--- a/SCDMS_Committee_Progress_Update.pptx
+++ b/SCDMS_Committee_Progress_Update.pptx
@@ -5,7 +5,7 @@
     <p:sldMasterId id="2147483648" r:id="rId1"/>
   </p:sldMasterIdLst>
   <p:notesMasterIdLst>
-    <p:notesMasterId r:id="rId22"/>
+    <p:notesMasterId r:id="rId24"/>
   </p:notesMasterIdLst>
   <p:sldIdLst>
     <p:sldId id="256" r:id="rId2"/>
@@ -23,11 +23,13 @@
     <p:sldId id="268" r:id="rId14"/>
     <p:sldId id="269" r:id="rId15"/>
     <p:sldId id="270" r:id="rId16"/>
-    <p:sldId id="271" r:id="rId17"/>
-    <p:sldId id="272" r:id="rId18"/>
-    <p:sldId id="273" r:id="rId19"/>
-    <p:sldId id="274" r:id="rId20"/>
-    <p:sldId id="275" r:id="rId21"/>
+    <p:sldId id="277" r:id="rId17"/>
+    <p:sldId id="271" r:id="rId18"/>
+    <p:sldId id="272" r:id="rId19"/>
+    <p:sldId id="273" r:id="rId20"/>
+    <p:sldId id="274" r:id="rId21"/>
+    <p:sldId id="275" r:id="rId22"/>
+    <p:sldId id="276" r:id="rId23"/>
   </p:sldIdLst>
   <p:sldSz cx="12192000" cy="6858000"/>
   <p:notesSz cx="6858000" cy="12192000"/>
@@ -156,7 +158,7 @@
     </p:spTree>
     <p:extLst>
       <p:ext uri="{BB962C8B-B14F-4D97-AF65-F5344CB8AC3E}">
-        <p14:creationId xmlns:p14="http://schemas.microsoft.com/office/powerpoint/2010/main" val="3843216510"/>
+        <p14:creationId xmlns:p14="http://schemas.microsoft.com/office/powerpoint/2010/main" val="1696054574"/>
       </p:ext>
     </p:extLst>
   </p:cSld>
@@ -849,7 +851,13 @@
   <p:cSld>
     <p:spTree>
       <p:nvGrpSpPr>
-        <p:cNvPr id="1" name=""/>
+        <p:cNvPr id="1" name="">
+          <a:extLst>
+            <a:ext uri="{FF2B5EF4-FFF2-40B4-BE49-F238E27FC236}">
+              <a16:creationId xmlns:a16="http://schemas.microsoft.com/office/drawing/2014/main" id="{95DCAB79-73FC-D842-65ED-02DE5BB0D61B}"/>
+            </a:ext>
+          </a:extLst>
+        </p:cNvPr>
         <p:cNvGrpSpPr/>
         <p:nvPr/>
       </p:nvGrpSpPr>
@@ -863,7 +871,13 @@
       </p:grpSpPr>
       <p:sp>
         <p:nvSpPr>
-          <p:cNvPr id="2" name="Slide Image Placeholder 1"/>
+          <p:cNvPr id="2" name="Slide Image Placeholder 1">
+            <a:extLst>
+              <a:ext uri="{FF2B5EF4-FFF2-40B4-BE49-F238E27FC236}">
+                <a16:creationId xmlns:a16="http://schemas.microsoft.com/office/drawing/2014/main" id="{E89712A1-508B-CD2F-E1FF-4D033E99F96D}"/>
+              </a:ext>
+            </a:extLst>
+          </p:cNvPr>
           <p:cNvSpPr>
             <a:spLocks noGrp="1" noRot="1" noChangeAspect="1"/>
           </p:cNvSpPr>
@@ -875,7 +889,13 @@
       </p:sp>
       <p:sp>
         <p:nvSpPr>
-          <p:cNvPr id="3" name="Notes Placeholder 2"/>
+          <p:cNvPr id="3" name="Notes Placeholder 2">
+            <a:extLst>
+              <a:ext uri="{FF2B5EF4-FFF2-40B4-BE49-F238E27FC236}">
+                <a16:creationId xmlns:a16="http://schemas.microsoft.com/office/drawing/2014/main" id="{FEA9022C-E56C-D655-D5AE-C8F3442CFFB9}"/>
+              </a:ext>
+            </a:extLst>
+          </p:cNvPr>
           <p:cNvSpPr>
             <a:spLocks noGrp="1"/>
           </p:cNvSpPr>
@@ -894,7 +914,13 @@
       </p:sp>
       <p:sp>
         <p:nvSpPr>
-          <p:cNvPr id="4" name="Slide Number Placeholder 3"/>
+          <p:cNvPr id="4" name="Slide Number Placeholder 3">
+            <a:extLst>
+              <a:ext uri="{FF2B5EF4-FFF2-40B4-BE49-F238E27FC236}">
+                <a16:creationId xmlns:a16="http://schemas.microsoft.com/office/drawing/2014/main" id="{CC26921C-5EEB-26A8-A801-96620E4E6415}"/>
+              </a:ext>
+            </a:extLst>
+          </p:cNvPr>
           <p:cNvSpPr>
             <a:spLocks noGrp="1"/>
           </p:cNvSpPr>
@@ -918,7 +944,7 @@
     </p:spTree>
     <p:extLst>
       <p:ext uri="{BB962C8B-B14F-4D97-AF65-F5344CB8AC3E}">
-        <p14:creationId xmlns:p14="http://schemas.microsoft.com/office/powerpoint/2010/main" val="1024086991"/>
+        <p14:creationId xmlns:p14="http://schemas.microsoft.com/office/powerpoint/2010/main" val="3954865210"/>
       </p:ext>
     </p:extLst>
   </p:cSld>
@@ -1330,6 +1356,174 @@
             <a:fld id="{F7021451-1387-4CA6-816F-3879F97B5CBC}" type="slidenum">
               <a:rPr lang="en-US"/>
               <a:t>20</a:t>
+            </a:fld>
+            <a:endParaRPr lang="en-US"/>
+          </a:p>
+        </p:txBody>
+      </p:sp>
+    </p:spTree>
+    <p:extLst>
+      <p:ext uri="{BB962C8B-B14F-4D97-AF65-F5344CB8AC3E}">
+        <p14:creationId xmlns:p14="http://schemas.microsoft.com/office/powerpoint/2010/main" val="1024086991"/>
+      </p:ext>
+    </p:extLst>
+  </p:cSld>
+  <p:clrMapOvr>
+    <a:masterClrMapping/>
+  </p:clrMapOvr>
+</p:notes>
+</file>
+
+<file path=ppt/notesSlides/notesSlide21.xml><?xml version="1.0" encoding="utf-8"?>
+<p:notes xmlns:a="http://schemas.openxmlformats.org/drawingml/2006/main" xmlns:r="http://schemas.openxmlformats.org/officeDocument/2006/relationships" xmlns:p="http://schemas.openxmlformats.org/presentationml/2006/main">
+  <p:cSld>
+    <p:spTree>
+      <p:nvGrpSpPr>
+        <p:cNvPr id="1" name=""/>
+        <p:cNvGrpSpPr/>
+        <p:nvPr/>
+      </p:nvGrpSpPr>
+      <p:grpSpPr>
+        <a:xfrm>
+          <a:off x="0" y="0"/>
+          <a:ext cx="0" cy="0"/>
+          <a:chOff x="0" y="0"/>
+          <a:chExt cx="0" cy="0"/>
+        </a:xfrm>
+      </p:grpSpPr>
+      <p:sp>
+        <p:nvSpPr>
+          <p:cNvPr id="2" name="Slide Image Placeholder 1"/>
+          <p:cNvSpPr>
+            <a:spLocks noGrp="1" noRot="1" noChangeAspect="1"/>
+          </p:cNvSpPr>
+          <p:nvPr>
+            <p:ph type="sldImg"/>
+          </p:nvPr>
+        </p:nvSpPr>
+        <p:spPr/>
+      </p:sp>
+      <p:sp>
+        <p:nvSpPr>
+          <p:cNvPr id="3" name="Notes Placeholder 2"/>
+          <p:cNvSpPr>
+            <a:spLocks noGrp="1"/>
+          </p:cNvSpPr>
+          <p:nvPr>
+            <p:ph type="body" idx="1"/>
+          </p:nvPr>
+        </p:nvSpPr>
+        <p:spPr/>
+        <p:txBody>
+          <a:bodyPr/>
+          <a:lstStyle/>
+          <a:p>
+            <a:endParaRPr lang="en-US" dirty="0"/>
+          </a:p>
+        </p:txBody>
+      </p:sp>
+      <p:sp>
+        <p:nvSpPr>
+          <p:cNvPr id="4" name="Slide Number Placeholder 3"/>
+          <p:cNvSpPr>
+            <a:spLocks noGrp="1"/>
+          </p:cNvSpPr>
+          <p:nvPr>
+            <p:ph type="sldNum" sz="quarter" idx="10"/>
+          </p:nvPr>
+        </p:nvSpPr>
+        <p:spPr/>
+        <p:txBody>
+          <a:bodyPr/>
+          <a:lstStyle/>
+          <a:p>
+            <a:fld id="{F7021451-1387-4CA6-816F-3879F97B5CBC}" type="slidenum">
+              <a:rPr lang="en-US"/>
+              <a:t>21</a:t>
+            </a:fld>
+            <a:endParaRPr lang="en-US"/>
+          </a:p>
+        </p:txBody>
+      </p:sp>
+    </p:spTree>
+    <p:extLst>
+      <p:ext uri="{BB962C8B-B14F-4D97-AF65-F5344CB8AC3E}">
+        <p14:creationId xmlns:p14="http://schemas.microsoft.com/office/powerpoint/2010/main" val="1024086991"/>
+      </p:ext>
+    </p:extLst>
+  </p:cSld>
+  <p:clrMapOvr>
+    <a:masterClrMapping/>
+  </p:clrMapOvr>
+</p:notes>
+</file>
+
+<file path=ppt/notesSlides/notesSlide22.xml><?xml version="1.0" encoding="utf-8"?>
+<p:notes xmlns:a="http://schemas.openxmlformats.org/drawingml/2006/main" xmlns:r="http://schemas.openxmlformats.org/officeDocument/2006/relationships" xmlns:p="http://schemas.openxmlformats.org/presentationml/2006/main">
+  <p:cSld>
+    <p:spTree>
+      <p:nvGrpSpPr>
+        <p:cNvPr id="1" name=""/>
+        <p:cNvGrpSpPr/>
+        <p:nvPr/>
+      </p:nvGrpSpPr>
+      <p:grpSpPr>
+        <a:xfrm>
+          <a:off x="0" y="0"/>
+          <a:ext cx="0" cy="0"/>
+          <a:chOff x="0" y="0"/>
+          <a:chExt cx="0" cy="0"/>
+        </a:xfrm>
+      </p:grpSpPr>
+      <p:sp>
+        <p:nvSpPr>
+          <p:cNvPr id="2" name="Slide Image Placeholder 1"/>
+          <p:cNvSpPr>
+            <a:spLocks noGrp="1" noRot="1" noChangeAspect="1"/>
+          </p:cNvSpPr>
+          <p:nvPr>
+            <p:ph type="sldImg"/>
+          </p:nvPr>
+        </p:nvSpPr>
+        <p:spPr/>
+      </p:sp>
+      <p:sp>
+        <p:nvSpPr>
+          <p:cNvPr id="3" name="Notes Placeholder 2"/>
+          <p:cNvSpPr>
+            <a:spLocks noGrp="1"/>
+          </p:cNvSpPr>
+          <p:nvPr>
+            <p:ph type="body" idx="1"/>
+          </p:nvPr>
+        </p:nvSpPr>
+        <p:spPr/>
+        <p:txBody>
+          <a:bodyPr/>
+          <a:lstStyle/>
+          <a:p>
+            <a:endParaRPr lang="en-US" dirty="0"/>
+          </a:p>
+        </p:txBody>
+      </p:sp>
+      <p:sp>
+        <p:nvSpPr>
+          <p:cNvPr id="4" name="Slide Number Placeholder 3"/>
+          <p:cNvSpPr>
+            <a:spLocks noGrp="1"/>
+          </p:cNvSpPr>
+          <p:nvPr>
+            <p:ph type="sldNum" sz="quarter" idx="10"/>
+          </p:nvPr>
+        </p:nvSpPr>
+        <p:spPr/>
+        <p:txBody>
+          <a:bodyPr/>
+          <a:lstStyle/>
+          <a:p>
+            <a:fld id="{F7021451-1387-4CA6-816F-3879F97B5CBC}" type="slidenum">
+              <a:rPr lang="en-US"/>
+              <a:t>22</a:t>
             </a:fld>
             <a:endParaRPr lang="en-US"/>
           </a:p>
@@ -8594,7 +8788,7 @@
                 <a:ea typeface="Calibri" pitchFamily="34" charset="-122"/>
                 <a:cs typeface="Calibri" pitchFamily="34" charset="-120"/>
               </a:rPr>
-              <a:t>In progress</a:t>
+              <a:t>Requested</a:t>
             </a:r>
             <a:endParaRPr lang="en-US" sz="1000" dirty="0"/>
           </a:p>
@@ -8608,8 +8802,8 @@
         </p:nvSpPr>
         <p:spPr>
           <a:xfrm>
-            <a:off x="868680" y="2788920"/>
-            <a:ext cx="4754880" cy="566928"/>
+            <a:off x="868680" y="2743200"/>
+            <a:ext cx="4754880" cy="512064"/>
           </a:xfrm>
           <a:prstGeom prst="rect">
             <a:avLst/>
@@ -8623,12 +8817,12 @@
           <a:p>
             <a:pPr marL="0" indent="0">
               <a:lnSpc>
-                <a:spcPct val="120000"/>
+                <a:spcPct val="115000"/>
               </a:lnSpc>
               <a:buNone/>
             </a:pPr>
             <a:r>
-              <a:rPr lang="en-US" sz="1150" b="1" dirty="0">
+              <a:rPr lang="en-US" sz="1100" b="1" dirty="0">
                 <a:solidFill>
                   <a:srgbClr val="2C0F5E"/>
                 </a:solidFill>
@@ -8639,7 +8833,7 @@
               <a:t>•  </a:t>
             </a:r>
             <a:r>
-              <a:rPr lang="en-US" sz="1150" dirty="0">
+              <a:rPr lang="en-US" sz="1100" dirty="0">
                 <a:solidFill>
                   <a:srgbClr val="5C5470"/>
                 </a:solidFill>
@@ -8649,7 +8843,7 @@
               </a:rPr>
               <a:t>8 vCPU · 32 GB RAM · 500 GB storage · Ubuntu 24.04 LTS</a:t>
             </a:r>
-            <a:endParaRPr lang="en-US" sz="1150" dirty="0"/>
+            <a:endParaRPr lang="en-US" sz="1100" dirty="0"/>
           </a:p>
         </p:txBody>
       </p:sp>
@@ -8661,8 +8855,8 @@
         </p:nvSpPr>
         <p:spPr>
           <a:xfrm>
-            <a:off x="868680" y="3410712"/>
-            <a:ext cx="4754880" cy="566928"/>
+            <a:off x="868680" y="3310128"/>
+            <a:ext cx="4754880" cy="512064"/>
           </a:xfrm>
           <a:prstGeom prst="rect">
             <a:avLst/>
@@ -8676,12 +8870,12 @@
           <a:p>
             <a:pPr marL="0" indent="0">
               <a:lnSpc>
-                <a:spcPct val="120000"/>
+                <a:spcPct val="115000"/>
               </a:lnSpc>
               <a:buNone/>
             </a:pPr>
             <a:r>
-              <a:rPr lang="en-US" sz="1150" b="1" dirty="0">
+              <a:rPr lang="en-US" sz="1100" b="1" dirty="0">
                 <a:solidFill>
                   <a:srgbClr val="2C0F5E"/>
                 </a:solidFill>
@@ -8692,7 +8886,7 @@
               <a:t>•  </a:t>
             </a:r>
             <a:r>
-              <a:rPr lang="en-US" sz="1150" dirty="0">
+              <a:rPr lang="en-US" sz="1100" dirty="0">
                 <a:solidFill>
                   <a:srgbClr val="5C5470"/>
                 </a:solidFill>
@@ -8702,7 +8896,7 @@
               </a:rPr>
               <a:t>Hosted at the DCDT data centre, Port Vila</a:t>
             </a:r>
-            <a:endParaRPr lang="en-US" sz="1150" dirty="0"/>
+            <a:endParaRPr lang="en-US" sz="1100" dirty="0"/>
           </a:p>
         </p:txBody>
       </p:sp>
@@ -8714,8 +8908,8 @@
         </p:nvSpPr>
         <p:spPr>
           <a:xfrm>
-            <a:off x="868680" y="4032504"/>
-            <a:ext cx="4754880" cy="566928"/>
+            <a:off x="868680" y="3877056"/>
+            <a:ext cx="4754880" cy="512064"/>
           </a:xfrm>
           <a:prstGeom prst="rect">
             <a:avLst/>
@@ -8729,12 +8923,12 @@
           <a:p>
             <a:pPr marL="0" indent="0">
               <a:lnSpc>
-                <a:spcPct val="120000"/>
+                <a:spcPct val="115000"/>
               </a:lnSpc>
               <a:buNone/>
             </a:pPr>
             <a:r>
-              <a:rPr lang="en-US" sz="1150" b="1" dirty="0">
+              <a:rPr lang="en-US" sz="1100" b="1" dirty="0">
                 <a:solidFill>
                   <a:srgbClr val="2C0F5E"/>
                 </a:solidFill>
@@ -8745,7 +8939,7 @@
               <a:t>•  </a:t>
             </a:r>
             <a:r>
-              <a:rPr lang="en-US" sz="1150" dirty="0">
+              <a:rPr lang="en-US" sz="1100" dirty="0">
                 <a:solidFill>
                   <a:srgbClr val="5C5470"/>
                 </a:solidFill>
@@ -8753,22 +8947,22 @@
                 <a:ea typeface="Calibri" pitchFamily="34" charset="-122"/>
                 <a:cs typeface="Calibri" pitchFamily="34" charset="-120"/>
               </a:rPr>
-              <a:t>Includes TLS certificate, government SMTP relay, and outbound access for automated vulnerability scanning</a:t>
-            </a:r>
-            <a:endParaRPr lang="en-US" sz="1150" dirty="0"/>
-          </a:p>
-        </p:txBody>
-      </p:sp>
-      <p:sp>
-        <p:nvSpPr>
-          <p:cNvPr id="13" name="Text 10"/>
-          <p:cNvSpPr/>
-          <p:nvPr/>
-        </p:nvSpPr>
-        <p:spPr>
-          <a:xfrm>
-            <a:off x="868680" y="4654296"/>
-            <a:ext cx="4754880" cy="566928"/>
+              <a:t>Includes TLS certificate, government SMTP relay, and outbound access for vulnerability scanning</a:t>
+            </a:r>
+            <a:endParaRPr lang="en-US" sz="1100" dirty="0"/>
+          </a:p>
+        </p:txBody>
+      </p:sp>
+      <p:sp>
+        <p:nvSpPr>
+          <p:cNvPr id="14" name="Text 11"/>
+          <p:cNvSpPr/>
+          <p:nvPr/>
+        </p:nvSpPr>
+        <p:spPr>
+          <a:xfrm>
+            <a:off x="868680" y="4443984"/>
+            <a:ext cx="4754880" cy="512064"/>
           </a:xfrm>
           <a:prstGeom prst="rect">
             <a:avLst/>
@@ -8782,12 +8976,12 @@
           <a:p>
             <a:pPr marL="0" indent="0">
               <a:lnSpc>
-                <a:spcPct val="120000"/>
+                <a:spcPct val="115000"/>
               </a:lnSpc>
               <a:buNone/>
             </a:pPr>
             <a:r>
-              <a:rPr lang="en-US" sz="1150" b="1" dirty="0">
+              <a:rPr lang="en-US" sz="1100" b="1" dirty="0">
                 <a:solidFill>
                   <a:srgbClr val="2C0F5E"/>
                 </a:solidFill>
@@ -8798,7 +8992,7 @@
               <a:t>•  </a:t>
             </a:r>
             <a:r>
-              <a:rPr lang="en-US" sz="1150" dirty="0">
+              <a:rPr lang="en-US" sz="1100" dirty="0">
                 <a:solidFill>
                   <a:srgbClr val="5C5470"/>
                 </a:solidFill>
@@ -8806,15 +9000,15 @@
                 <a:ea typeface="Calibri" pitchFamily="34" charset="-122"/>
                 <a:cs typeface="Calibri" pitchFamily="34" charset="-120"/>
               </a:rPr>
-              <a:t>Status: provisioning request submitted - awaiting DCDT allocation and Certificate of Compliance</a:t>
-            </a:r>
-            <a:endParaRPr lang="en-US" sz="1150" dirty="0"/>
-          </a:p>
-        </p:txBody>
-      </p:sp>
-      <p:sp>
-        <p:nvSpPr>
-          <p:cNvPr id="14" name="Shape 11"/>
+              <a:t>Status: request submitted - awaiting DCDT allocation and Certificate of Compliance</a:t>
+            </a:r>
+            <a:endParaRPr lang="en-US" sz="1100" dirty="0"/>
+          </a:p>
+        </p:txBody>
+      </p:sp>
+      <p:sp>
+        <p:nvSpPr>
+          <p:cNvPr id="15" name="Shape 12"/>
           <p:cNvSpPr/>
           <p:nvPr/>
         </p:nvSpPr>
@@ -8843,7 +9037,7 @@
       </p:sp>
       <p:sp>
         <p:nvSpPr>
-          <p:cNvPr id="15" name="Text 12"/>
+          <p:cNvPr id="16" name="Text 13"/>
           <p:cNvSpPr/>
           <p:nvPr/>
         </p:nvSpPr>
@@ -8882,7 +9076,7 @@
       </p:sp>
       <p:sp>
         <p:nvSpPr>
-          <p:cNvPr id="16" name="Shape 13"/>
+          <p:cNvPr id="17" name="Shape 14"/>
           <p:cNvSpPr/>
           <p:nvPr/>
         </p:nvSpPr>
@@ -8898,8 +9092,8 @@
           </a:prstGeom>
           <a:solidFill>
             <a:schemeClr val="accent6">
-              <a:lumMod val="40000"/>
-              <a:lumOff val="60000"/>
+              <a:lumMod val="20000"/>
+              <a:lumOff val="80000"/>
             </a:schemeClr>
           </a:solidFill>
           <a:ln/>
@@ -8907,7 +9101,7 @@
       </p:sp>
       <p:sp>
         <p:nvSpPr>
-          <p:cNvPr id="17" name="Text 14"/>
+          <p:cNvPr id="18" name="Text 15"/>
           <p:cNvSpPr/>
           <p:nvPr/>
         </p:nvSpPr>
@@ -8954,14 +9148,14 @@
       </p:sp>
       <p:sp>
         <p:nvSpPr>
-          <p:cNvPr id="18" name="Text 15"/>
-          <p:cNvSpPr/>
-          <p:nvPr/>
-        </p:nvSpPr>
-        <p:spPr>
-          <a:xfrm>
-            <a:off x="6583680" y="2788920"/>
-            <a:ext cx="4754880" cy="566928"/>
+          <p:cNvPr id="19" name="Text 16"/>
+          <p:cNvSpPr/>
+          <p:nvPr/>
+        </p:nvSpPr>
+        <p:spPr>
+          <a:xfrm>
+            <a:off x="6583680" y="2743200"/>
+            <a:ext cx="4754880" cy="512064"/>
           </a:xfrm>
           <a:prstGeom prst="rect">
             <a:avLst/>
@@ -8975,12 +9169,12 @@
           <a:p>
             <a:pPr marL="0" indent="0">
               <a:lnSpc>
-                <a:spcPct val="120000"/>
+                <a:spcPct val="115000"/>
               </a:lnSpc>
               <a:buNone/>
             </a:pPr>
             <a:r>
-              <a:rPr lang="en-US" sz="1150" b="1" dirty="0">
+              <a:rPr lang="en-US" sz="1100" b="1" dirty="0">
                 <a:solidFill>
                   <a:srgbClr val="D9A441"/>
                 </a:solidFill>
@@ -8991,7 +9185,7 @@
               <a:t>→  </a:t>
             </a:r>
             <a:r>
-              <a:rPr lang="en-US" sz="1150" dirty="0">
+              <a:rPr lang="en-US" sz="1100" dirty="0">
                 <a:solidFill>
                   <a:srgbClr val="FFFFFF"/>
                 </a:solidFill>
@@ -9001,13 +9195,66 @@
               </a:rPr>
               <a:t>A standby server so SCDMS stays available if the primary server goes down</a:t>
             </a:r>
-            <a:endParaRPr lang="en-US" sz="1150" dirty="0"/>
-          </a:p>
-        </p:txBody>
-      </p:sp>
-      <p:sp>
-        <p:nvSpPr>
-          <p:cNvPr id="21" name="Shape 18"/>
+            <a:endParaRPr lang="en-US" sz="1100" dirty="0"/>
+          </a:p>
+        </p:txBody>
+      </p:sp>
+      <p:sp>
+        <p:nvSpPr>
+          <p:cNvPr id="21" name="Text 18"/>
+          <p:cNvSpPr/>
+          <p:nvPr/>
+        </p:nvSpPr>
+        <p:spPr>
+          <a:xfrm>
+            <a:off x="6583680" y="3236976"/>
+            <a:ext cx="4754880" cy="512064"/>
+          </a:xfrm>
+          <a:prstGeom prst="rect">
+            <a:avLst/>
+          </a:prstGeom>
+          <a:noFill/>
+          <a:ln/>
+        </p:spPr>
+        <p:txBody>
+          <a:bodyPr wrap="square" rtlCol="0" anchor="ctr"/>
+          <a:lstStyle/>
+          <a:p>
+            <a:pPr marL="0" indent="0">
+              <a:lnSpc>
+                <a:spcPct val="115000"/>
+              </a:lnSpc>
+              <a:buNone/>
+            </a:pPr>
+            <a:r>
+              <a:rPr lang="en-US" sz="1100" b="1" dirty="0">
+                <a:solidFill>
+                  <a:srgbClr val="D9A441"/>
+                </a:solidFill>
+                <a:latin typeface="Calibri" pitchFamily="34" charset="0"/>
+                <a:ea typeface="Calibri" pitchFamily="34" charset="-122"/>
+                <a:cs typeface="Calibri" pitchFamily="34" charset="-120"/>
+              </a:rPr>
+              <a:t>→  </a:t>
+            </a:r>
+            <a:r>
+              <a:rPr lang="en-US" sz="1100" dirty="0">
+                <a:solidFill>
+                  <a:srgbClr val="FFFFFF"/>
+                </a:solidFill>
+                <a:latin typeface="Calibri" pitchFamily="34" charset="0"/>
+                <a:ea typeface="Calibri" pitchFamily="34" charset="-122"/>
+                <a:cs typeface="Calibri" pitchFamily="34" charset="-120"/>
+              </a:rPr>
+              <a:t>Same Computer World → Dell build-to-order route applies once the spec is finalised</a:t>
+            </a:r>
+            <a:endParaRPr lang="en-US" sz="1100" dirty="0"/>
+          </a:p>
+        </p:txBody>
+      </p:sp>
+      <p:sp>
+        <p:nvSpPr>
+          <p:cNvPr id="23" name="Shape 20"/>
           <p:cNvSpPr/>
           <p:nvPr/>
         </p:nvSpPr>
@@ -9036,7 +9283,7 @@
       </p:sp>
       <p:sp>
         <p:nvSpPr>
-          <p:cNvPr id="22" name="Text 19"/>
+          <p:cNvPr id="24" name="Text 21"/>
           <p:cNvSpPr/>
           <p:nvPr/>
         </p:nvSpPr>
@@ -9089,7 +9336,7 @@
       </p:sp>
       <p:sp>
         <p:nvSpPr>
-          <p:cNvPr id="23" name="Text 20"/>
+          <p:cNvPr id="25" name="Text 22"/>
           <p:cNvSpPr/>
           <p:nvPr/>
         </p:nvSpPr>
@@ -9128,7 +9375,7 @@
       </p:sp>
       <p:sp>
         <p:nvSpPr>
-          <p:cNvPr id="24" name="Text 21"/>
+          <p:cNvPr id="26" name="Text 23"/>
           <p:cNvSpPr/>
           <p:nvPr/>
         </p:nvSpPr>
@@ -9162,6 +9409,63 @@
               <a:t>15</a:t>
             </a:r>
             <a:endParaRPr lang="en-US" sz="900" dirty="0"/>
+          </a:p>
+        </p:txBody>
+      </p:sp>
+      <p:sp>
+        <p:nvSpPr>
+          <p:cNvPr id="28" name="Text 10">
+            <a:extLst>
+              <a:ext uri="{FF2B5EF4-FFF2-40B4-BE49-F238E27FC236}">
+                <a16:creationId xmlns:a16="http://schemas.microsoft.com/office/drawing/2014/main" id="{24D2D9F2-2D98-199D-A165-D0513BE019E4}"/>
+              </a:ext>
+            </a:extLst>
+          </p:cNvPr>
+          <p:cNvSpPr/>
+          <p:nvPr/>
+        </p:nvSpPr>
+        <p:spPr>
+          <a:xfrm>
+            <a:off x="6522415" y="3822192"/>
+            <a:ext cx="4754880" cy="512064"/>
+          </a:xfrm>
+          <a:prstGeom prst="rect">
+            <a:avLst/>
+          </a:prstGeom>
+          <a:noFill/>
+          <a:ln/>
+        </p:spPr>
+        <p:txBody>
+          <a:bodyPr wrap="square" rtlCol="0" anchor="ctr"/>
+          <a:lstStyle/>
+          <a:p>
+            <a:pPr>
+              <a:lnSpc>
+                <a:spcPct val="115000"/>
+              </a:lnSpc>
+            </a:pPr>
+            <a:r>
+              <a:rPr lang="en-US" sz="1100" b="1" dirty="0">
+                <a:solidFill>
+                  <a:srgbClr val="D9A441"/>
+                </a:solidFill>
+                <a:latin typeface="Calibri" pitchFamily="34" charset="0"/>
+                <a:ea typeface="Calibri" pitchFamily="34" charset="-122"/>
+                <a:cs typeface="Calibri" pitchFamily="34" charset="-120"/>
+              </a:rPr>
+              <a:t>→ </a:t>
+            </a:r>
+            <a:r>
+              <a:rPr lang="en-US" sz="1100" dirty="0">
+                <a:solidFill>
+                  <a:schemeClr val="bg1"/>
+                </a:solidFill>
+                <a:latin typeface="Calibri" pitchFamily="34" charset="0"/>
+                <a:ea typeface="Calibri" pitchFamily="34" charset="-122"/>
+                <a:cs typeface="Calibri" pitchFamily="34" charset="-120"/>
+              </a:rPr>
+              <a:t>Procurement: OPSC submits the spec → Computer World (official Dell reseller) → Dell builds the server to order</a:t>
+            </a:r>
           </a:p>
         </p:txBody>
       </p:sp>
@@ -9174,6 +9478,542 @@
 </file>
 
 <file path=ppt/slides/slide16.xml><?xml version="1.0" encoding="utf-8"?>
+<p:sld xmlns:a="http://schemas.openxmlformats.org/drawingml/2006/main" xmlns:r="http://schemas.openxmlformats.org/officeDocument/2006/relationships" xmlns:p="http://schemas.openxmlformats.org/presentationml/2006/main">
+  <p:cSld>
+    <p:spTree>
+      <p:nvGrpSpPr>
+        <p:cNvPr id="1" name="">
+          <a:extLst>
+            <a:ext uri="{FF2B5EF4-FFF2-40B4-BE49-F238E27FC236}">
+              <a16:creationId xmlns:a16="http://schemas.microsoft.com/office/drawing/2014/main" id="{A92E06B9-8AF8-8E44-95D1-5F054DA1E69D}"/>
+            </a:ext>
+          </a:extLst>
+        </p:cNvPr>
+        <p:cNvGrpSpPr/>
+        <p:nvPr/>
+      </p:nvGrpSpPr>
+      <p:grpSpPr>
+        <a:xfrm>
+          <a:off x="0" y="0"/>
+          <a:ext cx="0" cy="0"/>
+          <a:chOff x="0" y="0"/>
+          <a:chExt cx="0" cy="0"/>
+        </a:xfrm>
+      </p:grpSpPr>
+      <p:pic>
+        <p:nvPicPr>
+          <p:cNvPr id="2" name="Image 0" descr="C:\Users\Herman Tevilili\AppData\Local\Temp\claude\C--Users-Herman-Tevilili-Documents-GitHub-commissionDecisionApp-v1-0\2d2d3a12-ae9e-4f4b-990a-3e1ebe47ec28\scratchpad\scdms_deck\assets\bg.jpg">
+            <a:extLst>
+              <a:ext uri="{FF2B5EF4-FFF2-40B4-BE49-F238E27FC236}">
+                <a16:creationId xmlns:a16="http://schemas.microsoft.com/office/drawing/2014/main" id="{D6AB8E2E-85FE-4819-C1C8-0F49D2422632}"/>
+              </a:ext>
+            </a:extLst>
+          </p:cNvPr>
+          <p:cNvPicPr>
+            <a:picLocks noChangeAspect="1"/>
+          </p:cNvPicPr>
+          <p:nvPr/>
+        </p:nvPicPr>
+        <p:blipFill>
+          <a:blip r:embed="rId3"/>
+          <a:stretch>
+            <a:fillRect/>
+          </a:stretch>
+        </p:blipFill>
+        <p:spPr>
+          <a:xfrm>
+            <a:off x="0" y="0"/>
+            <a:ext cx="12191695" cy="8127797"/>
+          </a:xfrm>
+          <a:prstGeom prst="rect">
+            <a:avLst/>
+          </a:prstGeom>
+        </p:spPr>
+      </p:pic>
+      <p:sp>
+        <p:nvSpPr>
+          <p:cNvPr id="3" name="Text 0">
+            <a:extLst>
+              <a:ext uri="{FF2B5EF4-FFF2-40B4-BE49-F238E27FC236}">
+                <a16:creationId xmlns:a16="http://schemas.microsoft.com/office/drawing/2014/main" id="{DAA12C2F-2A5B-6122-7E3F-81A43AB857E0}"/>
+              </a:ext>
+            </a:extLst>
+          </p:cNvPr>
+          <p:cNvSpPr/>
+          <p:nvPr/>
+        </p:nvSpPr>
+        <p:spPr>
+          <a:xfrm>
+            <a:off x="1691640" y="457200"/>
+            <a:ext cx="9875520" cy="320040"/>
+          </a:xfrm>
+          <a:prstGeom prst="rect">
+            <a:avLst/>
+          </a:prstGeom>
+          <a:noFill/>
+          <a:ln/>
+        </p:spPr>
+        <p:txBody>
+          <a:bodyPr wrap="square" rtlCol="0" anchor="ctr"/>
+          <a:lstStyle/>
+          <a:p>
+            <a:pPr marL="0" indent="0">
+              <a:buNone/>
+            </a:pPr>
+            <a:r>
+              <a:rPr lang="en-US" sz="1200" b="1" kern="0" spc="200" dirty="0">
+                <a:solidFill>
+                  <a:srgbClr val="D9A441"/>
+                </a:solidFill>
+                <a:latin typeface="Calibri" pitchFamily="34" charset="0"/>
+                <a:ea typeface="Calibri" pitchFamily="34" charset="-122"/>
+                <a:cs typeface="Calibri" pitchFamily="34" charset="-120"/>
+              </a:rPr>
+              <a:t>WHERE WE ARE TODAY  ·  INFRASTRUCTURE</a:t>
+            </a:r>
+            <a:endParaRPr lang="en-US" sz="1200" dirty="0"/>
+          </a:p>
+        </p:txBody>
+      </p:sp>
+      <p:sp>
+        <p:nvSpPr>
+          <p:cNvPr id="4" name="Text 1">
+            <a:extLst>
+              <a:ext uri="{FF2B5EF4-FFF2-40B4-BE49-F238E27FC236}">
+                <a16:creationId xmlns:a16="http://schemas.microsoft.com/office/drawing/2014/main" id="{B8D215B4-2F7D-1ADA-0188-52FA8E336151}"/>
+              </a:ext>
+            </a:extLst>
+          </p:cNvPr>
+          <p:cNvSpPr/>
+          <p:nvPr/>
+        </p:nvSpPr>
+        <p:spPr>
+          <a:xfrm>
+            <a:off x="1691640" y="777240"/>
+            <a:ext cx="9951415" cy="822960"/>
+          </a:xfrm>
+          <a:prstGeom prst="rect">
+            <a:avLst/>
+          </a:prstGeom>
+          <a:noFill/>
+          <a:ln/>
+        </p:spPr>
+        <p:txBody>
+          <a:bodyPr wrap="square" rtlCol="0" anchor="ctr"/>
+          <a:lstStyle/>
+          <a:p>
+            <a:pPr marL="0" indent="0">
+              <a:buNone/>
+            </a:pPr>
+            <a:r>
+              <a:rPr lang="en-US" sz="2700" b="1" dirty="0">
+                <a:solidFill>
+                  <a:srgbClr val="FFFFFF"/>
+                </a:solidFill>
+                <a:latin typeface="Cambria" pitchFamily="34" charset="0"/>
+                <a:ea typeface="Cambria" pitchFamily="34" charset="-122"/>
+                <a:cs typeface="Cambria" pitchFamily="34" charset="-120"/>
+              </a:rPr>
+              <a:t>Hosting &amp; failover: provisioning with DCDT</a:t>
+            </a:r>
+            <a:endParaRPr lang="en-US" sz="2700" dirty="0"/>
+          </a:p>
+        </p:txBody>
+      </p:sp>
+      <p:sp>
+        <p:nvSpPr>
+          <p:cNvPr id="5" name="Text 2">
+            <a:extLst>
+              <a:ext uri="{FF2B5EF4-FFF2-40B4-BE49-F238E27FC236}">
+                <a16:creationId xmlns:a16="http://schemas.microsoft.com/office/drawing/2014/main" id="{C3396837-4207-082C-4082-2B85653A423F}"/>
+              </a:ext>
+            </a:extLst>
+          </p:cNvPr>
+          <p:cNvSpPr/>
+          <p:nvPr/>
+        </p:nvSpPr>
+        <p:spPr>
+          <a:xfrm>
+            <a:off x="1691640" y="1325880"/>
+            <a:ext cx="10058400" cy="548640"/>
+          </a:xfrm>
+          <a:prstGeom prst="rect">
+            <a:avLst/>
+          </a:prstGeom>
+          <a:noFill/>
+          <a:ln/>
+        </p:spPr>
+        <p:txBody>
+          <a:bodyPr wrap="square" rtlCol="0" anchor="ctr"/>
+          <a:lstStyle/>
+          <a:p>
+            <a:pPr marL="0" indent="0">
+              <a:lnSpc>
+                <a:spcPct val="125000"/>
+              </a:lnSpc>
+              <a:buNone/>
+            </a:pPr>
+            <a:endParaRPr lang="en-US" sz="1250" dirty="0"/>
+          </a:p>
+        </p:txBody>
+      </p:sp>
+      <p:sp>
+        <p:nvSpPr>
+          <p:cNvPr id="6" name="Shape 3">
+            <a:extLst>
+              <a:ext uri="{FF2B5EF4-FFF2-40B4-BE49-F238E27FC236}">
+                <a16:creationId xmlns:a16="http://schemas.microsoft.com/office/drawing/2014/main" id="{AAE7BFD9-F877-3824-195F-E040121F1E1A}"/>
+              </a:ext>
+            </a:extLst>
+          </p:cNvPr>
+          <p:cNvSpPr/>
+          <p:nvPr/>
+        </p:nvSpPr>
+        <p:spPr>
+          <a:xfrm>
+            <a:off x="548640" y="2057400"/>
+            <a:ext cx="5349240" cy="3657600"/>
+          </a:xfrm>
+          <a:prstGeom prst="roundRect">
+            <a:avLst>
+              <a:gd name="adj" fmla="val 2250"/>
+            </a:avLst>
+          </a:prstGeom>
+          <a:solidFill>
+            <a:srgbClr val="F5F3FB"/>
+          </a:solidFill>
+          <a:ln/>
+          <a:effectLst>
+            <a:outerShdw blurRad="127000" dist="38100" dir="5400000" algn="bl" rotWithShape="0">
+              <a:srgbClr val="1B0B3E">
+                <a:alpha val="35000"/>
+              </a:srgbClr>
+            </a:outerShdw>
+          </a:effectLst>
+        </p:spPr>
+      </p:sp>
+      <p:sp>
+        <p:nvSpPr>
+          <p:cNvPr id="7" name="Text 4">
+            <a:extLst>
+              <a:ext uri="{FF2B5EF4-FFF2-40B4-BE49-F238E27FC236}">
+                <a16:creationId xmlns:a16="http://schemas.microsoft.com/office/drawing/2014/main" id="{61C1404E-7D03-4941-68C3-5DAA7577AEF8}"/>
+              </a:ext>
+            </a:extLst>
+          </p:cNvPr>
+          <p:cNvSpPr/>
+          <p:nvPr/>
+        </p:nvSpPr>
+        <p:spPr>
+          <a:xfrm>
+            <a:off x="868680" y="2286000"/>
+            <a:ext cx="4754880" cy="365760"/>
+          </a:xfrm>
+          <a:prstGeom prst="rect">
+            <a:avLst/>
+          </a:prstGeom>
+          <a:noFill/>
+          <a:ln/>
+        </p:spPr>
+        <p:txBody>
+          <a:bodyPr wrap="square" rtlCol="0" anchor="ctr"/>
+          <a:lstStyle/>
+          <a:p>
+            <a:pPr marL="0" indent="0">
+              <a:buNone/>
+            </a:pPr>
+            <a:r>
+              <a:rPr lang="en-US" sz="1450" b="1" dirty="0">
+                <a:solidFill>
+                  <a:srgbClr val="2C0F5E"/>
+                </a:solidFill>
+                <a:latin typeface="Calibri" pitchFamily="34" charset="0"/>
+                <a:ea typeface="Calibri" pitchFamily="34" charset="-122"/>
+                <a:cs typeface="Calibri" pitchFamily="34" charset="-120"/>
+              </a:rPr>
+              <a:t>Temporary failover server</a:t>
+            </a:r>
+          </a:p>
+        </p:txBody>
+      </p:sp>
+      <p:sp>
+        <p:nvSpPr>
+          <p:cNvPr id="9" name="Text 6">
+            <a:extLst>
+              <a:ext uri="{FF2B5EF4-FFF2-40B4-BE49-F238E27FC236}">
+                <a16:creationId xmlns:a16="http://schemas.microsoft.com/office/drawing/2014/main" id="{E4E9FB32-940A-DBE3-7D78-A8D31EDF993F}"/>
+              </a:ext>
+            </a:extLst>
+          </p:cNvPr>
+          <p:cNvSpPr/>
+          <p:nvPr/>
+        </p:nvSpPr>
+        <p:spPr>
+          <a:xfrm>
+            <a:off x="4037162" y="2286000"/>
+            <a:ext cx="1723558" cy="329184"/>
+          </a:xfrm>
+          <a:prstGeom prst="rect">
+            <a:avLst/>
+          </a:prstGeom>
+          <a:noFill/>
+          <a:ln/>
+        </p:spPr>
+        <p:txBody>
+          <a:bodyPr wrap="square" rtlCol="0" anchor="ctr"/>
+          <a:lstStyle/>
+          <a:p>
+            <a:pPr marL="0" indent="0" algn="ctr">
+              <a:buNone/>
+            </a:pPr>
+            <a:endParaRPr lang="en-US" sz="1000" dirty="0"/>
+          </a:p>
+        </p:txBody>
+      </p:sp>
+      <p:sp>
+        <p:nvSpPr>
+          <p:cNvPr id="15" name="Shape 12">
+            <a:extLst>
+              <a:ext uri="{FF2B5EF4-FFF2-40B4-BE49-F238E27FC236}">
+                <a16:creationId xmlns:a16="http://schemas.microsoft.com/office/drawing/2014/main" id="{E41A990C-F130-1A0B-831E-28B44F465E62}"/>
+              </a:ext>
+            </a:extLst>
+          </p:cNvPr>
+          <p:cNvSpPr/>
+          <p:nvPr/>
+        </p:nvSpPr>
+        <p:spPr>
+          <a:xfrm>
+            <a:off x="6263640" y="2057400"/>
+            <a:ext cx="5349240" cy="3657600"/>
+          </a:xfrm>
+          <a:prstGeom prst="roundRect">
+            <a:avLst>
+              <a:gd name="adj" fmla="val 2250"/>
+            </a:avLst>
+          </a:prstGeom>
+          <a:solidFill>
+            <a:srgbClr val="1E0E42"/>
+          </a:solidFill>
+          <a:ln/>
+          <a:effectLst>
+            <a:outerShdw blurRad="127000" dist="38100" dir="5400000" algn="bl" rotWithShape="0">
+              <a:srgbClr val="1B0B3E">
+                <a:alpha val="35000"/>
+              </a:srgbClr>
+            </a:outerShdw>
+          </a:effectLst>
+        </p:spPr>
+      </p:sp>
+      <p:sp>
+        <p:nvSpPr>
+          <p:cNvPr id="16" name="Text 13">
+            <a:extLst>
+              <a:ext uri="{FF2B5EF4-FFF2-40B4-BE49-F238E27FC236}">
+                <a16:creationId xmlns:a16="http://schemas.microsoft.com/office/drawing/2014/main" id="{411C5546-1FC1-1F4B-FEF6-74F4B2B0EDCC}"/>
+              </a:ext>
+            </a:extLst>
+          </p:cNvPr>
+          <p:cNvSpPr/>
+          <p:nvPr/>
+        </p:nvSpPr>
+        <p:spPr>
+          <a:xfrm>
+            <a:off x="6583680" y="2286000"/>
+            <a:ext cx="3657600" cy="365760"/>
+          </a:xfrm>
+          <a:prstGeom prst="rect">
+            <a:avLst/>
+          </a:prstGeom>
+          <a:noFill/>
+          <a:ln/>
+        </p:spPr>
+        <p:txBody>
+          <a:bodyPr wrap="square" rtlCol="0" anchor="ctr"/>
+          <a:lstStyle/>
+          <a:p>
+            <a:pPr marL="0" indent="0">
+              <a:buNone/>
+            </a:pPr>
+            <a:r>
+              <a:rPr lang="en-US" sz="1450" b="1" dirty="0">
+                <a:solidFill>
+                  <a:srgbClr val="D9A441"/>
+                </a:solidFill>
+                <a:latin typeface="Calibri" pitchFamily="34" charset="0"/>
+                <a:ea typeface="Calibri" pitchFamily="34" charset="-122"/>
+                <a:cs typeface="Calibri" pitchFamily="34" charset="-120"/>
+              </a:rPr>
+              <a:t>What’s recommended</a:t>
+            </a:r>
+            <a:endParaRPr lang="en-US" sz="1450" dirty="0"/>
+          </a:p>
+        </p:txBody>
+      </p:sp>
+      <p:sp>
+        <p:nvSpPr>
+          <p:cNvPr id="25" name="Text 22">
+            <a:extLst>
+              <a:ext uri="{FF2B5EF4-FFF2-40B4-BE49-F238E27FC236}">
+                <a16:creationId xmlns:a16="http://schemas.microsoft.com/office/drawing/2014/main" id="{14823073-453A-8407-446F-BEC54BEBEFEF}"/>
+              </a:ext>
+            </a:extLst>
+          </p:cNvPr>
+          <p:cNvSpPr/>
+          <p:nvPr/>
+        </p:nvSpPr>
+        <p:spPr>
+          <a:xfrm>
+            <a:off x="457200" y="6473952"/>
+            <a:ext cx="7315200" cy="274320"/>
+          </a:xfrm>
+          <a:prstGeom prst="rect">
+            <a:avLst/>
+          </a:prstGeom>
+          <a:noFill/>
+          <a:ln/>
+        </p:spPr>
+        <p:txBody>
+          <a:bodyPr wrap="square" rtlCol="0" anchor="ctr"/>
+          <a:lstStyle/>
+          <a:p>
+            <a:pPr marL="0" indent="0">
+              <a:buNone/>
+            </a:pPr>
+            <a:r>
+              <a:rPr lang="en-US" sz="900" i="1" dirty="0">
+                <a:solidFill>
+                  <a:srgbClr val="CBBFE6"/>
+                </a:solidFill>
+                <a:latin typeface="Calibri" pitchFamily="34" charset="0"/>
+                <a:ea typeface="Calibri" pitchFamily="34" charset="-122"/>
+                <a:cs typeface="Calibri" pitchFamily="34" charset="-120"/>
+              </a:rPr>
+              <a:t>SCDMS - Submission &amp; Commission Decision Management System</a:t>
+            </a:r>
+            <a:endParaRPr lang="en-US" sz="900" dirty="0"/>
+          </a:p>
+        </p:txBody>
+      </p:sp>
+      <p:sp>
+        <p:nvSpPr>
+          <p:cNvPr id="26" name="Text 23">
+            <a:extLst>
+              <a:ext uri="{FF2B5EF4-FFF2-40B4-BE49-F238E27FC236}">
+                <a16:creationId xmlns:a16="http://schemas.microsoft.com/office/drawing/2014/main" id="{CFA1AC57-C752-963A-10EB-31615AD90930}"/>
+              </a:ext>
+            </a:extLst>
+          </p:cNvPr>
+          <p:cNvSpPr/>
+          <p:nvPr/>
+        </p:nvSpPr>
+        <p:spPr>
+          <a:xfrm>
+            <a:off x="11277295" y="6473952"/>
+            <a:ext cx="457200" cy="274320"/>
+          </a:xfrm>
+          <a:prstGeom prst="rect">
+            <a:avLst/>
+          </a:prstGeom>
+          <a:noFill/>
+          <a:ln/>
+        </p:spPr>
+        <p:txBody>
+          <a:bodyPr wrap="square" rtlCol="0" anchor="ctr"/>
+          <a:lstStyle/>
+          <a:p>
+            <a:pPr marL="0" indent="0" algn="r">
+              <a:buNone/>
+            </a:pPr>
+            <a:r>
+              <a:rPr lang="en-US" sz="900" dirty="0">
+                <a:solidFill>
+                  <a:srgbClr val="CBBFE6"/>
+                </a:solidFill>
+                <a:latin typeface="Calibri" pitchFamily="34" charset="0"/>
+                <a:ea typeface="Calibri" pitchFamily="34" charset="-122"/>
+                <a:cs typeface="Calibri" pitchFamily="34" charset="-120"/>
+              </a:rPr>
+              <a:t>15</a:t>
+            </a:r>
+            <a:endParaRPr lang="en-US" sz="900" dirty="0"/>
+          </a:p>
+        </p:txBody>
+      </p:sp>
+      <p:pic>
+        <p:nvPicPr>
+          <p:cNvPr id="20" name="Picture 19">
+            <a:extLst>
+              <a:ext uri="{FF2B5EF4-FFF2-40B4-BE49-F238E27FC236}">
+                <a16:creationId xmlns:a16="http://schemas.microsoft.com/office/drawing/2014/main" id="{0B670895-5282-C5DC-ACB8-7C2F5EE1B66A}"/>
+              </a:ext>
+            </a:extLst>
+          </p:cNvPr>
+          <p:cNvPicPr>
+            <a:picLocks noChangeAspect="1"/>
+          </p:cNvPicPr>
+          <p:nvPr/>
+        </p:nvPicPr>
+        <p:blipFill>
+          <a:blip r:embed="rId4"/>
+          <a:stretch>
+            <a:fillRect/>
+          </a:stretch>
+        </p:blipFill>
+        <p:spPr>
+          <a:xfrm>
+            <a:off x="1400107" y="2730685"/>
+            <a:ext cx="3692026" cy="2801435"/>
+          </a:xfrm>
+          <a:prstGeom prst="rect">
+            <a:avLst/>
+          </a:prstGeom>
+        </p:spPr>
+      </p:pic>
+      <p:pic>
+        <p:nvPicPr>
+          <p:cNvPr id="27" name="Picture 26">
+            <a:extLst>
+              <a:ext uri="{FF2B5EF4-FFF2-40B4-BE49-F238E27FC236}">
+                <a16:creationId xmlns:a16="http://schemas.microsoft.com/office/drawing/2014/main" id="{62EB4588-C0E0-4D6B-BF32-A29AD29E3FC4}"/>
+              </a:ext>
+            </a:extLst>
+          </p:cNvPr>
+          <p:cNvPicPr>
+            <a:picLocks noChangeAspect="1"/>
+          </p:cNvPicPr>
+          <p:nvPr/>
+        </p:nvPicPr>
+        <p:blipFill>
+          <a:blip r:embed="rId5"/>
+          <a:stretch>
+            <a:fillRect/>
+          </a:stretch>
+        </p:blipFill>
+        <p:spPr>
+          <a:xfrm>
+            <a:off x="6263641" y="3315257"/>
+            <a:ext cx="5349240" cy="1708321"/>
+          </a:xfrm>
+          <a:prstGeom prst="rect">
+            <a:avLst/>
+          </a:prstGeom>
+        </p:spPr>
+      </p:pic>
+    </p:spTree>
+    <p:extLst>
+      <p:ext uri="{BB962C8B-B14F-4D97-AF65-F5344CB8AC3E}">
+        <p14:creationId xmlns:p14="http://schemas.microsoft.com/office/powerpoint/2010/main" val="2904075384"/>
+      </p:ext>
+    </p:extLst>
+  </p:cSld>
+  <p:clrMapOvr>
+    <a:masterClrMapping/>
+  </p:clrMapOvr>
+</p:sld>
+</file>
+
+<file path=ppt/slides/slide17.xml><?xml version="1.0" encoding="utf-8"?>
 <p:sld xmlns:a="http://schemas.openxmlformats.org/drawingml/2006/main" xmlns:r="http://schemas.openxmlformats.org/officeDocument/2006/relationships" xmlns:p="http://schemas.openxmlformats.org/presentationml/2006/main">
   <p:cSld name="Slide 16">
     <p:spTree>
@@ -9247,7 +10087,7 @@
                 <a:ea typeface="Calibri" pitchFamily="34" charset="-122"/>
                 <a:cs typeface="Calibri" pitchFamily="34" charset="-120"/>
               </a:rPr>
-              <a:t>WHERE WE ARE TODAY</a:t>
+              <a:t>WHERE WE ARE TODAY  ·  INFRASTRUCTURE</a:t>
             </a:r>
             <a:endParaRPr lang="en-US" sz="1200" dirty="0"/>
           </a:p>
@@ -9286,7 +10126,7 @@
                 <a:ea typeface="Cambria" pitchFamily="34" charset="-122"/>
                 <a:cs typeface="Cambria" pitchFamily="34" charset="-120"/>
               </a:rPr>
-              <a:t>Important: this is a progress update, not a pilot</a:t>
+              <a:t>Why invest in a proper backup/failover server</a:t>
             </a:r>
             <a:endParaRPr lang="en-US" sz="2700" dirty="0"/>
           </a:p>
@@ -9300,12 +10140,12 @@
         </p:nvSpPr>
         <p:spPr>
           <a:xfrm>
-            <a:off x="548640" y="1737360"/>
-            <a:ext cx="5349240" cy="4297680"/>
+            <a:off x="548640" y="1600200"/>
+            <a:ext cx="5349240" cy="4160520"/>
           </a:xfrm>
           <a:prstGeom prst="roundRect">
             <a:avLst>
-              <a:gd name="adj" fmla="val 1915"/>
+              <a:gd name="adj" fmla="val 1978"/>
             </a:avLst>
           </a:prstGeom>
           <a:solidFill>
@@ -9329,7 +10169,7 @@
         </p:nvSpPr>
         <p:spPr>
           <a:xfrm>
-            <a:off x="868680" y="1965960"/>
+            <a:off x="868680" y="1828800"/>
             <a:ext cx="4754880" cy="365760"/>
           </a:xfrm>
           <a:prstGeom prst="rect">
@@ -9354,7 +10194,7 @@
                 <a:ea typeface="Calibri" pitchFamily="34" charset="-122"/>
                 <a:cs typeface="Calibri" pitchFamily="34" charset="-120"/>
               </a:rPr>
-              <a:t>Where we are</a:t>
+              <a:t>The risk without one</a:t>
             </a:r>
             <a:endParaRPr lang="en-US" sz="1450" dirty="0"/>
           </a:p>
@@ -9368,8 +10208,8 @@
         </p:nvSpPr>
         <p:spPr>
           <a:xfrm>
-            <a:off x="868680" y="2450592"/>
-            <a:ext cx="4754880" cy="502920"/>
+            <a:off x="868680" y="2331720"/>
+            <a:ext cx="4754880" cy="621792"/>
           </a:xfrm>
           <a:prstGeom prst="rect">
             <a:avLst/>
@@ -9388,7 +10228,7 @@
               <a:buNone/>
             </a:pPr>
             <a:r>
-              <a:rPr lang="en-US" sz="1200" b="1" dirty="0">
+              <a:rPr lang="en-US" sz="1150" b="1" dirty="0">
                 <a:solidFill>
                   <a:srgbClr val="2C0F5E"/>
                 </a:solidFill>
@@ -9399,7 +10239,7 @@
               <a:t>•  </a:t>
             </a:r>
             <a:r>
-              <a:rPr lang="en-US" sz="1200" dirty="0">
+              <a:rPr lang="en-US" sz="1150" dirty="0">
                 <a:solidFill>
                   <a:srgbClr val="5C5470"/>
                 </a:solidFill>
@@ -9407,9 +10247,9 @@
                 <a:ea typeface="Calibri" pitchFamily="34" charset="-122"/>
                 <a:cs typeface="Calibri" pitchFamily="34" charset="-120"/>
               </a:rPr>
-              <a:t>System built and functioning across all core modules</a:t>
-            </a:r>
-            <a:endParaRPr lang="en-US" sz="1200" dirty="0"/>
+              <a:t>One server is a single point of failure - for SCDMS, and for anything else placed on it</a:t>
+            </a:r>
+            <a:endParaRPr lang="en-US" sz="1150" dirty="0"/>
           </a:p>
         </p:txBody>
       </p:sp>
@@ -9421,8 +10261,8 @@
         </p:nvSpPr>
         <p:spPr>
           <a:xfrm>
-            <a:off x="868680" y="2999232"/>
-            <a:ext cx="4754880" cy="502920"/>
+            <a:off x="868680" y="2990088"/>
+            <a:ext cx="4754880" cy="621792"/>
           </a:xfrm>
           <a:prstGeom prst="rect">
             <a:avLst/>
@@ -9441,7 +10281,7 @@
               <a:buNone/>
             </a:pPr>
             <a:r>
-              <a:rPr lang="en-US" sz="1200" b="1" dirty="0">
+              <a:rPr lang="en-US" sz="1150" b="1" dirty="0">
                 <a:solidFill>
                   <a:srgbClr val="2C0F5E"/>
                 </a:solidFill>
@@ -9452,7 +10292,7 @@
               <a:t>•  </a:t>
             </a:r>
             <a:r>
-              <a:rPr lang="en-US" sz="1200" dirty="0">
+              <a:rPr lang="en-US" sz="1150" dirty="0">
                 <a:solidFill>
                   <a:srgbClr val="5C5470"/>
                 </a:solidFill>
@@ -9460,9 +10300,9 @@
                 <a:ea typeface="Calibri" pitchFamily="34" charset="-122"/>
                 <a:cs typeface="Calibri" pitchFamily="34" charset="-120"/>
               </a:rPr>
-              <a:t>Running in a controlled environment with seeded / dummy data only</a:t>
-            </a:r>
-            <a:endParaRPr lang="en-US" sz="1200" dirty="0"/>
+              <a:t>Hardware fault, maintenance, or an outage takes the system offline with no fallback</a:t>
+            </a:r>
+            <a:endParaRPr lang="en-US" sz="1150" dirty="0"/>
           </a:p>
         </p:txBody>
       </p:sp>
@@ -9474,8 +10314,8 @@
         </p:nvSpPr>
         <p:spPr>
           <a:xfrm>
-            <a:off x="868680" y="3547872"/>
-            <a:ext cx="4754880" cy="502920"/>
+            <a:off x="868680" y="3648456"/>
+            <a:ext cx="4754880" cy="621792"/>
           </a:xfrm>
           <a:prstGeom prst="rect">
             <a:avLst/>
@@ -9494,7 +10334,7 @@
               <a:buNone/>
             </a:pPr>
             <a:r>
-              <a:rPr lang="en-US" sz="1200" b="1" dirty="0">
+              <a:rPr lang="en-US" sz="1150" b="1" dirty="0">
                 <a:solidFill>
                   <a:srgbClr val="2C0F5E"/>
                 </a:solidFill>
@@ -9505,7 +10345,7 @@
               <a:t>•  </a:t>
             </a:r>
             <a:r>
-              <a:rPr lang="en-US" sz="1200" dirty="0">
+              <a:rPr lang="en-US" sz="1150" dirty="0">
                 <a:solidFill>
                   <a:srgbClr val="5C5470"/>
                 </a:solidFill>
@@ -9513,9 +10353,9 @@
                 <a:ea typeface="Calibri" pitchFamily="34" charset="-122"/>
                 <a:cs typeface="Calibri" pitchFamily="34" charset="-120"/>
               </a:rPr>
-              <a:t>No real ministry submissions, no real personnel data</a:t>
-            </a:r>
-            <a:endParaRPr lang="en-US" sz="1200" dirty="0"/>
+              <a:t>Statutory deadlines, sittings, and submissions in progress stall until it's restored</a:t>
+            </a:r>
+            <a:endParaRPr lang="en-US" sz="1150" dirty="0"/>
           </a:p>
         </p:txBody>
       </p:sp>
@@ -9527,8 +10367,8 @@
         </p:nvSpPr>
         <p:spPr>
           <a:xfrm>
-            <a:off x="868680" y="4096512"/>
-            <a:ext cx="4754880" cy="502920"/>
+            <a:off x="868680" y="4306824"/>
+            <a:ext cx="4754880" cy="621792"/>
           </a:xfrm>
           <a:prstGeom prst="rect">
             <a:avLst/>
@@ -9547,7 +10387,7 @@
               <a:buNone/>
             </a:pPr>
             <a:r>
-              <a:rPr lang="en-US" sz="1200" b="1" dirty="0">
+              <a:rPr lang="en-US" sz="1150" b="1" dirty="0">
                 <a:solidFill>
                   <a:srgbClr val="2C0F5E"/>
                 </a:solidFill>
@@ -9558,7 +10398,7 @@
               <a:t>•  </a:t>
             </a:r>
             <a:r>
-              <a:rPr lang="en-US" sz="1200" dirty="0">
+              <a:rPr lang="en-US" sz="1150" dirty="0">
                 <a:solidFill>
                   <a:srgbClr val="5C5470"/>
                 </a:solidFill>
@@ -9566,9 +10406,9 @@
                 <a:ea typeface="Calibri" pitchFamily="34" charset="-122"/>
                 <a:cs typeface="Calibri" pitchFamily="34" charset="-120"/>
               </a:rPr>
-              <a:t>Internal testing by the build team, not by end users</a:t>
-            </a:r>
-            <a:endParaRPr lang="en-US" sz="1200" dirty="0"/>
+              <a:t>Recovery time then depends entirely on DCDT's turnaround, not on OPSC's plans</a:t>
+            </a:r>
+            <a:endParaRPr lang="en-US" sz="1150" dirty="0"/>
           </a:p>
         </p:txBody>
       </p:sp>
@@ -9580,12 +10420,12 @@
         </p:nvSpPr>
         <p:spPr>
           <a:xfrm>
-            <a:off x="6263640" y="1737360"/>
-            <a:ext cx="5349240" cy="4297680"/>
+            <a:off x="6263640" y="1600200"/>
+            <a:ext cx="5349240" cy="4160520"/>
           </a:xfrm>
           <a:prstGeom prst="roundRect">
             <a:avLst>
-              <a:gd name="adj" fmla="val 1915"/>
+              <a:gd name="adj" fmla="val 1978"/>
             </a:avLst>
           </a:prstGeom>
           <a:solidFill>
@@ -9609,20 +10449,23 @@
         </p:nvSpPr>
         <p:spPr>
           <a:xfrm>
-            <a:off x="6583680" y="1965960"/>
-            <a:ext cx="4754880" cy="365760"/>
-          </a:xfrm>
-          <a:prstGeom prst="rect">
-            <a:avLst/>
-          </a:prstGeom>
-          <a:noFill/>
-          <a:ln/>
-        </p:spPr>
-        <p:txBody>
-          <a:bodyPr wrap="square" rtlCol="0" anchor="ctr"/>
-          <a:lstStyle/>
-          <a:p>
-            <a:pPr marL="0" indent="0">
+            <a:off x="6583680" y="1828800"/>
+            <a:ext cx="4754880" cy="548640"/>
+          </a:xfrm>
+          <a:prstGeom prst="rect">
+            <a:avLst/>
+          </a:prstGeom>
+          <a:noFill/>
+          <a:ln/>
+        </p:spPr>
+        <p:txBody>
+          <a:bodyPr wrap="square" rtlCol="0" anchor="ctr"/>
+          <a:lstStyle/>
+          <a:p>
+            <a:pPr marL="0" indent="0">
+              <a:lnSpc>
+                <a:spcPct val="105000"/>
+              </a:lnSpc>
               <a:buNone/>
             </a:pPr>
             <a:r>
@@ -9634,7 +10477,7 @@
                 <a:ea typeface="Calibri" pitchFamily="34" charset="-122"/>
                 <a:cs typeface="Calibri" pitchFamily="34" charset="-120"/>
               </a:rPr>
-              <a:t>What's still ahead before a pilot</a:t>
+              <a:t>More than insurance for SCDMS alone</a:t>
             </a:r>
             <a:endParaRPr lang="en-US" sz="1450" dirty="0"/>
           </a:p>
@@ -9648,8 +10491,8 @@
         </p:nvSpPr>
         <p:spPr>
           <a:xfrm>
-            <a:off x="6583680" y="2450592"/>
-            <a:ext cx="4754880" cy="502920"/>
+            <a:off x="6583680" y="2377440"/>
+            <a:ext cx="4754880" cy="621792"/>
           </a:xfrm>
           <a:prstGeom prst="rect">
             <a:avLst/>
@@ -9668,7 +10511,7 @@
               <a:buNone/>
             </a:pPr>
             <a:r>
-              <a:rPr lang="en-US" sz="1200" b="1" dirty="0">
+              <a:rPr lang="en-US" sz="1150" b="1" dirty="0">
                 <a:solidFill>
                   <a:srgbClr val="D9A441"/>
                 </a:solidFill>
@@ -9679,7 +10522,7 @@
               <a:t>→  </a:t>
             </a:r>
             <a:r>
-              <a:rPr lang="en-US" sz="1200" dirty="0">
+              <a:rPr lang="en-US" sz="1150" dirty="0">
                 <a:solidFill>
                   <a:srgbClr val="FFFFFF"/>
                 </a:solidFill>
@@ -9687,9 +10530,9 @@
                 <a:ea typeface="Calibri" pitchFamily="34" charset="-122"/>
                 <a:cs typeface="Calibri" pitchFamily="34" charset="-120"/>
               </a:rPr>
-              <a:t>Select pilot ministries and a defined pilot scope</a:t>
-            </a:r>
-            <a:endParaRPr lang="en-US" sz="1200" dirty="0"/>
+              <a:t>Sized and provisioned properly, the same standby server doesn't have to sit idle waiting for a failure</a:t>
+            </a:r>
+            <a:endParaRPr lang="en-US" sz="1150" dirty="0"/>
           </a:p>
         </p:txBody>
       </p:sp>
@@ -9701,8 +10544,8 @@
         </p:nvSpPr>
         <p:spPr>
           <a:xfrm>
-            <a:off x="6583680" y="2999232"/>
-            <a:ext cx="4754880" cy="502920"/>
+            <a:off x="6583680" y="3035808"/>
+            <a:ext cx="4754880" cy="621792"/>
           </a:xfrm>
           <a:prstGeom prst="rect">
             <a:avLst/>
@@ -9721,7 +10564,7 @@
               <a:buNone/>
             </a:pPr>
             <a:r>
-              <a:rPr lang="en-US" sz="1200" b="1" dirty="0">
+              <a:rPr lang="en-US" sz="1150" b="1" dirty="0">
                 <a:solidFill>
                   <a:srgbClr val="D9A441"/>
                 </a:solidFill>
@@ -9732,7 +10575,7 @@
               <a:t>→  </a:t>
             </a:r>
             <a:r>
-              <a:rPr lang="en-US" sz="1200" dirty="0">
+              <a:rPr lang="en-US" sz="1150" dirty="0">
                 <a:solidFill>
                   <a:srgbClr val="FFFFFF"/>
                 </a:solidFill>
@@ -9740,9 +10583,9 @@
                 <a:ea typeface="Calibri" pitchFamily="34" charset="-122"/>
                 <a:cs typeface="Calibri" pitchFamily="34" charset="-120"/>
               </a:rPr>
-              <a:t>Load real (approved) reference data - ministries, departments, users</a:t>
-            </a:r>
-            <a:endParaRPr lang="en-US" sz="1200" dirty="0"/>
+              <a:t>It can also host other OPSC systems - turning a single-purpose redundancy cost into shared government infrastructure</a:t>
+            </a:r>
+            <a:endParaRPr lang="en-US" sz="1150" dirty="0"/>
           </a:p>
         </p:txBody>
       </p:sp>
@@ -9754,8 +10597,8 @@
         </p:nvSpPr>
         <p:spPr>
           <a:xfrm>
-            <a:off x="6583680" y="3547872"/>
-            <a:ext cx="4754880" cy="502920"/>
+            <a:off x="6583680" y="3694176"/>
+            <a:ext cx="4754880" cy="621792"/>
           </a:xfrm>
           <a:prstGeom prst="rect">
             <a:avLst/>
@@ -9774,7 +10617,7 @@
               <a:buNone/>
             </a:pPr>
             <a:r>
-              <a:rPr lang="en-US" sz="1200" b="1" dirty="0">
+              <a:rPr lang="en-US" sz="1150" b="1" dirty="0">
                 <a:solidFill>
                   <a:srgbClr val="D9A441"/>
                 </a:solidFill>
@@ -9785,7 +10628,7 @@
               <a:t>→  </a:t>
             </a:r>
             <a:r>
-              <a:rPr lang="en-US" sz="1200" dirty="0">
+              <a:rPr lang="en-US" sz="1150" dirty="0">
                 <a:solidFill>
                   <a:srgbClr val="FFFFFF"/>
                 </a:solidFill>
@@ -9793,121 +10636,15 @@
                 <a:ea typeface="Calibri" pitchFamily="34" charset="-122"/>
                 <a:cs typeface="Calibri" pitchFamily="34" charset="-120"/>
               </a:rPr>
-              <a:t>Formal user acceptance testing with real OPSC and ministry staff</a:t>
-            </a:r>
-            <a:endParaRPr lang="en-US" sz="1200" dirty="0"/>
-          </a:p>
-        </p:txBody>
-      </p:sp>
-      <p:sp>
-        <p:nvSpPr>
-          <p:cNvPr id="16" name="Text 13"/>
-          <p:cNvSpPr/>
-          <p:nvPr/>
-        </p:nvSpPr>
-        <p:spPr>
-          <a:xfrm>
-            <a:off x="6583680" y="4096512"/>
-            <a:ext cx="4754880" cy="502920"/>
-          </a:xfrm>
-          <a:prstGeom prst="rect">
-            <a:avLst/>
-          </a:prstGeom>
-          <a:noFill/>
-          <a:ln/>
-        </p:spPr>
-        <p:txBody>
-          <a:bodyPr wrap="square" rtlCol="0" anchor="ctr"/>
-          <a:lstStyle/>
-          <a:p>
-            <a:pPr marL="0" indent="0">
-              <a:lnSpc>
-                <a:spcPct val="120000"/>
-              </a:lnSpc>
-              <a:buNone/>
-            </a:pPr>
-            <a:r>
-              <a:rPr lang="en-US" sz="1200" b="1" dirty="0">
-                <a:solidFill>
-                  <a:srgbClr val="D9A441"/>
-                </a:solidFill>
-                <a:latin typeface="Calibri" pitchFamily="34" charset="0"/>
-                <a:ea typeface="Calibri" pitchFamily="34" charset="-122"/>
-                <a:cs typeface="Calibri" pitchFamily="34" charset="-120"/>
-              </a:rPr>
-              <a:t>→  </a:t>
-            </a:r>
-            <a:r>
-              <a:rPr lang="en-US" sz="1200" dirty="0">
-                <a:solidFill>
-                  <a:srgbClr val="FFFFFF"/>
-                </a:solidFill>
-                <a:latin typeface="Calibri" pitchFamily="34" charset="0"/>
-                <a:ea typeface="Calibri" pitchFamily="34" charset="-122"/>
-                <a:cs typeface="Calibri" pitchFamily="34" charset="-120"/>
-              </a:rPr>
-              <a:t>Training and rollout plan for pilot participants</a:t>
-            </a:r>
-            <a:endParaRPr lang="en-US" sz="1200" dirty="0"/>
-          </a:p>
-        </p:txBody>
-      </p:sp>
-      <p:sp>
-        <p:nvSpPr>
-          <p:cNvPr id="17" name="Text 14"/>
-          <p:cNvSpPr/>
-          <p:nvPr/>
-        </p:nvSpPr>
-        <p:spPr>
-          <a:xfrm>
-            <a:off x="6583680" y="4645152"/>
-            <a:ext cx="4754880" cy="502920"/>
-          </a:xfrm>
-          <a:prstGeom prst="rect">
-            <a:avLst/>
-          </a:prstGeom>
-          <a:noFill/>
-          <a:ln/>
-        </p:spPr>
-        <p:txBody>
-          <a:bodyPr wrap="square" rtlCol="0" anchor="ctr"/>
-          <a:lstStyle/>
-          <a:p>
-            <a:pPr marL="0" indent="0">
-              <a:lnSpc>
-                <a:spcPct val="120000"/>
-              </a:lnSpc>
-              <a:buNone/>
-            </a:pPr>
-            <a:r>
-              <a:rPr lang="en-US" sz="1200" b="1" dirty="0">
-                <a:solidFill>
-                  <a:srgbClr val="D9A441"/>
-                </a:solidFill>
-                <a:latin typeface="Calibri" pitchFamily="34" charset="0"/>
-                <a:ea typeface="Calibri" pitchFamily="34" charset="-122"/>
-                <a:cs typeface="Calibri" pitchFamily="34" charset="-120"/>
-              </a:rPr>
-              <a:t>→  </a:t>
-            </a:r>
-            <a:r>
-              <a:rPr lang="en-US" sz="1200" dirty="0">
-                <a:solidFill>
-                  <a:srgbClr val="FFFFFF"/>
-                </a:solidFill>
-                <a:latin typeface="Calibri" pitchFamily="34" charset="0"/>
-                <a:ea typeface="Calibri" pitchFamily="34" charset="-122"/>
-                <a:cs typeface="Calibri" pitchFamily="34" charset="-120"/>
-              </a:rPr>
-              <a:t>Committee sign-off on go-live readiness criteria</a:t>
-            </a:r>
-            <a:endParaRPr lang="en-US" sz="1200" dirty="0"/>
-          </a:p>
-        </p:txBody>
-      </p:sp>
-      <p:sp>
-        <p:nvSpPr>
-          <p:cNvPr id="18" name="Text 15"/>
+              <a:t>One properly-specified request to DCDT, instead of a separate one-off ask per system</a:t>
+            </a:r>
+            <a:endParaRPr lang="en-US" sz="1150" dirty="0"/>
+          </a:p>
+        </p:txBody>
+      </p:sp>
+      <p:sp>
+        <p:nvSpPr>
+          <p:cNvPr id="19" name="Text 16"/>
           <p:cNvSpPr/>
           <p:nvPr/>
         </p:nvSpPr>
@@ -9946,7 +10683,7 @@
       </p:sp>
       <p:sp>
         <p:nvSpPr>
-          <p:cNvPr id="19" name="Text 16"/>
+          <p:cNvPr id="20" name="Text 17"/>
           <p:cNvSpPr/>
           <p:nvPr/>
         </p:nvSpPr>
@@ -9991,7 +10728,7 @@
 </p:sld>
 </file>
 
-<file path=ppt/slides/slide17.xml><?xml version="1.0" encoding="utf-8"?>
+<file path=ppt/slides/slide18.xml><?xml version="1.0" encoding="utf-8"?>
 <p:sld xmlns:a="http://schemas.openxmlformats.org/drawingml/2006/main" xmlns:r="http://schemas.openxmlformats.org/officeDocument/2006/relationships" xmlns:p="http://schemas.openxmlformats.org/presentationml/2006/main">
   <p:cSld name="Slide 17">
     <p:spTree>
@@ -10065,7 +10802,7 @@
                 <a:ea typeface="Calibri" pitchFamily="34" charset="-122"/>
                 <a:cs typeface="Calibri" pitchFamily="34" charset="-120"/>
               </a:rPr>
-              <a:t>WHAT'S NEXT</a:t>
+              <a:t>WHERE WE ARE TODAY</a:t>
             </a:r>
             <a:endParaRPr lang="en-US" sz="1200" dirty="0"/>
           </a:p>
@@ -10096,7 +10833,7 @@
               <a:buNone/>
             </a:pPr>
             <a:r>
-              <a:rPr lang="en-US" sz="2900" b="1" dirty="0">
+              <a:rPr lang="en-US" sz="2700" b="1" dirty="0">
                 <a:solidFill>
                   <a:srgbClr val="FFFFFF"/>
                 </a:solidFill>
@@ -10104,9 +10841,9 @@
                 <a:ea typeface="Cambria" pitchFamily="34" charset="-122"/>
                 <a:cs typeface="Cambria" pitchFamily="34" charset="-120"/>
               </a:rPr>
-              <a:t>Near-term roadmap</a:t>
-            </a:r>
-            <a:endParaRPr lang="en-US" sz="2900" dirty="0"/>
+              <a:t>Important: this is a progress update, not a pilot</a:t>
+            </a:r>
+            <a:endParaRPr lang="en-US" sz="2700" dirty="0"/>
           </a:p>
         </p:txBody>
       </p:sp>
@@ -10119,11 +10856,11 @@
         <p:spPr>
           <a:xfrm>
             <a:off x="548640" y="1737360"/>
-            <a:ext cx="11064240" cy="960120"/>
+            <a:ext cx="5349240" cy="4297680"/>
           </a:xfrm>
           <a:prstGeom prst="roundRect">
             <a:avLst>
-              <a:gd name="adj" fmla="val 8571"/>
+              <a:gd name="adj" fmla="val 1915"/>
             </a:avLst>
           </a:prstGeom>
           <a:solidFill>
@@ -10147,24 +10884,24 @@
         </p:nvSpPr>
         <p:spPr>
           <a:xfrm>
-            <a:off x="822960" y="1865376"/>
-            <a:ext cx="3657600" cy="457200"/>
-          </a:xfrm>
-          <a:prstGeom prst="rect">
-            <a:avLst/>
-          </a:prstGeom>
-          <a:noFill/>
-          <a:ln/>
-        </p:spPr>
-        <p:txBody>
-          <a:bodyPr wrap="square" rtlCol="0" anchor="ctr"/>
-          <a:lstStyle/>
-          <a:p>
-            <a:pPr marL="0" indent="0">
-              <a:buNone/>
-            </a:pPr>
-            <a:r>
-              <a:rPr lang="en-US" sz="1350" b="1" dirty="0">
+            <a:off x="868680" y="1965960"/>
+            <a:ext cx="4754880" cy="365760"/>
+          </a:xfrm>
+          <a:prstGeom prst="rect">
+            <a:avLst/>
+          </a:prstGeom>
+          <a:noFill/>
+          <a:ln/>
+        </p:spPr>
+        <p:txBody>
+          <a:bodyPr wrap="square" rtlCol="0" anchor="ctr"/>
+          <a:lstStyle/>
+          <a:p>
+            <a:pPr marL="0" indent="0">
+              <a:buNone/>
+            </a:pPr>
+            <a:r>
+              <a:rPr lang="en-US" sz="1450" b="1" dirty="0">
                 <a:solidFill>
                   <a:srgbClr val="2C0F5E"/>
                 </a:solidFill>
@@ -10172,9 +10909,9 @@
                 <a:ea typeface="Calibri" pitchFamily="34" charset="-122"/>
                 <a:cs typeface="Calibri" pitchFamily="34" charset="-120"/>
               </a:rPr>
-              <a:t>Workflow Automation</a:t>
-            </a:r>
-            <a:endParaRPr lang="en-US" sz="1350" dirty="0"/>
+              <a:t>Where we are</a:t>
+            </a:r>
+            <a:endParaRPr lang="en-US" sz="1450" dirty="0"/>
           </a:p>
         </p:txBody>
       </p:sp>
@@ -10186,8 +10923,8 @@
         </p:nvSpPr>
         <p:spPr>
           <a:xfrm>
-            <a:off x="822960" y="2240280"/>
-            <a:ext cx="7315200" cy="411480"/>
+            <a:off x="868680" y="2450592"/>
+            <a:ext cx="4754880" cy="502920"/>
           </a:xfrm>
           <a:prstGeom prst="rect">
             <a:avLst/>
@@ -10201,12 +10938,23 @@
           <a:p>
             <a:pPr marL="0" indent="0">
               <a:lnSpc>
-                <a:spcPct val="110000"/>
+                <a:spcPct val="120000"/>
               </a:lnSpc>
               <a:buNone/>
             </a:pPr>
             <a:r>
-              <a:rPr lang="en-US" sz="1000" dirty="0">
+              <a:rPr lang="en-US" sz="1200" b="1" dirty="0">
+                <a:solidFill>
+                  <a:srgbClr val="2C0F5E"/>
+                </a:solidFill>
+                <a:latin typeface="Calibri" pitchFamily="34" charset="0"/>
+                <a:ea typeface="Calibri" pitchFamily="34" charset="-122"/>
+                <a:cs typeface="Calibri" pitchFamily="34" charset="-120"/>
+              </a:rPr>
+              <a:t>•  </a:t>
+            </a:r>
+            <a:r>
+              <a:rPr lang="en-US" sz="1200" dirty="0">
                 <a:solidFill>
                   <a:srgbClr val="5C5470"/>
                 </a:solidFill>
@@ -10214,91 +10962,189 @@
                 <a:ea typeface="Calibri" pitchFamily="34" charset="-122"/>
                 <a:cs typeface="Calibri" pitchFamily="34" charset="-120"/>
               </a:rPr>
-              <a:t>No-code trigger → condition → action builder across submissions, cases, meetings, and tasks. Awaiting build approval.</a:t>
-            </a:r>
-            <a:endParaRPr lang="en-US" sz="1000" dirty="0"/>
-          </a:p>
-        </p:txBody>
-      </p:sp>
-      <p:sp>
-        <p:nvSpPr>
-          <p:cNvPr id="8" name="Shape 5"/>
-          <p:cNvSpPr/>
-          <p:nvPr/>
-        </p:nvSpPr>
-        <p:spPr>
-          <a:xfrm>
-            <a:off x="8366760" y="2029968"/>
-            <a:ext cx="2468880" cy="384048"/>
+              <a:t>System built and functioning across all core modules</a:t>
+            </a:r>
+            <a:endParaRPr lang="en-US" sz="1200" dirty="0"/>
+          </a:p>
+        </p:txBody>
+      </p:sp>
+      <p:sp>
+        <p:nvSpPr>
+          <p:cNvPr id="8" name="Text 5"/>
+          <p:cNvSpPr/>
+          <p:nvPr/>
+        </p:nvSpPr>
+        <p:spPr>
+          <a:xfrm>
+            <a:off x="868680" y="2999232"/>
+            <a:ext cx="4754880" cy="502920"/>
+          </a:xfrm>
+          <a:prstGeom prst="rect">
+            <a:avLst/>
+          </a:prstGeom>
+          <a:noFill/>
+          <a:ln/>
+        </p:spPr>
+        <p:txBody>
+          <a:bodyPr wrap="square" rtlCol="0" anchor="ctr"/>
+          <a:lstStyle/>
+          <a:p>
+            <a:pPr marL="0" indent="0">
+              <a:lnSpc>
+                <a:spcPct val="120000"/>
+              </a:lnSpc>
+              <a:buNone/>
+            </a:pPr>
+            <a:r>
+              <a:rPr lang="en-US" sz="1200" b="1" dirty="0">
+                <a:solidFill>
+                  <a:srgbClr val="2C0F5E"/>
+                </a:solidFill>
+                <a:latin typeface="Calibri" pitchFamily="34" charset="0"/>
+                <a:ea typeface="Calibri" pitchFamily="34" charset="-122"/>
+                <a:cs typeface="Calibri" pitchFamily="34" charset="-120"/>
+              </a:rPr>
+              <a:t>•  </a:t>
+            </a:r>
+            <a:r>
+              <a:rPr lang="en-US" sz="1200" dirty="0">
+                <a:solidFill>
+                  <a:srgbClr val="5C5470"/>
+                </a:solidFill>
+                <a:latin typeface="Calibri" pitchFamily="34" charset="0"/>
+                <a:ea typeface="Calibri" pitchFamily="34" charset="-122"/>
+                <a:cs typeface="Calibri" pitchFamily="34" charset="-120"/>
+              </a:rPr>
+              <a:t>Running in a controlled environment with seeded / dummy data only</a:t>
+            </a:r>
+            <a:endParaRPr lang="en-US" sz="1200" dirty="0"/>
+          </a:p>
+        </p:txBody>
+      </p:sp>
+      <p:sp>
+        <p:nvSpPr>
+          <p:cNvPr id="9" name="Text 6"/>
+          <p:cNvSpPr/>
+          <p:nvPr/>
+        </p:nvSpPr>
+        <p:spPr>
+          <a:xfrm>
+            <a:off x="868680" y="3547872"/>
+            <a:ext cx="4754880" cy="502920"/>
+          </a:xfrm>
+          <a:prstGeom prst="rect">
+            <a:avLst/>
+          </a:prstGeom>
+          <a:noFill/>
+          <a:ln/>
+        </p:spPr>
+        <p:txBody>
+          <a:bodyPr wrap="square" rtlCol="0" anchor="ctr"/>
+          <a:lstStyle/>
+          <a:p>
+            <a:pPr marL="0" indent="0">
+              <a:lnSpc>
+                <a:spcPct val="120000"/>
+              </a:lnSpc>
+              <a:buNone/>
+            </a:pPr>
+            <a:r>
+              <a:rPr lang="en-US" sz="1200" b="1" dirty="0">
+                <a:solidFill>
+                  <a:srgbClr val="2C0F5E"/>
+                </a:solidFill>
+                <a:latin typeface="Calibri" pitchFamily="34" charset="0"/>
+                <a:ea typeface="Calibri" pitchFamily="34" charset="-122"/>
+                <a:cs typeface="Calibri" pitchFamily="34" charset="-120"/>
+              </a:rPr>
+              <a:t>•  </a:t>
+            </a:r>
+            <a:r>
+              <a:rPr lang="en-US" sz="1200" dirty="0">
+                <a:solidFill>
+                  <a:srgbClr val="5C5470"/>
+                </a:solidFill>
+                <a:latin typeface="Calibri" pitchFamily="34" charset="0"/>
+                <a:ea typeface="Calibri" pitchFamily="34" charset="-122"/>
+                <a:cs typeface="Calibri" pitchFamily="34" charset="-120"/>
+              </a:rPr>
+              <a:t>No real ministry submissions, no real personnel data</a:t>
+            </a:r>
+            <a:endParaRPr lang="en-US" sz="1200" dirty="0"/>
+          </a:p>
+        </p:txBody>
+      </p:sp>
+      <p:sp>
+        <p:nvSpPr>
+          <p:cNvPr id="10" name="Text 7"/>
+          <p:cNvSpPr/>
+          <p:nvPr/>
+        </p:nvSpPr>
+        <p:spPr>
+          <a:xfrm>
+            <a:off x="868680" y="4096512"/>
+            <a:ext cx="4754880" cy="502920"/>
+          </a:xfrm>
+          <a:prstGeom prst="rect">
+            <a:avLst/>
+          </a:prstGeom>
+          <a:noFill/>
+          <a:ln/>
+        </p:spPr>
+        <p:txBody>
+          <a:bodyPr wrap="square" rtlCol="0" anchor="ctr"/>
+          <a:lstStyle/>
+          <a:p>
+            <a:pPr marL="0" indent="0">
+              <a:lnSpc>
+                <a:spcPct val="120000"/>
+              </a:lnSpc>
+              <a:buNone/>
+            </a:pPr>
+            <a:r>
+              <a:rPr lang="en-US" sz="1200" b="1" dirty="0">
+                <a:solidFill>
+                  <a:srgbClr val="2C0F5E"/>
+                </a:solidFill>
+                <a:latin typeface="Calibri" pitchFamily="34" charset="0"/>
+                <a:ea typeface="Calibri" pitchFamily="34" charset="-122"/>
+                <a:cs typeface="Calibri" pitchFamily="34" charset="-120"/>
+              </a:rPr>
+              <a:t>•  </a:t>
+            </a:r>
+            <a:r>
+              <a:rPr lang="en-US" sz="1200" dirty="0">
+                <a:solidFill>
+                  <a:srgbClr val="5C5470"/>
+                </a:solidFill>
+                <a:latin typeface="Calibri" pitchFamily="34" charset="0"/>
+                <a:ea typeface="Calibri" pitchFamily="34" charset="-122"/>
+                <a:cs typeface="Calibri" pitchFamily="34" charset="-120"/>
+              </a:rPr>
+              <a:t>Internal testing by the build team, not by end users</a:t>
+            </a:r>
+            <a:endParaRPr lang="en-US" sz="1200" dirty="0"/>
+          </a:p>
+        </p:txBody>
+      </p:sp>
+      <p:sp>
+        <p:nvSpPr>
+          <p:cNvPr id="11" name="Shape 8"/>
+          <p:cNvSpPr/>
+          <p:nvPr/>
+        </p:nvSpPr>
+        <p:spPr>
+          <a:xfrm>
+            <a:off x="6263640" y="1737360"/>
+            <a:ext cx="5349240" cy="4297680"/>
           </a:xfrm>
           <a:prstGeom prst="roundRect">
             <a:avLst>
-              <a:gd name="adj" fmla="val 50000"/>
+              <a:gd name="adj" fmla="val 1915"/>
             </a:avLst>
           </a:prstGeom>
           <a:solidFill>
-            <a:srgbClr val="FBF0DC"/>
-          </a:solidFill>
-          <a:ln/>
-        </p:spPr>
-      </p:sp>
-      <p:sp>
-        <p:nvSpPr>
-          <p:cNvPr id="9" name="Text 6"/>
-          <p:cNvSpPr/>
-          <p:nvPr/>
-        </p:nvSpPr>
-        <p:spPr>
-          <a:xfrm>
-            <a:off x="8366760" y="2029968"/>
-            <a:ext cx="2468880" cy="384048"/>
-          </a:xfrm>
-          <a:prstGeom prst="rect">
-            <a:avLst/>
-          </a:prstGeom>
-          <a:noFill/>
-          <a:ln/>
-        </p:spPr>
-        <p:txBody>
-          <a:bodyPr wrap="square" rtlCol="0" anchor="ctr"/>
-          <a:lstStyle/>
-          <a:p>
-            <a:pPr marL="0" indent="0" algn="ctr">
-              <a:buNone/>
-            </a:pPr>
-            <a:r>
-              <a:rPr lang="en-US" sz="1000" b="1" dirty="0">
-                <a:solidFill>
-                  <a:srgbClr val="B5791A"/>
-                </a:solidFill>
-                <a:latin typeface="Calibri" pitchFamily="34" charset="0"/>
-                <a:ea typeface="Calibri" pitchFamily="34" charset="-122"/>
-                <a:cs typeface="Calibri" pitchFamily="34" charset="-120"/>
-              </a:rPr>
-              <a:t>Proposed</a:t>
-            </a:r>
-            <a:endParaRPr lang="en-US" sz="1000" dirty="0"/>
-          </a:p>
-        </p:txBody>
-      </p:sp>
-      <p:sp>
-        <p:nvSpPr>
-          <p:cNvPr id="10" name="Shape 7"/>
-          <p:cNvSpPr/>
-          <p:nvPr/>
-        </p:nvSpPr>
-        <p:spPr>
-          <a:xfrm>
-            <a:off x="548640" y="2807208"/>
-            <a:ext cx="11064240" cy="960120"/>
-          </a:xfrm>
-          <a:prstGeom prst="roundRect">
-            <a:avLst>
-              <a:gd name="adj" fmla="val 8571"/>
-            </a:avLst>
-          </a:prstGeom>
-          <a:solidFill>
-            <a:srgbClr val="F5F3FB"/>
+            <a:srgbClr val="1E0E42"/>
           </a:solidFill>
           <a:ln/>
           <a:effectLst>
@@ -10312,53 +11158,53 @@
       </p:sp>
       <p:sp>
         <p:nvSpPr>
-          <p:cNvPr id="11" name="Text 8"/>
-          <p:cNvSpPr/>
-          <p:nvPr/>
-        </p:nvSpPr>
-        <p:spPr>
-          <a:xfrm>
-            <a:off x="822960" y="2935224"/>
-            <a:ext cx="3657600" cy="457200"/>
-          </a:xfrm>
-          <a:prstGeom prst="rect">
-            <a:avLst/>
-          </a:prstGeom>
-          <a:noFill/>
-          <a:ln/>
-        </p:spPr>
-        <p:txBody>
-          <a:bodyPr wrap="square" rtlCol="0" anchor="ctr"/>
-          <a:lstStyle/>
-          <a:p>
-            <a:pPr marL="0" indent="0">
-              <a:buNone/>
-            </a:pPr>
-            <a:r>
-              <a:rPr lang="en-US" sz="1350" b="1" dirty="0">
-                <a:solidFill>
-                  <a:srgbClr val="2C0F5E"/>
-                </a:solidFill>
-                <a:latin typeface="Calibri" pitchFamily="34" charset="0"/>
-                <a:ea typeface="Calibri" pitchFamily="34" charset="-122"/>
-                <a:cs typeface="Calibri" pitchFamily="34" charset="-120"/>
-              </a:rPr>
-              <a:t>Enterprise Reporting Engine</a:t>
-            </a:r>
-            <a:endParaRPr lang="en-US" sz="1350" dirty="0"/>
-          </a:p>
-        </p:txBody>
-      </p:sp>
-      <p:sp>
-        <p:nvSpPr>
           <p:cNvPr id="12" name="Text 9"/>
           <p:cNvSpPr/>
           <p:nvPr/>
         </p:nvSpPr>
         <p:spPr>
           <a:xfrm>
-            <a:off x="822960" y="3310128"/>
-            <a:ext cx="7315200" cy="411480"/>
+            <a:off x="6583680" y="1965960"/>
+            <a:ext cx="4754880" cy="365760"/>
+          </a:xfrm>
+          <a:prstGeom prst="rect">
+            <a:avLst/>
+          </a:prstGeom>
+          <a:noFill/>
+          <a:ln/>
+        </p:spPr>
+        <p:txBody>
+          <a:bodyPr wrap="square" rtlCol="0" anchor="ctr"/>
+          <a:lstStyle/>
+          <a:p>
+            <a:pPr marL="0" indent="0">
+              <a:buNone/>
+            </a:pPr>
+            <a:r>
+              <a:rPr lang="en-US" sz="1450" b="1" dirty="0">
+                <a:solidFill>
+                  <a:srgbClr val="D9A441"/>
+                </a:solidFill>
+                <a:latin typeface="Calibri" pitchFamily="34" charset="0"/>
+                <a:ea typeface="Calibri" pitchFamily="34" charset="-122"/>
+                <a:cs typeface="Calibri" pitchFamily="34" charset="-120"/>
+              </a:rPr>
+              <a:t>What's still ahead before a pilot</a:t>
+            </a:r>
+            <a:endParaRPr lang="en-US" sz="1450" dirty="0"/>
+          </a:p>
+        </p:txBody>
+      </p:sp>
+      <p:sp>
+        <p:nvSpPr>
+          <p:cNvPr id="13" name="Text 10"/>
+          <p:cNvSpPr/>
+          <p:nvPr/>
+        </p:nvSpPr>
+        <p:spPr>
+          <a:xfrm>
+            <a:off x="6583680" y="2450592"/>
+            <a:ext cx="4754880" cy="502920"/>
           </a:xfrm>
           <a:prstGeom prst="rect">
             <a:avLst/>
@@ -10372,46 +11218,35 @@
           <a:p>
             <a:pPr marL="0" indent="0">
               <a:lnSpc>
-                <a:spcPct val="110000"/>
+                <a:spcPct val="120000"/>
               </a:lnSpc>
               <a:buNone/>
             </a:pPr>
             <a:r>
-              <a:rPr lang="en-US" sz="1000" dirty="0">
-                <a:solidFill>
-                  <a:srgbClr val="5C5470"/>
-                </a:solidFill>
-                <a:latin typeface="Calibri" pitchFamily="34" charset="0"/>
-                <a:ea typeface="Calibri" pitchFamily="34" charset="-122"/>
-                <a:cs typeface="Calibri" pitchFamily="34" charset="-120"/>
-              </a:rPr>
-              <a:t>Parameterised report catalog plus ad-hoc natural-language reports, ready for migration and rollout.</a:t>
-            </a:r>
-            <a:endParaRPr lang="en-US" sz="1000" dirty="0"/>
-          </a:p>
-        </p:txBody>
-      </p:sp>
-      <p:sp>
-        <p:nvSpPr>
-          <p:cNvPr id="13" name="Shape 10"/>
-          <p:cNvSpPr/>
-          <p:nvPr/>
-        </p:nvSpPr>
-        <p:spPr>
-          <a:xfrm>
-            <a:off x="8366760" y="3099816"/>
-            <a:ext cx="2468880" cy="384048"/>
-          </a:xfrm>
-          <a:prstGeom prst="roundRect">
-            <a:avLst>
-              <a:gd name="adj" fmla="val 50000"/>
-            </a:avLst>
-          </a:prstGeom>
-          <a:solidFill>
-            <a:srgbClr val="E4F4EC"/>
-          </a:solidFill>
-          <a:ln/>
-        </p:spPr>
+              <a:rPr lang="en-US" sz="1200" b="1" dirty="0">
+                <a:solidFill>
+                  <a:srgbClr val="D9A441"/>
+                </a:solidFill>
+                <a:latin typeface="Calibri" pitchFamily="34" charset="0"/>
+                <a:ea typeface="Calibri" pitchFamily="34" charset="-122"/>
+                <a:cs typeface="Calibri" pitchFamily="34" charset="-120"/>
+              </a:rPr>
+              <a:t>→  </a:t>
+            </a:r>
+            <a:r>
+              <a:rPr lang="en-US" sz="1200" dirty="0">
+                <a:solidFill>
+                  <a:srgbClr val="FFFFFF"/>
+                </a:solidFill>
+                <a:latin typeface="Calibri" pitchFamily="34" charset="0"/>
+                <a:ea typeface="Calibri" pitchFamily="34" charset="-122"/>
+                <a:cs typeface="Calibri" pitchFamily="34" charset="-120"/>
+              </a:rPr>
+              <a:t>OPSC unit pre-pilot, Select pilot ministries and a defined pilot scope</a:t>
+            </a:r>
+            <a:endParaRPr lang="en-US" sz="1200" dirty="0"/>
+          </a:p>
+        </p:txBody>
       </p:sp>
       <p:sp>
         <p:nvSpPr>
@@ -10421,65 +11256,103 @@
         </p:nvSpPr>
         <p:spPr>
           <a:xfrm>
-            <a:off x="8366760" y="3099816"/>
-            <a:ext cx="2468880" cy="384048"/>
-          </a:xfrm>
-          <a:prstGeom prst="rect">
-            <a:avLst/>
-          </a:prstGeom>
-          <a:noFill/>
-          <a:ln/>
-        </p:spPr>
-        <p:txBody>
-          <a:bodyPr wrap="square" rtlCol="0" anchor="ctr"/>
-          <a:lstStyle/>
-          <a:p>
-            <a:pPr marL="0" indent="0" algn="ctr">
-              <a:buNone/>
-            </a:pPr>
-            <a:r>
-              <a:rPr lang="en-US" sz="1000" b="1" dirty="0">
-                <a:solidFill>
-                  <a:srgbClr val="1E7A4C"/>
-                </a:solidFill>
-                <a:latin typeface="Calibri" pitchFamily="34" charset="0"/>
-                <a:ea typeface="Calibri" pitchFamily="34" charset="-122"/>
-                <a:cs typeface="Calibri" pitchFamily="34" charset="-120"/>
-              </a:rPr>
-              <a:t>Built, pending deploy</a:t>
-            </a:r>
-            <a:endParaRPr lang="en-US" sz="1000" dirty="0"/>
-          </a:p>
-        </p:txBody>
-      </p:sp>
-      <p:sp>
-        <p:nvSpPr>
-          <p:cNvPr id="15" name="Shape 12"/>
-          <p:cNvSpPr/>
-          <p:nvPr/>
-        </p:nvSpPr>
-        <p:spPr>
-          <a:xfrm>
-            <a:off x="548640" y="3877056"/>
-            <a:ext cx="11064240" cy="960120"/>
-          </a:xfrm>
-          <a:prstGeom prst="roundRect">
-            <a:avLst>
-              <a:gd name="adj" fmla="val 8571"/>
-            </a:avLst>
-          </a:prstGeom>
-          <a:solidFill>
-            <a:srgbClr val="F5F3FB"/>
-          </a:solidFill>
-          <a:ln/>
-          <a:effectLst>
-            <a:outerShdw blurRad="127000" dist="38100" dir="5400000" algn="bl" rotWithShape="0">
-              <a:srgbClr val="1B0B3E">
-                <a:alpha val="35000"/>
-              </a:srgbClr>
-            </a:outerShdw>
-          </a:effectLst>
-        </p:spPr>
+            <a:off x="6583680" y="2999232"/>
+            <a:ext cx="4754880" cy="502920"/>
+          </a:xfrm>
+          <a:prstGeom prst="rect">
+            <a:avLst/>
+          </a:prstGeom>
+          <a:noFill/>
+          <a:ln/>
+        </p:spPr>
+        <p:txBody>
+          <a:bodyPr wrap="square" rtlCol="0" anchor="ctr"/>
+          <a:lstStyle/>
+          <a:p>
+            <a:pPr marL="0" indent="0">
+              <a:lnSpc>
+                <a:spcPct val="120000"/>
+              </a:lnSpc>
+              <a:buNone/>
+            </a:pPr>
+            <a:r>
+              <a:rPr lang="en-US" sz="1200" b="1" dirty="0">
+                <a:solidFill>
+                  <a:srgbClr val="D9A441"/>
+                </a:solidFill>
+                <a:latin typeface="Calibri" pitchFamily="34" charset="0"/>
+                <a:ea typeface="Calibri" pitchFamily="34" charset="-122"/>
+                <a:cs typeface="Calibri" pitchFamily="34" charset="-120"/>
+              </a:rPr>
+              <a:t>→  </a:t>
+            </a:r>
+            <a:r>
+              <a:rPr lang="en-US" sz="1200" dirty="0">
+                <a:solidFill>
+                  <a:srgbClr val="FFFFFF"/>
+                </a:solidFill>
+                <a:latin typeface="Calibri" pitchFamily="34" charset="0"/>
+                <a:ea typeface="Calibri" pitchFamily="34" charset="-122"/>
+                <a:cs typeface="Calibri" pitchFamily="34" charset="-120"/>
+              </a:rPr>
+              <a:t>Load real (approved) reference data - ministries, departments, users</a:t>
+            </a:r>
+            <a:endParaRPr lang="en-US" sz="1200" dirty="0"/>
+          </a:p>
+        </p:txBody>
+      </p:sp>
+      <p:sp>
+        <p:nvSpPr>
+          <p:cNvPr id="15" name="Text 12"/>
+          <p:cNvSpPr/>
+          <p:nvPr/>
+        </p:nvSpPr>
+        <p:spPr>
+          <a:xfrm>
+            <a:off x="6583680" y="3547872"/>
+            <a:ext cx="4754880" cy="502920"/>
+          </a:xfrm>
+          <a:prstGeom prst="rect">
+            <a:avLst/>
+          </a:prstGeom>
+          <a:noFill/>
+          <a:ln/>
+        </p:spPr>
+        <p:txBody>
+          <a:bodyPr wrap="square" rtlCol="0" anchor="ctr"/>
+          <a:lstStyle/>
+          <a:p>
+            <a:pPr marL="0" indent="0">
+              <a:lnSpc>
+                <a:spcPct val="120000"/>
+              </a:lnSpc>
+              <a:buNone/>
+            </a:pPr>
+            <a:r>
+              <a:rPr lang="en-US" sz="1200" b="1" dirty="0">
+                <a:solidFill>
+                  <a:srgbClr val="D9A441"/>
+                </a:solidFill>
+                <a:latin typeface="Calibri" pitchFamily="34" charset="0"/>
+                <a:ea typeface="Calibri" pitchFamily="34" charset="-122"/>
+                <a:cs typeface="Calibri" pitchFamily="34" charset="-120"/>
+              </a:rPr>
+              <a:t>→  </a:t>
+            </a:r>
+            <a:r>
+              <a:rPr lang="en-US" sz="1200" dirty="0">
+                <a:solidFill>
+                  <a:srgbClr val="FFFFFF"/>
+                </a:solidFill>
+                <a:latin typeface="Calibri" pitchFamily="34" charset="0"/>
+                <a:ea typeface="Calibri" pitchFamily="34" charset="-122"/>
+                <a:cs typeface="Calibri" pitchFamily="34" charset="-120"/>
+              </a:rPr>
+              <a:t>Formal user acceptance testing with real OPSC and ministry staff</a:t>
+            </a:r>
+            <a:endParaRPr lang="en-US" sz="1200" dirty="0"/>
+          </a:p>
+        </p:txBody>
       </p:sp>
       <p:sp>
         <p:nvSpPr>
@@ -10489,34 +11362,48 @@
         </p:nvSpPr>
         <p:spPr>
           <a:xfrm>
-            <a:off x="822960" y="4005072"/>
-            <a:ext cx="3657600" cy="457200"/>
-          </a:xfrm>
-          <a:prstGeom prst="rect">
-            <a:avLst/>
-          </a:prstGeom>
-          <a:noFill/>
-          <a:ln/>
-        </p:spPr>
-        <p:txBody>
-          <a:bodyPr wrap="square" rtlCol="0" anchor="ctr"/>
-          <a:lstStyle/>
-          <a:p>
-            <a:pPr marL="0" indent="0">
-              <a:buNone/>
-            </a:pPr>
-            <a:r>
-              <a:rPr lang="en-US" sz="1350" b="1" dirty="0">
-                <a:solidFill>
-                  <a:srgbClr val="2C0F5E"/>
-                </a:solidFill>
-                <a:latin typeface="Calibri" pitchFamily="34" charset="0"/>
-                <a:ea typeface="Calibri" pitchFamily="34" charset="-122"/>
-                <a:cs typeface="Calibri" pitchFamily="34" charset="-120"/>
-              </a:rPr>
-              <a:t>Intelligence Explorer</a:t>
-            </a:r>
-            <a:endParaRPr lang="en-US" sz="1350" dirty="0"/>
+            <a:off x="6583680" y="4096512"/>
+            <a:ext cx="4754880" cy="502920"/>
+          </a:xfrm>
+          <a:prstGeom prst="rect">
+            <a:avLst/>
+          </a:prstGeom>
+          <a:noFill/>
+          <a:ln/>
+        </p:spPr>
+        <p:txBody>
+          <a:bodyPr wrap="square" rtlCol="0" anchor="ctr"/>
+          <a:lstStyle/>
+          <a:p>
+            <a:pPr marL="0" indent="0">
+              <a:lnSpc>
+                <a:spcPct val="120000"/>
+              </a:lnSpc>
+              <a:buNone/>
+            </a:pPr>
+            <a:r>
+              <a:rPr lang="en-US" sz="1200" b="1" dirty="0">
+                <a:solidFill>
+                  <a:srgbClr val="D9A441"/>
+                </a:solidFill>
+                <a:latin typeface="Calibri" pitchFamily="34" charset="0"/>
+                <a:ea typeface="Calibri" pitchFamily="34" charset="-122"/>
+                <a:cs typeface="Calibri" pitchFamily="34" charset="-120"/>
+              </a:rPr>
+              <a:t>→  </a:t>
+            </a:r>
+            <a:r>
+              <a:rPr lang="en-US" sz="1200" dirty="0">
+                <a:solidFill>
+                  <a:srgbClr val="FFFFFF"/>
+                </a:solidFill>
+                <a:latin typeface="Calibri" pitchFamily="34" charset="0"/>
+                <a:ea typeface="Calibri" pitchFamily="34" charset="-122"/>
+                <a:cs typeface="Calibri" pitchFamily="34" charset="-120"/>
+              </a:rPr>
+              <a:t>Training and rollout plan for pilot participants</a:t>
+            </a:r>
+            <a:endParaRPr lang="en-US" sz="1200" dirty="0"/>
           </a:p>
         </p:txBody>
       </p:sp>
@@ -10528,8 +11415,8 @@
         </p:nvSpPr>
         <p:spPr>
           <a:xfrm>
-            <a:off x="822960" y="4379976"/>
-            <a:ext cx="7315200" cy="411480"/>
+            <a:off x="6583680" y="4645152"/>
+            <a:ext cx="4754880" cy="502920"/>
           </a:xfrm>
           <a:prstGeom prst="rect">
             <a:avLst/>
@@ -10543,260 +11430,39 @@
           <a:p>
             <a:pPr marL="0" indent="0">
               <a:lnSpc>
-                <a:spcPct val="110000"/>
+                <a:spcPct val="120000"/>
               </a:lnSpc>
               <a:buNone/>
             </a:pPr>
             <a:r>
-              <a:rPr lang="en-US" sz="1000" dirty="0">
-                <a:solidFill>
-                  <a:srgbClr val="5C5470"/>
-                </a:solidFill>
-                <a:latin typeface="Calibri" pitchFamily="34" charset="0"/>
-                <a:ea typeface="Calibri" pitchFamily="34" charset="-122"/>
-                <a:cs typeface="Calibri" pitchFamily="34" charset="-120"/>
-              </a:rPr>
-              <a:t>Interactive data-exploration UI now live for the Submissions dataset.</a:t>
-            </a:r>
-            <a:endParaRPr lang="en-US" sz="1000" dirty="0"/>
-          </a:p>
-        </p:txBody>
-      </p:sp>
-      <p:sp>
-        <p:nvSpPr>
-          <p:cNvPr id="18" name="Shape 15"/>
-          <p:cNvSpPr/>
-          <p:nvPr/>
-        </p:nvSpPr>
-        <p:spPr>
-          <a:xfrm>
-            <a:off x="8366760" y="4169664"/>
-            <a:ext cx="2468880" cy="384048"/>
-          </a:xfrm>
-          <a:prstGeom prst="roundRect">
-            <a:avLst>
-              <a:gd name="adj" fmla="val 50000"/>
-            </a:avLst>
-          </a:prstGeom>
-          <a:solidFill>
-            <a:srgbClr val="E4F4EC"/>
-          </a:solidFill>
-          <a:ln/>
-        </p:spPr>
-      </p:sp>
-      <p:sp>
-        <p:nvSpPr>
-          <p:cNvPr id="19" name="Text 16"/>
-          <p:cNvSpPr/>
-          <p:nvPr/>
-        </p:nvSpPr>
-        <p:spPr>
-          <a:xfrm>
-            <a:off x="8366760" y="4169664"/>
-            <a:ext cx="2468880" cy="384048"/>
-          </a:xfrm>
-          <a:prstGeom prst="rect">
-            <a:avLst/>
-          </a:prstGeom>
-          <a:noFill/>
-          <a:ln/>
-        </p:spPr>
-        <p:txBody>
-          <a:bodyPr wrap="square" rtlCol="0" anchor="ctr"/>
-          <a:lstStyle/>
-          <a:p>
-            <a:pPr marL="0" indent="0" algn="ctr">
-              <a:buNone/>
-            </a:pPr>
-            <a:r>
-              <a:rPr lang="en-US" sz="1000" b="1" dirty="0">
-                <a:solidFill>
-                  <a:srgbClr val="1E7A4C"/>
-                </a:solidFill>
-                <a:latin typeface="Calibri" pitchFamily="34" charset="0"/>
-                <a:ea typeface="Calibri" pitchFamily="34" charset="-122"/>
-                <a:cs typeface="Calibri" pitchFamily="34" charset="-120"/>
-              </a:rPr>
-              <a:t>Built (P1)</a:t>
-            </a:r>
-            <a:endParaRPr lang="en-US" sz="1000" dirty="0"/>
-          </a:p>
-        </p:txBody>
-      </p:sp>
-      <p:sp>
-        <p:nvSpPr>
-          <p:cNvPr id="20" name="Shape 17"/>
-          <p:cNvSpPr/>
-          <p:nvPr/>
-        </p:nvSpPr>
-        <p:spPr>
-          <a:xfrm>
-            <a:off x="548640" y="4946904"/>
-            <a:ext cx="11064240" cy="960120"/>
-          </a:xfrm>
-          <a:prstGeom prst="roundRect">
-            <a:avLst>
-              <a:gd name="adj" fmla="val 8571"/>
-            </a:avLst>
-          </a:prstGeom>
-          <a:solidFill>
-            <a:srgbClr val="F5F3FB"/>
-          </a:solidFill>
-          <a:ln/>
-          <a:effectLst>
-            <a:outerShdw blurRad="127000" dist="38100" dir="5400000" algn="bl" rotWithShape="0">
-              <a:srgbClr val="1B0B3E">
-                <a:alpha val="35000"/>
-              </a:srgbClr>
-            </a:outerShdw>
-          </a:effectLst>
-        </p:spPr>
-      </p:sp>
-      <p:sp>
-        <p:nvSpPr>
-          <p:cNvPr id="21" name="Text 18"/>
-          <p:cNvSpPr/>
-          <p:nvPr/>
-        </p:nvSpPr>
-        <p:spPr>
-          <a:xfrm>
-            <a:off x="822960" y="5074920"/>
-            <a:ext cx="3657600" cy="457200"/>
-          </a:xfrm>
-          <a:prstGeom prst="rect">
-            <a:avLst/>
-          </a:prstGeom>
-          <a:noFill/>
-          <a:ln/>
-        </p:spPr>
-        <p:txBody>
-          <a:bodyPr wrap="square" rtlCol="0" anchor="ctr"/>
-          <a:lstStyle/>
-          <a:p>
-            <a:pPr marL="0" indent="0">
-              <a:buNone/>
-            </a:pPr>
-            <a:r>
-              <a:rPr lang="en-US" sz="1350" b="1" dirty="0">
-                <a:solidFill>
-                  <a:srgbClr val="2C0F5E"/>
-                </a:solidFill>
-                <a:latin typeface="Calibri" pitchFamily="34" charset="0"/>
-                <a:ea typeface="Calibri" pitchFamily="34" charset="-122"/>
-                <a:cs typeface="Calibri" pitchFamily="34" charset="-120"/>
-              </a:rPr>
-              <a:t>Sitting Workspace</a:t>
-            </a:r>
-            <a:endParaRPr lang="en-US" sz="1350" dirty="0"/>
-          </a:p>
-        </p:txBody>
-      </p:sp>
-      <p:sp>
-        <p:nvSpPr>
-          <p:cNvPr id="22" name="Text 19"/>
-          <p:cNvSpPr/>
-          <p:nvPr/>
-        </p:nvSpPr>
-        <p:spPr>
-          <a:xfrm>
-            <a:off x="822960" y="5449824"/>
-            <a:ext cx="7315200" cy="411480"/>
-          </a:xfrm>
-          <a:prstGeom prst="rect">
-            <a:avLst/>
-          </a:prstGeom>
-          <a:noFill/>
-          <a:ln/>
-        </p:spPr>
-        <p:txBody>
-          <a:bodyPr wrap="square" rtlCol="0" anchor="ctr"/>
-          <a:lstStyle/>
-          <a:p>
-            <a:pPr marL="0" indent="0">
-              <a:lnSpc>
-                <a:spcPct val="110000"/>
-              </a:lnSpc>
-              <a:buNone/>
-            </a:pPr>
-            <a:r>
-              <a:rPr lang="en-US" sz="1000" dirty="0">
-                <a:solidFill>
-                  <a:srgbClr val="5C5470"/>
-                </a:solidFill>
-                <a:latin typeface="Calibri" pitchFamily="34" charset="0"/>
-                <a:ea typeface="Calibri" pitchFamily="34" charset="-122"/>
-                <a:cs typeface="Calibri" pitchFamily="34" charset="-120"/>
-              </a:rPr>
-              <a:t>Project-board view of Commission sittings; kanban-by-stage and one-click approval still to come (P3–P4).</a:t>
-            </a:r>
-            <a:endParaRPr lang="en-US" sz="1000" dirty="0"/>
-          </a:p>
-        </p:txBody>
-      </p:sp>
-      <p:sp>
-        <p:nvSpPr>
-          <p:cNvPr id="23" name="Shape 20"/>
-          <p:cNvSpPr/>
-          <p:nvPr/>
-        </p:nvSpPr>
-        <p:spPr>
-          <a:xfrm>
-            <a:off x="8366760" y="5239512"/>
-            <a:ext cx="2468880" cy="384048"/>
-          </a:xfrm>
-          <a:prstGeom prst="roundRect">
-            <a:avLst>
-              <a:gd name="adj" fmla="val 50000"/>
-            </a:avLst>
-          </a:prstGeom>
-          <a:solidFill>
-            <a:srgbClr val="E4F4EC"/>
-          </a:solidFill>
-          <a:ln/>
-        </p:spPr>
-      </p:sp>
-      <p:sp>
-        <p:nvSpPr>
-          <p:cNvPr id="24" name="Text 21"/>
-          <p:cNvSpPr/>
-          <p:nvPr/>
-        </p:nvSpPr>
-        <p:spPr>
-          <a:xfrm>
-            <a:off x="8366760" y="5239512"/>
-            <a:ext cx="2468880" cy="384048"/>
-          </a:xfrm>
-          <a:prstGeom prst="rect">
-            <a:avLst/>
-          </a:prstGeom>
-          <a:noFill/>
-          <a:ln/>
-        </p:spPr>
-        <p:txBody>
-          <a:bodyPr wrap="square" rtlCol="0" anchor="ctr"/>
-          <a:lstStyle/>
-          <a:p>
-            <a:pPr marL="0" indent="0" algn="ctr">
-              <a:buNone/>
-            </a:pPr>
-            <a:r>
-              <a:rPr lang="en-US" sz="1000" b="1" dirty="0">
-                <a:solidFill>
-                  <a:srgbClr val="1E7A4C"/>
-                </a:solidFill>
-                <a:latin typeface="Calibri" pitchFamily="34" charset="0"/>
-                <a:ea typeface="Calibri" pitchFamily="34" charset="-122"/>
-                <a:cs typeface="Calibri" pitchFamily="34" charset="-120"/>
-              </a:rPr>
-              <a:t>Built (P1–P2)</a:t>
-            </a:r>
-            <a:endParaRPr lang="en-US" sz="1000" dirty="0"/>
-          </a:p>
-        </p:txBody>
-      </p:sp>
-      <p:sp>
-        <p:nvSpPr>
-          <p:cNvPr id="25" name="Text 22"/>
+              <a:rPr lang="en-US" sz="1200" b="1" dirty="0">
+                <a:solidFill>
+                  <a:srgbClr val="D9A441"/>
+                </a:solidFill>
+                <a:latin typeface="Calibri" pitchFamily="34" charset="0"/>
+                <a:ea typeface="Calibri" pitchFamily="34" charset="-122"/>
+                <a:cs typeface="Calibri" pitchFamily="34" charset="-120"/>
+              </a:rPr>
+              <a:t>→  </a:t>
+            </a:r>
+            <a:r>
+              <a:rPr lang="en-US" sz="1200" dirty="0">
+                <a:solidFill>
+                  <a:srgbClr val="FFFFFF"/>
+                </a:solidFill>
+                <a:latin typeface="Calibri" pitchFamily="34" charset="0"/>
+                <a:ea typeface="Calibri" pitchFamily="34" charset="-122"/>
+                <a:cs typeface="Calibri" pitchFamily="34" charset="-120"/>
+              </a:rPr>
+              <a:t>Committee sign-off on go-live readiness criteria</a:t>
+            </a:r>
+            <a:endParaRPr lang="en-US" sz="1200" dirty="0"/>
+          </a:p>
+        </p:txBody>
+      </p:sp>
+      <p:sp>
+        <p:nvSpPr>
+          <p:cNvPr id="18" name="Text 15"/>
           <p:cNvSpPr/>
           <p:nvPr/>
         </p:nvSpPr>
@@ -10835,7 +11501,7 @@
       </p:sp>
       <p:sp>
         <p:nvSpPr>
-          <p:cNvPr id="26" name="Text 23"/>
+          <p:cNvPr id="19" name="Text 16"/>
           <p:cNvSpPr/>
           <p:nvPr/>
         </p:nvSpPr>
@@ -10880,7 +11546,7 @@
 </p:sld>
 </file>
 
-<file path=ppt/slides/slide18.xml><?xml version="1.0" encoding="utf-8"?>
+<file path=ppt/slides/slide19.xml><?xml version="1.0" encoding="utf-8"?>
 <p:sld xmlns:a="http://schemas.openxmlformats.org/drawingml/2006/main" xmlns:r="http://schemas.openxmlformats.org/officeDocument/2006/relationships" xmlns:p="http://schemas.openxmlformats.org/presentationml/2006/main">
   <p:cSld name="Slide 18">
     <p:spTree>
@@ -10921,35 +11587,9 @@
           </a:prstGeom>
         </p:spPr>
       </p:pic>
-      <p:pic>
-        <p:nvPicPr>
-          <p:cNvPr id="3" name="Image 1" descr="C:\Users\Herman Tevilili\AppData\Local\Temp\claude\C--Users-Herman-Tevilili-Documents-GitHub-commissionDecisionApp-v1-0\2d2d3a12-ae9e-4f4b-990a-3e1ebe47ec28\scratchpad\scdms_deck\assets\rings.png"/>
-          <p:cNvPicPr>
-            <a:picLocks noChangeAspect="1"/>
-          </p:cNvPicPr>
-          <p:nvPr/>
-        </p:nvPicPr>
-        <p:blipFill>
-          <a:blip r:embed="rId4">
-            <a:alphaModFix amt="55000"/>
-          </a:blip>
-          <a:stretch>
-            <a:fillRect/>
-          </a:stretch>
-        </p:blipFill>
-        <p:spPr>
-          <a:xfrm>
-            <a:off x="10271455" y="4937760"/>
-            <a:ext cx="2926080" cy="2926080"/>
-          </a:xfrm>
-          <a:prstGeom prst="rect">
-            <a:avLst/>
-          </a:prstGeom>
-        </p:spPr>
-      </p:pic>
-      <p:sp>
-        <p:nvSpPr>
-          <p:cNvPr id="4" name="Text 0"/>
+      <p:sp>
+        <p:nvSpPr>
+          <p:cNvPr id="3" name="Text 0"/>
           <p:cNvSpPr/>
           <p:nvPr/>
         </p:nvSpPr>
@@ -10988,7 +11628,7 @@
       </p:sp>
       <p:sp>
         <p:nvSpPr>
-          <p:cNvPr id="5" name="Text 1"/>
+          <p:cNvPr id="4" name="Text 1"/>
           <p:cNvSpPr/>
           <p:nvPr/>
         </p:nvSpPr>
@@ -11019,7 +11659,7 @@
                 <a:ea typeface="Cambria" pitchFamily="34" charset="-122"/>
                 <a:cs typeface="Cambria" pitchFamily="34" charset="-120"/>
               </a:rPr>
-              <a:t>Proposed path to a live pilot</a:t>
+              <a:t>Near-term roadmap</a:t>
             </a:r>
             <a:endParaRPr lang="en-US" sz="2900" dirty="0"/>
           </a:p>
@@ -11027,922 +11667,22 @@
       </p:sp>
       <p:sp>
         <p:nvSpPr>
-          <p:cNvPr id="6" name="Shape 2"/>
-          <p:cNvSpPr/>
-          <p:nvPr/>
-        </p:nvSpPr>
-        <p:spPr>
-          <a:xfrm>
-            <a:off x="1005840" y="3246120"/>
-            <a:ext cx="10149840" cy="0"/>
-          </a:xfrm>
-          <a:prstGeom prst="line">
-            <a:avLst/>
-          </a:prstGeom>
-          <a:noFill/>
-          <a:ln w="38100">
-            <a:solidFill>
-              <a:srgbClr val="6C5C9A"/>
-            </a:solidFill>
-            <a:prstDash val="solid"/>
-          </a:ln>
-        </p:spPr>
-      </p:sp>
-      <p:sp>
-        <p:nvSpPr>
-          <p:cNvPr id="7" name="Shape 3"/>
-          <p:cNvSpPr/>
-          <p:nvPr/>
-        </p:nvSpPr>
-        <p:spPr>
-          <a:xfrm>
-            <a:off x="804672" y="3044952"/>
-            <a:ext cx="402336" cy="402336"/>
-          </a:xfrm>
-          <a:prstGeom prst="ellipse">
-            <a:avLst/>
-          </a:prstGeom>
-          <a:solidFill>
-            <a:srgbClr val="D9A441"/>
-          </a:solidFill>
-          <a:ln w="38100">
-            <a:solidFill>
-              <a:srgbClr val="1E0E42"/>
-            </a:solidFill>
-            <a:prstDash val="solid"/>
-          </a:ln>
-        </p:spPr>
-      </p:sp>
-      <p:sp>
-        <p:nvSpPr>
-          <p:cNvPr id="8" name="Text 4"/>
-          <p:cNvSpPr/>
-          <p:nvPr/>
-        </p:nvSpPr>
-        <p:spPr>
-          <a:xfrm>
-            <a:off x="804672" y="3044952"/>
-            <a:ext cx="402336" cy="402336"/>
-          </a:xfrm>
-          <a:prstGeom prst="rect">
-            <a:avLst/>
-          </a:prstGeom>
-          <a:noFill/>
-          <a:ln/>
-        </p:spPr>
-        <p:txBody>
-          <a:bodyPr wrap="square" rtlCol="0" anchor="ctr"/>
-          <a:lstStyle/>
-          <a:p>
-            <a:pPr marL="0" indent="0" algn="ctr">
-              <a:buNone/>
-            </a:pPr>
-            <a:r>
-              <a:rPr lang="en-US" sz="1200" b="1" dirty="0">
-                <a:solidFill>
-                  <a:srgbClr val="2C0F5E"/>
-                </a:solidFill>
-                <a:latin typeface="Calibri" pitchFamily="34" charset="0"/>
-                <a:ea typeface="Calibri" pitchFamily="34" charset="-122"/>
-                <a:cs typeface="Calibri" pitchFamily="34" charset="-120"/>
-              </a:rPr>
-              <a:t>1</a:t>
-            </a:r>
-            <a:endParaRPr lang="en-US" sz="1200" dirty="0"/>
-          </a:p>
-        </p:txBody>
-      </p:sp>
-      <p:sp>
-        <p:nvSpPr>
-          <p:cNvPr id="9" name="Text 5"/>
-          <p:cNvSpPr/>
-          <p:nvPr/>
-        </p:nvSpPr>
-        <p:spPr>
-          <a:xfrm>
-            <a:off x="548640" y="1828800"/>
-            <a:ext cx="2468880" cy="365760"/>
-          </a:xfrm>
-          <a:prstGeom prst="rect">
-            <a:avLst/>
-          </a:prstGeom>
-          <a:noFill/>
-          <a:ln/>
-        </p:spPr>
-        <p:txBody>
-          <a:bodyPr wrap="square" rtlCol="0" anchor="ctr"/>
-          <a:lstStyle/>
-          <a:p>
-            <a:pPr marL="0" indent="0" algn="ctr">
-              <a:buNone/>
-            </a:pPr>
-            <a:r>
-              <a:rPr lang="en-US" sz="1350" b="1" dirty="0">
-                <a:solidFill>
-                  <a:srgbClr val="FFFFFF"/>
-                </a:solidFill>
-                <a:latin typeface="Calibri" pitchFamily="34" charset="0"/>
-                <a:ea typeface="Calibri" pitchFamily="34" charset="-122"/>
-                <a:cs typeface="Calibri" pitchFamily="34" charset="-120"/>
-              </a:rPr>
-              <a:t>Committee sign-off</a:t>
-            </a:r>
-            <a:endParaRPr lang="en-US" sz="1350" dirty="0"/>
-          </a:p>
-        </p:txBody>
-      </p:sp>
-      <p:sp>
-        <p:nvSpPr>
-          <p:cNvPr id="10" name="Text 6"/>
-          <p:cNvSpPr/>
-          <p:nvPr/>
-        </p:nvSpPr>
-        <p:spPr>
-          <a:xfrm>
-            <a:off x="548640" y="2194560"/>
-            <a:ext cx="2468880" cy="822960"/>
-          </a:xfrm>
-          <a:prstGeom prst="rect">
-            <a:avLst/>
-          </a:prstGeom>
-          <a:noFill/>
-          <a:ln/>
-        </p:spPr>
-        <p:txBody>
-          <a:bodyPr wrap="square" rtlCol="0" anchor="ctr"/>
-          <a:lstStyle/>
-          <a:p>
-            <a:pPr marL="0" indent="0" algn="ctr">
-              <a:lnSpc>
-                <a:spcPct val="120000"/>
-              </a:lnSpc>
-              <a:buNone/>
-            </a:pPr>
-            <a:r>
-              <a:rPr lang="en-US" sz="1050" dirty="0">
-                <a:solidFill>
-                  <a:srgbClr val="CBBFE6"/>
-                </a:solidFill>
-                <a:latin typeface="Calibri" pitchFamily="34" charset="0"/>
-                <a:ea typeface="Calibri" pitchFamily="34" charset="-122"/>
-                <a:cs typeface="Calibri" pitchFamily="34" charset="-120"/>
-              </a:rPr>
-              <a:t>Confirm pilot scope, ministries, and success criteria</a:t>
-            </a:r>
-            <a:endParaRPr lang="en-US" sz="1050" dirty="0"/>
-          </a:p>
-        </p:txBody>
-      </p:sp>
-      <p:sp>
-        <p:nvSpPr>
-          <p:cNvPr id="11" name="Shape 7"/>
-          <p:cNvSpPr/>
-          <p:nvPr/>
-        </p:nvSpPr>
-        <p:spPr>
-          <a:xfrm>
-            <a:off x="1005840" y="3017520"/>
-            <a:ext cx="0" cy="27432"/>
-          </a:xfrm>
-          <a:prstGeom prst="line">
-            <a:avLst/>
-          </a:prstGeom>
-          <a:noFill/>
-          <a:ln w="19050">
-            <a:solidFill>
-              <a:srgbClr val="6C5C9A"/>
-            </a:solidFill>
-            <a:prstDash val="dash"/>
-          </a:ln>
-        </p:spPr>
-      </p:sp>
-      <p:sp>
-        <p:nvSpPr>
-          <p:cNvPr id="12" name="Shape 8"/>
-          <p:cNvSpPr/>
-          <p:nvPr/>
-        </p:nvSpPr>
-        <p:spPr>
-          <a:xfrm>
-            <a:off x="4187952" y="3044952"/>
-            <a:ext cx="402336" cy="402336"/>
-          </a:xfrm>
-          <a:prstGeom prst="ellipse">
-            <a:avLst/>
-          </a:prstGeom>
-          <a:solidFill>
-            <a:srgbClr val="D9A441"/>
-          </a:solidFill>
-          <a:ln w="38100">
-            <a:solidFill>
-              <a:srgbClr val="1E0E42"/>
-            </a:solidFill>
-            <a:prstDash val="solid"/>
-          </a:ln>
-        </p:spPr>
-      </p:sp>
-      <p:sp>
-        <p:nvSpPr>
-          <p:cNvPr id="13" name="Text 9"/>
-          <p:cNvSpPr/>
-          <p:nvPr/>
-        </p:nvSpPr>
-        <p:spPr>
-          <a:xfrm>
-            <a:off x="4187952" y="3044952"/>
-            <a:ext cx="402336" cy="402336"/>
-          </a:xfrm>
-          <a:prstGeom prst="rect">
-            <a:avLst/>
-          </a:prstGeom>
-          <a:noFill/>
-          <a:ln/>
-        </p:spPr>
-        <p:txBody>
-          <a:bodyPr wrap="square" rtlCol="0" anchor="ctr"/>
-          <a:lstStyle/>
-          <a:p>
-            <a:pPr marL="0" indent="0" algn="ctr">
-              <a:buNone/>
-            </a:pPr>
-            <a:r>
-              <a:rPr lang="en-US" sz="1200" b="1" dirty="0">
-                <a:solidFill>
-                  <a:srgbClr val="2C0F5E"/>
-                </a:solidFill>
-                <a:latin typeface="Calibri" pitchFamily="34" charset="0"/>
-                <a:ea typeface="Calibri" pitchFamily="34" charset="-122"/>
-                <a:cs typeface="Calibri" pitchFamily="34" charset="-120"/>
-              </a:rPr>
-              <a:t>2</a:t>
-            </a:r>
-            <a:endParaRPr lang="en-US" sz="1200" dirty="0"/>
-          </a:p>
-        </p:txBody>
-      </p:sp>
-      <p:sp>
-        <p:nvSpPr>
-          <p:cNvPr id="14" name="Text 10"/>
-          <p:cNvSpPr/>
-          <p:nvPr/>
-        </p:nvSpPr>
-        <p:spPr>
-          <a:xfrm>
-            <a:off x="3154680" y="3703320"/>
-            <a:ext cx="2468880" cy="365760"/>
-          </a:xfrm>
-          <a:prstGeom prst="rect">
-            <a:avLst/>
-          </a:prstGeom>
-          <a:noFill/>
-          <a:ln/>
-        </p:spPr>
-        <p:txBody>
-          <a:bodyPr wrap="square" rtlCol="0" anchor="ctr"/>
-          <a:lstStyle/>
-          <a:p>
-            <a:pPr marL="0" indent="0" algn="ctr">
-              <a:buNone/>
-            </a:pPr>
-            <a:r>
-              <a:rPr lang="en-US" sz="1350" b="1" dirty="0">
-                <a:solidFill>
-                  <a:srgbClr val="FFFFFF"/>
-                </a:solidFill>
-                <a:latin typeface="Calibri" pitchFamily="34" charset="0"/>
-                <a:ea typeface="Calibri" pitchFamily="34" charset="-122"/>
-                <a:cs typeface="Calibri" pitchFamily="34" charset="-120"/>
-              </a:rPr>
-              <a:t>Data &amp; user setup</a:t>
-            </a:r>
-            <a:endParaRPr lang="en-US" sz="1350" dirty="0"/>
-          </a:p>
-        </p:txBody>
-      </p:sp>
-      <p:sp>
-        <p:nvSpPr>
-          <p:cNvPr id="15" name="Text 11"/>
-          <p:cNvSpPr/>
-          <p:nvPr/>
-        </p:nvSpPr>
-        <p:spPr>
-          <a:xfrm>
-            <a:off x="3154680" y="4069080"/>
-            <a:ext cx="2468880" cy="822960"/>
-          </a:xfrm>
-          <a:prstGeom prst="rect">
-            <a:avLst/>
-          </a:prstGeom>
-          <a:noFill/>
-          <a:ln/>
-        </p:spPr>
-        <p:txBody>
-          <a:bodyPr wrap="square" rtlCol="0" anchor="ctr"/>
-          <a:lstStyle/>
-          <a:p>
-            <a:pPr marL="0" indent="0" algn="ctr">
-              <a:lnSpc>
-                <a:spcPct val="120000"/>
-              </a:lnSpc>
-              <a:buNone/>
-            </a:pPr>
-            <a:r>
-              <a:rPr lang="en-US" sz="1050" dirty="0">
-                <a:solidFill>
-                  <a:srgbClr val="CBBFE6"/>
-                </a:solidFill>
-                <a:latin typeface="Calibri" pitchFamily="34" charset="0"/>
-                <a:ea typeface="Calibri" pitchFamily="34" charset="-122"/>
-                <a:cs typeface="Calibri" pitchFamily="34" charset="-120"/>
-              </a:rPr>
-              <a:t>Load real reference data; create verified accounts</a:t>
-            </a:r>
-            <a:endParaRPr lang="en-US" sz="1050" dirty="0"/>
-          </a:p>
-        </p:txBody>
-      </p:sp>
-      <p:sp>
-        <p:nvSpPr>
-          <p:cNvPr id="16" name="Shape 12"/>
-          <p:cNvSpPr/>
-          <p:nvPr/>
-        </p:nvSpPr>
-        <p:spPr>
-          <a:xfrm>
-            <a:off x="4389120" y="3447288"/>
-            <a:ext cx="0" cy="256032"/>
-          </a:xfrm>
-          <a:prstGeom prst="line">
-            <a:avLst/>
-          </a:prstGeom>
-          <a:noFill/>
-          <a:ln w="19050">
-            <a:solidFill>
-              <a:srgbClr val="6C5C9A"/>
-            </a:solidFill>
-            <a:prstDash val="dash"/>
-          </a:ln>
-        </p:spPr>
-      </p:sp>
-      <p:sp>
-        <p:nvSpPr>
-          <p:cNvPr id="17" name="Shape 13"/>
-          <p:cNvSpPr/>
-          <p:nvPr/>
-        </p:nvSpPr>
-        <p:spPr>
-          <a:xfrm>
-            <a:off x="7571232" y="3044952"/>
-            <a:ext cx="402336" cy="402336"/>
-          </a:xfrm>
-          <a:prstGeom prst="ellipse">
-            <a:avLst/>
-          </a:prstGeom>
-          <a:solidFill>
-            <a:srgbClr val="D9A441"/>
-          </a:solidFill>
-          <a:ln w="38100">
-            <a:solidFill>
-              <a:srgbClr val="1E0E42"/>
-            </a:solidFill>
-            <a:prstDash val="solid"/>
-          </a:ln>
-        </p:spPr>
-      </p:sp>
-      <p:sp>
-        <p:nvSpPr>
-          <p:cNvPr id="18" name="Text 14"/>
-          <p:cNvSpPr/>
-          <p:nvPr/>
-        </p:nvSpPr>
-        <p:spPr>
-          <a:xfrm>
-            <a:off x="7571232" y="3044952"/>
-            <a:ext cx="402336" cy="402336"/>
-          </a:xfrm>
-          <a:prstGeom prst="rect">
-            <a:avLst/>
-          </a:prstGeom>
-          <a:noFill/>
-          <a:ln/>
-        </p:spPr>
-        <p:txBody>
-          <a:bodyPr wrap="square" rtlCol="0" anchor="ctr"/>
-          <a:lstStyle/>
-          <a:p>
-            <a:pPr marL="0" indent="0" algn="ctr">
-              <a:buNone/>
-            </a:pPr>
-            <a:r>
-              <a:rPr lang="en-US" sz="1200" b="1" dirty="0">
-                <a:solidFill>
-                  <a:srgbClr val="2C0F5E"/>
-                </a:solidFill>
-                <a:latin typeface="Calibri" pitchFamily="34" charset="0"/>
-                <a:ea typeface="Calibri" pitchFamily="34" charset="-122"/>
-                <a:cs typeface="Calibri" pitchFamily="34" charset="-120"/>
-              </a:rPr>
-              <a:t>3</a:t>
-            </a:r>
-            <a:endParaRPr lang="en-US" sz="1200" dirty="0"/>
-          </a:p>
-        </p:txBody>
-      </p:sp>
-      <p:sp>
-        <p:nvSpPr>
-          <p:cNvPr id="19" name="Text 15"/>
-          <p:cNvSpPr/>
-          <p:nvPr/>
-        </p:nvSpPr>
-        <p:spPr>
-          <a:xfrm>
-            <a:off x="6537960" y="1828800"/>
-            <a:ext cx="2468880" cy="365760"/>
-          </a:xfrm>
-          <a:prstGeom prst="rect">
-            <a:avLst/>
-          </a:prstGeom>
-          <a:noFill/>
-          <a:ln/>
-        </p:spPr>
-        <p:txBody>
-          <a:bodyPr wrap="square" rtlCol="0" anchor="ctr"/>
-          <a:lstStyle/>
-          <a:p>
-            <a:pPr marL="0" indent="0" algn="ctr">
-              <a:buNone/>
-            </a:pPr>
-            <a:r>
-              <a:rPr lang="en-US" sz="1350" b="1" dirty="0">
-                <a:solidFill>
-                  <a:srgbClr val="FFFFFF"/>
-                </a:solidFill>
-                <a:latin typeface="Calibri" pitchFamily="34" charset="0"/>
-                <a:ea typeface="Calibri" pitchFamily="34" charset="-122"/>
-                <a:cs typeface="Calibri" pitchFamily="34" charset="-120"/>
-              </a:rPr>
-              <a:t>Acceptance testing</a:t>
-            </a:r>
-            <a:endParaRPr lang="en-US" sz="1350" dirty="0"/>
-          </a:p>
-        </p:txBody>
-      </p:sp>
-      <p:sp>
-        <p:nvSpPr>
-          <p:cNvPr id="20" name="Text 16"/>
-          <p:cNvSpPr/>
-          <p:nvPr/>
-        </p:nvSpPr>
-        <p:spPr>
-          <a:xfrm>
-            <a:off x="6537960" y="2194560"/>
-            <a:ext cx="2468880" cy="822960"/>
-          </a:xfrm>
-          <a:prstGeom prst="rect">
-            <a:avLst/>
-          </a:prstGeom>
-          <a:noFill/>
-          <a:ln/>
-        </p:spPr>
-        <p:txBody>
-          <a:bodyPr wrap="square" rtlCol="0" anchor="ctr"/>
-          <a:lstStyle/>
-          <a:p>
-            <a:pPr marL="0" indent="0" algn="ctr">
-              <a:lnSpc>
-                <a:spcPct val="120000"/>
-              </a:lnSpc>
-              <a:buNone/>
-            </a:pPr>
-            <a:r>
-              <a:rPr lang="en-US" sz="1050" dirty="0">
-                <a:solidFill>
-                  <a:srgbClr val="CBBFE6"/>
-                </a:solidFill>
-                <a:latin typeface="Calibri" pitchFamily="34" charset="0"/>
-                <a:ea typeface="Calibri" pitchFamily="34" charset="-122"/>
-                <a:cs typeface="Calibri" pitchFamily="34" charset="-120"/>
-              </a:rPr>
-              <a:t>OPSC and ministry staff test with real workflows</a:t>
-            </a:r>
-            <a:endParaRPr lang="en-US" sz="1050" dirty="0"/>
-          </a:p>
-        </p:txBody>
-      </p:sp>
-      <p:sp>
-        <p:nvSpPr>
-          <p:cNvPr id="21" name="Shape 17"/>
-          <p:cNvSpPr/>
-          <p:nvPr/>
-        </p:nvSpPr>
-        <p:spPr>
-          <a:xfrm>
-            <a:off x="7772400" y="3017520"/>
-            <a:ext cx="0" cy="27432"/>
-          </a:xfrm>
-          <a:prstGeom prst="line">
-            <a:avLst/>
-          </a:prstGeom>
-          <a:noFill/>
-          <a:ln w="19050">
-            <a:solidFill>
-              <a:srgbClr val="6C5C9A"/>
-            </a:solidFill>
-            <a:prstDash val="dash"/>
-          </a:ln>
-        </p:spPr>
-      </p:sp>
-      <p:sp>
-        <p:nvSpPr>
-          <p:cNvPr id="22" name="Shape 18"/>
-          <p:cNvSpPr/>
-          <p:nvPr/>
-        </p:nvSpPr>
-        <p:spPr>
-          <a:xfrm>
-            <a:off x="10954512" y="3044952"/>
-            <a:ext cx="402336" cy="402336"/>
-          </a:xfrm>
-          <a:prstGeom prst="ellipse">
-            <a:avLst/>
-          </a:prstGeom>
-          <a:solidFill>
-            <a:srgbClr val="D9A441"/>
-          </a:solidFill>
-          <a:ln w="38100">
-            <a:solidFill>
-              <a:srgbClr val="1E0E42"/>
-            </a:solidFill>
-            <a:prstDash val="solid"/>
-          </a:ln>
-        </p:spPr>
-      </p:sp>
-      <p:sp>
-        <p:nvSpPr>
-          <p:cNvPr id="23" name="Text 19"/>
-          <p:cNvSpPr/>
-          <p:nvPr/>
-        </p:nvSpPr>
-        <p:spPr>
-          <a:xfrm>
-            <a:off x="10954512" y="3044952"/>
-            <a:ext cx="402336" cy="402336"/>
-          </a:xfrm>
-          <a:prstGeom prst="rect">
-            <a:avLst/>
-          </a:prstGeom>
-          <a:noFill/>
-          <a:ln/>
-        </p:spPr>
-        <p:txBody>
-          <a:bodyPr wrap="square" rtlCol="0" anchor="ctr"/>
-          <a:lstStyle/>
-          <a:p>
-            <a:pPr marL="0" indent="0" algn="ctr">
-              <a:buNone/>
-            </a:pPr>
-            <a:r>
-              <a:rPr lang="en-US" sz="1200" b="1" dirty="0">
-                <a:solidFill>
-                  <a:srgbClr val="2C0F5E"/>
-                </a:solidFill>
-                <a:latin typeface="Calibri" pitchFamily="34" charset="0"/>
-                <a:ea typeface="Calibri" pitchFamily="34" charset="-122"/>
-                <a:cs typeface="Calibri" pitchFamily="34" charset="-120"/>
-              </a:rPr>
-              <a:t>4</a:t>
-            </a:r>
-            <a:endParaRPr lang="en-US" sz="1200" dirty="0"/>
-          </a:p>
-        </p:txBody>
-      </p:sp>
-      <p:sp>
-        <p:nvSpPr>
-          <p:cNvPr id="24" name="Text 20"/>
-          <p:cNvSpPr/>
-          <p:nvPr/>
-        </p:nvSpPr>
-        <p:spPr>
-          <a:xfrm>
-            <a:off x="9174175" y="3703320"/>
-            <a:ext cx="2468880" cy="365760"/>
-          </a:xfrm>
-          <a:prstGeom prst="rect">
-            <a:avLst/>
-          </a:prstGeom>
-          <a:noFill/>
-          <a:ln/>
-        </p:spPr>
-        <p:txBody>
-          <a:bodyPr wrap="square" rtlCol="0" anchor="ctr"/>
-          <a:lstStyle/>
-          <a:p>
-            <a:pPr marL="0" indent="0" algn="ctr">
-              <a:buNone/>
-            </a:pPr>
-            <a:r>
-              <a:rPr lang="en-US" sz="1350" b="1" dirty="0">
-                <a:solidFill>
-                  <a:srgbClr val="FFFFFF"/>
-                </a:solidFill>
-                <a:latin typeface="Calibri" pitchFamily="34" charset="0"/>
-                <a:ea typeface="Calibri" pitchFamily="34" charset="-122"/>
-                <a:cs typeface="Calibri" pitchFamily="34" charset="-120"/>
-              </a:rPr>
-              <a:t>Training &amp; go-live</a:t>
-            </a:r>
-            <a:endParaRPr lang="en-US" sz="1350" dirty="0"/>
-          </a:p>
-        </p:txBody>
-      </p:sp>
-      <p:sp>
-        <p:nvSpPr>
-          <p:cNvPr id="25" name="Text 21"/>
-          <p:cNvSpPr/>
-          <p:nvPr/>
-        </p:nvSpPr>
-        <p:spPr>
-          <a:xfrm>
-            <a:off x="9174175" y="4069080"/>
-            <a:ext cx="2468880" cy="822960"/>
-          </a:xfrm>
-          <a:prstGeom prst="rect">
-            <a:avLst/>
-          </a:prstGeom>
-          <a:noFill/>
-          <a:ln/>
-        </p:spPr>
-        <p:txBody>
-          <a:bodyPr wrap="square" rtlCol="0" anchor="ctr"/>
-          <a:lstStyle/>
-          <a:p>
-            <a:pPr marL="0" indent="0" algn="ctr">
-              <a:lnSpc>
-                <a:spcPct val="120000"/>
-              </a:lnSpc>
-              <a:buNone/>
-            </a:pPr>
-            <a:r>
-              <a:rPr lang="en-US" sz="1050" dirty="0">
-                <a:solidFill>
-                  <a:srgbClr val="CBBFE6"/>
-                </a:solidFill>
-                <a:latin typeface="Calibri" pitchFamily="34" charset="0"/>
-                <a:ea typeface="Calibri" pitchFamily="34" charset="-122"/>
-                <a:cs typeface="Calibri" pitchFamily="34" charset="-120"/>
-              </a:rPr>
-              <a:t>Roll out to pilot ministries with support in place</a:t>
-            </a:r>
-            <a:endParaRPr lang="en-US" sz="1050" dirty="0"/>
-          </a:p>
-        </p:txBody>
-      </p:sp>
-      <p:sp>
-        <p:nvSpPr>
-          <p:cNvPr id="26" name="Shape 22"/>
-          <p:cNvSpPr/>
-          <p:nvPr/>
-        </p:nvSpPr>
-        <p:spPr>
-          <a:xfrm>
-            <a:off x="11155680" y="3447288"/>
-            <a:ext cx="0" cy="256032"/>
-          </a:xfrm>
-          <a:prstGeom prst="line">
-            <a:avLst/>
-          </a:prstGeom>
-          <a:noFill/>
-          <a:ln w="19050">
-            <a:solidFill>
-              <a:srgbClr val="6C5C9A"/>
-            </a:solidFill>
-            <a:prstDash val="dash"/>
-          </a:ln>
-        </p:spPr>
-      </p:sp>
-      <p:sp>
-        <p:nvSpPr>
-          <p:cNvPr id="27" name="Text 23"/>
-          <p:cNvSpPr/>
-          <p:nvPr/>
-        </p:nvSpPr>
-        <p:spPr>
-          <a:xfrm>
-            <a:off x="457200" y="6473952"/>
-            <a:ext cx="7315200" cy="274320"/>
-          </a:xfrm>
-          <a:prstGeom prst="rect">
-            <a:avLst/>
-          </a:prstGeom>
-          <a:noFill/>
-          <a:ln/>
-        </p:spPr>
-        <p:txBody>
-          <a:bodyPr wrap="square" rtlCol="0" anchor="ctr"/>
-          <a:lstStyle/>
-          <a:p>
-            <a:pPr marL="0" indent="0">
-              <a:buNone/>
-            </a:pPr>
-            <a:r>
-              <a:rPr lang="en-US" sz="900" i="1" dirty="0">
-                <a:solidFill>
-                  <a:srgbClr val="CBBFE6"/>
-                </a:solidFill>
-                <a:latin typeface="Calibri" pitchFamily="34" charset="0"/>
-                <a:ea typeface="Calibri" pitchFamily="34" charset="-122"/>
-                <a:cs typeface="Calibri" pitchFamily="34" charset="-120"/>
-              </a:rPr>
-              <a:t>SCDMS - Submission &amp; Commission Decision Management System</a:t>
-            </a:r>
-            <a:endParaRPr lang="en-US" sz="900" dirty="0"/>
-          </a:p>
-        </p:txBody>
-      </p:sp>
-      <p:sp>
-        <p:nvSpPr>
-          <p:cNvPr id="28" name="Text 24"/>
-          <p:cNvSpPr/>
-          <p:nvPr/>
-        </p:nvSpPr>
-        <p:spPr>
-          <a:xfrm>
-            <a:off x="11277295" y="6473952"/>
-            <a:ext cx="457200" cy="274320"/>
-          </a:xfrm>
-          <a:prstGeom prst="rect">
-            <a:avLst/>
-          </a:prstGeom>
-          <a:noFill/>
-          <a:ln/>
-        </p:spPr>
-        <p:txBody>
-          <a:bodyPr wrap="square" rtlCol="0" anchor="ctr"/>
-          <a:lstStyle/>
-          <a:p>
-            <a:pPr marL="0" indent="0" algn="r">
-              <a:buNone/>
-            </a:pPr>
-            <a:r>
-              <a:rPr lang="en-US" sz="900" dirty="0">
-                <a:solidFill>
-                  <a:srgbClr val="CBBFE6"/>
-                </a:solidFill>
-                <a:latin typeface="Calibri" pitchFamily="34" charset="0"/>
-                <a:ea typeface="Calibri" pitchFamily="34" charset="-122"/>
-                <a:cs typeface="Calibri" pitchFamily="34" charset="-120"/>
-              </a:rPr>
-              <a:t>18</a:t>
-            </a:r>
-            <a:endParaRPr lang="en-US" sz="900" dirty="0"/>
-          </a:p>
-        </p:txBody>
-      </p:sp>
-    </p:spTree>
-  </p:cSld>
-  <p:clrMapOvr>
-    <a:masterClrMapping/>
-  </p:clrMapOvr>
-</p:sld>
-</file>
-
-<file path=ppt/slides/slide19.xml><?xml version="1.0" encoding="utf-8"?>
-<p:sld xmlns:a="http://schemas.openxmlformats.org/drawingml/2006/main" xmlns:r="http://schemas.openxmlformats.org/officeDocument/2006/relationships" xmlns:p="http://schemas.openxmlformats.org/presentationml/2006/main">
-  <p:cSld name="Slide 19">
-    <p:spTree>
-      <p:nvGrpSpPr>
-        <p:cNvPr id="1" name=""/>
-        <p:cNvGrpSpPr/>
-        <p:nvPr/>
-      </p:nvGrpSpPr>
-      <p:grpSpPr>
-        <a:xfrm>
-          <a:off x="0" y="0"/>
-          <a:ext cx="0" cy="0"/>
-          <a:chOff x="0" y="0"/>
-          <a:chExt cx="0" cy="0"/>
-        </a:xfrm>
-      </p:grpSpPr>
-      <p:pic>
-        <p:nvPicPr>
-          <p:cNvPr id="2" name="Image 0" descr="C:\Users\Herman Tevilili\AppData\Local\Temp\claude\C--Users-Herman-Tevilili-Documents-GitHub-commissionDecisionApp-v1-0\2d2d3a12-ae9e-4f4b-990a-3e1ebe47ec28\scratchpad\scdms_deck\assets\bg.jpg"/>
-          <p:cNvPicPr>
-            <a:picLocks noChangeAspect="1"/>
-          </p:cNvPicPr>
-          <p:nvPr/>
-        </p:nvPicPr>
-        <p:blipFill>
-          <a:blip r:embed="rId3"/>
-          <a:stretch>
-            <a:fillRect/>
-          </a:stretch>
-        </p:blipFill>
-        <p:spPr>
-          <a:xfrm>
-            <a:off x="0" y="0"/>
-            <a:ext cx="12191695" cy="8127797"/>
-          </a:xfrm>
-          <a:prstGeom prst="rect">
-            <a:avLst/>
-          </a:prstGeom>
-        </p:spPr>
-      </p:pic>
-      <p:sp>
-        <p:nvSpPr>
-          <p:cNvPr id="3" name="Text 0"/>
-          <p:cNvSpPr/>
-          <p:nvPr/>
-        </p:nvSpPr>
-        <p:spPr>
-          <a:xfrm>
-            <a:off x="1691640" y="457200"/>
-            <a:ext cx="9875520" cy="320040"/>
-          </a:xfrm>
-          <a:prstGeom prst="rect">
-            <a:avLst/>
-          </a:prstGeom>
-          <a:noFill/>
-          <a:ln/>
-        </p:spPr>
-        <p:txBody>
-          <a:bodyPr wrap="square" rtlCol="0" anchor="ctr"/>
-          <a:lstStyle/>
-          <a:p>
-            <a:pPr marL="0" indent="0">
-              <a:buNone/>
-            </a:pPr>
-            <a:r>
-              <a:rPr lang="en-US" sz="1200" b="1" kern="0" spc="200" dirty="0">
-                <a:solidFill>
-                  <a:srgbClr val="D9A441"/>
-                </a:solidFill>
-                <a:latin typeface="Calibri" pitchFamily="34" charset="0"/>
-                <a:ea typeface="Calibri" pitchFamily="34" charset="-122"/>
-                <a:cs typeface="Calibri" pitchFamily="34" charset="-120"/>
-              </a:rPr>
-              <a:t>WHAT WE NEED</a:t>
-            </a:r>
-            <a:endParaRPr lang="en-US" sz="1200" dirty="0"/>
-          </a:p>
-        </p:txBody>
-      </p:sp>
-      <p:sp>
-        <p:nvSpPr>
-          <p:cNvPr id="4" name="Text 1"/>
-          <p:cNvSpPr/>
-          <p:nvPr/>
-        </p:nvSpPr>
-        <p:spPr>
-          <a:xfrm>
-            <a:off x="1691640" y="777240"/>
-            <a:ext cx="9951415" cy="822960"/>
-          </a:xfrm>
-          <a:prstGeom prst="rect">
-            <a:avLst/>
-          </a:prstGeom>
-          <a:noFill/>
-          <a:ln/>
-        </p:spPr>
-        <p:txBody>
-          <a:bodyPr wrap="square" rtlCol="0" anchor="ctr"/>
-          <a:lstStyle/>
-          <a:p>
-            <a:pPr marL="0" indent="0">
-              <a:buNone/>
-            </a:pPr>
-            <a:r>
-              <a:rPr lang="en-US" sz="2900" b="1" dirty="0">
-                <a:solidFill>
-                  <a:srgbClr val="FFFFFF"/>
-                </a:solidFill>
-                <a:latin typeface="Cambria" pitchFamily="34" charset="0"/>
-                <a:ea typeface="Cambria" pitchFamily="34" charset="-122"/>
-                <a:cs typeface="Cambria" pitchFamily="34" charset="-120"/>
-              </a:rPr>
-              <a:t>What we're asking of the Committee today</a:t>
-            </a:r>
-            <a:endParaRPr lang="en-US" sz="2900" dirty="0"/>
-          </a:p>
-        </p:txBody>
-      </p:sp>
-      <p:sp>
-        <p:nvSpPr>
           <p:cNvPr id="5" name="Shape 2"/>
           <p:cNvSpPr/>
           <p:nvPr/>
         </p:nvSpPr>
         <p:spPr>
           <a:xfrm>
-            <a:off x="548640" y="1783080"/>
-            <a:ext cx="5257800" cy="1874520"/>
+            <a:off x="548640" y="1737360"/>
+            <a:ext cx="11064240" cy="960120"/>
           </a:xfrm>
           <a:prstGeom prst="roundRect">
             <a:avLst>
-              <a:gd name="adj" fmla="val 4390"/>
+              <a:gd name="adj" fmla="val 8571"/>
             </a:avLst>
           </a:prstGeom>
           <a:solidFill>
-            <a:srgbClr val="FBF3E4"/>
+            <a:srgbClr val="F5F3FB"/>
           </a:solidFill>
           <a:ln/>
           <a:effectLst>
@@ -11956,23 +11696,42 @@
       </p:sp>
       <p:sp>
         <p:nvSpPr>
-          <p:cNvPr id="6" name="Shape 3"/>
-          <p:cNvSpPr/>
-          <p:nvPr/>
-        </p:nvSpPr>
-        <p:spPr>
-          <a:xfrm>
-            <a:off x="800100" y="1988820"/>
-            <a:ext cx="594360" cy="594360"/>
-          </a:xfrm>
-          <a:prstGeom prst="ellipse">
-            <a:avLst/>
-          </a:prstGeom>
-          <a:solidFill>
-            <a:srgbClr val="D9A441"/>
-          </a:solidFill>
-          <a:ln/>
-        </p:spPr>
+          <p:cNvPr id="6" name="Text 3"/>
+          <p:cNvSpPr/>
+          <p:nvPr/>
+        </p:nvSpPr>
+        <p:spPr>
+          <a:xfrm>
+            <a:off x="822960" y="1865376"/>
+            <a:ext cx="3657600" cy="457200"/>
+          </a:xfrm>
+          <a:prstGeom prst="rect">
+            <a:avLst/>
+          </a:prstGeom>
+          <a:noFill/>
+          <a:ln/>
+        </p:spPr>
+        <p:txBody>
+          <a:bodyPr wrap="square" rtlCol="0" anchor="ctr"/>
+          <a:lstStyle/>
+          <a:p>
+            <a:pPr marL="0" indent="0">
+              <a:buNone/>
+            </a:pPr>
+            <a:r>
+              <a:rPr lang="en-US" sz="1350" b="1" dirty="0">
+                <a:solidFill>
+                  <a:srgbClr val="2C0F5E"/>
+                </a:solidFill>
+                <a:latin typeface="Calibri" pitchFamily="34" charset="0"/>
+                <a:ea typeface="Calibri" pitchFamily="34" charset="-122"/>
+                <a:cs typeface="Calibri" pitchFamily="34" charset="-120"/>
+              </a:rPr>
+              <a:t>Workflow Automation</a:t>
+            </a:r>
+            <a:endParaRPr lang="en-US" sz="1350" dirty="0"/>
+          </a:p>
+        </p:txBody>
       </p:sp>
       <p:sp>
         <p:nvSpPr>
@@ -11982,47 +11741,8 @@
         </p:nvSpPr>
         <p:spPr>
           <a:xfrm>
-            <a:off x="800100" y="1988820"/>
-            <a:ext cx="594360" cy="594360"/>
-          </a:xfrm>
-          <a:prstGeom prst="rect">
-            <a:avLst/>
-          </a:prstGeom>
-          <a:noFill/>
-          <a:ln/>
-        </p:spPr>
-        <p:txBody>
-          <a:bodyPr wrap="square" rtlCol="0" anchor="ctr"/>
-          <a:lstStyle/>
-          <a:p>
-            <a:pPr marL="0" indent="0" algn="ctr">
-              <a:buNone/>
-            </a:pPr>
-            <a:r>
-              <a:rPr lang="en-US" sz="1800" b="1" dirty="0">
-                <a:solidFill>
-                  <a:srgbClr val="2C0F5E"/>
-                </a:solidFill>
-                <a:latin typeface="Calibri" pitchFamily="34" charset="0"/>
-                <a:ea typeface="Calibri" pitchFamily="34" charset="-122"/>
-                <a:cs typeface="Calibri" pitchFamily="34" charset="-120"/>
-              </a:rPr>
-              <a:t>1</a:t>
-            </a:r>
-            <a:endParaRPr lang="en-US" sz="1800" dirty="0"/>
-          </a:p>
-        </p:txBody>
-      </p:sp>
-      <p:sp>
-        <p:nvSpPr>
-          <p:cNvPr id="8" name="Text 5"/>
-          <p:cNvSpPr/>
-          <p:nvPr/>
-        </p:nvSpPr>
-        <p:spPr>
-          <a:xfrm>
-            <a:off x="1737360" y="1984248"/>
-            <a:ext cx="3840480" cy="594360"/>
+            <a:off x="822960" y="2240280"/>
+            <a:ext cx="7315200" cy="411480"/>
           </a:xfrm>
           <a:prstGeom prst="rect">
             <a:avLst/>
@@ -12041,49 +11761,7 @@
               <a:buNone/>
             </a:pPr>
             <a:r>
-              <a:rPr lang="en-US" sz="1450" b="1" dirty="0">
-                <a:solidFill>
-                  <a:srgbClr val="2C0F5E"/>
-                </a:solidFill>
-                <a:latin typeface="Calibri" pitchFamily="34" charset="0"/>
-                <a:ea typeface="Calibri" pitchFamily="34" charset="-122"/>
-                <a:cs typeface="Calibri" pitchFamily="34" charset="-120"/>
-              </a:rPr>
-              <a:t>Endorse the pilot approach</a:t>
-            </a:r>
-            <a:endParaRPr lang="en-US" sz="1450" dirty="0"/>
-          </a:p>
-        </p:txBody>
-      </p:sp>
-      <p:sp>
-        <p:nvSpPr>
-          <p:cNvPr id="9" name="Text 6"/>
-          <p:cNvSpPr/>
-          <p:nvPr/>
-        </p:nvSpPr>
-        <p:spPr>
-          <a:xfrm>
-            <a:off x="868680" y="2834640"/>
-            <a:ext cx="4617720" cy="731520"/>
-          </a:xfrm>
-          <a:prstGeom prst="rect">
-            <a:avLst/>
-          </a:prstGeom>
-          <a:noFill/>
-          <a:ln/>
-        </p:spPr>
-        <p:txBody>
-          <a:bodyPr wrap="square" rtlCol="0" anchor="ctr"/>
-          <a:lstStyle/>
-          <a:p>
-            <a:pPr marL="0" indent="0">
-              <a:lnSpc>
-                <a:spcPct val="120000"/>
-              </a:lnSpc>
-              <a:buNone/>
-            </a:pPr>
-            <a:r>
-              <a:rPr lang="en-US" sz="1100" dirty="0">
+              <a:rPr lang="en-US" sz="1000" dirty="0">
                 <a:solidFill>
                   <a:srgbClr val="5C5470"/>
                 </a:solidFill>
@@ -12091,30 +11769,91 @@
                 <a:ea typeface="Calibri" pitchFamily="34" charset="-122"/>
                 <a:cs typeface="Calibri" pitchFamily="34" charset="-120"/>
               </a:rPr>
-              <a:t>Agree to move from internal testing to a defined, scoped pilot phase.</a:t>
-            </a:r>
-            <a:endParaRPr lang="en-US" sz="1100" dirty="0"/>
-          </a:p>
-        </p:txBody>
-      </p:sp>
-      <p:sp>
-        <p:nvSpPr>
-          <p:cNvPr id="10" name="Shape 7"/>
-          <p:cNvSpPr/>
-          <p:nvPr/>
-        </p:nvSpPr>
-        <p:spPr>
-          <a:xfrm>
-            <a:off x="6126480" y="1783080"/>
-            <a:ext cx="5257800" cy="1874520"/>
+              <a:t>No-code trigger → condition → action builder across submissions, cases, meetings, and tasks. Awaiting build approval.</a:t>
+            </a:r>
+            <a:endParaRPr lang="en-US" sz="1000" dirty="0"/>
+          </a:p>
+        </p:txBody>
+      </p:sp>
+      <p:sp>
+        <p:nvSpPr>
+          <p:cNvPr id="8" name="Shape 5"/>
+          <p:cNvSpPr/>
+          <p:nvPr/>
+        </p:nvSpPr>
+        <p:spPr>
+          <a:xfrm>
+            <a:off x="8366760" y="2029968"/>
+            <a:ext cx="2468880" cy="384048"/>
           </a:xfrm>
           <a:prstGeom prst="roundRect">
             <a:avLst>
-              <a:gd name="adj" fmla="val 4390"/>
+              <a:gd name="adj" fmla="val 50000"/>
             </a:avLst>
           </a:prstGeom>
           <a:solidFill>
-            <a:srgbClr val="FBF3E4"/>
+            <a:srgbClr val="FBF0DC"/>
+          </a:solidFill>
+          <a:ln/>
+        </p:spPr>
+      </p:sp>
+      <p:sp>
+        <p:nvSpPr>
+          <p:cNvPr id="9" name="Text 6"/>
+          <p:cNvSpPr/>
+          <p:nvPr/>
+        </p:nvSpPr>
+        <p:spPr>
+          <a:xfrm>
+            <a:off x="8366760" y="2029968"/>
+            <a:ext cx="2468880" cy="384048"/>
+          </a:xfrm>
+          <a:prstGeom prst="rect">
+            <a:avLst/>
+          </a:prstGeom>
+          <a:noFill/>
+          <a:ln/>
+        </p:spPr>
+        <p:txBody>
+          <a:bodyPr wrap="square" rtlCol="0" anchor="ctr"/>
+          <a:lstStyle/>
+          <a:p>
+            <a:pPr marL="0" indent="0" algn="ctr">
+              <a:buNone/>
+            </a:pPr>
+            <a:r>
+              <a:rPr lang="en-US" sz="1000" b="1" dirty="0">
+                <a:solidFill>
+                  <a:srgbClr val="B5791A"/>
+                </a:solidFill>
+                <a:latin typeface="Calibri" pitchFamily="34" charset="0"/>
+                <a:ea typeface="Calibri" pitchFamily="34" charset="-122"/>
+                <a:cs typeface="Calibri" pitchFamily="34" charset="-120"/>
+              </a:rPr>
+              <a:t>Proposed</a:t>
+            </a:r>
+            <a:endParaRPr lang="en-US" sz="1000" dirty="0"/>
+          </a:p>
+        </p:txBody>
+      </p:sp>
+      <p:sp>
+        <p:nvSpPr>
+          <p:cNvPr id="10" name="Shape 7"/>
+          <p:cNvSpPr/>
+          <p:nvPr/>
+        </p:nvSpPr>
+        <p:spPr>
+          <a:xfrm>
+            <a:off x="548640" y="2807208"/>
+            <a:ext cx="11064240" cy="960120"/>
+          </a:xfrm>
+          <a:prstGeom prst="roundRect">
+            <a:avLst>
+              <a:gd name="adj" fmla="val 8571"/>
+            </a:avLst>
+          </a:prstGeom>
+          <a:solidFill>
+            <a:srgbClr val="F5F3FB"/>
           </a:solidFill>
           <a:ln/>
           <a:effectLst>
@@ -12128,23 +11867,42 @@
       </p:sp>
       <p:sp>
         <p:nvSpPr>
-          <p:cNvPr id="11" name="Shape 8"/>
-          <p:cNvSpPr/>
-          <p:nvPr/>
-        </p:nvSpPr>
-        <p:spPr>
-          <a:xfrm>
-            <a:off x="6377940" y="1988820"/>
-            <a:ext cx="594360" cy="594360"/>
-          </a:xfrm>
-          <a:prstGeom prst="ellipse">
-            <a:avLst/>
-          </a:prstGeom>
-          <a:solidFill>
-            <a:srgbClr val="D9A441"/>
-          </a:solidFill>
-          <a:ln/>
-        </p:spPr>
+          <p:cNvPr id="11" name="Text 8"/>
+          <p:cNvSpPr/>
+          <p:nvPr/>
+        </p:nvSpPr>
+        <p:spPr>
+          <a:xfrm>
+            <a:off x="822960" y="2935224"/>
+            <a:ext cx="3657600" cy="457200"/>
+          </a:xfrm>
+          <a:prstGeom prst="rect">
+            <a:avLst/>
+          </a:prstGeom>
+          <a:noFill/>
+          <a:ln/>
+        </p:spPr>
+        <p:txBody>
+          <a:bodyPr wrap="square" rtlCol="0" anchor="ctr"/>
+          <a:lstStyle/>
+          <a:p>
+            <a:pPr marL="0" indent="0">
+              <a:buNone/>
+            </a:pPr>
+            <a:r>
+              <a:rPr lang="en-US" sz="1350" b="1" dirty="0">
+                <a:solidFill>
+                  <a:srgbClr val="2C0F5E"/>
+                </a:solidFill>
+                <a:latin typeface="Calibri" pitchFamily="34" charset="0"/>
+                <a:ea typeface="Calibri" pitchFamily="34" charset="-122"/>
+                <a:cs typeface="Calibri" pitchFamily="34" charset="-120"/>
+              </a:rPr>
+              <a:t>Enterprise Reporting Engine</a:t>
+            </a:r>
+            <a:endParaRPr lang="en-US" sz="1350" dirty="0"/>
+          </a:p>
+        </p:txBody>
       </p:sp>
       <p:sp>
         <p:nvSpPr>
@@ -12154,47 +11912,8 @@
         </p:nvSpPr>
         <p:spPr>
           <a:xfrm>
-            <a:off x="6377940" y="1988820"/>
-            <a:ext cx="594360" cy="594360"/>
-          </a:xfrm>
-          <a:prstGeom prst="rect">
-            <a:avLst/>
-          </a:prstGeom>
-          <a:noFill/>
-          <a:ln/>
-        </p:spPr>
-        <p:txBody>
-          <a:bodyPr wrap="square" rtlCol="0" anchor="ctr"/>
-          <a:lstStyle/>
-          <a:p>
-            <a:pPr marL="0" indent="0" algn="ctr">
-              <a:buNone/>
-            </a:pPr>
-            <a:r>
-              <a:rPr lang="en-US" sz="1800" b="1" dirty="0">
-                <a:solidFill>
-                  <a:srgbClr val="2C0F5E"/>
-                </a:solidFill>
-                <a:latin typeface="Calibri" pitchFamily="34" charset="0"/>
-                <a:ea typeface="Calibri" pitchFamily="34" charset="-122"/>
-                <a:cs typeface="Calibri" pitchFamily="34" charset="-120"/>
-              </a:rPr>
-              <a:t>2</a:t>
-            </a:r>
-            <a:endParaRPr lang="en-US" sz="1800" dirty="0"/>
-          </a:p>
-        </p:txBody>
-      </p:sp>
-      <p:sp>
-        <p:nvSpPr>
-          <p:cNvPr id="13" name="Text 10"/>
-          <p:cNvSpPr/>
-          <p:nvPr/>
-        </p:nvSpPr>
-        <p:spPr>
-          <a:xfrm>
-            <a:off x="7315200" y="1984248"/>
-            <a:ext cx="3840480" cy="594360"/>
+            <a:off x="822960" y="3310128"/>
+            <a:ext cx="7315200" cy="411480"/>
           </a:xfrm>
           <a:prstGeom prst="rect">
             <a:avLst/>
@@ -12213,49 +11932,7 @@
               <a:buNone/>
             </a:pPr>
             <a:r>
-              <a:rPr lang="en-US" sz="1450" b="1" dirty="0">
-                <a:solidFill>
-                  <a:srgbClr val="2C0F5E"/>
-                </a:solidFill>
-                <a:latin typeface="Calibri" pitchFamily="34" charset="0"/>
-                <a:ea typeface="Calibri" pitchFamily="34" charset="-122"/>
-                <a:cs typeface="Calibri" pitchFamily="34" charset="-120"/>
-              </a:rPr>
-              <a:t>Confirm pilot ministries/departments/units</a:t>
-            </a:r>
-            <a:endParaRPr lang="en-US" sz="1450" dirty="0"/>
-          </a:p>
-        </p:txBody>
-      </p:sp>
-      <p:sp>
-        <p:nvSpPr>
-          <p:cNvPr id="14" name="Text 11"/>
-          <p:cNvSpPr/>
-          <p:nvPr/>
-        </p:nvSpPr>
-        <p:spPr>
-          <a:xfrm>
-            <a:off x="6446520" y="2834640"/>
-            <a:ext cx="4617720" cy="731520"/>
-          </a:xfrm>
-          <a:prstGeom prst="rect">
-            <a:avLst/>
-          </a:prstGeom>
-          <a:noFill/>
-          <a:ln/>
-        </p:spPr>
-        <p:txBody>
-          <a:bodyPr wrap="square" rtlCol="0" anchor="ctr"/>
-          <a:lstStyle/>
-          <a:p>
-            <a:pPr marL="0" indent="0">
-              <a:lnSpc>
-                <a:spcPct val="120000"/>
-              </a:lnSpc>
-              <a:buNone/>
-            </a:pPr>
-            <a:r>
-              <a:rPr lang="en-US" sz="1100" dirty="0">
+              <a:rPr lang="en-US" sz="1000" dirty="0">
                 <a:solidFill>
                   <a:srgbClr val="5C5470"/>
                 </a:solidFill>
@@ -12263,30 +11940,91 @@
                 <a:ea typeface="Calibri" pitchFamily="34" charset="-122"/>
                 <a:cs typeface="Calibri" pitchFamily="34" charset="-120"/>
               </a:rPr>
-              <a:t>Nominate the ministries / units to participate in the first pilot cohort.</a:t>
-            </a:r>
-            <a:endParaRPr lang="en-US" sz="1100" dirty="0"/>
-          </a:p>
-        </p:txBody>
-      </p:sp>
-      <p:sp>
-        <p:nvSpPr>
-          <p:cNvPr id="15" name="Shape 12"/>
-          <p:cNvSpPr/>
-          <p:nvPr/>
-        </p:nvSpPr>
-        <p:spPr>
-          <a:xfrm>
-            <a:off x="548640" y="3840480"/>
-            <a:ext cx="5257800" cy="1874520"/>
+              <a:t>Parameterised report catalog plus ad-hoc natural-language reports, ready for migration and rollout.</a:t>
+            </a:r>
+            <a:endParaRPr lang="en-US" sz="1000" dirty="0"/>
+          </a:p>
+        </p:txBody>
+      </p:sp>
+      <p:sp>
+        <p:nvSpPr>
+          <p:cNvPr id="13" name="Shape 10"/>
+          <p:cNvSpPr/>
+          <p:nvPr/>
+        </p:nvSpPr>
+        <p:spPr>
+          <a:xfrm>
+            <a:off x="8366760" y="3099816"/>
+            <a:ext cx="2468880" cy="384048"/>
           </a:xfrm>
           <a:prstGeom prst="roundRect">
             <a:avLst>
-              <a:gd name="adj" fmla="val 4390"/>
+              <a:gd name="adj" fmla="val 50000"/>
             </a:avLst>
           </a:prstGeom>
           <a:solidFill>
-            <a:srgbClr val="FBF3E4"/>
+            <a:srgbClr val="E4F4EC"/>
+          </a:solidFill>
+          <a:ln/>
+        </p:spPr>
+      </p:sp>
+      <p:sp>
+        <p:nvSpPr>
+          <p:cNvPr id="14" name="Text 11"/>
+          <p:cNvSpPr/>
+          <p:nvPr/>
+        </p:nvSpPr>
+        <p:spPr>
+          <a:xfrm>
+            <a:off x="8366760" y="3099816"/>
+            <a:ext cx="2468880" cy="384048"/>
+          </a:xfrm>
+          <a:prstGeom prst="rect">
+            <a:avLst/>
+          </a:prstGeom>
+          <a:noFill/>
+          <a:ln/>
+        </p:spPr>
+        <p:txBody>
+          <a:bodyPr wrap="square" rtlCol="0" anchor="ctr"/>
+          <a:lstStyle/>
+          <a:p>
+            <a:pPr marL="0" indent="0" algn="ctr">
+              <a:buNone/>
+            </a:pPr>
+            <a:r>
+              <a:rPr lang="en-US" sz="1000" b="1" dirty="0">
+                <a:solidFill>
+                  <a:srgbClr val="1E7A4C"/>
+                </a:solidFill>
+                <a:latin typeface="Calibri" pitchFamily="34" charset="0"/>
+                <a:ea typeface="Calibri" pitchFamily="34" charset="-122"/>
+                <a:cs typeface="Calibri" pitchFamily="34" charset="-120"/>
+              </a:rPr>
+              <a:t>Built, pending deploy</a:t>
+            </a:r>
+            <a:endParaRPr lang="en-US" sz="1000" dirty="0"/>
+          </a:p>
+        </p:txBody>
+      </p:sp>
+      <p:sp>
+        <p:nvSpPr>
+          <p:cNvPr id="15" name="Shape 12"/>
+          <p:cNvSpPr/>
+          <p:nvPr/>
+        </p:nvSpPr>
+        <p:spPr>
+          <a:xfrm>
+            <a:off x="548640" y="3877056"/>
+            <a:ext cx="11064240" cy="960120"/>
+          </a:xfrm>
+          <a:prstGeom prst="roundRect">
+            <a:avLst>
+              <a:gd name="adj" fmla="val 8571"/>
+            </a:avLst>
+          </a:prstGeom>
+          <a:solidFill>
+            <a:srgbClr val="F5F3FB"/>
           </a:solidFill>
           <a:ln/>
           <a:effectLst>
@@ -12300,23 +12038,42 @@
       </p:sp>
       <p:sp>
         <p:nvSpPr>
-          <p:cNvPr id="16" name="Shape 13"/>
-          <p:cNvSpPr/>
-          <p:nvPr/>
-        </p:nvSpPr>
-        <p:spPr>
-          <a:xfrm>
-            <a:off x="800100" y="4046220"/>
-            <a:ext cx="594360" cy="594360"/>
-          </a:xfrm>
-          <a:prstGeom prst="ellipse">
-            <a:avLst/>
-          </a:prstGeom>
-          <a:solidFill>
-            <a:srgbClr val="D9A441"/>
-          </a:solidFill>
-          <a:ln/>
-        </p:spPr>
+          <p:cNvPr id="16" name="Text 13"/>
+          <p:cNvSpPr/>
+          <p:nvPr/>
+        </p:nvSpPr>
+        <p:spPr>
+          <a:xfrm>
+            <a:off x="822960" y="4005072"/>
+            <a:ext cx="3657600" cy="457200"/>
+          </a:xfrm>
+          <a:prstGeom prst="rect">
+            <a:avLst/>
+          </a:prstGeom>
+          <a:noFill/>
+          <a:ln/>
+        </p:spPr>
+        <p:txBody>
+          <a:bodyPr wrap="square" rtlCol="0" anchor="ctr"/>
+          <a:lstStyle/>
+          <a:p>
+            <a:pPr marL="0" indent="0">
+              <a:buNone/>
+            </a:pPr>
+            <a:r>
+              <a:rPr lang="en-US" sz="1350" b="1" dirty="0">
+                <a:solidFill>
+                  <a:srgbClr val="2C0F5E"/>
+                </a:solidFill>
+                <a:latin typeface="Calibri" pitchFamily="34" charset="0"/>
+                <a:ea typeface="Calibri" pitchFamily="34" charset="-122"/>
+                <a:cs typeface="Calibri" pitchFamily="34" charset="-120"/>
+              </a:rPr>
+              <a:t>Intelligence Explorer</a:t>
+            </a:r>
+            <a:endParaRPr lang="en-US" sz="1350" dirty="0"/>
+          </a:p>
+        </p:txBody>
       </p:sp>
       <p:sp>
         <p:nvSpPr>
@@ -12326,47 +12083,8 @@
         </p:nvSpPr>
         <p:spPr>
           <a:xfrm>
-            <a:off x="800100" y="4046220"/>
-            <a:ext cx="594360" cy="594360"/>
-          </a:xfrm>
-          <a:prstGeom prst="rect">
-            <a:avLst/>
-          </a:prstGeom>
-          <a:noFill/>
-          <a:ln/>
-        </p:spPr>
-        <p:txBody>
-          <a:bodyPr wrap="square" rtlCol="0" anchor="ctr"/>
-          <a:lstStyle/>
-          <a:p>
-            <a:pPr marL="0" indent="0" algn="ctr">
-              <a:buNone/>
-            </a:pPr>
-            <a:r>
-              <a:rPr lang="en-US" sz="1800" b="1" dirty="0">
-                <a:solidFill>
-                  <a:srgbClr val="2C0F5E"/>
-                </a:solidFill>
-                <a:latin typeface="Calibri" pitchFamily="34" charset="0"/>
-                <a:ea typeface="Calibri" pitchFamily="34" charset="-122"/>
-                <a:cs typeface="Calibri" pitchFamily="34" charset="-120"/>
-              </a:rPr>
-              <a:t>3</a:t>
-            </a:r>
-            <a:endParaRPr lang="en-US" sz="1800" dirty="0"/>
-          </a:p>
-        </p:txBody>
-      </p:sp>
-      <p:sp>
-        <p:nvSpPr>
-          <p:cNvPr id="18" name="Text 15"/>
-          <p:cNvSpPr/>
-          <p:nvPr/>
-        </p:nvSpPr>
-        <p:spPr>
-          <a:xfrm>
-            <a:off x="1737360" y="4041648"/>
-            <a:ext cx="3840480" cy="594360"/>
+            <a:off x="822960" y="4379976"/>
+            <a:ext cx="7315200" cy="411480"/>
           </a:xfrm>
           <a:prstGeom prst="rect">
             <a:avLst/>
@@ -12385,49 +12103,7 @@
               <a:buNone/>
             </a:pPr>
             <a:r>
-              <a:rPr lang="en-US" sz="1450" b="1" dirty="0">
-                <a:solidFill>
-                  <a:srgbClr val="2C0F5E"/>
-                </a:solidFill>
-                <a:latin typeface="Calibri" pitchFamily="34" charset="0"/>
-                <a:ea typeface="Calibri" pitchFamily="34" charset="-122"/>
-                <a:cs typeface="Calibri" pitchFamily="34" charset="-120"/>
-              </a:rPr>
-              <a:t>Support data &amp; user readiness</a:t>
-            </a:r>
-            <a:endParaRPr lang="en-US" sz="1450" dirty="0"/>
-          </a:p>
-        </p:txBody>
-      </p:sp>
-      <p:sp>
-        <p:nvSpPr>
-          <p:cNvPr id="19" name="Text 16"/>
-          <p:cNvSpPr/>
-          <p:nvPr/>
-        </p:nvSpPr>
-        <p:spPr>
-          <a:xfrm>
-            <a:off x="868680" y="4892040"/>
-            <a:ext cx="4617720" cy="731520"/>
-          </a:xfrm>
-          <a:prstGeom prst="rect">
-            <a:avLst/>
-          </a:prstGeom>
-          <a:noFill/>
-          <a:ln/>
-        </p:spPr>
-        <p:txBody>
-          <a:bodyPr wrap="square" rtlCol="0" anchor="ctr"/>
-          <a:lstStyle/>
-          <a:p>
-            <a:pPr marL="0" indent="0">
-              <a:lnSpc>
-                <a:spcPct val="120000"/>
-              </a:lnSpc>
-              <a:buNone/>
-            </a:pPr>
-            <a:r>
-              <a:rPr lang="en-US" sz="1100" dirty="0">
+              <a:rPr lang="en-US" sz="1000" dirty="0">
                 <a:solidFill>
                   <a:srgbClr val="5C5470"/>
                 </a:solidFill>
@@ -12435,30 +12111,91 @@
                 <a:ea typeface="Calibri" pitchFamily="34" charset="-122"/>
                 <a:cs typeface="Calibri" pitchFamily="34" charset="-120"/>
               </a:rPr>
-              <a:t>Approve provisioning real reference data and verified user accounts for pilot participants.</a:t>
-            </a:r>
-            <a:endParaRPr lang="en-US" sz="1100" dirty="0"/>
-          </a:p>
-        </p:txBody>
-      </p:sp>
-      <p:sp>
-        <p:nvSpPr>
-          <p:cNvPr id="20" name="Shape 17"/>
-          <p:cNvSpPr/>
-          <p:nvPr/>
-        </p:nvSpPr>
-        <p:spPr>
-          <a:xfrm>
-            <a:off x="6126480" y="3840480"/>
-            <a:ext cx="5257800" cy="1874520"/>
+              <a:t>Interactive data-exploration UI now live for the Submissions dataset.</a:t>
+            </a:r>
+            <a:endParaRPr lang="en-US" sz="1000" dirty="0"/>
+          </a:p>
+        </p:txBody>
+      </p:sp>
+      <p:sp>
+        <p:nvSpPr>
+          <p:cNvPr id="18" name="Shape 15"/>
+          <p:cNvSpPr/>
+          <p:nvPr/>
+        </p:nvSpPr>
+        <p:spPr>
+          <a:xfrm>
+            <a:off x="8366760" y="4169664"/>
+            <a:ext cx="2468880" cy="384048"/>
           </a:xfrm>
           <a:prstGeom prst="roundRect">
             <a:avLst>
-              <a:gd name="adj" fmla="val 4390"/>
+              <a:gd name="adj" fmla="val 50000"/>
             </a:avLst>
           </a:prstGeom>
           <a:solidFill>
-            <a:srgbClr val="FBF3E4"/>
+            <a:srgbClr val="E4F4EC"/>
+          </a:solidFill>
+          <a:ln/>
+        </p:spPr>
+      </p:sp>
+      <p:sp>
+        <p:nvSpPr>
+          <p:cNvPr id="19" name="Text 16"/>
+          <p:cNvSpPr/>
+          <p:nvPr/>
+        </p:nvSpPr>
+        <p:spPr>
+          <a:xfrm>
+            <a:off x="8366760" y="4169664"/>
+            <a:ext cx="2468880" cy="384048"/>
+          </a:xfrm>
+          <a:prstGeom prst="rect">
+            <a:avLst/>
+          </a:prstGeom>
+          <a:noFill/>
+          <a:ln/>
+        </p:spPr>
+        <p:txBody>
+          <a:bodyPr wrap="square" rtlCol="0" anchor="ctr"/>
+          <a:lstStyle/>
+          <a:p>
+            <a:pPr marL="0" indent="0" algn="ctr">
+              <a:buNone/>
+            </a:pPr>
+            <a:r>
+              <a:rPr lang="en-US" sz="1000" b="1" dirty="0">
+                <a:solidFill>
+                  <a:srgbClr val="1E7A4C"/>
+                </a:solidFill>
+                <a:latin typeface="Calibri" pitchFamily="34" charset="0"/>
+                <a:ea typeface="Calibri" pitchFamily="34" charset="-122"/>
+                <a:cs typeface="Calibri" pitchFamily="34" charset="-120"/>
+              </a:rPr>
+              <a:t>Built (P1)</a:t>
+            </a:r>
+            <a:endParaRPr lang="en-US" sz="1000" dirty="0"/>
+          </a:p>
+        </p:txBody>
+      </p:sp>
+      <p:sp>
+        <p:nvSpPr>
+          <p:cNvPr id="20" name="Shape 17"/>
+          <p:cNvSpPr/>
+          <p:nvPr/>
+        </p:nvSpPr>
+        <p:spPr>
+          <a:xfrm>
+            <a:off x="548640" y="4946904"/>
+            <a:ext cx="11064240" cy="960120"/>
+          </a:xfrm>
+          <a:prstGeom prst="roundRect">
+            <a:avLst>
+              <a:gd name="adj" fmla="val 8571"/>
+            </a:avLst>
+          </a:prstGeom>
+          <a:solidFill>
+            <a:srgbClr val="F5F3FB"/>
           </a:solidFill>
           <a:ln/>
           <a:effectLst>
@@ -12472,23 +12209,42 @@
       </p:sp>
       <p:sp>
         <p:nvSpPr>
-          <p:cNvPr id="21" name="Shape 18"/>
-          <p:cNvSpPr/>
-          <p:nvPr/>
-        </p:nvSpPr>
-        <p:spPr>
-          <a:xfrm>
-            <a:off x="6377940" y="4046220"/>
-            <a:ext cx="594360" cy="594360"/>
-          </a:xfrm>
-          <a:prstGeom prst="ellipse">
-            <a:avLst/>
-          </a:prstGeom>
-          <a:solidFill>
-            <a:srgbClr val="D9A441"/>
-          </a:solidFill>
-          <a:ln/>
-        </p:spPr>
+          <p:cNvPr id="21" name="Text 18"/>
+          <p:cNvSpPr/>
+          <p:nvPr/>
+        </p:nvSpPr>
+        <p:spPr>
+          <a:xfrm>
+            <a:off x="822960" y="5074920"/>
+            <a:ext cx="3657600" cy="457200"/>
+          </a:xfrm>
+          <a:prstGeom prst="rect">
+            <a:avLst/>
+          </a:prstGeom>
+          <a:noFill/>
+          <a:ln/>
+        </p:spPr>
+        <p:txBody>
+          <a:bodyPr wrap="square" rtlCol="0" anchor="ctr"/>
+          <a:lstStyle/>
+          <a:p>
+            <a:pPr marL="0" indent="0">
+              <a:buNone/>
+            </a:pPr>
+            <a:r>
+              <a:rPr lang="en-US" sz="1350" b="1" dirty="0">
+                <a:solidFill>
+                  <a:srgbClr val="2C0F5E"/>
+                </a:solidFill>
+                <a:latin typeface="Calibri" pitchFamily="34" charset="0"/>
+                <a:ea typeface="Calibri" pitchFamily="34" charset="-122"/>
+                <a:cs typeface="Calibri" pitchFamily="34" charset="-120"/>
+              </a:rPr>
+              <a:t>Sitting Workspace</a:t>
+            </a:r>
+            <a:endParaRPr lang="en-US" sz="1350" dirty="0"/>
+          </a:p>
+        </p:txBody>
       </p:sp>
       <p:sp>
         <p:nvSpPr>
@@ -12498,47 +12254,8 @@
         </p:nvSpPr>
         <p:spPr>
           <a:xfrm>
-            <a:off x="6377940" y="4046220"/>
-            <a:ext cx="594360" cy="594360"/>
-          </a:xfrm>
-          <a:prstGeom prst="rect">
-            <a:avLst/>
-          </a:prstGeom>
-          <a:noFill/>
-          <a:ln/>
-        </p:spPr>
-        <p:txBody>
-          <a:bodyPr wrap="square" rtlCol="0" anchor="ctr"/>
-          <a:lstStyle/>
-          <a:p>
-            <a:pPr marL="0" indent="0" algn="ctr">
-              <a:buNone/>
-            </a:pPr>
-            <a:r>
-              <a:rPr lang="en-US" sz="1800" b="1" dirty="0">
-                <a:solidFill>
-                  <a:srgbClr val="2C0F5E"/>
-                </a:solidFill>
-                <a:latin typeface="Calibri" pitchFamily="34" charset="0"/>
-                <a:ea typeface="Calibri" pitchFamily="34" charset="-122"/>
-                <a:cs typeface="Calibri" pitchFamily="34" charset="-120"/>
-              </a:rPr>
-              <a:t>4</a:t>
-            </a:r>
-            <a:endParaRPr lang="en-US" sz="1800" dirty="0"/>
-          </a:p>
-        </p:txBody>
-      </p:sp>
-      <p:sp>
-        <p:nvSpPr>
-          <p:cNvPr id="23" name="Text 20"/>
-          <p:cNvSpPr/>
-          <p:nvPr/>
-        </p:nvSpPr>
-        <p:spPr>
-          <a:xfrm>
-            <a:off x="7315200" y="4041648"/>
-            <a:ext cx="3840480" cy="594360"/>
+            <a:off x="822960" y="5449824"/>
+            <a:ext cx="7315200" cy="411480"/>
           </a:xfrm>
           <a:prstGeom prst="rect">
             <a:avLst/>
@@ -12557,19 +12274,41 @@
               <a:buNone/>
             </a:pPr>
             <a:r>
-              <a:rPr lang="en-US" sz="1450" b="1" dirty="0">
-                <a:solidFill>
-                  <a:srgbClr val="2C0F5E"/>
-                </a:solidFill>
-                <a:latin typeface="Calibri" pitchFamily="34" charset="0"/>
-                <a:ea typeface="Calibri" pitchFamily="34" charset="-122"/>
-                <a:cs typeface="Calibri" pitchFamily="34" charset="-120"/>
-              </a:rPr>
-              <a:t>Set a review checkpoint</a:t>
-            </a:r>
-            <a:endParaRPr lang="en-US" sz="1450" dirty="0"/>
-          </a:p>
-        </p:txBody>
+              <a:rPr lang="en-US" sz="1000" dirty="0">
+                <a:solidFill>
+                  <a:srgbClr val="5C5470"/>
+                </a:solidFill>
+                <a:latin typeface="Calibri" pitchFamily="34" charset="0"/>
+                <a:ea typeface="Calibri" pitchFamily="34" charset="-122"/>
+                <a:cs typeface="Calibri" pitchFamily="34" charset="-120"/>
+              </a:rPr>
+              <a:t>Project-board view of Commission sittings; kanban-by-stage and one-click approval still to come (P3–P4).</a:t>
+            </a:r>
+            <a:endParaRPr lang="en-US" sz="1000" dirty="0"/>
+          </a:p>
+        </p:txBody>
+      </p:sp>
+      <p:sp>
+        <p:nvSpPr>
+          <p:cNvPr id="23" name="Shape 20"/>
+          <p:cNvSpPr/>
+          <p:nvPr/>
+        </p:nvSpPr>
+        <p:spPr>
+          <a:xfrm>
+            <a:off x="8366760" y="5239512"/>
+            <a:ext cx="2468880" cy="384048"/>
+          </a:xfrm>
+          <a:prstGeom prst="roundRect">
+            <a:avLst>
+              <a:gd name="adj" fmla="val 50000"/>
+            </a:avLst>
+          </a:prstGeom>
+          <a:solidFill>
+            <a:srgbClr val="E4F4EC"/>
+          </a:solidFill>
+          <a:ln/>
+        </p:spPr>
       </p:sp>
       <p:sp>
         <p:nvSpPr>
@@ -12579,37 +12318,34 @@
         </p:nvSpPr>
         <p:spPr>
           <a:xfrm>
-            <a:off x="6446520" y="4892040"/>
-            <a:ext cx="4617720" cy="731520"/>
-          </a:xfrm>
-          <a:prstGeom prst="rect">
-            <a:avLst/>
-          </a:prstGeom>
-          <a:noFill/>
-          <a:ln/>
-        </p:spPr>
-        <p:txBody>
-          <a:bodyPr wrap="square" rtlCol="0" anchor="ctr"/>
-          <a:lstStyle/>
-          <a:p>
-            <a:pPr marL="0" indent="0">
-              <a:lnSpc>
-                <a:spcPct val="120000"/>
-              </a:lnSpc>
-              <a:buNone/>
-            </a:pPr>
-            <a:r>
-              <a:rPr lang="en-US" sz="1100" dirty="0">
-                <a:solidFill>
-                  <a:srgbClr val="5C5470"/>
-                </a:solidFill>
-                <a:latin typeface="Calibri" pitchFamily="34" charset="0"/>
-                <a:ea typeface="Calibri" pitchFamily="34" charset="-122"/>
-                <a:cs typeface="Calibri" pitchFamily="34" charset="-120"/>
-              </a:rPr>
-              <a:t>Agree a date for the Committee to review pilot results before wider rollout.</a:t>
-            </a:r>
-            <a:endParaRPr lang="en-US" sz="1100" dirty="0"/>
+            <a:off x="8366760" y="5239512"/>
+            <a:ext cx="2468880" cy="384048"/>
+          </a:xfrm>
+          <a:prstGeom prst="rect">
+            <a:avLst/>
+          </a:prstGeom>
+          <a:noFill/>
+          <a:ln/>
+        </p:spPr>
+        <p:txBody>
+          <a:bodyPr wrap="square" rtlCol="0" anchor="ctr"/>
+          <a:lstStyle/>
+          <a:p>
+            <a:pPr marL="0" indent="0" algn="ctr">
+              <a:buNone/>
+            </a:pPr>
+            <a:r>
+              <a:rPr lang="en-US" sz="1000" b="1" dirty="0">
+                <a:solidFill>
+                  <a:srgbClr val="1E7A4C"/>
+                </a:solidFill>
+                <a:latin typeface="Calibri" pitchFamily="34" charset="0"/>
+                <a:ea typeface="Calibri" pitchFamily="34" charset="-122"/>
+                <a:cs typeface="Calibri" pitchFamily="34" charset="-120"/>
+              </a:rPr>
+              <a:t>Built (P1–P2)</a:t>
+            </a:r>
+            <a:endParaRPr lang="en-US" sz="1000" dirty="0"/>
           </a:p>
         </p:txBody>
       </p:sp>
@@ -12685,7 +12421,7 @@
                 <a:ea typeface="Calibri" pitchFamily="34" charset="-122"/>
                 <a:cs typeface="Calibri" pitchFamily="34" charset="-120"/>
               </a:rPr>
-              <a:t>19</a:t>
+              <a:t>18</a:t>
             </a:r>
             <a:endParaRPr lang="en-US" sz="900" dirty="0"/>
           </a:p>
@@ -13782,6 +13518,1149 @@
 
 <file path=ppt/slides/slide20.xml><?xml version="1.0" encoding="utf-8"?>
 <p:sld xmlns:a="http://schemas.openxmlformats.org/drawingml/2006/main" xmlns:r="http://schemas.openxmlformats.org/officeDocument/2006/relationships" xmlns:p="http://schemas.openxmlformats.org/presentationml/2006/main">
+  <p:cSld name="Slide 19">
+    <p:spTree>
+      <p:nvGrpSpPr>
+        <p:cNvPr id="1" name=""/>
+        <p:cNvGrpSpPr/>
+        <p:nvPr/>
+      </p:nvGrpSpPr>
+      <p:grpSpPr>
+        <a:xfrm>
+          <a:off x="0" y="0"/>
+          <a:ext cx="0" cy="0"/>
+          <a:chOff x="0" y="0"/>
+          <a:chExt cx="0" cy="0"/>
+        </a:xfrm>
+      </p:grpSpPr>
+      <p:pic>
+        <p:nvPicPr>
+          <p:cNvPr id="2" name="Image 0" descr="C:\Users\Herman Tevilili\AppData\Local\Temp\claude\C--Users-Herman-Tevilili-Documents-GitHub-commissionDecisionApp-v1-0\2d2d3a12-ae9e-4f4b-990a-3e1ebe47ec28\scratchpad\scdms_deck\assets\bg.jpg"/>
+          <p:cNvPicPr>
+            <a:picLocks noChangeAspect="1"/>
+          </p:cNvPicPr>
+          <p:nvPr/>
+        </p:nvPicPr>
+        <p:blipFill>
+          <a:blip r:embed="rId3"/>
+          <a:stretch>
+            <a:fillRect/>
+          </a:stretch>
+        </p:blipFill>
+        <p:spPr>
+          <a:xfrm>
+            <a:off x="0" y="0"/>
+            <a:ext cx="12191695" cy="8127797"/>
+          </a:xfrm>
+          <a:prstGeom prst="rect">
+            <a:avLst/>
+          </a:prstGeom>
+        </p:spPr>
+      </p:pic>
+      <p:pic>
+        <p:nvPicPr>
+          <p:cNvPr id="3" name="Image 1" descr="C:\Users\Herman Tevilili\AppData\Local\Temp\claude\C--Users-Herman-Tevilili-Documents-GitHub-commissionDecisionApp-v1-0\2d2d3a12-ae9e-4f4b-990a-3e1ebe47ec28\scratchpad\scdms_deck\assets\rings.png"/>
+          <p:cNvPicPr>
+            <a:picLocks noChangeAspect="1"/>
+          </p:cNvPicPr>
+          <p:nvPr/>
+        </p:nvPicPr>
+        <p:blipFill>
+          <a:blip r:embed="rId4">
+            <a:alphaModFix amt="55000"/>
+          </a:blip>
+          <a:stretch>
+            <a:fillRect/>
+          </a:stretch>
+        </p:blipFill>
+        <p:spPr>
+          <a:xfrm>
+            <a:off x="10271455" y="4937760"/>
+            <a:ext cx="2926080" cy="2926080"/>
+          </a:xfrm>
+          <a:prstGeom prst="rect">
+            <a:avLst/>
+          </a:prstGeom>
+        </p:spPr>
+      </p:pic>
+      <p:sp>
+        <p:nvSpPr>
+          <p:cNvPr id="4" name="Text 0"/>
+          <p:cNvSpPr/>
+          <p:nvPr/>
+        </p:nvSpPr>
+        <p:spPr>
+          <a:xfrm>
+            <a:off x="1691640" y="457200"/>
+            <a:ext cx="9875520" cy="320040"/>
+          </a:xfrm>
+          <a:prstGeom prst="rect">
+            <a:avLst/>
+          </a:prstGeom>
+          <a:noFill/>
+          <a:ln/>
+        </p:spPr>
+        <p:txBody>
+          <a:bodyPr wrap="square" rtlCol="0" anchor="ctr"/>
+          <a:lstStyle/>
+          <a:p>
+            <a:pPr marL="0" indent="0">
+              <a:buNone/>
+            </a:pPr>
+            <a:r>
+              <a:rPr lang="en-US" sz="1200" b="1" kern="0" spc="200" dirty="0">
+                <a:solidFill>
+                  <a:srgbClr val="D9A441"/>
+                </a:solidFill>
+                <a:latin typeface="Calibri" pitchFamily="34" charset="0"/>
+                <a:ea typeface="Calibri" pitchFamily="34" charset="-122"/>
+                <a:cs typeface="Calibri" pitchFamily="34" charset="-120"/>
+              </a:rPr>
+              <a:t>WHAT'S NEXT</a:t>
+            </a:r>
+            <a:endParaRPr lang="en-US" sz="1200" dirty="0"/>
+          </a:p>
+        </p:txBody>
+      </p:sp>
+      <p:sp>
+        <p:nvSpPr>
+          <p:cNvPr id="5" name="Text 1"/>
+          <p:cNvSpPr/>
+          <p:nvPr/>
+        </p:nvSpPr>
+        <p:spPr>
+          <a:xfrm>
+            <a:off x="1691640" y="777240"/>
+            <a:ext cx="9951415" cy="822960"/>
+          </a:xfrm>
+          <a:prstGeom prst="rect">
+            <a:avLst/>
+          </a:prstGeom>
+          <a:noFill/>
+          <a:ln/>
+        </p:spPr>
+        <p:txBody>
+          <a:bodyPr wrap="square" rtlCol="0" anchor="ctr"/>
+          <a:lstStyle/>
+          <a:p>
+            <a:pPr marL="0" indent="0">
+              <a:buNone/>
+            </a:pPr>
+            <a:r>
+              <a:rPr lang="en-US" sz="2600" b="1" dirty="0">
+                <a:solidFill>
+                  <a:srgbClr val="FFFFFF"/>
+                </a:solidFill>
+                <a:latin typeface="Cambria" pitchFamily="34" charset="0"/>
+                <a:ea typeface="Cambria" pitchFamily="34" charset="-122"/>
+                <a:cs typeface="Cambria" pitchFamily="34" charset="-120"/>
+              </a:rPr>
+              <a:t>Two stages before wider rollout: pre-pilot, then pilot</a:t>
+            </a:r>
+            <a:endParaRPr lang="en-US" sz="2600" dirty="0"/>
+          </a:p>
+        </p:txBody>
+      </p:sp>
+      <p:sp>
+        <p:nvSpPr>
+          <p:cNvPr id="6" name="Text 2"/>
+          <p:cNvSpPr/>
+          <p:nvPr/>
+        </p:nvSpPr>
+        <p:spPr>
+          <a:xfrm>
+            <a:off x="1691640" y="1417320"/>
+            <a:ext cx="10058400" cy="594360"/>
+          </a:xfrm>
+          <a:prstGeom prst="rect">
+            <a:avLst/>
+          </a:prstGeom>
+          <a:noFill/>
+          <a:ln/>
+        </p:spPr>
+        <p:txBody>
+          <a:bodyPr wrap="square" rtlCol="0" anchor="ctr"/>
+          <a:lstStyle/>
+          <a:p>
+            <a:pPr marL="0" indent="0">
+              <a:lnSpc>
+                <a:spcPct val="125000"/>
+              </a:lnSpc>
+              <a:buNone/>
+            </a:pPr>
+            <a:r>
+              <a:rPr lang="en-US" sz="1200" dirty="0">
+                <a:solidFill>
+                  <a:srgbClr val="CBBFE6"/>
+                </a:solidFill>
+                <a:latin typeface="Calibri" pitchFamily="34" charset="0"/>
+                <a:ea typeface="Calibri" pitchFamily="34" charset="-122"/>
+                <a:cs typeface="Calibri" pitchFamily="34" charset="-120"/>
+              </a:rPr>
+              <a:t>Pre-pilot proves the system works under real conditions, with PSC staff only. Pilot proves it works for real ministries. Separating them contains risk before any live personnel decision runs through SCDMS.</a:t>
+            </a:r>
+            <a:endParaRPr lang="en-US" sz="1200" dirty="0"/>
+          </a:p>
+        </p:txBody>
+      </p:sp>
+      <p:sp>
+        <p:nvSpPr>
+          <p:cNvPr id="7" name="Shape 3"/>
+          <p:cNvSpPr/>
+          <p:nvPr/>
+        </p:nvSpPr>
+        <p:spPr>
+          <a:xfrm>
+            <a:off x="548640" y="2148840"/>
+            <a:ext cx="5349240" cy="3611880"/>
+          </a:xfrm>
+          <a:prstGeom prst="roundRect">
+            <a:avLst>
+              <a:gd name="adj" fmla="val 2278"/>
+            </a:avLst>
+          </a:prstGeom>
+          <a:solidFill>
+            <a:srgbClr val="F5F3FB"/>
+          </a:solidFill>
+          <a:ln/>
+          <a:effectLst>
+            <a:outerShdw blurRad="127000" dist="38100" dir="5400000" algn="bl" rotWithShape="0">
+              <a:srgbClr val="1B0B3E">
+                <a:alpha val="35000"/>
+              </a:srgbClr>
+            </a:outerShdw>
+          </a:effectLst>
+        </p:spPr>
+      </p:sp>
+      <p:sp>
+        <p:nvSpPr>
+          <p:cNvPr id="8" name="Text 4"/>
+          <p:cNvSpPr/>
+          <p:nvPr/>
+        </p:nvSpPr>
+        <p:spPr>
+          <a:xfrm>
+            <a:off x="868680" y="2377440"/>
+            <a:ext cx="3291840" cy="365760"/>
+          </a:xfrm>
+          <a:prstGeom prst="rect">
+            <a:avLst/>
+          </a:prstGeom>
+          <a:noFill/>
+          <a:ln/>
+        </p:spPr>
+        <p:txBody>
+          <a:bodyPr wrap="square" rtlCol="0" anchor="ctr"/>
+          <a:lstStyle/>
+          <a:p>
+            <a:pPr marL="0" indent="0">
+              <a:buNone/>
+            </a:pPr>
+            <a:r>
+              <a:rPr lang="en-US" sz="1450" b="1" dirty="0">
+                <a:solidFill>
+                  <a:srgbClr val="2C0F5E"/>
+                </a:solidFill>
+                <a:latin typeface="Calibri" pitchFamily="34" charset="0"/>
+                <a:ea typeface="Calibri" pitchFamily="34" charset="-122"/>
+                <a:cs typeface="Calibri" pitchFamily="34" charset="-120"/>
+              </a:rPr>
+              <a:t>Pre-Pilot</a:t>
+            </a:r>
+            <a:endParaRPr lang="en-US" sz="1450" dirty="0"/>
+          </a:p>
+        </p:txBody>
+      </p:sp>
+      <p:sp>
+        <p:nvSpPr>
+          <p:cNvPr id="9" name="Shape 5"/>
+          <p:cNvSpPr/>
+          <p:nvPr/>
+        </p:nvSpPr>
+        <p:spPr>
+          <a:xfrm>
+            <a:off x="4206240" y="2377440"/>
+            <a:ext cx="1554480" cy="329184"/>
+          </a:xfrm>
+          <a:prstGeom prst="roundRect">
+            <a:avLst>
+              <a:gd name="adj" fmla="val 50000"/>
+            </a:avLst>
+          </a:prstGeom>
+          <a:solidFill>
+            <a:srgbClr val="FBF0DC"/>
+          </a:solidFill>
+          <a:ln/>
+        </p:spPr>
+      </p:sp>
+      <p:sp>
+        <p:nvSpPr>
+          <p:cNvPr id="10" name="Text 6"/>
+          <p:cNvSpPr/>
+          <p:nvPr/>
+        </p:nvSpPr>
+        <p:spPr>
+          <a:xfrm>
+            <a:off x="4206240" y="2377440"/>
+            <a:ext cx="1554480" cy="329184"/>
+          </a:xfrm>
+          <a:prstGeom prst="rect">
+            <a:avLst/>
+          </a:prstGeom>
+          <a:noFill/>
+          <a:ln/>
+        </p:spPr>
+        <p:txBody>
+          <a:bodyPr wrap="square" rtlCol="0" anchor="ctr"/>
+          <a:lstStyle/>
+          <a:p>
+            <a:pPr marL="0" indent="0" algn="ctr">
+              <a:buNone/>
+            </a:pPr>
+            <a:r>
+              <a:rPr lang="en-US" sz="1000" b="1" dirty="0">
+                <a:solidFill>
+                  <a:srgbClr val="B5791A"/>
+                </a:solidFill>
+                <a:latin typeface="Calibri" pitchFamily="34" charset="0"/>
+                <a:ea typeface="Calibri" pitchFamily="34" charset="-122"/>
+                <a:cs typeface="Calibri" pitchFamily="34" charset="-120"/>
+              </a:rPr>
+              <a:t>Internal only</a:t>
+            </a:r>
+            <a:endParaRPr lang="en-US" sz="1000" dirty="0"/>
+          </a:p>
+        </p:txBody>
+      </p:sp>
+      <p:sp>
+        <p:nvSpPr>
+          <p:cNvPr id="11" name="Text 7"/>
+          <p:cNvSpPr/>
+          <p:nvPr/>
+        </p:nvSpPr>
+        <p:spPr>
+          <a:xfrm>
+            <a:off x="868680" y="2852928"/>
+            <a:ext cx="4754880" cy="502920"/>
+          </a:xfrm>
+          <a:prstGeom prst="rect">
+            <a:avLst/>
+          </a:prstGeom>
+          <a:noFill/>
+          <a:ln/>
+        </p:spPr>
+        <p:txBody>
+          <a:bodyPr wrap="square" rtlCol="0" anchor="ctr"/>
+          <a:lstStyle/>
+          <a:p>
+            <a:pPr marL="0" indent="0">
+              <a:lnSpc>
+                <a:spcPct val="115000"/>
+              </a:lnSpc>
+              <a:buNone/>
+            </a:pPr>
+            <a:r>
+              <a:rPr lang="en-US" sz="1080" b="1" dirty="0">
+                <a:solidFill>
+                  <a:srgbClr val="2C0F5E"/>
+                </a:solidFill>
+                <a:latin typeface="Calibri" pitchFamily="34" charset="0"/>
+                <a:ea typeface="Calibri" pitchFamily="34" charset="-122"/>
+                <a:cs typeface="Calibri" pitchFamily="34" charset="-120"/>
+              </a:rPr>
+              <a:t>•  </a:t>
+            </a:r>
+            <a:r>
+              <a:rPr lang="en-US" sz="1080" dirty="0">
+                <a:solidFill>
+                  <a:srgbClr val="5C5470"/>
+                </a:solidFill>
+                <a:latin typeface="Calibri" pitchFamily="34" charset="0"/>
+                <a:ea typeface="Calibri" pitchFamily="34" charset="-122"/>
+                <a:cs typeface="Calibri" pitchFamily="34" charset="-120"/>
+              </a:rPr>
+              <a:t>Real reference data loaded - ministries, departments, users - but no live submissions yet</a:t>
+            </a:r>
+            <a:endParaRPr lang="en-US" sz="1080" dirty="0"/>
+          </a:p>
+        </p:txBody>
+      </p:sp>
+      <p:sp>
+        <p:nvSpPr>
+          <p:cNvPr id="12" name="Text 8"/>
+          <p:cNvSpPr/>
+          <p:nvPr/>
+        </p:nvSpPr>
+        <p:spPr>
+          <a:xfrm>
+            <a:off x="868680" y="3383280"/>
+            <a:ext cx="4754880" cy="502920"/>
+          </a:xfrm>
+          <a:prstGeom prst="rect">
+            <a:avLst/>
+          </a:prstGeom>
+          <a:noFill/>
+          <a:ln/>
+        </p:spPr>
+        <p:txBody>
+          <a:bodyPr wrap="square" rtlCol="0" anchor="ctr"/>
+          <a:lstStyle/>
+          <a:p>
+            <a:pPr marL="0" indent="0">
+              <a:lnSpc>
+                <a:spcPct val="115000"/>
+              </a:lnSpc>
+              <a:buNone/>
+            </a:pPr>
+            <a:r>
+              <a:rPr lang="en-US" sz="1080" b="1" dirty="0">
+                <a:solidFill>
+                  <a:srgbClr val="2C0F5E"/>
+                </a:solidFill>
+                <a:latin typeface="Calibri" pitchFamily="34" charset="0"/>
+                <a:ea typeface="Calibri" pitchFamily="34" charset="-122"/>
+                <a:cs typeface="Calibri" pitchFamily="34" charset="-120"/>
+              </a:rPr>
+              <a:t>•  </a:t>
+            </a:r>
+            <a:r>
+              <a:rPr lang="en-US" sz="1080" dirty="0">
+                <a:solidFill>
+                  <a:srgbClr val="5C5470"/>
+                </a:solidFill>
+                <a:latin typeface="Calibri" pitchFamily="34" charset="0"/>
+                <a:ea typeface="Calibri" pitchFamily="34" charset="-122"/>
+                <a:cs typeface="Calibri" pitchFamily="34" charset="-120"/>
+              </a:rPr>
+              <a:t>Security fully activated: 2FA and the rest of the auth posture turned on</a:t>
+            </a:r>
+            <a:endParaRPr lang="en-US" sz="1080" dirty="0"/>
+          </a:p>
+        </p:txBody>
+      </p:sp>
+      <p:sp>
+        <p:nvSpPr>
+          <p:cNvPr id="13" name="Text 9"/>
+          <p:cNvSpPr/>
+          <p:nvPr/>
+        </p:nvSpPr>
+        <p:spPr>
+          <a:xfrm>
+            <a:off x="868680" y="3913632"/>
+            <a:ext cx="4754880" cy="502920"/>
+          </a:xfrm>
+          <a:prstGeom prst="rect">
+            <a:avLst/>
+          </a:prstGeom>
+          <a:noFill/>
+          <a:ln/>
+        </p:spPr>
+        <p:txBody>
+          <a:bodyPr wrap="square" rtlCol="0" anchor="ctr"/>
+          <a:lstStyle/>
+          <a:p>
+            <a:pPr marL="0" indent="0">
+              <a:lnSpc>
+                <a:spcPct val="115000"/>
+              </a:lnSpc>
+              <a:buNone/>
+            </a:pPr>
+            <a:r>
+              <a:rPr lang="en-US" sz="1080" b="1" dirty="0">
+                <a:solidFill>
+                  <a:srgbClr val="2C0F5E"/>
+                </a:solidFill>
+                <a:latin typeface="Calibri" pitchFamily="34" charset="0"/>
+                <a:ea typeface="Calibri" pitchFamily="34" charset="-122"/>
+                <a:cs typeface="Calibri" pitchFamily="34" charset="-120"/>
+              </a:rPr>
+              <a:t>•  </a:t>
+            </a:r>
+            <a:r>
+              <a:rPr lang="en-US" sz="1080" dirty="0">
+                <a:solidFill>
+                  <a:srgbClr val="5C5470"/>
+                </a:solidFill>
+                <a:latin typeface="Calibri" pitchFamily="34" charset="0"/>
+                <a:ea typeface="Calibri" pitchFamily="34" charset="-122"/>
+                <a:cs typeface="Calibri" pitchFamily="34" charset="-120"/>
+              </a:rPr>
+              <a:t>Running on the DCDT-provisioned server, not local dev</a:t>
+            </a:r>
+            <a:endParaRPr lang="en-US" sz="1080" dirty="0"/>
+          </a:p>
+        </p:txBody>
+      </p:sp>
+      <p:sp>
+        <p:nvSpPr>
+          <p:cNvPr id="14" name="Text 10"/>
+          <p:cNvSpPr/>
+          <p:nvPr/>
+        </p:nvSpPr>
+        <p:spPr>
+          <a:xfrm>
+            <a:off x="868680" y="4443984"/>
+            <a:ext cx="4754880" cy="502920"/>
+          </a:xfrm>
+          <a:prstGeom prst="rect">
+            <a:avLst/>
+          </a:prstGeom>
+          <a:noFill/>
+          <a:ln/>
+        </p:spPr>
+        <p:txBody>
+          <a:bodyPr wrap="square" rtlCol="0" anchor="ctr"/>
+          <a:lstStyle/>
+          <a:p>
+            <a:pPr marL="0" indent="0">
+              <a:lnSpc>
+                <a:spcPct val="115000"/>
+              </a:lnSpc>
+              <a:buNone/>
+            </a:pPr>
+            <a:r>
+              <a:rPr lang="en-US" sz="1080" b="1" dirty="0">
+                <a:solidFill>
+                  <a:srgbClr val="2C0F5E"/>
+                </a:solidFill>
+                <a:latin typeface="Calibri" pitchFamily="34" charset="0"/>
+                <a:ea typeface="Calibri" pitchFamily="34" charset="-122"/>
+                <a:cs typeface="Calibri" pitchFamily="34" charset="-120"/>
+              </a:rPr>
+              <a:t>•  </a:t>
+            </a:r>
+            <a:r>
+              <a:rPr lang="en-US" sz="1080" dirty="0">
+                <a:solidFill>
+                  <a:srgbClr val="5C5470"/>
+                </a:solidFill>
+                <a:latin typeface="Calibri" pitchFamily="34" charset="0"/>
+                <a:ea typeface="Calibri" pitchFamily="34" charset="-122"/>
+                <a:cs typeface="Calibri" pitchFamily="34" charset="-120"/>
+              </a:rPr>
+              <a:t>Formal internal UAT by PSC staff, end to end</a:t>
+            </a:r>
+            <a:endParaRPr lang="en-US" sz="1080" dirty="0"/>
+          </a:p>
+        </p:txBody>
+      </p:sp>
+      <p:sp>
+        <p:nvSpPr>
+          <p:cNvPr id="15" name="Text 11"/>
+          <p:cNvSpPr/>
+          <p:nvPr/>
+        </p:nvSpPr>
+        <p:spPr>
+          <a:xfrm>
+            <a:off x="868680" y="4974336"/>
+            <a:ext cx="4754880" cy="502920"/>
+          </a:xfrm>
+          <a:prstGeom prst="rect">
+            <a:avLst/>
+          </a:prstGeom>
+          <a:noFill/>
+          <a:ln/>
+        </p:spPr>
+        <p:txBody>
+          <a:bodyPr wrap="square" rtlCol="0" anchor="ctr"/>
+          <a:lstStyle/>
+          <a:p>
+            <a:pPr marL="0" indent="0">
+              <a:lnSpc>
+                <a:spcPct val="115000"/>
+              </a:lnSpc>
+              <a:buNone/>
+            </a:pPr>
+            <a:r>
+              <a:rPr lang="en-US" sz="1080" b="1" dirty="0">
+                <a:solidFill>
+                  <a:srgbClr val="2C0F5E"/>
+                </a:solidFill>
+                <a:latin typeface="Calibri" pitchFamily="34" charset="0"/>
+                <a:ea typeface="Calibri" pitchFamily="34" charset="-122"/>
+                <a:cs typeface="Calibri" pitchFamily="34" charset="-120"/>
+              </a:rPr>
+              <a:t>•  </a:t>
+            </a:r>
+            <a:r>
+              <a:rPr lang="en-US" sz="1080" dirty="0">
+                <a:solidFill>
+                  <a:srgbClr val="5C5470"/>
+                </a:solidFill>
+                <a:latin typeface="Calibri" pitchFamily="34" charset="0"/>
+                <a:ea typeface="Calibri" pitchFamily="34" charset="-122"/>
+                <a:cs typeface="Calibri" pitchFamily="34" charset="-120"/>
+              </a:rPr>
+              <a:t>Outstanding unit workflow sign-offs confirmed (ODU, CIU, VIPAM, HRM)</a:t>
+            </a:r>
+            <a:endParaRPr lang="en-US" sz="1080" dirty="0"/>
+          </a:p>
+        </p:txBody>
+      </p:sp>
+      <p:sp>
+        <p:nvSpPr>
+          <p:cNvPr id="16" name="Shape 12"/>
+          <p:cNvSpPr/>
+          <p:nvPr/>
+        </p:nvSpPr>
+        <p:spPr>
+          <a:xfrm>
+            <a:off x="6263640" y="2148840"/>
+            <a:ext cx="5349240" cy="3611880"/>
+          </a:xfrm>
+          <a:prstGeom prst="roundRect">
+            <a:avLst>
+              <a:gd name="adj" fmla="val 2278"/>
+            </a:avLst>
+          </a:prstGeom>
+          <a:solidFill>
+            <a:srgbClr val="1E0E42"/>
+          </a:solidFill>
+          <a:ln/>
+          <a:effectLst>
+            <a:outerShdw blurRad="127000" dist="38100" dir="5400000" algn="bl" rotWithShape="0">
+              <a:srgbClr val="1B0B3E">
+                <a:alpha val="35000"/>
+              </a:srgbClr>
+            </a:outerShdw>
+          </a:effectLst>
+        </p:spPr>
+      </p:sp>
+      <p:sp>
+        <p:nvSpPr>
+          <p:cNvPr id="17" name="Text 13"/>
+          <p:cNvSpPr/>
+          <p:nvPr/>
+        </p:nvSpPr>
+        <p:spPr>
+          <a:xfrm>
+            <a:off x="6583680" y="2377440"/>
+            <a:ext cx="3291840" cy="365760"/>
+          </a:xfrm>
+          <a:prstGeom prst="rect">
+            <a:avLst/>
+          </a:prstGeom>
+          <a:noFill/>
+          <a:ln/>
+        </p:spPr>
+        <p:txBody>
+          <a:bodyPr wrap="square" rtlCol="0" anchor="ctr"/>
+          <a:lstStyle/>
+          <a:p>
+            <a:pPr marL="0" indent="0">
+              <a:buNone/>
+            </a:pPr>
+            <a:r>
+              <a:rPr lang="en-US" sz="1450" b="1" dirty="0">
+                <a:solidFill>
+                  <a:srgbClr val="D9A441"/>
+                </a:solidFill>
+                <a:latin typeface="Calibri" pitchFamily="34" charset="0"/>
+                <a:ea typeface="Calibri" pitchFamily="34" charset="-122"/>
+                <a:cs typeface="Calibri" pitchFamily="34" charset="-120"/>
+              </a:rPr>
+              <a:t>Pilot</a:t>
+            </a:r>
+            <a:endParaRPr lang="en-US" sz="1450" dirty="0"/>
+          </a:p>
+        </p:txBody>
+      </p:sp>
+      <p:sp>
+        <p:nvSpPr>
+          <p:cNvPr id="18" name="Shape 14"/>
+          <p:cNvSpPr/>
+          <p:nvPr/>
+        </p:nvSpPr>
+        <p:spPr>
+          <a:xfrm>
+            <a:off x="9601200" y="2377440"/>
+            <a:ext cx="1645920" cy="329184"/>
+          </a:xfrm>
+          <a:prstGeom prst="roundRect">
+            <a:avLst>
+              <a:gd name="adj" fmla="val 50000"/>
+            </a:avLst>
+          </a:prstGeom>
+          <a:solidFill>
+            <a:srgbClr val="FBF0DC"/>
+          </a:solidFill>
+          <a:ln/>
+        </p:spPr>
+      </p:sp>
+      <p:sp>
+        <p:nvSpPr>
+          <p:cNvPr id="19" name="Text 15"/>
+          <p:cNvSpPr/>
+          <p:nvPr/>
+        </p:nvSpPr>
+        <p:spPr>
+          <a:xfrm>
+            <a:off x="9601200" y="2377440"/>
+            <a:ext cx="1645920" cy="329184"/>
+          </a:xfrm>
+          <a:prstGeom prst="rect">
+            <a:avLst/>
+          </a:prstGeom>
+          <a:noFill/>
+          <a:ln/>
+        </p:spPr>
+        <p:txBody>
+          <a:bodyPr wrap="square" rtlCol="0" anchor="ctr"/>
+          <a:lstStyle/>
+          <a:p>
+            <a:pPr marL="0" indent="0" algn="ctr">
+              <a:buNone/>
+            </a:pPr>
+            <a:r>
+              <a:rPr lang="en-US" sz="1000" b="1" dirty="0">
+                <a:solidFill>
+                  <a:srgbClr val="B5791A"/>
+                </a:solidFill>
+                <a:latin typeface="Calibri" pitchFamily="34" charset="0"/>
+                <a:ea typeface="Calibri" pitchFamily="34" charset="-122"/>
+                <a:cs typeface="Calibri" pitchFamily="34" charset="-120"/>
+              </a:rPr>
+              <a:t>1–2 ministries</a:t>
+            </a:r>
+            <a:endParaRPr lang="en-US" sz="1000" dirty="0"/>
+          </a:p>
+        </p:txBody>
+      </p:sp>
+      <p:sp>
+        <p:nvSpPr>
+          <p:cNvPr id="20" name="Text 16"/>
+          <p:cNvSpPr/>
+          <p:nvPr/>
+        </p:nvSpPr>
+        <p:spPr>
+          <a:xfrm>
+            <a:off x="6583680" y="2852928"/>
+            <a:ext cx="4754880" cy="502920"/>
+          </a:xfrm>
+          <a:prstGeom prst="rect">
+            <a:avLst/>
+          </a:prstGeom>
+          <a:noFill/>
+          <a:ln/>
+        </p:spPr>
+        <p:txBody>
+          <a:bodyPr wrap="square" rtlCol="0" anchor="ctr"/>
+          <a:lstStyle/>
+          <a:p>
+            <a:pPr marL="0" indent="0">
+              <a:lnSpc>
+                <a:spcPct val="115000"/>
+              </a:lnSpc>
+              <a:buNone/>
+            </a:pPr>
+            <a:r>
+              <a:rPr lang="en-US" sz="1080" b="1" dirty="0">
+                <a:solidFill>
+                  <a:srgbClr val="D9A441"/>
+                </a:solidFill>
+                <a:latin typeface="Calibri" pitchFamily="34" charset="0"/>
+                <a:ea typeface="Calibri" pitchFamily="34" charset="-122"/>
+                <a:cs typeface="Calibri" pitchFamily="34" charset="-120"/>
+              </a:rPr>
+              <a:t>→  </a:t>
+            </a:r>
+            <a:r>
+              <a:rPr lang="en-US" sz="1080" dirty="0">
+                <a:solidFill>
+                  <a:srgbClr val="FFFFFF"/>
+                </a:solidFill>
+                <a:latin typeface="Calibri" pitchFamily="34" charset="0"/>
+                <a:ea typeface="Calibri" pitchFamily="34" charset="-122"/>
+                <a:cs typeface="Calibri" pitchFamily="34" charset="-120"/>
+              </a:rPr>
+              <a:t>Real ministries, real submissions, real Commission decisions</a:t>
+            </a:r>
+            <a:endParaRPr lang="en-US" sz="1080" dirty="0"/>
+          </a:p>
+        </p:txBody>
+      </p:sp>
+      <p:sp>
+        <p:nvSpPr>
+          <p:cNvPr id="21" name="Text 17"/>
+          <p:cNvSpPr/>
+          <p:nvPr/>
+        </p:nvSpPr>
+        <p:spPr>
+          <a:xfrm>
+            <a:off x="6583680" y="3383280"/>
+            <a:ext cx="4754880" cy="502920"/>
+          </a:xfrm>
+          <a:prstGeom prst="rect">
+            <a:avLst/>
+          </a:prstGeom>
+          <a:noFill/>
+          <a:ln/>
+        </p:spPr>
+        <p:txBody>
+          <a:bodyPr wrap="square" rtlCol="0" anchor="ctr"/>
+          <a:lstStyle/>
+          <a:p>
+            <a:pPr marL="0" indent="0">
+              <a:lnSpc>
+                <a:spcPct val="115000"/>
+              </a:lnSpc>
+              <a:buNone/>
+            </a:pPr>
+            <a:r>
+              <a:rPr lang="en-US" sz="1080" b="1" dirty="0">
+                <a:solidFill>
+                  <a:srgbClr val="D9A441"/>
+                </a:solidFill>
+                <a:latin typeface="Calibri" pitchFamily="34" charset="0"/>
+                <a:ea typeface="Calibri" pitchFamily="34" charset="-122"/>
+                <a:cs typeface="Calibri" pitchFamily="34" charset="-120"/>
+              </a:rPr>
+              <a:t>→  </a:t>
+            </a:r>
+            <a:r>
+              <a:rPr lang="en-US" sz="1080" dirty="0">
+                <a:solidFill>
+                  <a:srgbClr val="FFFFFF"/>
+                </a:solidFill>
+                <a:latin typeface="Calibri" pitchFamily="34" charset="0"/>
+                <a:ea typeface="Calibri" pitchFamily="34" charset="-122"/>
+                <a:cs typeface="Calibri" pitchFamily="34" charset="-120"/>
+              </a:rPr>
+              <a:t>A small, deliberate cohort - not a full rollout</a:t>
+            </a:r>
+            <a:endParaRPr lang="en-US" sz="1080" dirty="0"/>
+          </a:p>
+        </p:txBody>
+      </p:sp>
+      <p:sp>
+        <p:nvSpPr>
+          <p:cNvPr id="22" name="Text 18"/>
+          <p:cNvSpPr/>
+          <p:nvPr/>
+        </p:nvSpPr>
+        <p:spPr>
+          <a:xfrm>
+            <a:off x="6583680" y="3913632"/>
+            <a:ext cx="4754880" cy="502920"/>
+          </a:xfrm>
+          <a:prstGeom prst="rect">
+            <a:avLst/>
+          </a:prstGeom>
+          <a:noFill/>
+          <a:ln/>
+        </p:spPr>
+        <p:txBody>
+          <a:bodyPr wrap="square" rtlCol="0" anchor="ctr"/>
+          <a:lstStyle/>
+          <a:p>
+            <a:pPr marL="0" indent="0">
+              <a:lnSpc>
+                <a:spcPct val="115000"/>
+              </a:lnSpc>
+              <a:buNone/>
+            </a:pPr>
+            <a:r>
+              <a:rPr lang="en-US" sz="1080" b="1" dirty="0">
+                <a:solidFill>
+                  <a:srgbClr val="D9A441"/>
+                </a:solidFill>
+                <a:latin typeface="Calibri" pitchFamily="34" charset="0"/>
+                <a:ea typeface="Calibri" pitchFamily="34" charset="-122"/>
+                <a:cs typeface="Calibri" pitchFamily="34" charset="-120"/>
+              </a:rPr>
+              <a:t>→  </a:t>
+            </a:r>
+            <a:r>
+              <a:rPr lang="en-US" sz="1080" dirty="0">
+                <a:solidFill>
+                  <a:srgbClr val="FFFFFF"/>
+                </a:solidFill>
+                <a:latin typeface="Calibri" pitchFamily="34" charset="0"/>
+                <a:ea typeface="Calibri" pitchFamily="34" charset="-122"/>
+                <a:cs typeface="Calibri" pitchFamily="34" charset="-120"/>
+              </a:rPr>
+              <a:t>Training delivered to participants before go-live</a:t>
+            </a:r>
+            <a:endParaRPr lang="en-US" sz="1080" dirty="0"/>
+          </a:p>
+        </p:txBody>
+      </p:sp>
+      <p:sp>
+        <p:nvSpPr>
+          <p:cNvPr id="23" name="Text 19"/>
+          <p:cNvSpPr/>
+          <p:nvPr/>
+        </p:nvSpPr>
+        <p:spPr>
+          <a:xfrm>
+            <a:off x="6583680" y="4443984"/>
+            <a:ext cx="4754880" cy="502920"/>
+          </a:xfrm>
+          <a:prstGeom prst="rect">
+            <a:avLst/>
+          </a:prstGeom>
+          <a:noFill/>
+          <a:ln/>
+        </p:spPr>
+        <p:txBody>
+          <a:bodyPr wrap="square" rtlCol="0" anchor="ctr"/>
+          <a:lstStyle/>
+          <a:p>
+            <a:pPr marL="0" indent="0">
+              <a:lnSpc>
+                <a:spcPct val="115000"/>
+              </a:lnSpc>
+              <a:buNone/>
+            </a:pPr>
+            <a:r>
+              <a:rPr lang="en-US" sz="1080" b="1" dirty="0">
+                <a:solidFill>
+                  <a:srgbClr val="D9A441"/>
+                </a:solidFill>
+                <a:latin typeface="Calibri" pitchFamily="34" charset="0"/>
+                <a:ea typeface="Calibri" pitchFamily="34" charset="-122"/>
+                <a:cs typeface="Calibri" pitchFamily="34" charset="-120"/>
+              </a:rPr>
+              <a:t>→  </a:t>
+            </a:r>
+            <a:r>
+              <a:rPr lang="en-US" sz="1080" dirty="0">
+                <a:solidFill>
+                  <a:srgbClr val="FFFFFF"/>
+                </a:solidFill>
+                <a:latin typeface="Calibri" pitchFamily="34" charset="0"/>
+                <a:ea typeface="Calibri" pitchFamily="34" charset="-122"/>
+                <a:cs typeface="Calibri" pitchFamily="34" charset="-120"/>
+              </a:rPr>
+              <a:t>Helpdesk/support staffed for the duration of the pilot window</a:t>
+            </a:r>
+            <a:endParaRPr lang="en-US" sz="1080" dirty="0"/>
+          </a:p>
+        </p:txBody>
+      </p:sp>
+      <p:sp>
+        <p:nvSpPr>
+          <p:cNvPr id="24" name="Text 20"/>
+          <p:cNvSpPr/>
+          <p:nvPr/>
+        </p:nvSpPr>
+        <p:spPr>
+          <a:xfrm>
+            <a:off x="6583680" y="4974336"/>
+            <a:ext cx="4754880" cy="502920"/>
+          </a:xfrm>
+          <a:prstGeom prst="rect">
+            <a:avLst/>
+          </a:prstGeom>
+          <a:noFill/>
+          <a:ln/>
+        </p:spPr>
+        <p:txBody>
+          <a:bodyPr wrap="square" rtlCol="0" anchor="ctr"/>
+          <a:lstStyle/>
+          <a:p>
+            <a:pPr marL="0" indent="0">
+              <a:lnSpc>
+                <a:spcPct val="115000"/>
+              </a:lnSpc>
+              <a:buNone/>
+            </a:pPr>
+            <a:r>
+              <a:rPr lang="en-US" sz="1080" b="1" dirty="0">
+                <a:solidFill>
+                  <a:srgbClr val="D9A441"/>
+                </a:solidFill>
+                <a:latin typeface="Calibri" pitchFamily="34" charset="0"/>
+                <a:ea typeface="Calibri" pitchFamily="34" charset="-122"/>
+                <a:cs typeface="Calibri" pitchFamily="34" charset="-120"/>
+              </a:rPr>
+              <a:t>→  </a:t>
+            </a:r>
+            <a:r>
+              <a:rPr lang="en-US" sz="1080" dirty="0">
+                <a:solidFill>
+                  <a:srgbClr val="FFFFFF"/>
+                </a:solidFill>
+                <a:latin typeface="Calibri" pitchFamily="34" charset="0"/>
+                <a:ea typeface="Calibri" pitchFamily="34" charset="-122"/>
+                <a:cs typeface="Calibri" pitchFamily="34" charset="-120"/>
+              </a:rPr>
+              <a:t>Committee checkpoint to review results before wider rollout</a:t>
+            </a:r>
+            <a:endParaRPr lang="en-US" sz="1080" dirty="0"/>
+          </a:p>
+        </p:txBody>
+      </p:sp>
+      <p:sp>
+        <p:nvSpPr>
+          <p:cNvPr id="25" name="Shape 21"/>
+          <p:cNvSpPr/>
+          <p:nvPr/>
+        </p:nvSpPr>
+        <p:spPr>
+          <a:xfrm>
+            <a:off x="548640" y="5943600"/>
+            <a:ext cx="11064240" cy="594360"/>
+          </a:xfrm>
+          <a:prstGeom prst="roundRect">
+            <a:avLst>
+              <a:gd name="adj" fmla="val 13846"/>
+            </a:avLst>
+          </a:prstGeom>
+          <a:solidFill>
+            <a:srgbClr val="FBF3E4"/>
+          </a:solidFill>
+          <a:ln/>
+          <a:effectLst>
+            <a:outerShdw blurRad="127000" dist="38100" dir="5400000" algn="bl" rotWithShape="0">
+              <a:srgbClr val="1B0B3E">
+                <a:alpha val="35000"/>
+              </a:srgbClr>
+            </a:outerShdw>
+          </a:effectLst>
+        </p:spPr>
+      </p:sp>
+      <p:sp>
+        <p:nvSpPr>
+          <p:cNvPr id="26" name="Text 22"/>
+          <p:cNvSpPr/>
+          <p:nvPr/>
+        </p:nvSpPr>
+        <p:spPr>
+          <a:xfrm>
+            <a:off x="868680" y="5943600"/>
+            <a:ext cx="10424160" cy="594360"/>
+          </a:xfrm>
+          <a:prstGeom prst="rect">
+            <a:avLst/>
+          </a:prstGeom>
+          <a:noFill/>
+          <a:ln/>
+        </p:spPr>
+        <p:txBody>
+          <a:bodyPr wrap="square" rtlCol="0" anchor="ctr"/>
+          <a:lstStyle/>
+          <a:p>
+            <a:pPr marL="0" indent="0">
+              <a:lnSpc>
+                <a:spcPct val="115000"/>
+              </a:lnSpc>
+              <a:buNone/>
+            </a:pPr>
+            <a:r>
+              <a:rPr lang="en-US" sz="1100" b="1" i="1" dirty="0">
+                <a:solidFill>
+                  <a:srgbClr val="2C0F5E"/>
+                </a:solidFill>
+                <a:latin typeface="Calibri" pitchFamily="34" charset="0"/>
+                <a:ea typeface="Calibri" pitchFamily="34" charset="-122"/>
+                <a:cs typeface="Calibri" pitchFamily="34" charset="-120"/>
+              </a:rPr>
+              <a:t>In short:  </a:t>
+            </a:r>
+            <a:r>
+              <a:rPr lang="en-US" sz="1100" i="1" dirty="0">
+                <a:solidFill>
+                  <a:srgbClr val="5C5470"/>
+                </a:solidFill>
+                <a:latin typeface="Calibri" pitchFamily="34" charset="0"/>
+                <a:ea typeface="Calibri" pitchFamily="34" charset="-122"/>
+                <a:cs typeface="Calibri" pitchFamily="34" charset="-120"/>
+              </a:rPr>
+              <a:t>pre-pilot asks “does it work?” with people who already know the system; pilot asks “does it work for them?” with people who don't.</a:t>
+            </a:r>
+            <a:endParaRPr lang="en-US" sz="1100" dirty="0"/>
+          </a:p>
+        </p:txBody>
+      </p:sp>
+      <p:sp>
+        <p:nvSpPr>
+          <p:cNvPr id="27" name="Text 23"/>
+          <p:cNvSpPr/>
+          <p:nvPr/>
+        </p:nvSpPr>
+        <p:spPr>
+          <a:xfrm>
+            <a:off x="457200" y="6473952"/>
+            <a:ext cx="7315200" cy="274320"/>
+          </a:xfrm>
+          <a:prstGeom prst="rect">
+            <a:avLst/>
+          </a:prstGeom>
+          <a:noFill/>
+          <a:ln/>
+        </p:spPr>
+        <p:txBody>
+          <a:bodyPr wrap="square" rtlCol="0" anchor="ctr"/>
+          <a:lstStyle/>
+          <a:p>
+            <a:pPr marL="0" indent="0">
+              <a:buNone/>
+            </a:pPr>
+            <a:r>
+              <a:rPr lang="en-US" sz="900" i="1" dirty="0">
+                <a:solidFill>
+                  <a:srgbClr val="CBBFE6"/>
+                </a:solidFill>
+                <a:latin typeface="Calibri" pitchFamily="34" charset="0"/>
+                <a:ea typeface="Calibri" pitchFamily="34" charset="-122"/>
+                <a:cs typeface="Calibri" pitchFamily="34" charset="-120"/>
+              </a:rPr>
+              <a:t>SCDMS - Submission &amp; Commission Decision Management System</a:t>
+            </a:r>
+            <a:endParaRPr lang="en-US" sz="900" dirty="0"/>
+          </a:p>
+        </p:txBody>
+      </p:sp>
+      <p:sp>
+        <p:nvSpPr>
+          <p:cNvPr id="28" name="Text 24"/>
+          <p:cNvSpPr/>
+          <p:nvPr/>
+        </p:nvSpPr>
+        <p:spPr>
+          <a:xfrm>
+            <a:off x="11277295" y="6473952"/>
+            <a:ext cx="457200" cy="274320"/>
+          </a:xfrm>
+          <a:prstGeom prst="rect">
+            <a:avLst/>
+          </a:prstGeom>
+          <a:noFill/>
+          <a:ln/>
+        </p:spPr>
+        <p:txBody>
+          <a:bodyPr wrap="square" rtlCol="0" anchor="ctr"/>
+          <a:lstStyle/>
+          <a:p>
+            <a:pPr marL="0" indent="0" algn="r">
+              <a:buNone/>
+            </a:pPr>
+            <a:r>
+              <a:rPr lang="en-US" sz="900" dirty="0">
+                <a:solidFill>
+                  <a:srgbClr val="CBBFE6"/>
+                </a:solidFill>
+                <a:latin typeface="Calibri" pitchFamily="34" charset="0"/>
+                <a:ea typeface="Calibri" pitchFamily="34" charset="-122"/>
+                <a:cs typeface="Calibri" pitchFamily="34" charset="-120"/>
+              </a:rPr>
+              <a:t>19</a:t>
+            </a:r>
+            <a:endParaRPr lang="en-US" sz="900" dirty="0"/>
+          </a:p>
+        </p:txBody>
+      </p:sp>
+    </p:spTree>
+  </p:cSld>
+  <p:clrMapOvr>
+    <a:masterClrMapping/>
+  </p:clrMapOvr>
+</p:sld>
+</file>
+
+<file path=ppt/slides/slide21.xml><?xml version="1.0" encoding="utf-8"?>
+<p:sld xmlns:a="http://schemas.openxmlformats.org/drawingml/2006/main" xmlns:r="http://schemas.openxmlformats.org/officeDocument/2006/relationships" xmlns:p="http://schemas.openxmlformats.org/presentationml/2006/main">
   <p:cSld name="Slide 20">
     <p:spTree>
       <p:nvGrpSpPr>
@@ -13821,26 +14700,893 @@
           </a:prstGeom>
         </p:spPr>
       </p:pic>
+      <p:sp>
+        <p:nvSpPr>
+          <p:cNvPr id="3" name="Text 0"/>
+          <p:cNvSpPr/>
+          <p:nvPr/>
+        </p:nvSpPr>
+        <p:spPr>
+          <a:xfrm>
+            <a:off x="1691640" y="457200"/>
+            <a:ext cx="9875520" cy="320040"/>
+          </a:xfrm>
+          <a:prstGeom prst="rect">
+            <a:avLst/>
+          </a:prstGeom>
+          <a:noFill/>
+          <a:ln/>
+        </p:spPr>
+        <p:txBody>
+          <a:bodyPr wrap="square" rtlCol="0" anchor="ctr"/>
+          <a:lstStyle/>
+          <a:p>
+            <a:pPr marL="0" indent="0">
+              <a:buNone/>
+            </a:pPr>
+            <a:r>
+              <a:rPr lang="en-US" sz="1200" b="1" kern="0" spc="200" dirty="0">
+                <a:solidFill>
+                  <a:srgbClr val="D9A441"/>
+                </a:solidFill>
+                <a:latin typeface="Calibri" pitchFamily="34" charset="0"/>
+                <a:ea typeface="Calibri" pitchFamily="34" charset="-122"/>
+                <a:cs typeface="Calibri" pitchFamily="34" charset="-120"/>
+              </a:rPr>
+              <a:t>WHAT WE NEED</a:t>
+            </a:r>
+            <a:endParaRPr lang="en-US" sz="1200" dirty="0"/>
+          </a:p>
+        </p:txBody>
+      </p:sp>
+      <p:sp>
+        <p:nvSpPr>
+          <p:cNvPr id="4" name="Text 1"/>
+          <p:cNvSpPr/>
+          <p:nvPr/>
+        </p:nvSpPr>
+        <p:spPr>
+          <a:xfrm>
+            <a:off x="1691640" y="777240"/>
+            <a:ext cx="9951415" cy="822960"/>
+          </a:xfrm>
+          <a:prstGeom prst="rect">
+            <a:avLst/>
+          </a:prstGeom>
+          <a:noFill/>
+          <a:ln/>
+        </p:spPr>
+        <p:txBody>
+          <a:bodyPr wrap="square" rtlCol="0" anchor="ctr"/>
+          <a:lstStyle/>
+          <a:p>
+            <a:pPr marL="0" indent="0">
+              <a:buNone/>
+            </a:pPr>
+            <a:r>
+              <a:rPr lang="en-US" sz="2900" b="1" dirty="0">
+                <a:solidFill>
+                  <a:srgbClr val="FFFFFF"/>
+                </a:solidFill>
+                <a:latin typeface="Cambria" pitchFamily="34" charset="0"/>
+                <a:ea typeface="Cambria" pitchFamily="34" charset="-122"/>
+                <a:cs typeface="Cambria" pitchFamily="34" charset="-120"/>
+              </a:rPr>
+              <a:t>What we're asking of the Committee today</a:t>
+            </a:r>
+            <a:endParaRPr lang="en-US" sz="2900" dirty="0"/>
+          </a:p>
+        </p:txBody>
+      </p:sp>
+      <p:sp>
+        <p:nvSpPr>
+          <p:cNvPr id="5" name="Shape 2"/>
+          <p:cNvSpPr/>
+          <p:nvPr/>
+        </p:nvSpPr>
+        <p:spPr>
+          <a:xfrm>
+            <a:off x="548640" y="1783080"/>
+            <a:ext cx="5257800" cy="1874520"/>
+          </a:xfrm>
+          <a:prstGeom prst="roundRect">
+            <a:avLst>
+              <a:gd name="adj" fmla="val 4390"/>
+            </a:avLst>
+          </a:prstGeom>
+          <a:solidFill>
+            <a:srgbClr val="FBF3E4"/>
+          </a:solidFill>
+          <a:ln/>
+          <a:effectLst>
+            <a:outerShdw blurRad="127000" dist="38100" dir="5400000" algn="bl" rotWithShape="0">
+              <a:srgbClr val="1B0B3E">
+                <a:alpha val="35000"/>
+              </a:srgbClr>
+            </a:outerShdw>
+          </a:effectLst>
+        </p:spPr>
+      </p:sp>
+      <p:sp>
+        <p:nvSpPr>
+          <p:cNvPr id="6" name="Shape 3"/>
+          <p:cNvSpPr/>
+          <p:nvPr/>
+        </p:nvSpPr>
+        <p:spPr>
+          <a:xfrm>
+            <a:off x="800100" y="1988820"/>
+            <a:ext cx="594360" cy="594360"/>
+          </a:xfrm>
+          <a:prstGeom prst="ellipse">
+            <a:avLst/>
+          </a:prstGeom>
+          <a:solidFill>
+            <a:srgbClr val="D9A441"/>
+          </a:solidFill>
+          <a:ln/>
+        </p:spPr>
+      </p:sp>
+      <p:sp>
+        <p:nvSpPr>
+          <p:cNvPr id="7" name="Text 4"/>
+          <p:cNvSpPr/>
+          <p:nvPr/>
+        </p:nvSpPr>
+        <p:spPr>
+          <a:xfrm>
+            <a:off x="800100" y="1988820"/>
+            <a:ext cx="594360" cy="594360"/>
+          </a:xfrm>
+          <a:prstGeom prst="rect">
+            <a:avLst/>
+          </a:prstGeom>
+          <a:noFill/>
+          <a:ln/>
+        </p:spPr>
+        <p:txBody>
+          <a:bodyPr wrap="square" rtlCol="0" anchor="ctr"/>
+          <a:lstStyle/>
+          <a:p>
+            <a:pPr marL="0" indent="0" algn="ctr">
+              <a:buNone/>
+            </a:pPr>
+            <a:r>
+              <a:rPr lang="en-US" sz="1800" b="1" dirty="0">
+                <a:solidFill>
+                  <a:srgbClr val="2C0F5E"/>
+                </a:solidFill>
+                <a:latin typeface="Calibri" pitchFamily="34" charset="0"/>
+                <a:ea typeface="Calibri" pitchFamily="34" charset="-122"/>
+                <a:cs typeface="Calibri" pitchFamily="34" charset="-120"/>
+              </a:rPr>
+              <a:t>1</a:t>
+            </a:r>
+            <a:endParaRPr lang="en-US" sz="1800" dirty="0"/>
+          </a:p>
+        </p:txBody>
+      </p:sp>
+      <p:sp>
+        <p:nvSpPr>
+          <p:cNvPr id="8" name="Text 5"/>
+          <p:cNvSpPr/>
+          <p:nvPr/>
+        </p:nvSpPr>
+        <p:spPr>
+          <a:xfrm>
+            <a:off x="1737360" y="1984248"/>
+            <a:ext cx="3840480" cy="594360"/>
+          </a:xfrm>
+          <a:prstGeom prst="rect">
+            <a:avLst/>
+          </a:prstGeom>
+          <a:noFill/>
+          <a:ln/>
+        </p:spPr>
+        <p:txBody>
+          <a:bodyPr wrap="square" rtlCol="0" anchor="ctr"/>
+          <a:lstStyle/>
+          <a:p>
+            <a:pPr marL="0" indent="0">
+              <a:lnSpc>
+                <a:spcPct val="110000"/>
+              </a:lnSpc>
+              <a:buNone/>
+            </a:pPr>
+            <a:r>
+              <a:rPr lang="en-US" sz="1450" b="1" dirty="0">
+                <a:solidFill>
+                  <a:srgbClr val="2C0F5E"/>
+                </a:solidFill>
+                <a:latin typeface="Calibri" pitchFamily="34" charset="0"/>
+                <a:ea typeface="Calibri" pitchFamily="34" charset="-122"/>
+                <a:cs typeface="Calibri" pitchFamily="34" charset="-120"/>
+              </a:rPr>
+              <a:t>Endorse the pre-pilot &amp; pilot approach</a:t>
+            </a:r>
+            <a:endParaRPr lang="en-US" sz="1450" dirty="0"/>
+          </a:p>
+        </p:txBody>
+      </p:sp>
+      <p:sp>
+        <p:nvSpPr>
+          <p:cNvPr id="9" name="Text 6"/>
+          <p:cNvSpPr/>
+          <p:nvPr/>
+        </p:nvSpPr>
+        <p:spPr>
+          <a:xfrm>
+            <a:off x="868680" y="2834640"/>
+            <a:ext cx="4617720" cy="731520"/>
+          </a:xfrm>
+          <a:prstGeom prst="rect">
+            <a:avLst/>
+          </a:prstGeom>
+          <a:noFill/>
+          <a:ln/>
+        </p:spPr>
+        <p:txBody>
+          <a:bodyPr wrap="square" rtlCol="0" anchor="ctr"/>
+          <a:lstStyle/>
+          <a:p>
+            <a:pPr marL="0" indent="0">
+              <a:lnSpc>
+                <a:spcPct val="120000"/>
+              </a:lnSpc>
+              <a:buNone/>
+            </a:pPr>
+            <a:r>
+              <a:rPr lang="en-US" sz="1100" dirty="0">
+                <a:solidFill>
+                  <a:srgbClr val="5C5470"/>
+                </a:solidFill>
+                <a:latin typeface="Calibri" pitchFamily="34" charset="0"/>
+                <a:ea typeface="Calibri" pitchFamily="34" charset="-122"/>
+                <a:cs typeface="Calibri" pitchFamily="34" charset="-120"/>
+              </a:rPr>
+              <a:t>Agree to move from internal testing into pre-pilot, then a defined, scoped pilot phase.</a:t>
+            </a:r>
+            <a:endParaRPr lang="en-US" sz="1100" dirty="0"/>
+          </a:p>
+        </p:txBody>
+      </p:sp>
+      <p:sp>
+        <p:nvSpPr>
+          <p:cNvPr id="10" name="Shape 7"/>
+          <p:cNvSpPr/>
+          <p:nvPr/>
+        </p:nvSpPr>
+        <p:spPr>
+          <a:xfrm>
+            <a:off x="6126480" y="1783080"/>
+            <a:ext cx="5257800" cy="1874520"/>
+          </a:xfrm>
+          <a:prstGeom prst="roundRect">
+            <a:avLst>
+              <a:gd name="adj" fmla="val 4390"/>
+            </a:avLst>
+          </a:prstGeom>
+          <a:solidFill>
+            <a:srgbClr val="FBF3E4"/>
+          </a:solidFill>
+          <a:ln/>
+          <a:effectLst>
+            <a:outerShdw blurRad="127000" dist="38100" dir="5400000" algn="bl" rotWithShape="0">
+              <a:srgbClr val="1B0B3E">
+                <a:alpha val="35000"/>
+              </a:srgbClr>
+            </a:outerShdw>
+          </a:effectLst>
+        </p:spPr>
+      </p:sp>
+      <p:sp>
+        <p:nvSpPr>
+          <p:cNvPr id="11" name="Shape 8"/>
+          <p:cNvSpPr/>
+          <p:nvPr/>
+        </p:nvSpPr>
+        <p:spPr>
+          <a:xfrm>
+            <a:off x="6377940" y="1988820"/>
+            <a:ext cx="594360" cy="594360"/>
+          </a:xfrm>
+          <a:prstGeom prst="ellipse">
+            <a:avLst/>
+          </a:prstGeom>
+          <a:solidFill>
+            <a:srgbClr val="D9A441"/>
+          </a:solidFill>
+          <a:ln/>
+        </p:spPr>
+      </p:sp>
+      <p:sp>
+        <p:nvSpPr>
+          <p:cNvPr id="12" name="Text 9"/>
+          <p:cNvSpPr/>
+          <p:nvPr/>
+        </p:nvSpPr>
+        <p:spPr>
+          <a:xfrm>
+            <a:off x="6377940" y="1988820"/>
+            <a:ext cx="594360" cy="594360"/>
+          </a:xfrm>
+          <a:prstGeom prst="rect">
+            <a:avLst/>
+          </a:prstGeom>
+          <a:noFill/>
+          <a:ln/>
+        </p:spPr>
+        <p:txBody>
+          <a:bodyPr wrap="square" rtlCol="0" anchor="ctr"/>
+          <a:lstStyle/>
+          <a:p>
+            <a:pPr marL="0" indent="0" algn="ctr">
+              <a:buNone/>
+            </a:pPr>
+            <a:r>
+              <a:rPr lang="en-US" sz="1800" b="1" dirty="0">
+                <a:solidFill>
+                  <a:srgbClr val="2C0F5E"/>
+                </a:solidFill>
+                <a:latin typeface="Calibri" pitchFamily="34" charset="0"/>
+                <a:ea typeface="Calibri" pitchFamily="34" charset="-122"/>
+                <a:cs typeface="Calibri" pitchFamily="34" charset="-120"/>
+              </a:rPr>
+              <a:t>2</a:t>
+            </a:r>
+            <a:endParaRPr lang="en-US" sz="1800" dirty="0"/>
+          </a:p>
+        </p:txBody>
+      </p:sp>
+      <p:sp>
+        <p:nvSpPr>
+          <p:cNvPr id="13" name="Text 10"/>
+          <p:cNvSpPr/>
+          <p:nvPr/>
+        </p:nvSpPr>
+        <p:spPr>
+          <a:xfrm>
+            <a:off x="7315200" y="1984248"/>
+            <a:ext cx="3840480" cy="594360"/>
+          </a:xfrm>
+          <a:prstGeom prst="rect">
+            <a:avLst/>
+          </a:prstGeom>
+          <a:noFill/>
+          <a:ln/>
+        </p:spPr>
+        <p:txBody>
+          <a:bodyPr wrap="square" rtlCol="0" anchor="ctr"/>
+          <a:lstStyle/>
+          <a:p>
+            <a:pPr marL="0" indent="0">
+              <a:lnSpc>
+                <a:spcPct val="110000"/>
+              </a:lnSpc>
+              <a:buNone/>
+            </a:pPr>
+            <a:r>
+              <a:rPr lang="en-US" sz="1450" b="1" dirty="0">
+                <a:solidFill>
+                  <a:srgbClr val="2C0F5E"/>
+                </a:solidFill>
+                <a:latin typeface="Calibri" pitchFamily="34" charset="0"/>
+                <a:ea typeface="Calibri" pitchFamily="34" charset="-122"/>
+                <a:cs typeface="Calibri" pitchFamily="34" charset="-120"/>
+              </a:rPr>
+              <a:t>Confirm pilot ministries</a:t>
+            </a:r>
+            <a:endParaRPr lang="en-US" sz="1450" dirty="0"/>
+          </a:p>
+        </p:txBody>
+      </p:sp>
+      <p:sp>
+        <p:nvSpPr>
+          <p:cNvPr id="14" name="Text 11"/>
+          <p:cNvSpPr/>
+          <p:nvPr/>
+        </p:nvSpPr>
+        <p:spPr>
+          <a:xfrm>
+            <a:off x="6446520" y="2834640"/>
+            <a:ext cx="4617720" cy="731520"/>
+          </a:xfrm>
+          <a:prstGeom prst="rect">
+            <a:avLst/>
+          </a:prstGeom>
+          <a:noFill/>
+          <a:ln/>
+        </p:spPr>
+        <p:txBody>
+          <a:bodyPr wrap="square" rtlCol="0" anchor="ctr"/>
+          <a:lstStyle/>
+          <a:p>
+            <a:pPr marL="0" indent="0">
+              <a:lnSpc>
+                <a:spcPct val="120000"/>
+              </a:lnSpc>
+              <a:buNone/>
+            </a:pPr>
+            <a:r>
+              <a:rPr lang="en-US" sz="1100" dirty="0">
+                <a:solidFill>
+                  <a:srgbClr val="5C5470"/>
+                </a:solidFill>
+                <a:latin typeface="Calibri" pitchFamily="34" charset="0"/>
+                <a:ea typeface="Calibri" pitchFamily="34" charset="-122"/>
+                <a:cs typeface="Calibri" pitchFamily="34" charset="-120"/>
+              </a:rPr>
+              <a:t>Nominate the ministries / units to participate in the first pilot cohort.</a:t>
+            </a:r>
+            <a:endParaRPr lang="en-US" sz="1100" dirty="0"/>
+          </a:p>
+        </p:txBody>
+      </p:sp>
+      <p:sp>
+        <p:nvSpPr>
+          <p:cNvPr id="15" name="Shape 12"/>
+          <p:cNvSpPr/>
+          <p:nvPr/>
+        </p:nvSpPr>
+        <p:spPr>
+          <a:xfrm>
+            <a:off x="548640" y="3840480"/>
+            <a:ext cx="5257800" cy="1874520"/>
+          </a:xfrm>
+          <a:prstGeom prst="roundRect">
+            <a:avLst>
+              <a:gd name="adj" fmla="val 4390"/>
+            </a:avLst>
+          </a:prstGeom>
+          <a:solidFill>
+            <a:srgbClr val="FBF3E4"/>
+          </a:solidFill>
+          <a:ln/>
+          <a:effectLst>
+            <a:outerShdw blurRad="127000" dist="38100" dir="5400000" algn="bl" rotWithShape="0">
+              <a:srgbClr val="1B0B3E">
+                <a:alpha val="35000"/>
+              </a:srgbClr>
+            </a:outerShdw>
+          </a:effectLst>
+        </p:spPr>
+      </p:sp>
+      <p:sp>
+        <p:nvSpPr>
+          <p:cNvPr id="16" name="Shape 13"/>
+          <p:cNvSpPr/>
+          <p:nvPr/>
+        </p:nvSpPr>
+        <p:spPr>
+          <a:xfrm>
+            <a:off x="800100" y="4046220"/>
+            <a:ext cx="594360" cy="594360"/>
+          </a:xfrm>
+          <a:prstGeom prst="ellipse">
+            <a:avLst/>
+          </a:prstGeom>
+          <a:solidFill>
+            <a:srgbClr val="D9A441"/>
+          </a:solidFill>
+          <a:ln/>
+        </p:spPr>
+      </p:sp>
+      <p:sp>
+        <p:nvSpPr>
+          <p:cNvPr id="17" name="Text 14"/>
+          <p:cNvSpPr/>
+          <p:nvPr/>
+        </p:nvSpPr>
+        <p:spPr>
+          <a:xfrm>
+            <a:off x="800100" y="4046220"/>
+            <a:ext cx="594360" cy="594360"/>
+          </a:xfrm>
+          <a:prstGeom prst="rect">
+            <a:avLst/>
+          </a:prstGeom>
+          <a:noFill/>
+          <a:ln/>
+        </p:spPr>
+        <p:txBody>
+          <a:bodyPr wrap="square" rtlCol="0" anchor="ctr"/>
+          <a:lstStyle/>
+          <a:p>
+            <a:pPr marL="0" indent="0" algn="ctr">
+              <a:buNone/>
+            </a:pPr>
+            <a:r>
+              <a:rPr lang="en-US" sz="1800" b="1" dirty="0">
+                <a:solidFill>
+                  <a:srgbClr val="2C0F5E"/>
+                </a:solidFill>
+                <a:latin typeface="Calibri" pitchFamily="34" charset="0"/>
+                <a:ea typeface="Calibri" pitchFamily="34" charset="-122"/>
+                <a:cs typeface="Calibri" pitchFamily="34" charset="-120"/>
+              </a:rPr>
+              <a:t>3</a:t>
+            </a:r>
+            <a:endParaRPr lang="en-US" sz="1800" dirty="0"/>
+          </a:p>
+        </p:txBody>
+      </p:sp>
+      <p:sp>
+        <p:nvSpPr>
+          <p:cNvPr id="18" name="Text 15"/>
+          <p:cNvSpPr/>
+          <p:nvPr/>
+        </p:nvSpPr>
+        <p:spPr>
+          <a:xfrm>
+            <a:off x="1737360" y="4041648"/>
+            <a:ext cx="3840480" cy="594360"/>
+          </a:xfrm>
+          <a:prstGeom prst="rect">
+            <a:avLst/>
+          </a:prstGeom>
+          <a:noFill/>
+          <a:ln/>
+        </p:spPr>
+        <p:txBody>
+          <a:bodyPr wrap="square" rtlCol="0" anchor="ctr"/>
+          <a:lstStyle/>
+          <a:p>
+            <a:pPr marL="0" indent="0">
+              <a:lnSpc>
+                <a:spcPct val="110000"/>
+              </a:lnSpc>
+              <a:buNone/>
+            </a:pPr>
+            <a:r>
+              <a:rPr lang="en-US" sz="1450" b="1" dirty="0">
+                <a:solidFill>
+                  <a:srgbClr val="2C0F5E"/>
+                </a:solidFill>
+                <a:latin typeface="Calibri" pitchFamily="34" charset="0"/>
+                <a:ea typeface="Calibri" pitchFamily="34" charset="-122"/>
+                <a:cs typeface="Calibri" pitchFamily="34" charset="-120"/>
+              </a:rPr>
+              <a:t>Support data &amp; user readiness</a:t>
+            </a:r>
+            <a:endParaRPr lang="en-US" sz="1450" dirty="0"/>
+          </a:p>
+        </p:txBody>
+      </p:sp>
+      <p:sp>
+        <p:nvSpPr>
+          <p:cNvPr id="19" name="Text 16"/>
+          <p:cNvSpPr/>
+          <p:nvPr/>
+        </p:nvSpPr>
+        <p:spPr>
+          <a:xfrm>
+            <a:off x="868680" y="4892040"/>
+            <a:ext cx="4617720" cy="731520"/>
+          </a:xfrm>
+          <a:prstGeom prst="rect">
+            <a:avLst/>
+          </a:prstGeom>
+          <a:noFill/>
+          <a:ln/>
+        </p:spPr>
+        <p:txBody>
+          <a:bodyPr wrap="square" rtlCol="0" anchor="ctr"/>
+          <a:lstStyle/>
+          <a:p>
+            <a:pPr marL="0" indent="0">
+              <a:lnSpc>
+                <a:spcPct val="120000"/>
+              </a:lnSpc>
+              <a:buNone/>
+            </a:pPr>
+            <a:r>
+              <a:rPr lang="en-US" sz="1100" dirty="0">
+                <a:solidFill>
+                  <a:srgbClr val="5C5470"/>
+                </a:solidFill>
+                <a:latin typeface="Calibri" pitchFamily="34" charset="0"/>
+                <a:ea typeface="Calibri" pitchFamily="34" charset="-122"/>
+                <a:cs typeface="Calibri" pitchFamily="34" charset="-120"/>
+              </a:rPr>
+              <a:t>Approve provisioning real reference data and verified user accounts for pilot participants.</a:t>
+            </a:r>
+            <a:endParaRPr lang="en-US" sz="1100" dirty="0"/>
+          </a:p>
+        </p:txBody>
+      </p:sp>
+      <p:sp>
+        <p:nvSpPr>
+          <p:cNvPr id="20" name="Shape 17"/>
+          <p:cNvSpPr/>
+          <p:nvPr/>
+        </p:nvSpPr>
+        <p:spPr>
+          <a:xfrm>
+            <a:off x="6126480" y="3840480"/>
+            <a:ext cx="5257800" cy="1874520"/>
+          </a:xfrm>
+          <a:prstGeom prst="roundRect">
+            <a:avLst>
+              <a:gd name="adj" fmla="val 4390"/>
+            </a:avLst>
+          </a:prstGeom>
+          <a:solidFill>
+            <a:srgbClr val="FBF3E4"/>
+          </a:solidFill>
+          <a:ln/>
+          <a:effectLst>
+            <a:outerShdw blurRad="127000" dist="38100" dir="5400000" algn="bl" rotWithShape="0">
+              <a:srgbClr val="1B0B3E">
+                <a:alpha val="35000"/>
+              </a:srgbClr>
+            </a:outerShdw>
+          </a:effectLst>
+        </p:spPr>
+      </p:sp>
+      <p:sp>
+        <p:nvSpPr>
+          <p:cNvPr id="21" name="Shape 18"/>
+          <p:cNvSpPr/>
+          <p:nvPr/>
+        </p:nvSpPr>
+        <p:spPr>
+          <a:xfrm>
+            <a:off x="6377940" y="4046220"/>
+            <a:ext cx="594360" cy="594360"/>
+          </a:xfrm>
+          <a:prstGeom prst="ellipse">
+            <a:avLst/>
+          </a:prstGeom>
+          <a:solidFill>
+            <a:srgbClr val="D9A441"/>
+          </a:solidFill>
+          <a:ln/>
+        </p:spPr>
+      </p:sp>
+      <p:sp>
+        <p:nvSpPr>
+          <p:cNvPr id="22" name="Text 19"/>
+          <p:cNvSpPr/>
+          <p:nvPr/>
+        </p:nvSpPr>
+        <p:spPr>
+          <a:xfrm>
+            <a:off x="6377940" y="4046220"/>
+            <a:ext cx="594360" cy="594360"/>
+          </a:xfrm>
+          <a:prstGeom prst="rect">
+            <a:avLst/>
+          </a:prstGeom>
+          <a:noFill/>
+          <a:ln/>
+        </p:spPr>
+        <p:txBody>
+          <a:bodyPr wrap="square" rtlCol="0" anchor="ctr"/>
+          <a:lstStyle/>
+          <a:p>
+            <a:pPr marL="0" indent="0" algn="ctr">
+              <a:buNone/>
+            </a:pPr>
+            <a:r>
+              <a:rPr lang="en-US" sz="1800" b="1" dirty="0">
+                <a:solidFill>
+                  <a:srgbClr val="2C0F5E"/>
+                </a:solidFill>
+                <a:latin typeface="Calibri" pitchFamily="34" charset="0"/>
+                <a:ea typeface="Calibri" pitchFamily="34" charset="-122"/>
+                <a:cs typeface="Calibri" pitchFamily="34" charset="-120"/>
+              </a:rPr>
+              <a:t>4</a:t>
+            </a:r>
+            <a:endParaRPr lang="en-US" sz="1800" dirty="0"/>
+          </a:p>
+        </p:txBody>
+      </p:sp>
+      <p:sp>
+        <p:nvSpPr>
+          <p:cNvPr id="23" name="Text 20"/>
+          <p:cNvSpPr/>
+          <p:nvPr/>
+        </p:nvSpPr>
+        <p:spPr>
+          <a:xfrm>
+            <a:off x="7315200" y="4041648"/>
+            <a:ext cx="3840480" cy="594360"/>
+          </a:xfrm>
+          <a:prstGeom prst="rect">
+            <a:avLst/>
+          </a:prstGeom>
+          <a:noFill/>
+          <a:ln/>
+        </p:spPr>
+        <p:txBody>
+          <a:bodyPr wrap="square" rtlCol="0" anchor="ctr"/>
+          <a:lstStyle/>
+          <a:p>
+            <a:pPr marL="0" indent="0">
+              <a:lnSpc>
+                <a:spcPct val="110000"/>
+              </a:lnSpc>
+              <a:buNone/>
+            </a:pPr>
+            <a:r>
+              <a:rPr lang="en-US" sz="1450" b="1" dirty="0">
+                <a:solidFill>
+                  <a:srgbClr val="2C0F5E"/>
+                </a:solidFill>
+                <a:latin typeface="Calibri" pitchFamily="34" charset="0"/>
+                <a:ea typeface="Calibri" pitchFamily="34" charset="-122"/>
+                <a:cs typeface="Calibri" pitchFamily="34" charset="-120"/>
+              </a:rPr>
+              <a:t>Set a review checkpoint</a:t>
+            </a:r>
+            <a:endParaRPr lang="en-US" sz="1450" dirty="0"/>
+          </a:p>
+        </p:txBody>
+      </p:sp>
+      <p:sp>
+        <p:nvSpPr>
+          <p:cNvPr id="24" name="Text 21"/>
+          <p:cNvSpPr/>
+          <p:nvPr/>
+        </p:nvSpPr>
+        <p:spPr>
+          <a:xfrm>
+            <a:off x="6446520" y="4892040"/>
+            <a:ext cx="4617720" cy="731520"/>
+          </a:xfrm>
+          <a:prstGeom prst="rect">
+            <a:avLst/>
+          </a:prstGeom>
+          <a:noFill/>
+          <a:ln/>
+        </p:spPr>
+        <p:txBody>
+          <a:bodyPr wrap="square" rtlCol="0" anchor="ctr"/>
+          <a:lstStyle/>
+          <a:p>
+            <a:pPr marL="0" indent="0">
+              <a:lnSpc>
+                <a:spcPct val="120000"/>
+              </a:lnSpc>
+              <a:buNone/>
+            </a:pPr>
+            <a:r>
+              <a:rPr lang="en-US" sz="1100" dirty="0">
+                <a:solidFill>
+                  <a:srgbClr val="5C5470"/>
+                </a:solidFill>
+                <a:latin typeface="Calibri" pitchFamily="34" charset="0"/>
+                <a:ea typeface="Calibri" pitchFamily="34" charset="-122"/>
+                <a:cs typeface="Calibri" pitchFamily="34" charset="-120"/>
+              </a:rPr>
+              <a:t>Agree a date for the Committee to review pilot results before wider rollout.</a:t>
+            </a:r>
+            <a:endParaRPr lang="en-US" sz="1100" dirty="0"/>
+          </a:p>
+        </p:txBody>
+      </p:sp>
+      <p:sp>
+        <p:nvSpPr>
+          <p:cNvPr id="25" name="Text 22"/>
+          <p:cNvSpPr/>
+          <p:nvPr/>
+        </p:nvSpPr>
+        <p:spPr>
+          <a:xfrm>
+            <a:off x="457200" y="6473952"/>
+            <a:ext cx="7315200" cy="274320"/>
+          </a:xfrm>
+          <a:prstGeom prst="rect">
+            <a:avLst/>
+          </a:prstGeom>
+          <a:noFill/>
+          <a:ln/>
+        </p:spPr>
+        <p:txBody>
+          <a:bodyPr wrap="square" rtlCol="0" anchor="ctr"/>
+          <a:lstStyle/>
+          <a:p>
+            <a:pPr marL="0" indent="0">
+              <a:buNone/>
+            </a:pPr>
+            <a:r>
+              <a:rPr lang="en-US" sz="900" i="1" dirty="0">
+                <a:solidFill>
+                  <a:srgbClr val="CBBFE6"/>
+                </a:solidFill>
+                <a:latin typeface="Calibri" pitchFamily="34" charset="0"/>
+                <a:ea typeface="Calibri" pitchFamily="34" charset="-122"/>
+                <a:cs typeface="Calibri" pitchFamily="34" charset="-120"/>
+              </a:rPr>
+              <a:t>SCDMS - Submission &amp; Commission Decision Management System</a:t>
+            </a:r>
+            <a:endParaRPr lang="en-US" sz="900" dirty="0"/>
+          </a:p>
+        </p:txBody>
+      </p:sp>
+      <p:sp>
+        <p:nvSpPr>
+          <p:cNvPr id="26" name="Text 23"/>
+          <p:cNvSpPr/>
+          <p:nvPr/>
+        </p:nvSpPr>
+        <p:spPr>
+          <a:xfrm>
+            <a:off x="11277295" y="6473952"/>
+            <a:ext cx="457200" cy="274320"/>
+          </a:xfrm>
+          <a:prstGeom prst="rect">
+            <a:avLst/>
+          </a:prstGeom>
+          <a:noFill/>
+          <a:ln/>
+        </p:spPr>
+        <p:txBody>
+          <a:bodyPr wrap="square" rtlCol="0" anchor="ctr"/>
+          <a:lstStyle/>
+          <a:p>
+            <a:pPr marL="0" indent="0" algn="r">
+              <a:buNone/>
+            </a:pPr>
+            <a:r>
+              <a:rPr lang="en-US" sz="900" dirty="0">
+                <a:solidFill>
+                  <a:srgbClr val="CBBFE6"/>
+                </a:solidFill>
+                <a:latin typeface="Calibri" pitchFamily="34" charset="0"/>
+                <a:ea typeface="Calibri" pitchFamily="34" charset="-122"/>
+                <a:cs typeface="Calibri" pitchFamily="34" charset="-120"/>
+              </a:rPr>
+              <a:t>20</a:t>
+            </a:r>
+            <a:endParaRPr lang="en-US" sz="900" dirty="0"/>
+          </a:p>
+        </p:txBody>
+      </p:sp>
+    </p:spTree>
+  </p:cSld>
+  <p:clrMapOvr>
+    <a:masterClrMapping/>
+  </p:clrMapOvr>
+</p:sld>
+</file>
+
+<file path=ppt/slides/slide22.xml><?xml version="1.0" encoding="utf-8"?>
+<p:sld xmlns:a="http://schemas.openxmlformats.org/drawingml/2006/main" xmlns:r="http://schemas.openxmlformats.org/officeDocument/2006/relationships" xmlns:p="http://schemas.openxmlformats.org/presentationml/2006/main">
+  <p:cSld name="Slide 21">
+    <p:spTree>
+      <p:nvGrpSpPr>
+        <p:cNvPr id="1" name=""/>
+        <p:cNvGrpSpPr/>
+        <p:nvPr/>
+      </p:nvGrpSpPr>
+      <p:grpSpPr>
+        <a:xfrm>
+          <a:off x="0" y="0"/>
+          <a:ext cx="0" cy="0"/>
+          <a:chOff x="0" y="0"/>
+          <a:chExt cx="0" cy="0"/>
+        </a:xfrm>
+      </p:grpSpPr>
       <p:pic>
         <p:nvPicPr>
-          <p:cNvPr id="3" name="Image 1" descr="C:\Users\Herman Tevilili\AppData\Local\Temp\claude\C--Users-Herman-Tevilili-Documents-GitHub-commissionDecisionApp-v1-0\2d2d3a12-ae9e-4f4b-990a-3e1ebe47ec28\scratchpad\scdms_deck\assets\crown.png"/>
+          <p:cNvPr id="2" name="Image 0" descr="C:\Users\Herman Tevilili\AppData\Local\Temp\claude\C--Users-Herman-Tevilili-Documents-GitHub-commissionDecisionApp-v1-0\2d2d3a12-ae9e-4f4b-990a-3e1ebe47ec28\scratchpad\scdms_deck\assets\bg.jpg"/>
           <p:cNvPicPr>
             <a:picLocks noChangeAspect="1"/>
           </p:cNvPicPr>
           <p:nvPr/>
         </p:nvPicPr>
         <p:blipFill>
-          <a:blip r:embed="rId4">
-            <a:alphaModFix amt="92000"/>
-          </a:blip>
+          <a:blip r:embed="rId3"/>
           <a:stretch>
             <a:fillRect/>
           </a:stretch>
         </p:blipFill>
         <p:spPr>
           <a:xfrm>
-            <a:off x="-914400" y="-868680"/>
-            <a:ext cx="3383280" cy="2804848"/>
+            <a:off x="0" y="0"/>
+            <a:ext cx="12191695" cy="8127797"/>
           </a:xfrm>
           <a:prstGeom prst="rect">
             <a:avLst/>

--- a/SCDMS_Committee_Progress_Update.pptx
+++ b/SCDMS_Committee_Progress_Update.pptx
@@ -23,13 +23,13 @@
     <p:sldId id="268" r:id="rId14"/>
     <p:sldId id="269" r:id="rId15"/>
     <p:sldId id="270" r:id="rId16"/>
-    <p:sldId id="277" r:id="rId17"/>
-    <p:sldId id="271" r:id="rId18"/>
-    <p:sldId id="272" r:id="rId19"/>
-    <p:sldId id="273" r:id="rId20"/>
-    <p:sldId id="274" r:id="rId21"/>
-    <p:sldId id="275" r:id="rId22"/>
-    <p:sldId id="276" r:id="rId23"/>
+    <p:sldId id="271" r:id="rId17"/>
+    <p:sldId id="272" r:id="rId18"/>
+    <p:sldId id="273" r:id="rId19"/>
+    <p:sldId id="274" r:id="rId20"/>
+    <p:sldId id="275" r:id="rId21"/>
+    <p:sldId id="276" r:id="rId22"/>
+    <p:sldId id="277" r:id="rId23"/>
   </p:sldIdLst>
   <p:sldSz cx="12192000" cy="6858000"/>
   <p:notesSz cx="6858000" cy="12192000"/>
@@ -158,7 +158,7 @@
     </p:spTree>
     <p:extLst>
       <p:ext uri="{BB962C8B-B14F-4D97-AF65-F5344CB8AC3E}">
-        <p14:creationId xmlns:p14="http://schemas.microsoft.com/office/powerpoint/2010/main" val="1696054574"/>
+        <p14:creationId xmlns:p14="http://schemas.microsoft.com/office/powerpoint/2010/main" val="1054520784"/>
       </p:ext>
     </p:extLst>
   </p:cSld>
@@ -851,13 +851,7 @@
   <p:cSld>
     <p:spTree>
       <p:nvGrpSpPr>
-        <p:cNvPr id="1" name="">
-          <a:extLst>
-            <a:ext uri="{FF2B5EF4-FFF2-40B4-BE49-F238E27FC236}">
-              <a16:creationId xmlns:a16="http://schemas.microsoft.com/office/drawing/2014/main" id="{95DCAB79-73FC-D842-65ED-02DE5BB0D61B}"/>
-            </a:ext>
-          </a:extLst>
-        </p:cNvPr>
+        <p:cNvPr id="1" name=""/>
         <p:cNvGrpSpPr/>
         <p:nvPr/>
       </p:nvGrpSpPr>
@@ -871,13 +865,7 @@
       </p:grpSpPr>
       <p:sp>
         <p:nvSpPr>
-          <p:cNvPr id="2" name="Slide Image Placeholder 1">
-            <a:extLst>
-              <a:ext uri="{FF2B5EF4-FFF2-40B4-BE49-F238E27FC236}">
-                <a16:creationId xmlns:a16="http://schemas.microsoft.com/office/drawing/2014/main" id="{E89712A1-508B-CD2F-E1FF-4D033E99F96D}"/>
-              </a:ext>
-            </a:extLst>
-          </p:cNvPr>
+          <p:cNvPr id="2" name="Slide Image Placeholder 1"/>
           <p:cNvSpPr>
             <a:spLocks noGrp="1" noRot="1" noChangeAspect="1"/>
           </p:cNvSpPr>
@@ -889,13 +877,7 @@
       </p:sp>
       <p:sp>
         <p:nvSpPr>
-          <p:cNvPr id="3" name="Notes Placeholder 2">
-            <a:extLst>
-              <a:ext uri="{FF2B5EF4-FFF2-40B4-BE49-F238E27FC236}">
-                <a16:creationId xmlns:a16="http://schemas.microsoft.com/office/drawing/2014/main" id="{FEA9022C-E56C-D655-D5AE-C8F3442CFFB9}"/>
-              </a:ext>
-            </a:extLst>
-          </p:cNvPr>
+          <p:cNvPr id="3" name="Notes Placeholder 2"/>
           <p:cNvSpPr>
             <a:spLocks noGrp="1"/>
           </p:cNvSpPr>
@@ -914,13 +896,7 @@
       </p:sp>
       <p:sp>
         <p:nvSpPr>
-          <p:cNvPr id="4" name="Slide Number Placeholder 3">
-            <a:extLst>
-              <a:ext uri="{FF2B5EF4-FFF2-40B4-BE49-F238E27FC236}">
-                <a16:creationId xmlns:a16="http://schemas.microsoft.com/office/drawing/2014/main" id="{CC26921C-5EEB-26A8-A801-96620E4E6415}"/>
-              </a:ext>
-            </a:extLst>
-          </p:cNvPr>
+          <p:cNvPr id="4" name="Slide Number Placeholder 3"/>
           <p:cNvSpPr>
             <a:spLocks noGrp="1"/>
           </p:cNvSpPr>
@@ -944,7 +920,7 @@
     </p:spTree>
     <p:extLst>
       <p:ext uri="{BB962C8B-B14F-4D97-AF65-F5344CB8AC3E}">
-        <p14:creationId xmlns:p14="http://schemas.microsoft.com/office/powerpoint/2010/main" val="3954865210"/>
+        <p14:creationId xmlns:p14="http://schemas.microsoft.com/office/powerpoint/2010/main" val="1024086991"/>
       </p:ext>
     </p:extLst>
   </p:cSld>
@@ -2698,7 +2674,7 @@
                 <a:ea typeface="Calibri" pitchFamily="34" charset="-122"/>
                 <a:cs typeface="Calibri" pitchFamily="34" charset="-120"/>
               </a:rPr>
-              <a:t>July 2026</a:t>
+              <a:t>Presented by: Information &amp; Technology Planning Division (IPDU)  |  July 2026</a:t>
             </a:r>
             <a:endParaRPr lang="en-US" sz="1300" dirty="0"/>
           </a:p>
@@ -8955,13 +8931,66 @@
       </p:sp>
       <p:sp>
         <p:nvSpPr>
+          <p:cNvPr id="13" name="Text 10"/>
+          <p:cNvSpPr/>
+          <p:nvPr/>
+        </p:nvSpPr>
+        <p:spPr>
+          <a:xfrm>
+            <a:off x="868680" y="4443984"/>
+            <a:ext cx="4754880" cy="512064"/>
+          </a:xfrm>
+          <a:prstGeom prst="rect">
+            <a:avLst/>
+          </a:prstGeom>
+          <a:noFill/>
+          <a:ln/>
+        </p:spPr>
+        <p:txBody>
+          <a:bodyPr wrap="square" rtlCol="0" anchor="ctr"/>
+          <a:lstStyle/>
+          <a:p>
+            <a:pPr marL="0" indent="0">
+              <a:lnSpc>
+                <a:spcPct val="115000"/>
+              </a:lnSpc>
+              <a:buNone/>
+            </a:pPr>
+            <a:r>
+              <a:rPr lang="en-US" sz="1100" b="1" dirty="0">
+                <a:solidFill>
+                  <a:srgbClr val="2C0F5E"/>
+                </a:solidFill>
+                <a:latin typeface="Calibri" pitchFamily="34" charset="0"/>
+                <a:ea typeface="Calibri" pitchFamily="34" charset="-122"/>
+                <a:cs typeface="Calibri" pitchFamily="34" charset="-120"/>
+              </a:rPr>
+              <a:t>•  </a:t>
+            </a:r>
+            <a:r>
+              <a:rPr lang="en-US" sz="1100" dirty="0">
+                <a:solidFill>
+                  <a:srgbClr val="5C5470"/>
+                </a:solidFill>
+                <a:latin typeface="Calibri" pitchFamily="34" charset="0"/>
+                <a:ea typeface="Calibri" pitchFamily="34" charset="-122"/>
+                <a:cs typeface="Calibri" pitchFamily="34" charset="-120"/>
+              </a:rPr>
+              <a:t>Procurement: OPSC submits the spec → Computer World (official Dell reseller) → Dell builds the server to order</a:t>
+            </a:r>
+            <a:endParaRPr lang="en-US" sz="1100" dirty="0"/>
+          </a:p>
+        </p:txBody>
+      </p:sp>
+      <p:sp>
+        <p:nvSpPr>
           <p:cNvPr id="14" name="Text 11"/>
           <p:cNvSpPr/>
           <p:nvPr/>
         </p:nvSpPr>
         <p:spPr>
           <a:xfrm>
-            <a:off x="868680" y="4443984"/>
+            <a:off x="868680" y="5010912"/>
             <a:ext cx="4754880" cy="512064"/>
           </a:xfrm>
           <a:prstGeom prst="rect">
@@ -9091,10 +9120,7 @@
             </a:avLst>
           </a:prstGeom>
           <a:solidFill>
-            <a:schemeClr val="accent6">
-              <a:lumMod val="20000"/>
-              <a:lumOff val="80000"/>
-            </a:schemeClr>
+            <a:srgbClr val="FBF0DC"/>
           </a:solidFill>
           <a:ln/>
         </p:spPr>
@@ -9126,23 +9152,15 @@
             <a:r>
               <a:rPr lang="en-US" sz="1000" b="1" dirty="0">
                 <a:solidFill>
-                  <a:schemeClr val="accent6">
-                    <a:lumMod val="75000"/>
-                  </a:schemeClr>
-                </a:solidFill>
-                <a:latin typeface="Calibri" pitchFamily="34" charset="0"/>
-                <a:ea typeface="Calibri" pitchFamily="34" charset="-122"/>
-                <a:cs typeface="Calibri" pitchFamily="34" charset="-120"/>
-              </a:rPr>
-              <a:t>Complete</a:t>
-            </a:r>
-            <a:endParaRPr lang="en-US" sz="1000" dirty="0">
-              <a:solidFill>
-                <a:schemeClr val="accent6">
-                  <a:lumMod val="75000"/>
-                </a:schemeClr>
-              </a:solidFill>
-            </a:endParaRPr>
+                  <a:srgbClr val="B5791A"/>
+                </a:solidFill>
+                <a:latin typeface="Calibri" pitchFamily="34" charset="0"/>
+                <a:ea typeface="Calibri" pitchFamily="34" charset="-122"/>
+                <a:cs typeface="Calibri" pitchFamily="34" charset="-120"/>
+              </a:rPr>
+              <a:t>In progress</a:t>
+            </a:r>
+            <a:endParaRPr lang="en-US" sz="1000" dirty="0"/>
           </a:p>
         </p:txBody>
       </p:sp>
@@ -9201,13 +9219,13 @@
       </p:sp>
       <p:sp>
         <p:nvSpPr>
-          <p:cNvPr id="21" name="Text 18"/>
-          <p:cNvSpPr/>
-          <p:nvPr/>
-        </p:nvSpPr>
-        <p:spPr>
-          <a:xfrm>
-            <a:off x="6583680" y="3236976"/>
+          <p:cNvPr id="20" name="Text 17"/>
+          <p:cNvSpPr/>
+          <p:nvPr/>
+        </p:nvSpPr>
+        <p:spPr>
+          <a:xfrm>
+            <a:off x="6583680" y="3310128"/>
             <a:ext cx="4754880" cy="512064"/>
           </a:xfrm>
           <a:prstGeom prst="rect">
@@ -9246,7 +9264,113 @@
                 <a:ea typeface="Calibri" pitchFamily="34" charset="-122"/>
                 <a:cs typeface="Calibri" pitchFamily="34" charset="-120"/>
               </a:rPr>
+              <a:t>Scope and specification currently being worked through with DCDT</a:t>
+            </a:r>
+            <a:endParaRPr lang="en-US" sz="1100" dirty="0"/>
+          </a:p>
+        </p:txBody>
+      </p:sp>
+      <p:sp>
+        <p:nvSpPr>
+          <p:cNvPr id="21" name="Text 18"/>
+          <p:cNvSpPr/>
+          <p:nvPr/>
+        </p:nvSpPr>
+        <p:spPr>
+          <a:xfrm>
+            <a:off x="6583680" y="3877056"/>
+            <a:ext cx="4754880" cy="512064"/>
+          </a:xfrm>
+          <a:prstGeom prst="rect">
+            <a:avLst/>
+          </a:prstGeom>
+          <a:noFill/>
+          <a:ln/>
+        </p:spPr>
+        <p:txBody>
+          <a:bodyPr wrap="square" rtlCol="0" anchor="ctr"/>
+          <a:lstStyle/>
+          <a:p>
+            <a:pPr marL="0" indent="0">
+              <a:lnSpc>
+                <a:spcPct val="115000"/>
+              </a:lnSpc>
+              <a:buNone/>
+            </a:pPr>
+            <a:r>
+              <a:rPr lang="en-US" sz="1100" b="1" dirty="0">
+                <a:solidFill>
+                  <a:srgbClr val="D9A441"/>
+                </a:solidFill>
+                <a:latin typeface="Calibri" pitchFamily="34" charset="0"/>
+                <a:ea typeface="Calibri" pitchFamily="34" charset="-122"/>
+                <a:cs typeface="Calibri" pitchFamily="34" charset="-120"/>
+              </a:rPr>
+              <a:t>→  </a:t>
+            </a:r>
+            <a:r>
+              <a:rPr lang="en-US" sz="1100" dirty="0">
+                <a:solidFill>
+                  <a:srgbClr val="FFFFFF"/>
+                </a:solidFill>
+                <a:latin typeface="Calibri" pitchFamily="34" charset="0"/>
+                <a:ea typeface="Calibri" pitchFamily="34" charset="-122"/>
+                <a:cs typeface="Calibri" pitchFamily="34" charset="-120"/>
+              </a:rPr>
               <a:t>Same Computer World → Dell build-to-order route applies once the spec is finalised</a:t>
+            </a:r>
+            <a:endParaRPr lang="en-US" sz="1100" dirty="0"/>
+          </a:p>
+        </p:txBody>
+      </p:sp>
+      <p:sp>
+        <p:nvSpPr>
+          <p:cNvPr id="22" name="Text 19"/>
+          <p:cNvSpPr/>
+          <p:nvPr/>
+        </p:nvSpPr>
+        <p:spPr>
+          <a:xfrm>
+            <a:off x="6583680" y="4443984"/>
+            <a:ext cx="4754880" cy="512064"/>
+          </a:xfrm>
+          <a:prstGeom prst="rect">
+            <a:avLst/>
+          </a:prstGeom>
+          <a:noFill/>
+          <a:ln/>
+        </p:spPr>
+        <p:txBody>
+          <a:bodyPr wrap="square" rtlCol="0" anchor="ctr"/>
+          <a:lstStyle/>
+          <a:p>
+            <a:pPr marL="0" indent="0">
+              <a:lnSpc>
+                <a:spcPct val="115000"/>
+              </a:lnSpc>
+              <a:buNone/>
+            </a:pPr>
+            <a:r>
+              <a:rPr lang="en-US" sz="1100" b="1" dirty="0">
+                <a:solidFill>
+                  <a:srgbClr val="D9A441"/>
+                </a:solidFill>
+                <a:latin typeface="Calibri" pitchFamily="34" charset="0"/>
+                <a:ea typeface="Calibri" pitchFamily="34" charset="-122"/>
+                <a:cs typeface="Calibri" pitchFamily="34" charset="-120"/>
+              </a:rPr>
+              <a:t>→  </a:t>
+            </a:r>
+            <a:r>
+              <a:rPr lang="en-US" sz="1100" dirty="0">
+                <a:solidFill>
+                  <a:srgbClr val="FFFFFF"/>
+                </a:solidFill>
+                <a:latin typeface="Calibri" pitchFamily="34" charset="0"/>
+                <a:ea typeface="Calibri" pitchFamily="34" charset="-122"/>
+                <a:cs typeface="Calibri" pitchFamily="34" charset="-120"/>
+              </a:rPr>
+              <a:t>Not yet provisioned - timeline depends on DCDT infrastructure planning</a:t>
             </a:r>
             <a:endParaRPr lang="en-US" sz="1100" dirty="0"/>
           </a:p>
@@ -9409,63 +9533,6 @@
               <a:t>15</a:t>
             </a:r>
             <a:endParaRPr lang="en-US" sz="900" dirty="0"/>
-          </a:p>
-        </p:txBody>
-      </p:sp>
-      <p:sp>
-        <p:nvSpPr>
-          <p:cNvPr id="28" name="Text 10">
-            <a:extLst>
-              <a:ext uri="{FF2B5EF4-FFF2-40B4-BE49-F238E27FC236}">
-                <a16:creationId xmlns:a16="http://schemas.microsoft.com/office/drawing/2014/main" id="{24D2D9F2-2D98-199D-A165-D0513BE019E4}"/>
-              </a:ext>
-            </a:extLst>
-          </p:cNvPr>
-          <p:cNvSpPr/>
-          <p:nvPr/>
-        </p:nvSpPr>
-        <p:spPr>
-          <a:xfrm>
-            <a:off x="6522415" y="3822192"/>
-            <a:ext cx="4754880" cy="512064"/>
-          </a:xfrm>
-          <a:prstGeom prst="rect">
-            <a:avLst/>
-          </a:prstGeom>
-          <a:noFill/>
-          <a:ln/>
-        </p:spPr>
-        <p:txBody>
-          <a:bodyPr wrap="square" rtlCol="0" anchor="ctr"/>
-          <a:lstStyle/>
-          <a:p>
-            <a:pPr>
-              <a:lnSpc>
-                <a:spcPct val="115000"/>
-              </a:lnSpc>
-            </a:pPr>
-            <a:r>
-              <a:rPr lang="en-US" sz="1100" b="1" dirty="0">
-                <a:solidFill>
-                  <a:srgbClr val="D9A441"/>
-                </a:solidFill>
-                <a:latin typeface="Calibri" pitchFamily="34" charset="0"/>
-                <a:ea typeface="Calibri" pitchFamily="34" charset="-122"/>
-                <a:cs typeface="Calibri" pitchFamily="34" charset="-120"/>
-              </a:rPr>
-              <a:t>→ </a:t>
-            </a:r>
-            <a:r>
-              <a:rPr lang="en-US" sz="1100" dirty="0">
-                <a:solidFill>
-                  <a:schemeClr val="bg1"/>
-                </a:solidFill>
-                <a:latin typeface="Calibri" pitchFamily="34" charset="0"/>
-                <a:ea typeface="Calibri" pitchFamily="34" charset="-122"/>
-                <a:cs typeface="Calibri" pitchFamily="34" charset="-120"/>
-              </a:rPr>
-              <a:t>Procurement: OPSC submits the spec → Computer World (official Dell reseller) → Dell builds the server to order</a:t>
-            </a:r>
           </a:p>
         </p:txBody>
       </p:sp>
@@ -9478,542 +9545,6 @@
 </file>
 
 <file path=ppt/slides/slide16.xml><?xml version="1.0" encoding="utf-8"?>
-<p:sld xmlns:a="http://schemas.openxmlformats.org/drawingml/2006/main" xmlns:r="http://schemas.openxmlformats.org/officeDocument/2006/relationships" xmlns:p="http://schemas.openxmlformats.org/presentationml/2006/main">
-  <p:cSld>
-    <p:spTree>
-      <p:nvGrpSpPr>
-        <p:cNvPr id="1" name="">
-          <a:extLst>
-            <a:ext uri="{FF2B5EF4-FFF2-40B4-BE49-F238E27FC236}">
-              <a16:creationId xmlns:a16="http://schemas.microsoft.com/office/drawing/2014/main" id="{A92E06B9-8AF8-8E44-95D1-5F054DA1E69D}"/>
-            </a:ext>
-          </a:extLst>
-        </p:cNvPr>
-        <p:cNvGrpSpPr/>
-        <p:nvPr/>
-      </p:nvGrpSpPr>
-      <p:grpSpPr>
-        <a:xfrm>
-          <a:off x="0" y="0"/>
-          <a:ext cx="0" cy="0"/>
-          <a:chOff x="0" y="0"/>
-          <a:chExt cx="0" cy="0"/>
-        </a:xfrm>
-      </p:grpSpPr>
-      <p:pic>
-        <p:nvPicPr>
-          <p:cNvPr id="2" name="Image 0" descr="C:\Users\Herman Tevilili\AppData\Local\Temp\claude\C--Users-Herman-Tevilili-Documents-GitHub-commissionDecisionApp-v1-0\2d2d3a12-ae9e-4f4b-990a-3e1ebe47ec28\scratchpad\scdms_deck\assets\bg.jpg">
-            <a:extLst>
-              <a:ext uri="{FF2B5EF4-FFF2-40B4-BE49-F238E27FC236}">
-                <a16:creationId xmlns:a16="http://schemas.microsoft.com/office/drawing/2014/main" id="{D6AB8E2E-85FE-4819-C1C8-0F49D2422632}"/>
-              </a:ext>
-            </a:extLst>
-          </p:cNvPr>
-          <p:cNvPicPr>
-            <a:picLocks noChangeAspect="1"/>
-          </p:cNvPicPr>
-          <p:nvPr/>
-        </p:nvPicPr>
-        <p:blipFill>
-          <a:blip r:embed="rId3"/>
-          <a:stretch>
-            <a:fillRect/>
-          </a:stretch>
-        </p:blipFill>
-        <p:spPr>
-          <a:xfrm>
-            <a:off x="0" y="0"/>
-            <a:ext cx="12191695" cy="8127797"/>
-          </a:xfrm>
-          <a:prstGeom prst="rect">
-            <a:avLst/>
-          </a:prstGeom>
-        </p:spPr>
-      </p:pic>
-      <p:sp>
-        <p:nvSpPr>
-          <p:cNvPr id="3" name="Text 0">
-            <a:extLst>
-              <a:ext uri="{FF2B5EF4-FFF2-40B4-BE49-F238E27FC236}">
-                <a16:creationId xmlns:a16="http://schemas.microsoft.com/office/drawing/2014/main" id="{DAA12C2F-2A5B-6122-7E3F-81A43AB857E0}"/>
-              </a:ext>
-            </a:extLst>
-          </p:cNvPr>
-          <p:cNvSpPr/>
-          <p:nvPr/>
-        </p:nvSpPr>
-        <p:spPr>
-          <a:xfrm>
-            <a:off x="1691640" y="457200"/>
-            <a:ext cx="9875520" cy="320040"/>
-          </a:xfrm>
-          <a:prstGeom prst="rect">
-            <a:avLst/>
-          </a:prstGeom>
-          <a:noFill/>
-          <a:ln/>
-        </p:spPr>
-        <p:txBody>
-          <a:bodyPr wrap="square" rtlCol="0" anchor="ctr"/>
-          <a:lstStyle/>
-          <a:p>
-            <a:pPr marL="0" indent="0">
-              <a:buNone/>
-            </a:pPr>
-            <a:r>
-              <a:rPr lang="en-US" sz="1200" b="1" kern="0" spc="200" dirty="0">
-                <a:solidFill>
-                  <a:srgbClr val="D9A441"/>
-                </a:solidFill>
-                <a:latin typeface="Calibri" pitchFamily="34" charset="0"/>
-                <a:ea typeface="Calibri" pitchFamily="34" charset="-122"/>
-                <a:cs typeface="Calibri" pitchFamily="34" charset="-120"/>
-              </a:rPr>
-              <a:t>WHERE WE ARE TODAY  ·  INFRASTRUCTURE</a:t>
-            </a:r>
-            <a:endParaRPr lang="en-US" sz="1200" dirty="0"/>
-          </a:p>
-        </p:txBody>
-      </p:sp>
-      <p:sp>
-        <p:nvSpPr>
-          <p:cNvPr id="4" name="Text 1">
-            <a:extLst>
-              <a:ext uri="{FF2B5EF4-FFF2-40B4-BE49-F238E27FC236}">
-                <a16:creationId xmlns:a16="http://schemas.microsoft.com/office/drawing/2014/main" id="{B8D215B4-2F7D-1ADA-0188-52FA8E336151}"/>
-              </a:ext>
-            </a:extLst>
-          </p:cNvPr>
-          <p:cNvSpPr/>
-          <p:nvPr/>
-        </p:nvSpPr>
-        <p:spPr>
-          <a:xfrm>
-            <a:off x="1691640" y="777240"/>
-            <a:ext cx="9951415" cy="822960"/>
-          </a:xfrm>
-          <a:prstGeom prst="rect">
-            <a:avLst/>
-          </a:prstGeom>
-          <a:noFill/>
-          <a:ln/>
-        </p:spPr>
-        <p:txBody>
-          <a:bodyPr wrap="square" rtlCol="0" anchor="ctr"/>
-          <a:lstStyle/>
-          <a:p>
-            <a:pPr marL="0" indent="0">
-              <a:buNone/>
-            </a:pPr>
-            <a:r>
-              <a:rPr lang="en-US" sz="2700" b="1" dirty="0">
-                <a:solidFill>
-                  <a:srgbClr val="FFFFFF"/>
-                </a:solidFill>
-                <a:latin typeface="Cambria" pitchFamily="34" charset="0"/>
-                <a:ea typeface="Cambria" pitchFamily="34" charset="-122"/>
-                <a:cs typeface="Cambria" pitchFamily="34" charset="-120"/>
-              </a:rPr>
-              <a:t>Hosting &amp; failover: provisioning with DCDT</a:t>
-            </a:r>
-            <a:endParaRPr lang="en-US" sz="2700" dirty="0"/>
-          </a:p>
-        </p:txBody>
-      </p:sp>
-      <p:sp>
-        <p:nvSpPr>
-          <p:cNvPr id="5" name="Text 2">
-            <a:extLst>
-              <a:ext uri="{FF2B5EF4-FFF2-40B4-BE49-F238E27FC236}">
-                <a16:creationId xmlns:a16="http://schemas.microsoft.com/office/drawing/2014/main" id="{C3396837-4207-082C-4082-2B85653A423F}"/>
-              </a:ext>
-            </a:extLst>
-          </p:cNvPr>
-          <p:cNvSpPr/>
-          <p:nvPr/>
-        </p:nvSpPr>
-        <p:spPr>
-          <a:xfrm>
-            <a:off x="1691640" y="1325880"/>
-            <a:ext cx="10058400" cy="548640"/>
-          </a:xfrm>
-          <a:prstGeom prst="rect">
-            <a:avLst/>
-          </a:prstGeom>
-          <a:noFill/>
-          <a:ln/>
-        </p:spPr>
-        <p:txBody>
-          <a:bodyPr wrap="square" rtlCol="0" anchor="ctr"/>
-          <a:lstStyle/>
-          <a:p>
-            <a:pPr marL="0" indent="0">
-              <a:lnSpc>
-                <a:spcPct val="125000"/>
-              </a:lnSpc>
-              <a:buNone/>
-            </a:pPr>
-            <a:endParaRPr lang="en-US" sz="1250" dirty="0"/>
-          </a:p>
-        </p:txBody>
-      </p:sp>
-      <p:sp>
-        <p:nvSpPr>
-          <p:cNvPr id="6" name="Shape 3">
-            <a:extLst>
-              <a:ext uri="{FF2B5EF4-FFF2-40B4-BE49-F238E27FC236}">
-                <a16:creationId xmlns:a16="http://schemas.microsoft.com/office/drawing/2014/main" id="{AAE7BFD9-F877-3824-195F-E040121F1E1A}"/>
-              </a:ext>
-            </a:extLst>
-          </p:cNvPr>
-          <p:cNvSpPr/>
-          <p:nvPr/>
-        </p:nvSpPr>
-        <p:spPr>
-          <a:xfrm>
-            <a:off x="548640" y="2057400"/>
-            <a:ext cx="5349240" cy="3657600"/>
-          </a:xfrm>
-          <a:prstGeom prst="roundRect">
-            <a:avLst>
-              <a:gd name="adj" fmla="val 2250"/>
-            </a:avLst>
-          </a:prstGeom>
-          <a:solidFill>
-            <a:srgbClr val="F5F3FB"/>
-          </a:solidFill>
-          <a:ln/>
-          <a:effectLst>
-            <a:outerShdw blurRad="127000" dist="38100" dir="5400000" algn="bl" rotWithShape="0">
-              <a:srgbClr val="1B0B3E">
-                <a:alpha val="35000"/>
-              </a:srgbClr>
-            </a:outerShdw>
-          </a:effectLst>
-        </p:spPr>
-      </p:sp>
-      <p:sp>
-        <p:nvSpPr>
-          <p:cNvPr id="7" name="Text 4">
-            <a:extLst>
-              <a:ext uri="{FF2B5EF4-FFF2-40B4-BE49-F238E27FC236}">
-                <a16:creationId xmlns:a16="http://schemas.microsoft.com/office/drawing/2014/main" id="{61C1404E-7D03-4941-68C3-5DAA7577AEF8}"/>
-              </a:ext>
-            </a:extLst>
-          </p:cNvPr>
-          <p:cNvSpPr/>
-          <p:nvPr/>
-        </p:nvSpPr>
-        <p:spPr>
-          <a:xfrm>
-            <a:off x="868680" y="2286000"/>
-            <a:ext cx="4754880" cy="365760"/>
-          </a:xfrm>
-          <a:prstGeom prst="rect">
-            <a:avLst/>
-          </a:prstGeom>
-          <a:noFill/>
-          <a:ln/>
-        </p:spPr>
-        <p:txBody>
-          <a:bodyPr wrap="square" rtlCol="0" anchor="ctr"/>
-          <a:lstStyle/>
-          <a:p>
-            <a:pPr marL="0" indent="0">
-              <a:buNone/>
-            </a:pPr>
-            <a:r>
-              <a:rPr lang="en-US" sz="1450" b="1" dirty="0">
-                <a:solidFill>
-                  <a:srgbClr val="2C0F5E"/>
-                </a:solidFill>
-                <a:latin typeface="Calibri" pitchFamily="34" charset="0"/>
-                <a:ea typeface="Calibri" pitchFamily="34" charset="-122"/>
-                <a:cs typeface="Calibri" pitchFamily="34" charset="-120"/>
-              </a:rPr>
-              <a:t>Temporary failover server</a:t>
-            </a:r>
-          </a:p>
-        </p:txBody>
-      </p:sp>
-      <p:sp>
-        <p:nvSpPr>
-          <p:cNvPr id="9" name="Text 6">
-            <a:extLst>
-              <a:ext uri="{FF2B5EF4-FFF2-40B4-BE49-F238E27FC236}">
-                <a16:creationId xmlns:a16="http://schemas.microsoft.com/office/drawing/2014/main" id="{E4E9FB32-940A-DBE3-7D78-A8D31EDF993F}"/>
-              </a:ext>
-            </a:extLst>
-          </p:cNvPr>
-          <p:cNvSpPr/>
-          <p:nvPr/>
-        </p:nvSpPr>
-        <p:spPr>
-          <a:xfrm>
-            <a:off x="4037162" y="2286000"/>
-            <a:ext cx="1723558" cy="329184"/>
-          </a:xfrm>
-          <a:prstGeom prst="rect">
-            <a:avLst/>
-          </a:prstGeom>
-          <a:noFill/>
-          <a:ln/>
-        </p:spPr>
-        <p:txBody>
-          <a:bodyPr wrap="square" rtlCol="0" anchor="ctr"/>
-          <a:lstStyle/>
-          <a:p>
-            <a:pPr marL="0" indent="0" algn="ctr">
-              <a:buNone/>
-            </a:pPr>
-            <a:endParaRPr lang="en-US" sz="1000" dirty="0"/>
-          </a:p>
-        </p:txBody>
-      </p:sp>
-      <p:sp>
-        <p:nvSpPr>
-          <p:cNvPr id="15" name="Shape 12">
-            <a:extLst>
-              <a:ext uri="{FF2B5EF4-FFF2-40B4-BE49-F238E27FC236}">
-                <a16:creationId xmlns:a16="http://schemas.microsoft.com/office/drawing/2014/main" id="{E41A990C-F130-1A0B-831E-28B44F465E62}"/>
-              </a:ext>
-            </a:extLst>
-          </p:cNvPr>
-          <p:cNvSpPr/>
-          <p:nvPr/>
-        </p:nvSpPr>
-        <p:spPr>
-          <a:xfrm>
-            <a:off x="6263640" y="2057400"/>
-            <a:ext cx="5349240" cy="3657600"/>
-          </a:xfrm>
-          <a:prstGeom prst="roundRect">
-            <a:avLst>
-              <a:gd name="adj" fmla="val 2250"/>
-            </a:avLst>
-          </a:prstGeom>
-          <a:solidFill>
-            <a:srgbClr val="1E0E42"/>
-          </a:solidFill>
-          <a:ln/>
-          <a:effectLst>
-            <a:outerShdw blurRad="127000" dist="38100" dir="5400000" algn="bl" rotWithShape="0">
-              <a:srgbClr val="1B0B3E">
-                <a:alpha val="35000"/>
-              </a:srgbClr>
-            </a:outerShdw>
-          </a:effectLst>
-        </p:spPr>
-      </p:sp>
-      <p:sp>
-        <p:nvSpPr>
-          <p:cNvPr id="16" name="Text 13">
-            <a:extLst>
-              <a:ext uri="{FF2B5EF4-FFF2-40B4-BE49-F238E27FC236}">
-                <a16:creationId xmlns:a16="http://schemas.microsoft.com/office/drawing/2014/main" id="{411C5546-1FC1-1F4B-FEF6-74F4B2B0EDCC}"/>
-              </a:ext>
-            </a:extLst>
-          </p:cNvPr>
-          <p:cNvSpPr/>
-          <p:nvPr/>
-        </p:nvSpPr>
-        <p:spPr>
-          <a:xfrm>
-            <a:off x="6583680" y="2286000"/>
-            <a:ext cx="3657600" cy="365760"/>
-          </a:xfrm>
-          <a:prstGeom prst="rect">
-            <a:avLst/>
-          </a:prstGeom>
-          <a:noFill/>
-          <a:ln/>
-        </p:spPr>
-        <p:txBody>
-          <a:bodyPr wrap="square" rtlCol="0" anchor="ctr"/>
-          <a:lstStyle/>
-          <a:p>
-            <a:pPr marL="0" indent="0">
-              <a:buNone/>
-            </a:pPr>
-            <a:r>
-              <a:rPr lang="en-US" sz="1450" b="1" dirty="0">
-                <a:solidFill>
-                  <a:srgbClr val="D9A441"/>
-                </a:solidFill>
-                <a:latin typeface="Calibri" pitchFamily="34" charset="0"/>
-                <a:ea typeface="Calibri" pitchFamily="34" charset="-122"/>
-                <a:cs typeface="Calibri" pitchFamily="34" charset="-120"/>
-              </a:rPr>
-              <a:t>What’s recommended</a:t>
-            </a:r>
-            <a:endParaRPr lang="en-US" sz="1450" dirty="0"/>
-          </a:p>
-        </p:txBody>
-      </p:sp>
-      <p:sp>
-        <p:nvSpPr>
-          <p:cNvPr id="25" name="Text 22">
-            <a:extLst>
-              <a:ext uri="{FF2B5EF4-FFF2-40B4-BE49-F238E27FC236}">
-                <a16:creationId xmlns:a16="http://schemas.microsoft.com/office/drawing/2014/main" id="{14823073-453A-8407-446F-BEC54BEBEFEF}"/>
-              </a:ext>
-            </a:extLst>
-          </p:cNvPr>
-          <p:cNvSpPr/>
-          <p:nvPr/>
-        </p:nvSpPr>
-        <p:spPr>
-          <a:xfrm>
-            <a:off x="457200" y="6473952"/>
-            <a:ext cx="7315200" cy="274320"/>
-          </a:xfrm>
-          <a:prstGeom prst="rect">
-            <a:avLst/>
-          </a:prstGeom>
-          <a:noFill/>
-          <a:ln/>
-        </p:spPr>
-        <p:txBody>
-          <a:bodyPr wrap="square" rtlCol="0" anchor="ctr"/>
-          <a:lstStyle/>
-          <a:p>
-            <a:pPr marL="0" indent="0">
-              <a:buNone/>
-            </a:pPr>
-            <a:r>
-              <a:rPr lang="en-US" sz="900" i="1" dirty="0">
-                <a:solidFill>
-                  <a:srgbClr val="CBBFE6"/>
-                </a:solidFill>
-                <a:latin typeface="Calibri" pitchFamily="34" charset="0"/>
-                <a:ea typeface="Calibri" pitchFamily="34" charset="-122"/>
-                <a:cs typeface="Calibri" pitchFamily="34" charset="-120"/>
-              </a:rPr>
-              <a:t>SCDMS - Submission &amp; Commission Decision Management System</a:t>
-            </a:r>
-            <a:endParaRPr lang="en-US" sz="900" dirty="0"/>
-          </a:p>
-        </p:txBody>
-      </p:sp>
-      <p:sp>
-        <p:nvSpPr>
-          <p:cNvPr id="26" name="Text 23">
-            <a:extLst>
-              <a:ext uri="{FF2B5EF4-FFF2-40B4-BE49-F238E27FC236}">
-                <a16:creationId xmlns:a16="http://schemas.microsoft.com/office/drawing/2014/main" id="{CFA1AC57-C752-963A-10EB-31615AD90930}"/>
-              </a:ext>
-            </a:extLst>
-          </p:cNvPr>
-          <p:cNvSpPr/>
-          <p:nvPr/>
-        </p:nvSpPr>
-        <p:spPr>
-          <a:xfrm>
-            <a:off x="11277295" y="6473952"/>
-            <a:ext cx="457200" cy="274320"/>
-          </a:xfrm>
-          <a:prstGeom prst="rect">
-            <a:avLst/>
-          </a:prstGeom>
-          <a:noFill/>
-          <a:ln/>
-        </p:spPr>
-        <p:txBody>
-          <a:bodyPr wrap="square" rtlCol="0" anchor="ctr"/>
-          <a:lstStyle/>
-          <a:p>
-            <a:pPr marL="0" indent="0" algn="r">
-              <a:buNone/>
-            </a:pPr>
-            <a:r>
-              <a:rPr lang="en-US" sz="900" dirty="0">
-                <a:solidFill>
-                  <a:srgbClr val="CBBFE6"/>
-                </a:solidFill>
-                <a:latin typeface="Calibri" pitchFamily="34" charset="0"/>
-                <a:ea typeface="Calibri" pitchFamily="34" charset="-122"/>
-                <a:cs typeface="Calibri" pitchFamily="34" charset="-120"/>
-              </a:rPr>
-              <a:t>15</a:t>
-            </a:r>
-            <a:endParaRPr lang="en-US" sz="900" dirty="0"/>
-          </a:p>
-        </p:txBody>
-      </p:sp>
-      <p:pic>
-        <p:nvPicPr>
-          <p:cNvPr id="20" name="Picture 19">
-            <a:extLst>
-              <a:ext uri="{FF2B5EF4-FFF2-40B4-BE49-F238E27FC236}">
-                <a16:creationId xmlns:a16="http://schemas.microsoft.com/office/drawing/2014/main" id="{0B670895-5282-C5DC-ACB8-7C2F5EE1B66A}"/>
-              </a:ext>
-            </a:extLst>
-          </p:cNvPr>
-          <p:cNvPicPr>
-            <a:picLocks noChangeAspect="1"/>
-          </p:cNvPicPr>
-          <p:nvPr/>
-        </p:nvPicPr>
-        <p:blipFill>
-          <a:blip r:embed="rId4"/>
-          <a:stretch>
-            <a:fillRect/>
-          </a:stretch>
-        </p:blipFill>
-        <p:spPr>
-          <a:xfrm>
-            <a:off x="1400107" y="2730685"/>
-            <a:ext cx="3692026" cy="2801435"/>
-          </a:xfrm>
-          <a:prstGeom prst="rect">
-            <a:avLst/>
-          </a:prstGeom>
-        </p:spPr>
-      </p:pic>
-      <p:pic>
-        <p:nvPicPr>
-          <p:cNvPr id="27" name="Picture 26">
-            <a:extLst>
-              <a:ext uri="{FF2B5EF4-FFF2-40B4-BE49-F238E27FC236}">
-                <a16:creationId xmlns:a16="http://schemas.microsoft.com/office/drawing/2014/main" id="{62EB4588-C0E0-4D6B-BF32-A29AD29E3FC4}"/>
-              </a:ext>
-            </a:extLst>
-          </p:cNvPr>
-          <p:cNvPicPr>
-            <a:picLocks noChangeAspect="1"/>
-          </p:cNvPicPr>
-          <p:nvPr/>
-        </p:nvPicPr>
-        <p:blipFill>
-          <a:blip r:embed="rId5"/>
-          <a:stretch>
-            <a:fillRect/>
-          </a:stretch>
-        </p:blipFill>
-        <p:spPr>
-          <a:xfrm>
-            <a:off x="6263641" y="3315257"/>
-            <a:ext cx="5349240" cy="1708321"/>
-          </a:xfrm>
-          <a:prstGeom prst="rect">
-            <a:avLst/>
-          </a:prstGeom>
-        </p:spPr>
-      </p:pic>
-    </p:spTree>
-    <p:extLst>
-      <p:ext uri="{BB962C8B-B14F-4D97-AF65-F5344CB8AC3E}">
-        <p14:creationId xmlns:p14="http://schemas.microsoft.com/office/powerpoint/2010/main" val="2904075384"/>
-      </p:ext>
-    </p:extLst>
-  </p:cSld>
-  <p:clrMapOvr>
-    <a:masterClrMapping/>
-  </p:clrMapOvr>
-</p:sld>
-</file>
-
-<file path=ppt/slides/slide17.xml><?xml version="1.0" encoding="utf-8"?>
 <p:sld xmlns:a="http://schemas.openxmlformats.org/drawingml/2006/main" xmlns:r="http://schemas.openxmlformats.org/officeDocument/2006/relationships" xmlns:p="http://schemas.openxmlformats.org/presentationml/2006/main">
   <p:cSld name="Slide 16">
     <p:spTree>
@@ -10644,6 +10175,141 @@
       </p:sp>
       <p:sp>
         <p:nvSpPr>
+          <p:cNvPr id="16" name="Text 13"/>
+          <p:cNvSpPr/>
+          <p:nvPr/>
+        </p:nvSpPr>
+        <p:spPr>
+          <a:xfrm>
+            <a:off x="6583680" y="4352544"/>
+            <a:ext cx="4754880" cy="621792"/>
+          </a:xfrm>
+          <a:prstGeom prst="rect">
+            <a:avLst/>
+          </a:prstGeom>
+          <a:noFill/>
+          <a:ln/>
+        </p:spPr>
+        <p:txBody>
+          <a:bodyPr wrap="square" rtlCol="0" anchor="ctr"/>
+          <a:lstStyle/>
+          <a:p>
+            <a:pPr marL="0" indent="0">
+              <a:lnSpc>
+                <a:spcPct val="120000"/>
+              </a:lnSpc>
+              <a:buNone/>
+            </a:pPr>
+            <a:r>
+              <a:rPr lang="en-US" sz="1150" b="1" dirty="0">
+                <a:solidFill>
+                  <a:srgbClr val="D9A441"/>
+                </a:solidFill>
+                <a:latin typeface="Calibri" pitchFamily="34" charset="0"/>
+                <a:ea typeface="Calibri" pitchFamily="34" charset="-122"/>
+                <a:cs typeface="Calibri" pitchFamily="34" charset="-120"/>
+              </a:rPr>
+              <a:t>→  </a:t>
+            </a:r>
+            <a:r>
+              <a:rPr lang="en-US" sz="1150" dirty="0">
+                <a:solidFill>
+                  <a:srgbClr val="FFFFFF"/>
+                </a:solidFill>
+                <a:latin typeface="Calibri" pitchFamily="34" charset="0"/>
+                <a:ea typeface="Calibri" pitchFamily="34" charset="-122"/>
+                <a:cs typeface="Calibri" pitchFamily="34" charset="-120"/>
+              </a:rPr>
+              <a:t>Better return on the investment, and a stronger case to put to DCDT</a:t>
+            </a:r>
+            <a:endParaRPr lang="en-US" sz="1150" dirty="0"/>
+          </a:p>
+        </p:txBody>
+      </p:sp>
+      <p:sp>
+        <p:nvSpPr>
+          <p:cNvPr id="17" name="Shape 14"/>
+          <p:cNvSpPr/>
+          <p:nvPr/>
+        </p:nvSpPr>
+        <p:spPr>
+          <a:xfrm>
+            <a:off x="548640" y="5943600"/>
+            <a:ext cx="11064240" cy="594360"/>
+          </a:xfrm>
+          <a:prstGeom prst="roundRect">
+            <a:avLst>
+              <a:gd name="adj" fmla="val 13846"/>
+            </a:avLst>
+          </a:prstGeom>
+          <a:solidFill>
+            <a:srgbClr val="FBF3E4"/>
+          </a:solidFill>
+          <a:ln/>
+          <a:effectLst>
+            <a:outerShdw blurRad="127000" dist="38100" dir="5400000" algn="bl" rotWithShape="0">
+              <a:srgbClr val="1B0B3E">
+                <a:alpha val="35000"/>
+              </a:srgbClr>
+            </a:outerShdw>
+          </a:effectLst>
+        </p:spPr>
+      </p:sp>
+      <p:sp>
+        <p:nvSpPr>
+          <p:cNvPr id="18" name="Text 15"/>
+          <p:cNvSpPr/>
+          <p:nvPr/>
+        </p:nvSpPr>
+        <p:spPr>
+          <a:xfrm>
+            <a:off x="868680" y="5943600"/>
+            <a:ext cx="10424160" cy="594360"/>
+          </a:xfrm>
+          <a:prstGeom prst="rect">
+            <a:avLst/>
+          </a:prstGeom>
+          <a:noFill/>
+          <a:ln/>
+        </p:spPr>
+        <p:txBody>
+          <a:bodyPr wrap="square" rtlCol="0" anchor="ctr"/>
+          <a:lstStyle/>
+          <a:p>
+            <a:pPr marL="0" indent="0">
+              <a:lnSpc>
+                <a:spcPct val="115000"/>
+              </a:lnSpc>
+              <a:buNone/>
+            </a:pPr>
+            <a:r>
+              <a:rPr lang="en-US" sz="1100" b="1" i="1" dirty="0">
+                <a:solidFill>
+                  <a:srgbClr val="2C0F5E"/>
+                </a:solidFill>
+                <a:latin typeface="Calibri" pitchFamily="34" charset="0"/>
+                <a:ea typeface="Calibri" pitchFamily="34" charset="-122"/>
+                <a:cs typeface="Calibri" pitchFamily="34" charset="-120"/>
+              </a:rPr>
+              <a:t>The ask:  </a:t>
+            </a:r>
+            <a:r>
+              <a:rPr lang="en-US" sz="1100" i="1" dirty="0">
+                <a:solidFill>
+                  <a:srgbClr val="5C5470"/>
+                </a:solidFill>
+                <a:latin typeface="Calibri" pitchFamily="34" charset="0"/>
+                <a:ea typeface="Calibri" pitchFamily="34" charset="-122"/>
+                <a:cs typeface="Calibri" pitchFamily="34" charset="-120"/>
+              </a:rPr>
+              <a:t>provision the backup/failover server as shared OPSC infrastructure, not a single-system add-on - sized for SCDMS plus what comes after it.</a:t>
+            </a:r>
+            <a:endParaRPr lang="en-US" sz="1100" dirty="0"/>
+          </a:p>
+        </p:txBody>
+      </p:sp>
+      <p:sp>
+        <p:nvSpPr>
           <p:cNvPr id="19" name="Text 16"/>
           <p:cNvSpPr/>
           <p:nvPr/>
@@ -10728,7 +10394,7 @@
 </p:sld>
 </file>
 
-<file path=ppt/slides/slide18.xml><?xml version="1.0" encoding="utf-8"?>
+<file path=ppt/slides/slide17.xml><?xml version="1.0" encoding="utf-8"?>
 <p:sld xmlns:a="http://schemas.openxmlformats.org/drawingml/2006/main" xmlns:r="http://schemas.openxmlformats.org/officeDocument/2006/relationships" xmlns:p="http://schemas.openxmlformats.org/presentationml/2006/main">
   <p:cSld name="Slide 17">
     <p:spTree>
@@ -10802,7 +10468,7 @@
                 <a:ea typeface="Calibri" pitchFamily="34" charset="-122"/>
                 <a:cs typeface="Calibri" pitchFamily="34" charset="-120"/>
               </a:rPr>
-              <a:t>WHERE WE ARE TODAY</a:t>
+              <a:t>WHERE WE ARE TODAY  ·  INFRASTRUCTURE</a:t>
             </a:r>
             <a:endParaRPr lang="en-US" sz="1200" dirty="0"/>
           </a:p>
@@ -10833,7 +10499,7 @@
               <a:buNone/>
             </a:pPr>
             <a:r>
-              <a:rPr lang="en-US" sz="2700" b="1" dirty="0">
+              <a:rPr lang="en-US" sz="2600" b="1" dirty="0">
                 <a:solidFill>
                   <a:srgbClr val="FFFFFF"/>
                 </a:solidFill>
@@ -10841,26 +10507,65 @@
                 <a:ea typeface="Cambria" pitchFamily="34" charset="-122"/>
                 <a:cs typeface="Cambria" pitchFamily="34" charset="-120"/>
               </a:rPr>
-              <a:t>Important: this is a progress update, not a pilot</a:t>
-            </a:r>
-            <a:endParaRPr lang="en-US" sz="2700" dirty="0"/>
-          </a:p>
-        </p:txBody>
-      </p:sp>
-      <p:sp>
-        <p:nvSpPr>
-          <p:cNvPr id="5" name="Shape 2"/>
-          <p:cNvSpPr/>
-          <p:nvPr/>
-        </p:nvSpPr>
-        <p:spPr>
-          <a:xfrm>
-            <a:off x="548640" y="1737360"/>
-            <a:ext cx="5349240" cy="4297680"/>
+              <a:t>The Salmon risk, concretely: protecting the minutes</a:t>
+            </a:r>
+            <a:endParaRPr lang="en-US" sz="2600" dirty="0"/>
+          </a:p>
+        </p:txBody>
+      </p:sp>
+      <p:sp>
+        <p:nvSpPr>
+          <p:cNvPr id="5" name="Text 2"/>
+          <p:cNvSpPr/>
+          <p:nvPr/>
+        </p:nvSpPr>
+        <p:spPr>
+          <a:xfrm>
+            <a:off x="1691640" y="1371600"/>
+            <a:ext cx="10058400" cy="365760"/>
+          </a:xfrm>
+          <a:prstGeom prst="rect">
+            <a:avLst/>
+          </a:prstGeom>
+          <a:noFill/>
+          <a:ln/>
+        </p:spPr>
+        <p:txBody>
+          <a:bodyPr wrap="square" rtlCol="0" anchor="ctr"/>
+          <a:lstStyle/>
+          <a:p>
+            <a:pPr marL="0" indent="0">
+              <a:buNone/>
+            </a:pPr>
+            <a:r>
+              <a:rPr lang="en-US" sz="1250" dirty="0">
+                <a:solidFill>
+                  <a:srgbClr val="CBBFE6"/>
+                </a:solidFill>
+                <a:latin typeface="Calibri" pitchFamily="34" charset="0"/>
+                <a:ea typeface="Calibri" pitchFamily="34" charset="-122"/>
+                <a:cs typeface="Calibri" pitchFamily="34" charset="-120"/>
+              </a:rPr>
+              <a:t>Commissioners have raised this directly - here's the actual risk today, and what changes.</a:t>
+            </a:r>
+            <a:endParaRPr lang="en-US" sz="1250" dirty="0"/>
+          </a:p>
+        </p:txBody>
+      </p:sp>
+      <p:sp>
+        <p:nvSpPr>
+          <p:cNvPr id="6" name="Shape 3"/>
+          <p:cNvSpPr/>
+          <p:nvPr/>
+        </p:nvSpPr>
+        <p:spPr>
+          <a:xfrm>
+            <a:off x="548640" y="1965960"/>
+            <a:ext cx="5349240" cy="3749040"/>
           </a:xfrm>
           <a:prstGeom prst="roundRect">
             <a:avLst>
-              <a:gd name="adj" fmla="val 1915"/>
+              <a:gd name="adj" fmla="val 2195"/>
             </a:avLst>
           </a:prstGeom>
           <a:solidFill>
@@ -10878,30 +10583,33 @@
       </p:sp>
       <p:sp>
         <p:nvSpPr>
-          <p:cNvPr id="6" name="Text 3"/>
-          <p:cNvSpPr/>
-          <p:nvPr/>
-        </p:nvSpPr>
-        <p:spPr>
-          <a:xfrm>
-            <a:off x="868680" y="1965960"/>
-            <a:ext cx="4754880" cy="365760"/>
-          </a:xfrm>
-          <a:prstGeom prst="rect">
-            <a:avLst/>
-          </a:prstGeom>
-          <a:noFill/>
-          <a:ln/>
-        </p:spPr>
-        <p:txBody>
-          <a:bodyPr wrap="square" rtlCol="0" anchor="ctr"/>
-          <a:lstStyle/>
-          <a:p>
-            <a:pPr marL="0" indent="0">
-              <a:buNone/>
-            </a:pPr>
-            <a:r>
-              <a:rPr lang="en-US" sz="1450" b="1" dirty="0">
+          <p:cNvPr id="7" name="Text 4"/>
+          <p:cNvSpPr/>
+          <p:nvPr/>
+        </p:nvSpPr>
+        <p:spPr>
+          <a:xfrm>
+            <a:off x="868680" y="2194560"/>
+            <a:ext cx="4754880" cy="457200"/>
+          </a:xfrm>
+          <a:prstGeom prst="rect">
+            <a:avLst/>
+          </a:prstGeom>
+          <a:noFill/>
+          <a:ln/>
+        </p:spPr>
+        <p:txBody>
+          <a:bodyPr wrap="square" rtlCol="0" anchor="ctr"/>
+          <a:lstStyle/>
+          <a:p>
+            <a:pPr marL="0" indent="0">
+              <a:lnSpc>
+                <a:spcPct val="105000"/>
+              </a:lnSpc>
+              <a:buNone/>
+            </a:pPr>
+            <a:r>
+              <a:rPr lang="en-US" sz="1400" b="1" dirty="0">
                 <a:solidFill>
                   <a:srgbClr val="2C0F5E"/>
                 </a:solidFill>
@@ -10909,22 +10617,22 @@
                 <a:ea typeface="Calibri" pitchFamily="34" charset="-122"/>
                 <a:cs typeface="Calibri" pitchFamily="34" charset="-120"/>
               </a:rPr>
-              <a:t>Where we are</a:t>
-            </a:r>
-            <a:endParaRPr lang="en-US" sz="1450" dirty="0"/>
-          </a:p>
-        </p:txBody>
-      </p:sp>
-      <p:sp>
-        <p:nvSpPr>
-          <p:cNvPr id="7" name="Text 4"/>
-          <p:cNvSpPr/>
-          <p:nvPr/>
-        </p:nvSpPr>
-        <p:spPr>
-          <a:xfrm>
-            <a:off x="868680" y="2450592"/>
-            <a:ext cx="4754880" cy="502920"/>
+              <a:t>Today: a single point of failure</a:t>
+            </a:r>
+            <a:endParaRPr lang="en-US" sz="1400" dirty="0"/>
+          </a:p>
+        </p:txBody>
+      </p:sp>
+      <p:sp>
+        <p:nvSpPr>
+          <p:cNvPr id="8" name="Text 5"/>
+          <p:cNvSpPr/>
+          <p:nvPr/>
+        </p:nvSpPr>
+        <p:spPr>
+          <a:xfrm>
+            <a:off x="868680" y="2743200"/>
+            <a:ext cx="4754880" cy="731520"/>
           </a:xfrm>
           <a:prstGeom prst="rect">
             <a:avLst/>
@@ -10943,7 +10651,7 @@
               <a:buNone/>
             </a:pPr>
             <a:r>
-              <a:rPr lang="en-US" sz="1200" b="1" dirty="0">
+              <a:rPr lang="en-US" sz="1150" b="1" dirty="0">
                 <a:solidFill>
                   <a:srgbClr val="2C0F5E"/>
                 </a:solidFill>
@@ -10954,7 +10662,7 @@
               <a:t>•  </a:t>
             </a:r>
             <a:r>
-              <a:rPr lang="en-US" sz="1200" dirty="0">
+              <a:rPr lang="en-US" sz="1150" dirty="0">
                 <a:solidFill>
                   <a:srgbClr val="5C5470"/>
                 </a:solidFill>
@@ -10962,22 +10670,22 @@
                 <a:ea typeface="Calibri" pitchFamily="34" charset="-122"/>
                 <a:cs typeface="Calibri" pitchFamily="34" charset="-120"/>
               </a:rPr>
-              <a:t>System built and functioning across all core modules</a:t>
-            </a:r>
-            <a:endParaRPr lang="en-US" sz="1200" dirty="0"/>
-          </a:p>
-        </p:txBody>
-      </p:sp>
-      <p:sp>
-        <p:nvSpPr>
-          <p:cNvPr id="8" name="Text 5"/>
-          <p:cNvSpPr/>
-          <p:nvPr/>
-        </p:nvSpPr>
-        <p:spPr>
-          <a:xfrm>
-            <a:off x="868680" y="2999232"/>
-            <a:ext cx="4754880" cy="502920"/>
+              <a:t>All Commission minutes sit on Salmon, one shared VM used by every ministry</a:t>
+            </a:r>
+            <a:endParaRPr lang="en-US" sz="1150" dirty="0"/>
+          </a:p>
+        </p:txBody>
+      </p:sp>
+      <p:sp>
+        <p:nvSpPr>
+          <p:cNvPr id="9" name="Text 6"/>
+          <p:cNvSpPr/>
+          <p:nvPr/>
+        </p:nvSpPr>
+        <p:spPr>
+          <a:xfrm>
+            <a:off x="868680" y="3520440"/>
+            <a:ext cx="4754880" cy="731520"/>
           </a:xfrm>
           <a:prstGeom prst="rect">
             <a:avLst/>
@@ -10996,7 +10704,7 @@
               <a:buNone/>
             </a:pPr>
             <a:r>
-              <a:rPr lang="en-US" sz="1200" b="1" dirty="0">
+              <a:rPr lang="en-US" sz="1150" b="1" dirty="0">
                 <a:solidFill>
                   <a:srgbClr val="2C0F5E"/>
                 </a:solidFill>
@@ -11007,7 +10715,7 @@
               <a:t>•  </a:t>
             </a:r>
             <a:r>
-              <a:rPr lang="en-US" sz="1200" dirty="0">
+              <a:rPr lang="en-US" sz="1150" dirty="0">
                 <a:solidFill>
                   <a:srgbClr val="5C5470"/>
                 </a:solidFill>
@@ -11015,22 +10723,22 @@
                 <a:ea typeface="Calibri" pitchFamily="34" charset="-122"/>
                 <a:cs typeface="Calibri" pitchFamily="34" charset="-120"/>
               </a:rPr>
-              <a:t>Running in a controlled environment with seeded / dummy data only</a:t>
-            </a:r>
-            <a:endParaRPr lang="en-US" sz="1200" dirty="0"/>
-          </a:p>
-        </p:txBody>
-      </p:sp>
-      <p:sp>
-        <p:nvSpPr>
-          <p:cNvPr id="9" name="Text 6"/>
-          <p:cNvSpPr/>
-          <p:nvPr/>
-        </p:nvSpPr>
-        <p:spPr>
-          <a:xfrm>
-            <a:off x="868680" y="3547872"/>
-            <a:ext cx="4754880" cy="502920"/>
+              <a:t>No second copy exists anywhere else</a:t>
+            </a:r>
+            <a:endParaRPr lang="en-US" sz="1150" dirty="0"/>
+          </a:p>
+        </p:txBody>
+      </p:sp>
+      <p:sp>
+        <p:nvSpPr>
+          <p:cNvPr id="10" name="Text 7"/>
+          <p:cNvSpPr/>
+          <p:nvPr/>
+        </p:nvSpPr>
+        <p:spPr>
+          <a:xfrm>
+            <a:off x="868680" y="4297680"/>
+            <a:ext cx="4754880" cy="731520"/>
           </a:xfrm>
           <a:prstGeom prst="rect">
             <a:avLst/>
@@ -11049,7 +10757,7 @@
               <a:buNone/>
             </a:pPr>
             <a:r>
-              <a:rPr lang="en-US" sz="1200" b="1" dirty="0">
+              <a:rPr lang="en-US" sz="1150" b="1" dirty="0">
                 <a:solidFill>
                   <a:srgbClr val="2C0F5E"/>
                 </a:solidFill>
@@ -11060,7 +10768,7 @@
               <a:t>•  </a:t>
             </a:r>
             <a:r>
-              <a:rPr lang="en-US" sz="1200" dirty="0">
+              <a:rPr lang="en-US" sz="1150" dirty="0">
                 <a:solidFill>
                   <a:srgbClr val="5C5470"/>
                 </a:solidFill>
@@ -11068,62 +10776,9 @@
                 <a:ea typeface="Calibri" pitchFamily="34" charset="-122"/>
                 <a:cs typeface="Calibri" pitchFamily="34" charset="-120"/>
               </a:rPr>
-              <a:t>No real ministry submissions, no real personnel data</a:t>
-            </a:r>
-            <a:endParaRPr lang="en-US" sz="1200" dirty="0"/>
-          </a:p>
-        </p:txBody>
-      </p:sp>
-      <p:sp>
-        <p:nvSpPr>
-          <p:cNvPr id="10" name="Text 7"/>
-          <p:cNvSpPr/>
-          <p:nvPr/>
-        </p:nvSpPr>
-        <p:spPr>
-          <a:xfrm>
-            <a:off x="868680" y="4096512"/>
-            <a:ext cx="4754880" cy="502920"/>
-          </a:xfrm>
-          <a:prstGeom prst="rect">
-            <a:avLst/>
-          </a:prstGeom>
-          <a:noFill/>
-          <a:ln/>
-        </p:spPr>
-        <p:txBody>
-          <a:bodyPr wrap="square" rtlCol="0" anchor="ctr"/>
-          <a:lstStyle/>
-          <a:p>
-            <a:pPr marL="0" indent="0">
-              <a:lnSpc>
-                <a:spcPct val="120000"/>
-              </a:lnSpc>
-              <a:buNone/>
-            </a:pPr>
-            <a:r>
-              <a:rPr lang="en-US" sz="1200" b="1" dirty="0">
-                <a:solidFill>
-                  <a:srgbClr val="2C0F5E"/>
-                </a:solidFill>
-                <a:latin typeface="Calibri" pitchFamily="34" charset="0"/>
-                <a:ea typeface="Calibri" pitchFamily="34" charset="-122"/>
-                <a:cs typeface="Calibri" pitchFamily="34" charset="-120"/>
-              </a:rPr>
-              <a:t>•  </a:t>
-            </a:r>
-            <a:r>
-              <a:rPr lang="en-US" sz="1200" dirty="0">
-                <a:solidFill>
-                  <a:srgbClr val="5C5470"/>
-                </a:solidFill>
-                <a:latin typeface="Calibri" pitchFamily="34" charset="0"/>
-                <a:ea typeface="Calibri" pitchFamily="34" charset="-122"/>
-                <a:cs typeface="Calibri" pitchFamily="34" charset="-120"/>
-              </a:rPr>
-              <a:t>Internal testing by the build team, not by end users</a:t>
-            </a:r>
-            <a:endParaRPr lang="en-US" sz="1200" dirty="0"/>
+              <a:t>If Salmon fails, whatever's stored there could be gone for good - exactly the scenario commissioners are worried about</a:t>
+            </a:r>
+            <a:endParaRPr lang="en-US" sz="1150" dirty="0"/>
           </a:p>
         </p:txBody>
       </p:sp>
@@ -11135,12 +10790,12 @@
         </p:nvSpPr>
         <p:spPr>
           <a:xfrm>
-            <a:off x="6263640" y="1737360"/>
-            <a:ext cx="5349240" cy="4297680"/>
+            <a:off x="6263640" y="1965960"/>
+            <a:ext cx="5349240" cy="3749040"/>
           </a:xfrm>
           <a:prstGeom prst="roundRect">
             <a:avLst>
-              <a:gd name="adj" fmla="val 1915"/>
+              <a:gd name="adj" fmla="val 2195"/>
             </a:avLst>
           </a:prstGeom>
           <a:solidFill>
@@ -11164,7 +10819,7 @@
         </p:nvSpPr>
         <p:spPr>
           <a:xfrm>
-            <a:off x="6583680" y="1965960"/>
+            <a:off x="6583680" y="2194560"/>
             <a:ext cx="4754880" cy="365760"/>
           </a:xfrm>
           <a:prstGeom prst="rect">
@@ -11181,7 +10836,7 @@
               <a:buNone/>
             </a:pPr>
             <a:r>
-              <a:rPr lang="en-US" sz="1450" b="1" dirty="0">
+              <a:rPr lang="en-US" sz="1400" b="1" dirty="0">
                 <a:solidFill>
                   <a:srgbClr val="D9A441"/>
                 </a:solidFill>
@@ -11189,9 +10844,9 @@
                 <a:ea typeface="Calibri" pitchFamily="34" charset="-122"/>
                 <a:cs typeface="Calibri" pitchFamily="34" charset="-120"/>
               </a:rPr>
-              <a:t>What's still ahead before a pilot</a:t>
-            </a:r>
-            <a:endParaRPr lang="en-US" sz="1450" dirty="0"/>
+              <a:t>With SCDMS's failover server</a:t>
+            </a:r>
+            <a:endParaRPr lang="en-US" sz="1400" dirty="0"/>
           </a:p>
         </p:txBody>
       </p:sp>
@@ -11203,8 +10858,8 @@
         </p:nvSpPr>
         <p:spPr>
           <a:xfrm>
-            <a:off x="6583680" y="2450592"/>
-            <a:ext cx="4754880" cy="502920"/>
+            <a:off x="6583680" y="2743200"/>
+            <a:ext cx="4754880" cy="731520"/>
           </a:xfrm>
           <a:prstGeom prst="rect">
             <a:avLst/>
@@ -11223,7 +10878,7 @@
               <a:buNone/>
             </a:pPr>
             <a:r>
-              <a:rPr lang="en-US" sz="1200" b="1" dirty="0">
+              <a:rPr lang="en-US" sz="1150" b="1" dirty="0">
                 <a:solidFill>
                   <a:srgbClr val="D9A441"/>
                 </a:solidFill>
@@ -11234,7 +10889,7 @@
               <a:t>→  </a:t>
             </a:r>
             <a:r>
-              <a:rPr lang="en-US" sz="1200" dirty="0">
+              <a:rPr lang="en-US" sz="1150" dirty="0">
                 <a:solidFill>
                   <a:srgbClr val="FFFFFF"/>
                 </a:solidFill>
@@ -11242,9 +10897,9 @@
                 <a:ea typeface="Calibri" pitchFamily="34" charset="-122"/>
                 <a:cs typeface="Calibri" pitchFamily="34" charset="-120"/>
               </a:rPr>
-              <a:t>OPSC unit pre-pilot, Select pilot ministries and a defined pilot scope</a:t>
-            </a:r>
-            <a:endParaRPr lang="en-US" sz="1200" dirty="0"/>
+              <a:t>Minutes are structured database records, not loose files on a shared drive</a:t>
+            </a:r>
+            <a:endParaRPr lang="en-US" sz="1150" dirty="0"/>
           </a:p>
         </p:txBody>
       </p:sp>
@@ -11256,8 +10911,8 @@
         </p:nvSpPr>
         <p:spPr>
           <a:xfrm>
-            <a:off x="6583680" y="2999232"/>
-            <a:ext cx="4754880" cy="502920"/>
+            <a:off x="6583680" y="3520440"/>
+            <a:ext cx="4754880" cy="731520"/>
           </a:xfrm>
           <a:prstGeom prst="rect">
             <a:avLst/>
@@ -11276,7 +10931,7 @@
               <a:buNone/>
             </a:pPr>
             <a:r>
-              <a:rPr lang="en-US" sz="1200" b="1" dirty="0">
+              <a:rPr lang="en-US" sz="1150" b="1" dirty="0">
                 <a:solidFill>
                   <a:srgbClr val="D9A441"/>
                 </a:solidFill>
@@ -11287,7 +10942,7 @@
               <a:t>→  </a:t>
             </a:r>
             <a:r>
-              <a:rPr lang="en-US" sz="1200" dirty="0">
+              <a:rPr lang="en-US" sz="1150" dirty="0">
                 <a:solidFill>
                   <a:srgbClr val="FFFFFF"/>
                 </a:solidFill>
@@ -11295,9 +10950,9 @@
                 <a:ea typeface="Calibri" pitchFamily="34" charset="-122"/>
                 <a:cs typeface="Calibri" pitchFamily="34" charset="-120"/>
               </a:rPr>
-              <a:t>Load real (approved) reference data - ministries, departments, users</a:t>
-            </a:r>
-            <a:endParaRPr lang="en-US" sz="1200" dirty="0"/>
+              <a:t>Backups are already automated inside the app on a recurring schedule</a:t>
+            </a:r>
+            <a:endParaRPr lang="en-US" sz="1150" dirty="0"/>
           </a:p>
         </p:txBody>
       </p:sp>
@@ -11309,8 +10964,8 @@
         </p:nvSpPr>
         <p:spPr>
           <a:xfrm>
-            <a:off x="6583680" y="3547872"/>
-            <a:ext cx="4754880" cy="502920"/>
+            <a:off x="6583680" y="4297680"/>
+            <a:ext cx="4754880" cy="731520"/>
           </a:xfrm>
           <a:prstGeom prst="rect">
             <a:avLst/>
@@ -11329,7 +10984,7 @@
               <a:buNone/>
             </a:pPr>
             <a:r>
-              <a:rPr lang="en-US" sz="1200" b="1" dirty="0">
+              <a:rPr lang="en-US" sz="1150" b="1" dirty="0">
                 <a:solidFill>
                   <a:srgbClr val="D9A441"/>
                 </a:solidFill>
@@ -11340,7 +10995,7 @@
               <a:t>→  </a:t>
             </a:r>
             <a:r>
-              <a:rPr lang="en-US" sz="1200" dirty="0">
+              <a:rPr lang="en-US" sz="1150" dirty="0">
                 <a:solidFill>
                   <a:srgbClr val="FFFFFF"/>
                 </a:solidFill>
@@ -11348,22 +11003,51 @@
                 <a:ea typeface="Calibri" pitchFamily="34" charset="-122"/>
                 <a:cs typeface="Calibri" pitchFamily="34" charset="-120"/>
               </a:rPr>
-              <a:t>Formal user acceptance testing with real OPSC and ministry staff</a:t>
-            </a:r>
-            <a:endParaRPr lang="en-US" sz="1200" dirty="0"/>
-          </a:p>
-        </p:txBody>
-      </p:sp>
-      <p:sp>
-        <p:nvSpPr>
-          <p:cNvPr id="16" name="Text 13"/>
-          <p:cNvSpPr/>
-          <p:nvPr/>
-        </p:nvSpPr>
-        <p:spPr>
-          <a:xfrm>
-            <a:off x="6583680" y="4096512"/>
-            <a:ext cx="4754880" cy="502920"/>
+              <a:t>The failover server gives those backups - or a live copy - a separate machine to land on, so one server dying can't mean total loss</a:t>
+            </a:r>
+            <a:endParaRPr lang="en-US" sz="1150" dirty="0"/>
+          </a:p>
+        </p:txBody>
+      </p:sp>
+      <p:sp>
+        <p:nvSpPr>
+          <p:cNvPr id="16" name="Shape 13"/>
+          <p:cNvSpPr/>
+          <p:nvPr/>
+        </p:nvSpPr>
+        <p:spPr>
+          <a:xfrm>
+            <a:off x="548640" y="5852160"/>
+            <a:ext cx="11064240" cy="685800"/>
+          </a:xfrm>
+          <a:prstGeom prst="roundRect">
+            <a:avLst>
+              <a:gd name="adj" fmla="val 12000"/>
+            </a:avLst>
+          </a:prstGeom>
+          <a:solidFill>
+            <a:srgbClr val="FBF3E4"/>
+          </a:solidFill>
+          <a:ln/>
+          <a:effectLst>
+            <a:outerShdw blurRad="127000" dist="38100" dir="5400000" algn="bl" rotWithShape="0">
+              <a:srgbClr val="1B0B3E">
+                <a:alpha val="35000"/>
+              </a:srgbClr>
+            </a:outerShdw>
+          </a:effectLst>
+        </p:spPr>
+      </p:sp>
+      <p:sp>
+        <p:nvSpPr>
+          <p:cNvPr id="17" name="Text 14"/>
+          <p:cNvSpPr/>
+          <p:nvPr/>
+        </p:nvSpPr>
+        <p:spPr>
+          <a:xfrm>
+            <a:off x="868680" y="5852160"/>
+            <a:ext cx="10424160" cy="685800"/>
           </a:xfrm>
           <a:prstGeom prst="rect">
             <a:avLst/>
@@ -11377,86 +11061,33 @@
           <a:p>
             <a:pPr marL="0" indent="0">
               <a:lnSpc>
-                <a:spcPct val="120000"/>
+                <a:spcPct val="115000"/>
               </a:lnSpc>
               <a:buNone/>
             </a:pPr>
             <a:r>
-              <a:rPr lang="en-US" sz="1200" b="1" dirty="0">
-                <a:solidFill>
-                  <a:srgbClr val="D9A441"/>
-                </a:solidFill>
-                <a:latin typeface="Calibri" pitchFamily="34" charset="0"/>
-                <a:ea typeface="Calibri" pitchFamily="34" charset="-122"/>
-                <a:cs typeface="Calibri" pitchFamily="34" charset="-120"/>
-              </a:rPr>
-              <a:t>→  </a:t>
-            </a:r>
-            <a:r>
-              <a:rPr lang="en-US" sz="1200" dirty="0">
-                <a:solidFill>
-                  <a:srgbClr val="FFFFFF"/>
-                </a:solidFill>
-                <a:latin typeface="Calibri" pitchFamily="34" charset="0"/>
-                <a:ea typeface="Calibri" pitchFamily="34" charset="-122"/>
-                <a:cs typeface="Calibri" pitchFamily="34" charset="-120"/>
-              </a:rPr>
-              <a:t>Training and rollout plan for pilot participants</a:t>
-            </a:r>
-            <a:endParaRPr lang="en-US" sz="1200" dirty="0"/>
-          </a:p>
-        </p:txBody>
-      </p:sp>
-      <p:sp>
-        <p:nvSpPr>
-          <p:cNvPr id="17" name="Text 14"/>
-          <p:cNvSpPr/>
-          <p:nvPr/>
-        </p:nvSpPr>
-        <p:spPr>
-          <a:xfrm>
-            <a:off x="6583680" y="4645152"/>
-            <a:ext cx="4754880" cy="502920"/>
-          </a:xfrm>
-          <a:prstGeom prst="rect">
-            <a:avLst/>
-          </a:prstGeom>
-          <a:noFill/>
-          <a:ln/>
-        </p:spPr>
-        <p:txBody>
-          <a:bodyPr wrap="square" rtlCol="0" anchor="ctr"/>
-          <a:lstStyle/>
-          <a:p>
-            <a:pPr marL="0" indent="0">
-              <a:lnSpc>
-                <a:spcPct val="120000"/>
-              </a:lnSpc>
-              <a:buNone/>
-            </a:pPr>
-            <a:r>
-              <a:rPr lang="en-US" sz="1200" b="1" dirty="0">
-                <a:solidFill>
-                  <a:srgbClr val="D9A441"/>
-                </a:solidFill>
-                <a:latin typeface="Calibri" pitchFamily="34" charset="0"/>
-                <a:ea typeface="Calibri" pitchFamily="34" charset="-122"/>
-                <a:cs typeface="Calibri" pitchFamily="34" charset="-120"/>
-              </a:rPr>
-              <a:t>→  </a:t>
-            </a:r>
-            <a:r>
-              <a:rPr lang="en-US" sz="1200" dirty="0">
-                <a:solidFill>
-                  <a:srgbClr val="FFFFFF"/>
-                </a:solidFill>
-                <a:latin typeface="Calibri" pitchFamily="34" charset="0"/>
-                <a:ea typeface="Calibri" pitchFamily="34" charset="-122"/>
-                <a:cs typeface="Calibri" pitchFamily="34" charset="-120"/>
-              </a:rPr>
-              <a:t>Committee sign-off on go-live readiness criteria</a:t>
-            </a:r>
-            <a:endParaRPr lang="en-US" sz="1200" dirty="0"/>
+              <a:rPr lang="en-US" sz="1100" b="1" i="1" dirty="0">
+                <a:solidFill>
+                  <a:srgbClr val="2C0F5E"/>
+                </a:solidFill>
+                <a:latin typeface="Calibri" pitchFamily="34" charset="0"/>
+                <a:ea typeface="Calibri" pitchFamily="34" charset="-122"/>
+                <a:cs typeface="Calibri" pitchFamily="34" charset="-120"/>
+              </a:rPr>
+              <a:t>Being upfront:  </a:t>
+            </a:r>
+            <a:r>
+              <a:rPr lang="en-US" sz="1100" i="1" dirty="0">
+                <a:solidFill>
+                  <a:srgbClr val="5C5470"/>
+                </a:solidFill>
+                <a:latin typeface="Calibri" pitchFamily="34" charset="0"/>
+                <a:ea typeface="Calibri" pitchFamily="34" charset="-122"/>
+                <a:cs typeface="Calibri" pitchFamily="34" charset="-120"/>
+              </a:rPr>
+              <a:t>today's scheduled backups default to the same server's local disk. Pointing them at the failover server - not just having one - is what actually closes this gap.</a:t>
+            </a:r>
+            <a:endParaRPr lang="en-US" sz="1100" dirty="0"/>
           </a:p>
         </p:txBody>
       </p:sp>
@@ -11546,7 +11177,7 @@
 </p:sld>
 </file>
 
-<file path=ppt/slides/slide19.xml><?xml version="1.0" encoding="utf-8"?>
+<file path=ppt/slides/slide18.xml><?xml version="1.0" encoding="utf-8"?>
 <p:sld xmlns:a="http://schemas.openxmlformats.org/drawingml/2006/main" xmlns:r="http://schemas.openxmlformats.org/officeDocument/2006/relationships" xmlns:p="http://schemas.openxmlformats.org/presentationml/2006/main">
   <p:cSld name="Slide 18">
     <p:spTree>
@@ -11620,7 +11251,7 @@
                 <a:ea typeface="Calibri" pitchFamily="34" charset="-122"/>
                 <a:cs typeface="Calibri" pitchFamily="34" charset="-120"/>
               </a:rPr>
-              <a:t>WHAT'S NEXT</a:t>
+              <a:t>WHERE WE ARE TODAY</a:t>
             </a:r>
             <a:endParaRPr lang="en-US" sz="1200" dirty="0"/>
           </a:p>
@@ -11651,7 +11282,7 @@
               <a:buNone/>
             </a:pPr>
             <a:r>
-              <a:rPr lang="en-US" sz="2900" b="1" dirty="0">
+              <a:rPr lang="en-US" sz="2700" b="1" dirty="0">
                 <a:solidFill>
                   <a:srgbClr val="FFFFFF"/>
                 </a:solidFill>
@@ -11659,9 +11290,9 @@
                 <a:ea typeface="Cambria" pitchFamily="34" charset="-122"/>
                 <a:cs typeface="Cambria" pitchFamily="34" charset="-120"/>
               </a:rPr>
-              <a:t>Near-term roadmap</a:t>
-            </a:r>
-            <a:endParaRPr lang="en-US" sz="2900" dirty="0"/>
+              <a:t>Important: this is a progress update, not a pilot</a:t>
+            </a:r>
+            <a:endParaRPr lang="en-US" sz="2700" dirty="0"/>
           </a:p>
         </p:txBody>
       </p:sp>
@@ -11674,11 +11305,11 @@
         <p:spPr>
           <a:xfrm>
             <a:off x="548640" y="1737360"/>
-            <a:ext cx="11064240" cy="960120"/>
+            <a:ext cx="5349240" cy="4297680"/>
           </a:xfrm>
           <a:prstGeom prst="roundRect">
             <a:avLst>
-              <a:gd name="adj" fmla="val 8571"/>
+              <a:gd name="adj" fmla="val 1915"/>
             </a:avLst>
           </a:prstGeom>
           <a:solidFill>
@@ -11702,24 +11333,24 @@
         </p:nvSpPr>
         <p:spPr>
           <a:xfrm>
-            <a:off x="822960" y="1865376"/>
-            <a:ext cx="3657600" cy="457200"/>
-          </a:xfrm>
-          <a:prstGeom prst="rect">
-            <a:avLst/>
-          </a:prstGeom>
-          <a:noFill/>
-          <a:ln/>
-        </p:spPr>
-        <p:txBody>
-          <a:bodyPr wrap="square" rtlCol="0" anchor="ctr"/>
-          <a:lstStyle/>
-          <a:p>
-            <a:pPr marL="0" indent="0">
-              <a:buNone/>
-            </a:pPr>
-            <a:r>
-              <a:rPr lang="en-US" sz="1350" b="1" dirty="0">
+            <a:off x="868680" y="1965960"/>
+            <a:ext cx="4754880" cy="365760"/>
+          </a:xfrm>
+          <a:prstGeom prst="rect">
+            <a:avLst/>
+          </a:prstGeom>
+          <a:noFill/>
+          <a:ln/>
+        </p:spPr>
+        <p:txBody>
+          <a:bodyPr wrap="square" rtlCol="0" anchor="ctr"/>
+          <a:lstStyle/>
+          <a:p>
+            <a:pPr marL="0" indent="0">
+              <a:buNone/>
+            </a:pPr>
+            <a:r>
+              <a:rPr lang="en-US" sz="1450" b="1" dirty="0">
                 <a:solidFill>
                   <a:srgbClr val="2C0F5E"/>
                 </a:solidFill>
@@ -11727,9 +11358,9 @@
                 <a:ea typeface="Calibri" pitchFamily="34" charset="-122"/>
                 <a:cs typeface="Calibri" pitchFamily="34" charset="-120"/>
               </a:rPr>
-              <a:t>Workflow Automation</a:t>
-            </a:r>
-            <a:endParaRPr lang="en-US" sz="1350" dirty="0"/>
+              <a:t>Where we are</a:t>
+            </a:r>
+            <a:endParaRPr lang="en-US" sz="1450" dirty="0"/>
           </a:p>
         </p:txBody>
       </p:sp>
@@ -11741,8 +11372,8 @@
         </p:nvSpPr>
         <p:spPr>
           <a:xfrm>
-            <a:off x="822960" y="2240280"/>
-            <a:ext cx="7315200" cy="411480"/>
+            <a:off x="868680" y="2450592"/>
+            <a:ext cx="4754880" cy="502920"/>
           </a:xfrm>
           <a:prstGeom prst="rect">
             <a:avLst/>
@@ -11756,12 +11387,23 @@
           <a:p>
             <a:pPr marL="0" indent="0">
               <a:lnSpc>
-                <a:spcPct val="110000"/>
+                <a:spcPct val="120000"/>
               </a:lnSpc>
               <a:buNone/>
             </a:pPr>
             <a:r>
-              <a:rPr lang="en-US" sz="1000" dirty="0">
+              <a:rPr lang="en-US" sz="1200" b="1" dirty="0">
+                <a:solidFill>
+                  <a:srgbClr val="2C0F5E"/>
+                </a:solidFill>
+                <a:latin typeface="Calibri" pitchFamily="34" charset="0"/>
+                <a:ea typeface="Calibri" pitchFamily="34" charset="-122"/>
+                <a:cs typeface="Calibri" pitchFamily="34" charset="-120"/>
+              </a:rPr>
+              <a:t>•  </a:t>
+            </a:r>
+            <a:r>
+              <a:rPr lang="en-US" sz="1200" dirty="0">
                 <a:solidFill>
                   <a:srgbClr val="5C5470"/>
                 </a:solidFill>
@@ -11769,91 +11411,189 @@
                 <a:ea typeface="Calibri" pitchFamily="34" charset="-122"/>
                 <a:cs typeface="Calibri" pitchFamily="34" charset="-120"/>
               </a:rPr>
-              <a:t>No-code trigger → condition → action builder across submissions, cases, meetings, and tasks. Awaiting build approval.</a:t>
-            </a:r>
-            <a:endParaRPr lang="en-US" sz="1000" dirty="0"/>
-          </a:p>
-        </p:txBody>
-      </p:sp>
-      <p:sp>
-        <p:nvSpPr>
-          <p:cNvPr id="8" name="Shape 5"/>
-          <p:cNvSpPr/>
-          <p:nvPr/>
-        </p:nvSpPr>
-        <p:spPr>
-          <a:xfrm>
-            <a:off x="8366760" y="2029968"/>
-            <a:ext cx="2468880" cy="384048"/>
+              <a:t>System built and functioning across all core modules</a:t>
+            </a:r>
+            <a:endParaRPr lang="en-US" sz="1200" dirty="0"/>
+          </a:p>
+        </p:txBody>
+      </p:sp>
+      <p:sp>
+        <p:nvSpPr>
+          <p:cNvPr id="8" name="Text 5"/>
+          <p:cNvSpPr/>
+          <p:nvPr/>
+        </p:nvSpPr>
+        <p:spPr>
+          <a:xfrm>
+            <a:off x="868680" y="2999232"/>
+            <a:ext cx="4754880" cy="502920"/>
+          </a:xfrm>
+          <a:prstGeom prst="rect">
+            <a:avLst/>
+          </a:prstGeom>
+          <a:noFill/>
+          <a:ln/>
+        </p:spPr>
+        <p:txBody>
+          <a:bodyPr wrap="square" rtlCol="0" anchor="ctr"/>
+          <a:lstStyle/>
+          <a:p>
+            <a:pPr marL="0" indent="0">
+              <a:lnSpc>
+                <a:spcPct val="120000"/>
+              </a:lnSpc>
+              <a:buNone/>
+            </a:pPr>
+            <a:r>
+              <a:rPr lang="en-US" sz="1200" b="1" dirty="0">
+                <a:solidFill>
+                  <a:srgbClr val="2C0F5E"/>
+                </a:solidFill>
+                <a:latin typeface="Calibri" pitchFamily="34" charset="0"/>
+                <a:ea typeface="Calibri" pitchFamily="34" charset="-122"/>
+                <a:cs typeface="Calibri" pitchFamily="34" charset="-120"/>
+              </a:rPr>
+              <a:t>•  </a:t>
+            </a:r>
+            <a:r>
+              <a:rPr lang="en-US" sz="1200" dirty="0">
+                <a:solidFill>
+                  <a:srgbClr val="5C5470"/>
+                </a:solidFill>
+                <a:latin typeface="Calibri" pitchFamily="34" charset="0"/>
+                <a:ea typeface="Calibri" pitchFamily="34" charset="-122"/>
+                <a:cs typeface="Calibri" pitchFamily="34" charset="-120"/>
+              </a:rPr>
+              <a:t>Running in a controlled environment with seeded / dummy data only</a:t>
+            </a:r>
+            <a:endParaRPr lang="en-US" sz="1200" dirty="0"/>
+          </a:p>
+        </p:txBody>
+      </p:sp>
+      <p:sp>
+        <p:nvSpPr>
+          <p:cNvPr id="9" name="Text 6"/>
+          <p:cNvSpPr/>
+          <p:nvPr/>
+        </p:nvSpPr>
+        <p:spPr>
+          <a:xfrm>
+            <a:off x="868680" y="3547872"/>
+            <a:ext cx="4754880" cy="502920"/>
+          </a:xfrm>
+          <a:prstGeom prst="rect">
+            <a:avLst/>
+          </a:prstGeom>
+          <a:noFill/>
+          <a:ln/>
+        </p:spPr>
+        <p:txBody>
+          <a:bodyPr wrap="square" rtlCol="0" anchor="ctr"/>
+          <a:lstStyle/>
+          <a:p>
+            <a:pPr marL="0" indent="0">
+              <a:lnSpc>
+                <a:spcPct val="120000"/>
+              </a:lnSpc>
+              <a:buNone/>
+            </a:pPr>
+            <a:r>
+              <a:rPr lang="en-US" sz="1200" b="1" dirty="0">
+                <a:solidFill>
+                  <a:srgbClr val="2C0F5E"/>
+                </a:solidFill>
+                <a:latin typeface="Calibri" pitchFamily="34" charset="0"/>
+                <a:ea typeface="Calibri" pitchFamily="34" charset="-122"/>
+                <a:cs typeface="Calibri" pitchFamily="34" charset="-120"/>
+              </a:rPr>
+              <a:t>•  </a:t>
+            </a:r>
+            <a:r>
+              <a:rPr lang="en-US" sz="1200" dirty="0">
+                <a:solidFill>
+                  <a:srgbClr val="5C5470"/>
+                </a:solidFill>
+                <a:latin typeface="Calibri" pitchFamily="34" charset="0"/>
+                <a:ea typeface="Calibri" pitchFamily="34" charset="-122"/>
+                <a:cs typeface="Calibri" pitchFamily="34" charset="-120"/>
+              </a:rPr>
+              <a:t>No real ministry submissions, no real personnel data</a:t>
+            </a:r>
+            <a:endParaRPr lang="en-US" sz="1200" dirty="0"/>
+          </a:p>
+        </p:txBody>
+      </p:sp>
+      <p:sp>
+        <p:nvSpPr>
+          <p:cNvPr id="10" name="Text 7"/>
+          <p:cNvSpPr/>
+          <p:nvPr/>
+        </p:nvSpPr>
+        <p:spPr>
+          <a:xfrm>
+            <a:off x="868680" y="4096512"/>
+            <a:ext cx="4754880" cy="502920"/>
+          </a:xfrm>
+          <a:prstGeom prst="rect">
+            <a:avLst/>
+          </a:prstGeom>
+          <a:noFill/>
+          <a:ln/>
+        </p:spPr>
+        <p:txBody>
+          <a:bodyPr wrap="square" rtlCol="0" anchor="ctr"/>
+          <a:lstStyle/>
+          <a:p>
+            <a:pPr marL="0" indent="0">
+              <a:lnSpc>
+                <a:spcPct val="120000"/>
+              </a:lnSpc>
+              <a:buNone/>
+            </a:pPr>
+            <a:r>
+              <a:rPr lang="en-US" sz="1200" b="1" dirty="0">
+                <a:solidFill>
+                  <a:srgbClr val="2C0F5E"/>
+                </a:solidFill>
+                <a:latin typeface="Calibri" pitchFamily="34" charset="0"/>
+                <a:ea typeface="Calibri" pitchFamily="34" charset="-122"/>
+                <a:cs typeface="Calibri" pitchFamily="34" charset="-120"/>
+              </a:rPr>
+              <a:t>•  </a:t>
+            </a:r>
+            <a:r>
+              <a:rPr lang="en-US" sz="1200" dirty="0">
+                <a:solidFill>
+                  <a:srgbClr val="5C5470"/>
+                </a:solidFill>
+                <a:latin typeface="Calibri" pitchFamily="34" charset="0"/>
+                <a:ea typeface="Calibri" pitchFamily="34" charset="-122"/>
+                <a:cs typeface="Calibri" pitchFamily="34" charset="-120"/>
+              </a:rPr>
+              <a:t>Internal testing by the build team, not by end users</a:t>
+            </a:r>
+            <a:endParaRPr lang="en-US" sz="1200" dirty="0"/>
+          </a:p>
+        </p:txBody>
+      </p:sp>
+      <p:sp>
+        <p:nvSpPr>
+          <p:cNvPr id="11" name="Shape 8"/>
+          <p:cNvSpPr/>
+          <p:nvPr/>
+        </p:nvSpPr>
+        <p:spPr>
+          <a:xfrm>
+            <a:off x="6263640" y="1737360"/>
+            <a:ext cx="5349240" cy="4297680"/>
           </a:xfrm>
           <a:prstGeom prst="roundRect">
             <a:avLst>
-              <a:gd name="adj" fmla="val 50000"/>
+              <a:gd name="adj" fmla="val 1915"/>
             </a:avLst>
           </a:prstGeom>
           <a:solidFill>
-            <a:srgbClr val="FBF0DC"/>
-          </a:solidFill>
-          <a:ln/>
-        </p:spPr>
-      </p:sp>
-      <p:sp>
-        <p:nvSpPr>
-          <p:cNvPr id="9" name="Text 6"/>
-          <p:cNvSpPr/>
-          <p:nvPr/>
-        </p:nvSpPr>
-        <p:spPr>
-          <a:xfrm>
-            <a:off x="8366760" y="2029968"/>
-            <a:ext cx="2468880" cy="384048"/>
-          </a:xfrm>
-          <a:prstGeom prst="rect">
-            <a:avLst/>
-          </a:prstGeom>
-          <a:noFill/>
-          <a:ln/>
-        </p:spPr>
-        <p:txBody>
-          <a:bodyPr wrap="square" rtlCol="0" anchor="ctr"/>
-          <a:lstStyle/>
-          <a:p>
-            <a:pPr marL="0" indent="0" algn="ctr">
-              <a:buNone/>
-            </a:pPr>
-            <a:r>
-              <a:rPr lang="en-US" sz="1000" b="1" dirty="0">
-                <a:solidFill>
-                  <a:srgbClr val="B5791A"/>
-                </a:solidFill>
-                <a:latin typeface="Calibri" pitchFamily="34" charset="0"/>
-                <a:ea typeface="Calibri" pitchFamily="34" charset="-122"/>
-                <a:cs typeface="Calibri" pitchFamily="34" charset="-120"/>
-              </a:rPr>
-              <a:t>Proposed</a:t>
-            </a:r>
-            <a:endParaRPr lang="en-US" sz="1000" dirty="0"/>
-          </a:p>
-        </p:txBody>
-      </p:sp>
-      <p:sp>
-        <p:nvSpPr>
-          <p:cNvPr id="10" name="Shape 7"/>
-          <p:cNvSpPr/>
-          <p:nvPr/>
-        </p:nvSpPr>
-        <p:spPr>
-          <a:xfrm>
-            <a:off x="548640" y="2807208"/>
-            <a:ext cx="11064240" cy="960120"/>
-          </a:xfrm>
-          <a:prstGeom prst="roundRect">
-            <a:avLst>
-              <a:gd name="adj" fmla="val 8571"/>
-            </a:avLst>
-          </a:prstGeom>
-          <a:solidFill>
-            <a:srgbClr val="F5F3FB"/>
+            <a:srgbClr val="1E0E42"/>
           </a:solidFill>
           <a:ln/>
           <a:effectLst>
@@ -11867,53 +11607,53 @@
       </p:sp>
       <p:sp>
         <p:nvSpPr>
-          <p:cNvPr id="11" name="Text 8"/>
-          <p:cNvSpPr/>
-          <p:nvPr/>
-        </p:nvSpPr>
-        <p:spPr>
-          <a:xfrm>
-            <a:off x="822960" y="2935224"/>
-            <a:ext cx="3657600" cy="457200"/>
-          </a:xfrm>
-          <a:prstGeom prst="rect">
-            <a:avLst/>
-          </a:prstGeom>
-          <a:noFill/>
-          <a:ln/>
-        </p:spPr>
-        <p:txBody>
-          <a:bodyPr wrap="square" rtlCol="0" anchor="ctr"/>
-          <a:lstStyle/>
-          <a:p>
-            <a:pPr marL="0" indent="0">
-              <a:buNone/>
-            </a:pPr>
-            <a:r>
-              <a:rPr lang="en-US" sz="1350" b="1" dirty="0">
-                <a:solidFill>
-                  <a:srgbClr val="2C0F5E"/>
-                </a:solidFill>
-                <a:latin typeface="Calibri" pitchFamily="34" charset="0"/>
-                <a:ea typeface="Calibri" pitchFamily="34" charset="-122"/>
-                <a:cs typeface="Calibri" pitchFamily="34" charset="-120"/>
-              </a:rPr>
-              <a:t>Enterprise Reporting Engine</a:t>
-            </a:r>
-            <a:endParaRPr lang="en-US" sz="1350" dirty="0"/>
-          </a:p>
-        </p:txBody>
-      </p:sp>
-      <p:sp>
-        <p:nvSpPr>
           <p:cNvPr id="12" name="Text 9"/>
           <p:cNvSpPr/>
           <p:nvPr/>
         </p:nvSpPr>
         <p:spPr>
           <a:xfrm>
-            <a:off x="822960" y="3310128"/>
-            <a:ext cx="7315200" cy="411480"/>
+            <a:off x="6583680" y="1965960"/>
+            <a:ext cx="4754880" cy="365760"/>
+          </a:xfrm>
+          <a:prstGeom prst="rect">
+            <a:avLst/>
+          </a:prstGeom>
+          <a:noFill/>
+          <a:ln/>
+        </p:spPr>
+        <p:txBody>
+          <a:bodyPr wrap="square" rtlCol="0" anchor="ctr"/>
+          <a:lstStyle/>
+          <a:p>
+            <a:pPr marL="0" indent="0">
+              <a:buNone/>
+            </a:pPr>
+            <a:r>
+              <a:rPr lang="en-US" sz="1450" b="1" dirty="0">
+                <a:solidFill>
+                  <a:srgbClr val="D9A441"/>
+                </a:solidFill>
+                <a:latin typeface="Calibri" pitchFamily="34" charset="0"/>
+                <a:ea typeface="Calibri" pitchFamily="34" charset="-122"/>
+                <a:cs typeface="Calibri" pitchFamily="34" charset="-120"/>
+              </a:rPr>
+              <a:t>What's still ahead before a pilot</a:t>
+            </a:r>
+            <a:endParaRPr lang="en-US" sz="1450" dirty="0"/>
+          </a:p>
+        </p:txBody>
+      </p:sp>
+      <p:sp>
+        <p:nvSpPr>
+          <p:cNvPr id="13" name="Text 10"/>
+          <p:cNvSpPr/>
+          <p:nvPr/>
+        </p:nvSpPr>
+        <p:spPr>
+          <a:xfrm>
+            <a:off x="6583680" y="2450592"/>
+            <a:ext cx="4754880" cy="502920"/>
           </a:xfrm>
           <a:prstGeom prst="rect">
             <a:avLst/>
@@ -11927,46 +11667,35 @@
           <a:p>
             <a:pPr marL="0" indent="0">
               <a:lnSpc>
-                <a:spcPct val="110000"/>
+                <a:spcPct val="120000"/>
               </a:lnSpc>
               <a:buNone/>
             </a:pPr>
             <a:r>
-              <a:rPr lang="en-US" sz="1000" dirty="0">
-                <a:solidFill>
-                  <a:srgbClr val="5C5470"/>
-                </a:solidFill>
-                <a:latin typeface="Calibri" pitchFamily="34" charset="0"/>
-                <a:ea typeface="Calibri" pitchFamily="34" charset="-122"/>
-                <a:cs typeface="Calibri" pitchFamily="34" charset="-120"/>
-              </a:rPr>
-              <a:t>Parameterised report catalog plus ad-hoc natural-language reports, ready for migration and rollout.</a:t>
-            </a:r>
-            <a:endParaRPr lang="en-US" sz="1000" dirty="0"/>
-          </a:p>
-        </p:txBody>
-      </p:sp>
-      <p:sp>
-        <p:nvSpPr>
-          <p:cNvPr id="13" name="Shape 10"/>
-          <p:cNvSpPr/>
-          <p:nvPr/>
-        </p:nvSpPr>
-        <p:spPr>
-          <a:xfrm>
-            <a:off x="8366760" y="3099816"/>
-            <a:ext cx="2468880" cy="384048"/>
-          </a:xfrm>
-          <a:prstGeom prst="roundRect">
-            <a:avLst>
-              <a:gd name="adj" fmla="val 50000"/>
-            </a:avLst>
-          </a:prstGeom>
-          <a:solidFill>
-            <a:srgbClr val="E4F4EC"/>
-          </a:solidFill>
-          <a:ln/>
-        </p:spPr>
+              <a:rPr lang="en-US" sz="1200" b="1" dirty="0">
+                <a:solidFill>
+                  <a:srgbClr val="D9A441"/>
+                </a:solidFill>
+                <a:latin typeface="Calibri" pitchFamily="34" charset="0"/>
+                <a:ea typeface="Calibri" pitchFamily="34" charset="-122"/>
+                <a:cs typeface="Calibri" pitchFamily="34" charset="-120"/>
+              </a:rPr>
+              <a:t>→  </a:t>
+            </a:r>
+            <a:r>
+              <a:rPr lang="en-US" sz="1200" dirty="0">
+                <a:solidFill>
+                  <a:srgbClr val="FFFFFF"/>
+                </a:solidFill>
+                <a:latin typeface="Calibri" pitchFamily="34" charset="0"/>
+                <a:ea typeface="Calibri" pitchFamily="34" charset="-122"/>
+                <a:cs typeface="Calibri" pitchFamily="34" charset="-120"/>
+              </a:rPr>
+              <a:t>Select pilot ministries and a defined pilot scope</a:t>
+            </a:r>
+            <a:endParaRPr lang="en-US" sz="1200" dirty="0"/>
+          </a:p>
+        </p:txBody>
       </p:sp>
       <p:sp>
         <p:nvSpPr>
@@ -11976,46 +11705,424 @@
         </p:nvSpPr>
         <p:spPr>
           <a:xfrm>
-            <a:off x="8366760" y="3099816"/>
-            <a:ext cx="2468880" cy="384048"/>
-          </a:xfrm>
-          <a:prstGeom prst="rect">
-            <a:avLst/>
-          </a:prstGeom>
-          <a:noFill/>
-          <a:ln/>
-        </p:spPr>
-        <p:txBody>
-          <a:bodyPr wrap="square" rtlCol="0" anchor="ctr"/>
-          <a:lstStyle/>
-          <a:p>
-            <a:pPr marL="0" indent="0" algn="ctr">
-              <a:buNone/>
-            </a:pPr>
-            <a:r>
-              <a:rPr lang="en-US" sz="1000" b="1" dirty="0">
-                <a:solidFill>
-                  <a:srgbClr val="1E7A4C"/>
-                </a:solidFill>
-                <a:latin typeface="Calibri" pitchFamily="34" charset="0"/>
-                <a:ea typeface="Calibri" pitchFamily="34" charset="-122"/>
-                <a:cs typeface="Calibri" pitchFamily="34" charset="-120"/>
-              </a:rPr>
-              <a:t>Built, pending deploy</a:t>
-            </a:r>
-            <a:endParaRPr lang="en-US" sz="1000" dirty="0"/>
-          </a:p>
-        </p:txBody>
-      </p:sp>
-      <p:sp>
-        <p:nvSpPr>
-          <p:cNvPr id="15" name="Shape 12"/>
-          <p:cNvSpPr/>
-          <p:nvPr/>
-        </p:nvSpPr>
-        <p:spPr>
-          <a:xfrm>
-            <a:off x="548640" y="3877056"/>
+            <a:off x="6583680" y="2999232"/>
+            <a:ext cx="4754880" cy="502920"/>
+          </a:xfrm>
+          <a:prstGeom prst="rect">
+            <a:avLst/>
+          </a:prstGeom>
+          <a:noFill/>
+          <a:ln/>
+        </p:spPr>
+        <p:txBody>
+          <a:bodyPr wrap="square" rtlCol="0" anchor="ctr"/>
+          <a:lstStyle/>
+          <a:p>
+            <a:pPr marL="0" indent="0">
+              <a:lnSpc>
+                <a:spcPct val="120000"/>
+              </a:lnSpc>
+              <a:buNone/>
+            </a:pPr>
+            <a:r>
+              <a:rPr lang="en-US" sz="1200" b="1" dirty="0">
+                <a:solidFill>
+                  <a:srgbClr val="D9A441"/>
+                </a:solidFill>
+                <a:latin typeface="Calibri" pitchFamily="34" charset="0"/>
+                <a:ea typeface="Calibri" pitchFamily="34" charset="-122"/>
+                <a:cs typeface="Calibri" pitchFamily="34" charset="-120"/>
+              </a:rPr>
+              <a:t>→  </a:t>
+            </a:r>
+            <a:r>
+              <a:rPr lang="en-US" sz="1200" dirty="0">
+                <a:solidFill>
+                  <a:srgbClr val="FFFFFF"/>
+                </a:solidFill>
+                <a:latin typeface="Calibri" pitchFamily="34" charset="0"/>
+                <a:ea typeface="Calibri" pitchFamily="34" charset="-122"/>
+                <a:cs typeface="Calibri" pitchFamily="34" charset="-120"/>
+              </a:rPr>
+              <a:t>Load real (approved) reference data - ministries, departments, users</a:t>
+            </a:r>
+            <a:endParaRPr lang="en-US" sz="1200" dirty="0"/>
+          </a:p>
+        </p:txBody>
+      </p:sp>
+      <p:sp>
+        <p:nvSpPr>
+          <p:cNvPr id="15" name="Text 12"/>
+          <p:cNvSpPr/>
+          <p:nvPr/>
+        </p:nvSpPr>
+        <p:spPr>
+          <a:xfrm>
+            <a:off x="6583680" y="3547872"/>
+            <a:ext cx="4754880" cy="502920"/>
+          </a:xfrm>
+          <a:prstGeom prst="rect">
+            <a:avLst/>
+          </a:prstGeom>
+          <a:noFill/>
+          <a:ln/>
+        </p:spPr>
+        <p:txBody>
+          <a:bodyPr wrap="square" rtlCol="0" anchor="ctr"/>
+          <a:lstStyle/>
+          <a:p>
+            <a:pPr marL="0" indent="0">
+              <a:lnSpc>
+                <a:spcPct val="120000"/>
+              </a:lnSpc>
+              <a:buNone/>
+            </a:pPr>
+            <a:r>
+              <a:rPr lang="en-US" sz="1200" b="1" dirty="0">
+                <a:solidFill>
+                  <a:srgbClr val="D9A441"/>
+                </a:solidFill>
+                <a:latin typeface="Calibri" pitchFamily="34" charset="0"/>
+                <a:ea typeface="Calibri" pitchFamily="34" charset="-122"/>
+                <a:cs typeface="Calibri" pitchFamily="34" charset="-120"/>
+              </a:rPr>
+              <a:t>→  </a:t>
+            </a:r>
+            <a:r>
+              <a:rPr lang="en-US" sz="1200" dirty="0">
+                <a:solidFill>
+                  <a:srgbClr val="FFFFFF"/>
+                </a:solidFill>
+                <a:latin typeface="Calibri" pitchFamily="34" charset="0"/>
+                <a:ea typeface="Calibri" pitchFamily="34" charset="-122"/>
+                <a:cs typeface="Calibri" pitchFamily="34" charset="-120"/>
+              </a:rPr>
+              <a:t>Formal user acceptance testing with real OPSC and ministry staff</a:t>
+            </a:r>
+            <a:endParaRPr lang="en-US" sz="1200" dirty="0"/>
+          </a:p>
+        </p:txBody>
+      </p:sp>
+      <p:sp>
+        <p:nvSpPr>
+          <p:cNvPr id="16" name="Text 13"/>
+          <p:cNvSpPr/>
+          <p:nvPr/>
+        </p:nvSpPr>
+        <p:spPr>
+          <a:xfrm>
+            <a:off x="6583680" y="4096512"/>
+            <a:ext cx="4754880" cy="502920"/>
+          </a:xfrm>
+          <a:prstGeom prst="rect">
+            <a:avLst/>
+          </a:prstGeom>
+          <a:noFill/>
+          <a:ln/>
+        </p:spPr>
+        <p:txBody>
+          <a:bodyPr wrap="square" rtlCol="0" anchor="ctr"/>
+          <a:lstStyle/>
+          <a:p>
+            <a:pPr marL="0" indent="0">
+              <a:lnSpc>
+                <a:spcPct val="120000"/>
+              </a:lnSpc>
+              <a:buNone/>
+            </a:pPr>
+            <a:r>
+              <a:rPr lang="en-US" sz="1200" b="1" dirty="0">
+                <a:solidFill>
+                  <a:srgbClr val="D9A441"/>
+                </a:solidFill>
+                <a:latin typeface="Calibri" pitchFamily="34" charset="0"/>
+                <a:ea typeface="Calibri" pitchFamily="34" charset="-122"/>
+                <a:cs typeface="Calibri" pitchFamily="34" charset="-120"/>
+              </a:rPr>
+              <a:t>→  </a:t>
+            </a:r>
+            <a:r>
+              <a:rPr lang="en-US" sz="1200" dirty="0">
+                <a:solidFill>
+                  <a:srgbClr val="FFFFFF"/>
+                </a:solidFill>
+                <a:latin typeface="Calibri" pitchFamily="34" charset="0"/>
+                <a:ea typeface="Calibri" pitchFamily="34" charset="-122"/>
+                <a:cs typeface="Calibri" pitchFamily="34" charset="-120"/>
+              </a:rPr>
+              <a:t>Training and rollout plan for pilot participants</a:t>
+            </a:r>
+            <a:endParaRPr lang="en-US" sz="1200" dirty="0"/>
+          </a:p>
+        </p:txBody>
+      </p:sp>
+      <p:sp>
+        <p:nvSpPr>
+          <p:cNvPr id="17" name="Text 14"/>
+          <p:cNvSpPr/>
+          <p:nvPr/>
+        </p:nvSpPr>
+        <p:spPr>
+          <a:xfrm>
+            <a:off x="6583680" y="4645152"/>
+            <a:ext cx="4754880" cy="502920"/>
+          </a:xfrm>
+          <a:prstGeom prst="rect">
+            <a:avLst/>
+          </a:prstGeom>
+          <a:noFill/>
+          <a:ln/>
+        </p:spPr>
+        <p:txBody>
+          <a:bodyPr wrap="square" rtlCol="0" anchor="ctr"/>
+          <a:lstStyle/>
+          <a:p>
+            <a:pPr marL="0" indent="0">
+              <a:lnSpc>
+                <a:spcPct val="120000"/>
+              </a:lnSpc>
+              <a:buNone/>
+            </a:pPr>
+            <a:r>
+              <a:rPr lang="en-US" sz="1200" b="1" dirty="0">
+                <a:solidFill>
+                  <a:srgbClr val="D9A441"/>
+                </a:solidFill>
+                <a:latin typeface="Calibri" pitchFamily="34" charset="0"/>
+                <a:ea typeface="Calibri" pitchFamily="34" charset="-122"/>
+                <a:cs typeface="Calibri" pitchFamily="34" charset="-120"/>
+              </a:rPr>
+              <a:t>→  </a:t>
+            </a:r>
+            <a:r>
+              <a:rPr lang="en-US" sz="1200" dirty="0">
+                <a:solidFill>
+                  <a:srgbClr val="FFFFFF"/>
+                </a:solidFill>
+                <a:latin typeface="Calibri" pitchFamily="34" charset="0"/>
+                <a:ea typeface="Calibri" pitchFamily="34" charset="-122"/>
+                <a:cs typeface="Calibri" pitchFamily="34" charset="-120"/>
+              </a:rPr>
+              <a:t>Committee sign-off on go-live readiness criteria</a:t>
+            </a:r>
+            <a:endParaRPr lang="en-US" sz="1200" dirty="0"/>
+          </a:p>
+        </p:txBody>
+      </p:sp>
+      <p:sp>
+        <p:nvSpPr>
+          <p:cNvPr id="18" name="Text 15"/>
+          <p:cNvSpPr/>
+          <p:nvPr/>
+        </p:nvSpPr>
+        <p:spPr>
+          <a:xfrm>
+            <a:off x="457200" y="6473952"/>
+            <a:ext cx="7315200" cy="274320"/>
+          </a:xfrm>
+          <a:prstGeom prst="rect">
+            <a:avLst/>
+          </a:prstGeom>
+          <a:noFill/>
+          <a:ln/>
+        </p:spPr>
+        <p:txBody>
+          <a:bodyPr wrap="square" rtlCol="0" anchor="ctr"/>
+          <a:lstStyle/>
+          <a:p>
+            <a:pPr marL="0" indent="0">
+              <a:buNone/>
+            </a:pPr>
+            <a:r>
+              <a:rPr lang="en-US" sz="900" i="1" dirty="0">
+                <a:solidFill>
+                  <a:srgbClr val="CBBFE6"/>
+                </a:solidFill>
+                <a:latin typeface="Calibri" pitchFamily="34" charset="0"/>
+                <a:ea typeface="Calibri" pitchFamily="34" charset="-122"/>
+                <a:cs typeface="Calibri" pitchFamily="34" charset="-120"/>
+              </a:rPr>
+              <a:t>SCDMS - Submission &amp; Commission Decision Management System</a:t>
+            </a:r>
+            <a:endParaRPr lang="en-US" sz="900" dirty="0"/>
+          </a:p>
+        </p:txBody>
+      </p:sp>
+      <p:sp>
+        <p:nvSpPr>
+          <p:cNvPr id="19" name="Text 16"/>
+          <p:cNvSpPr/>
+          <p:nvPr/>
+        </p:nvSpPr>
+        <p:spPr>
+          <a:xfrm>
+            <a:off x="11277295" y="6473952"/>
+            <a:ext cx="457200" cy="274320"/>
+          </a:xfrm>
+          <a:prstGeom prst="rect">
+            <a:avLst/>
+          </a:prstGeom>
+          <a:noFill/>
+          <a:ln/>
+        </p:spPr>
+        <p:txBody>
+          <a:bodyPr wrap="square" rtlCol="0" anchor="ctr"/>
+          <a:lstStyle/>
+          <a:p>
+            <a:pPr marL="0" indent="0" algn="r">
+              <a:buNone/>
+            </a:pPr>
+            <a:r>
+              <a:rPr lang="en-US" sz="900" dirty="0">
+                <a:solidFill>
+                  <a:srgbClr val="CBBFE6"/>
+                </a:solidFill>
+                <a:latin typeface="Calibri" pitchFamily="34" charset="0"/>
+                <a:ea typeface="Calibri" pitchFamily="34" charset="-122"/>
+                <a:cs typeface="Calibri" pitchFamily="34" charset="-120"/>
+              </a:rPr>
+              <a:t>18</a:t>
+            </a:r>
+            <a:endParaRPr lang="en-US" sz="900" dirty="0"/>
+          </a:p>
+        </p:txBody>
+      </p:sp>
+    </p:spTree>
+  </p:cSld>
+  <p:clrMapOvr>
+    <a:masterClrMapping/>
+  </p:clrMapOvr>
+</p:sld>
+</file>
+
+<file path=ppt/slides/slide19.xml><?xml version="1.0" encoding="utf-8"?>
+<p:sld xmlns:a="http://schemas.openxmlformats.org/drawingml/2006/main" xmlns:r="http://schemas.openxmlformats.org/officeDocument/2006/relationships" xmlns:p="http://schemas.openxmlformats.org/presentationml/2006/main">
+  <p:cSld name="Slide 19">
+    <p:spTree>
+      <p:nvGrpSpPr>
+        <p:cNvPr id="1" name=""/>
+        <p:cNvGrpSpPr/>
+        <p:nvPr/>
+      </p:nvGrpSpPr>
+      <p:grpSpPr>
+        <a:xfrm>
+          <a:off x="0" y="0"/>
+          <a:ext cx="0" cy="0"/>
+          <a:chOff x="0" y="0"/>
+          <a:chExt cx="0" cy="0"/>
+        </a:xfrm>
+      </p:grpSpPr>
+      <p:pic>
+        <p:nvPicPr>
+          <p:cNvPr id="2" name="Image 0" descr="C:\Users\Herman Tevilili\AppData\Local\Temp\claude\C--Users-Herman-Tevilili-Documents-GitHub-commissionDecisionApp-v1-0\2d2d3a12-ae9e-4f4b-990a-3e1ebe47ec28\scratchpad\scdms_deck\assets\bg.jpg"/>
+          <p:cNvPicPr>
+            <a:picLocks noChangeAspect="1"/>
+          </p:cNvPicPr>
+          <p:nvPr/>
+        </p:nvPicPr>
+        <p:blipFill>
+          <a:blip r:embed="rId3"/>
+          <a:stretch>
+            <a:fillRect/>
+          </a:stretch>
+        </p:blipFill>
+        <p:spPr>
+          <a:xfrm>
+            <a:off x="0" y="0"/>
+            <a:ext cx="12191695" cy="8127797"/>
+          </a:xfrm>
+          <a:prstGeom prst="rect">
+            <a:avLst/>
+          </a:prstGeom>
+        </p:spPr>
+      </p:pic>
+      <p:sp>
+        <p:nvSpPr>
+          <p:cNvPr id="3" name="Text 0"/>
+          <p:cNvSpPr/>
+          <p:nvPr/>
+        </p:nvSpPr>
+        <p:spPr>
+          <a:xfrm>
+            <a:off x="1691640" y="457200"/>
+            <a:ext cx="9875520" cy="320040"/>
+          </a:xfrm>
+          <a:prstGeom prst="rect">
+            <a:avLst/>
+          </a:prstGeom>
+          <a:noFill/>
+          <a:ln/>
+        </p:spPr>
+        <p:txBody>
+          <a:bodyPr wrap="square" rtlCol="0" anchor="ctr"/>
+          <a:lstStyle/>
+          <a:p>
+            <a:pPr marL="0" indent="0">
+              <a:buNone/>
+            </a:pPr>
+            <a:r>
+              <a:rPr lang="en-US" sz="1200" b="1" kern="0" spc="200" dirty="0">
+                <a:solidFill>
+                  <a:srgbClr val="D9A441"/>
+                </a:solidFill>
+                <a:latin typeface="Calibri" pitchFamily="34" charset="0"/>
+                <a:ea typeface="Calibri" pitchFamily="34" charset="-122"/>
+                <a:cs typeface="Calibri" pitchFamily="34" charset="-120"/>
+              </a:rPr>
+              <a:t>WHAT'S NEXT</a:t>
+            </a:r>
+            <a:endParaRPr lang="en-US" sz="1200" dirty="0"/>
+          </a:p>
+        </p:txBody>
+      </p:sp>
+      <p:sp>
+        <p:nvSpPr>
+          <p:cNvPr id="4" name="Text 1"/>
+          <p:cNvSpPr/>
+          <p:nvPr/>
+        </p:nvSpPr>
+        <p:spPr>
+          <a:xfrm>
+            <a:off x="1691640" y="777240"/>
+            <a:ext cx="9951415" cy="822960"/>
+          </a:xfrm>
+          <a:prstGeom prst="rect">
+            <a:avLst/>
+          </a:prstGeom>
+          <a:noFill/>
+          <a:ln/>
+        </p:spPr>
+        <p:txBody>
+          <a:bodyPr wrap="square" rtlCol="0" anchor="ctr"/>
+          <a:lstStyle/>
+          <a:p>
+            <a:pPr marL="0" indent="0">
+              <a:buNone/>
+            </a:pPr>
+            <a:r>
+              <a:rPr lang="en-US" sz="2900" b="1" dirty="0">
+                <a:solidFill>
+                  <a:srgbClr val="FFFFFF"/>
+                </a:solidFill>
+                <a:latin typeface="Cambria" pitchFamily="34" charset="0"/>
+                <a:ea typeface="Cambria" pitchFamily="34" charset="-122"/>
+                <a:cs typeface="Cambria" pitchFamily="34" charset="-120"/>
+              </a:rPr>
+              <a:t>Near-term roadmap</a:t>
+            </a:r>
+            <a:endParaRPr lang="en-US" sz="2900" dirty="0"/>
+          </a:p>
+        </p:txBody>
+      </p:sp>
+      <p:sp>
+        <p:nvSpPr>
+          <p:cNvPr id="5" name="Shape 2"/>
+          <p:cNvSpPr/>
+          <p:nvPr/>
+        </p:nvSpPr>
+        <p:spPr>
+          <a:xfrm>
+            <a:off x="548640" y="1737360"/>
             <a:ext cx="11064240" cy="960120"/>
           </a:xfrm>
           <a:prstGeom prst="roundRect">
@@ -12038,13 +12145,13 @@
       </p:sp>
       <p:sp>
         <p:nvSpPr>
-          <p:cNvPr id="16" name="Text 13"/>
-          <p:cNvSpPr/>
-          <p:nvPr/>
-        </p:nvSpPr>
-        <p:spPr>
-          <a:xfrm>
-            <a:off x="822960" y="4005072"/>
+          <p:cNvPr id="6" name="Text 3"/>
+          <p:cNvSpPr/>
+          <p:nvPr/>
+        </p:nvSpPr>
+        <p:spPr>
+          <a:xfrm>
+            <a:off x="822960" y="1865376"/>
             <a:ext cx="3657600" cy="457200"/>
           </a:xfrm>
           <a:prstGeom prst="rect">
@@ -12069,7 +12176,7 @@
                 <a:ea typeface="Calibri" pitchFamily="34" charset="-122"/>
                 <a:cs typeface="Calibri" pitchFamily="34" charset="-120"/>
               </a:rPr>
-              <a:t>Intelligence Explorer</a:t>
+              <a:t>Workflow Automation</a:t>
             </a:r>
             <a:endParaRPr lang="en-US" sz="1350" dirty="0"/>
           </a:p>
@@ -12077,13 +12184,13 @@
       </p:sp>
       <p:sp>
         <p:nvSpPr>
-          <p:cNvPr id="17" name="Text 14"/>
-          <p:cNvSpPr/>
-          <p:nvPr/>
-        </p:nvSpPr>
-        <p:spPr>
-          <a:xfrm>
-            <a:off x="822960" y="4379976"/>
+          <p:cNvPr id="7" name="Text 4"/>
+          <p:cNvSpPr/>
+          <p:nvPr/>
+        </p:nvSpPr>
+        <p:spPr>
+          <a:xfrm>
+            <a:off x="822960" y="2240280"/>
             <a:ext cx="7315200" cy="411480"/>
           </a:xfrm>
           <a:prstGeom prst="rect">
@@ -12111,7 +12218,7 @@
                 <a:ea typeface="Calibri" pitchFamily="34" charset="-122"/>
                 <a:cs typeface="Calibri" pitchFamily="34" charset="-120"/>
               </a:rPr>
-              <a:t>Interactive data-exploration UI now live for the Submissions dataset.</a:t>
+              <a:t>No-code trigger → condition → action builder across submissions, cases, meetings, and tasks. Awaiting build approval.</a:t>
             </a:r>
             <a:endParaRPr lang="en-US" sz="1000" dirty="0"/>
           </a:p>
@@ -12119,13 +12226,13 @@
       </p:sp>
       <p:sp>
         <p:nvSpPr>
-          <p:cNvPr id="18" name="Shape 15"/>
-          <p:cNvSpPr/>
-          <p:nvPr/>
-        </p:nvSpPr>
-        <p:spPr>
-          <a:xfrm>
-            <a:off x="8366760" y="4169664"/>
+          <p:cNvPr id="8" name="Shape 5"/>
+          <p:cNvSpPr/>
+          <p:nvPr/>
+        </p:nvSpPr>
+        <p:spPr>
+          <a:xfrm>
+            <a:off x="8366760" y="2029968"/>
             <a:ext cx="2468880" cy="384048"/>
           </a:xfrm>
           <a:prstGeom prst="roundRect">
@@ -12134,20 +12241,20 @@
             </a:avLst>
           </a:prstGeom>
           <a:solidFill>
-            <a:srgbClr val="E4F4EC"/>
+            <a:srgbClr val="FBF0DC"/>
           </a:solidFill>
           <a:ln/>
         </p:spPr>
       </p:sp>
       <p:sp>
         <p:nvSpPr>
-          <p:cNvPr id="19" name="Text 16"/>
-          <p:cNvSpPr/>
-          <p:nvPr/>
-        </p:nvSpPr>
-        <p:spPr>
-          <a:xfrm>
-            <a:off x="8366760" y="4169664"/>
+          <p:cNvPr id="9" name="Text 6"/>
+          <p:cNvSpPr/>
+          <p:nvPr/>
+        </p:nvSpPr>
+        <p:spPr>
+          <a:xfrm>
+            <a:off x="8366760" y="2029968"/>
             <a:ext cx="2468880" cy="384048"/>
           </a:xfrm>
           <a:prstGeom prst="rect">
@@ -12166,13 +12273,13 @@
             <a:r>
               <a:rPr lang="en-US" sz="1000" b="1" dirty="0">
                 <a:solidFill>
-                  <a:srgbClr val="1E7A4C"/>
-                </a:solidFill>
-                <a:latin typeface="Calibri" pitchFamily="34" charset="0"/>
-                <a:ea typeface="Calibri" pitchFamily="34" charset="-122"/>
-                <a:cs typeface="Calibri" pitchFamily="34" charset="-120"/>
-              </a:rPr>
-              <a:t>Built (P1)</a:t>
+                  <a:srgbClr val="B5791A"/>
+                </a:solidFill>
+                <a:latin typeface="Calibri" pitchFamily="34" charset="0"/>
+                <a:ea typeface="Calibri" pitchFamily="34" charset="-122"/>
+                <a:cs typeface="Calibri" pitchFamily="34" charset="-120"/>
+              </a:rPr>
+              <a:t>Proposed</a:t>
             </a:r>
             <a:endParaRPr lang="en-US" sz="1000" dirty="0"/>
           </a:p>
@@ -12180,13 +12287,13 @@
       </p:sp>
       <p:sp>
         <p:nvSpPr>
-          <p:cNvPr id="20" name="Shape 17"/>
-          <p:cNvSpPr/>
-          <p:nvPr/>
-        </p:nvSpPr>
-        <p:spPr>
-          <a:xfrm>
-            <a:off x="548640" y="4946904"/>
+          <p:cNvPr id="10" name="Shape 7"/>
+          <p:cNvSpPr/>
+          <p:nvPr/>
+        </p:nvSpPr>
+        <p:spPr>
+          <a:xfrm>
+            <a:off x="548640" y="2807208"/>
             <a:ext cx="11064240" cy="960120"/>
           </a:xfrm>
           <a:prstGeom prst="roundRect">
@@ -12209,13 +12316,13 @@
       </p:sp>
       <p:sp>
         <p:nvSpPr>
-          <p:cNvPr id="21" name="Text 18"/>
-          <p:cNvSpPr/>
-          <p:nvPr/>
-        </p:nvSpPr>
-        <p:spPr>
-          <a:xfrm>
-            <a:off x="822960" y="5074920"/>
+          <p:cNvPr id="11" name="Text 8"/>
+          <p:cNvSpPr/>
+          <p:nvPr/>
+        </p:nvSpPr>
+        <p:spPr>
+          <a:xfrm>
+            <a:off x="822960" y="2935224"/>
             <a:ext cx="3657600" cy="457200"/>
           </a:xfrm>
           <a:prstGeom prst="rect">
@@ -12240,7 +12347,7 @@
                 <a:ea typeface="Calibri" pitchFamily="34" charset="-122"/>
                 <a:cs typeface="Calibri" pitchFamily="34" charset="-120"/>
               </a:rPr>
-              <a:t>Sitting Workspace</a:t>
+              <a:t>Enterprise Reporting Engine</a:t>
             </a:r>
             <a:endParaRPr lang="en-US" sz="1350" dirty="0"/>
           </a:p>
@@ -12248,13 +12355,13 @@
       </p:sp>
       <p:sp>
         <p:nvSpPr>
-          <p:cNvPr id="22" name="Text 19"/>
-          <p:cNvSpPr/>
-          <p:nvPr/>
-        </p:nvSpPr>
-        <p:spPr>
-          <a:xfrm>
-            <a:off x="822960" y="5449824"/>
+          <p:cNvPr id="12" name="Text 9"/>
+          <p:cNvSpPr/>
+          <p:nvPr/>
+        </p:nvSpPr>
+        <p:spPr>
+          <a:xfrm>
+            <a:off x="822960" y="3310128"/>
             <a:ext cx="7315200" cy="411480"/>
           </a:xfrm>
           <a:prstGeom prst="rect">
@@ -12282,7 +12389,7 @@
                 <a:ea typeface="Calibri" pitchFamily="34" charset="-122"/>
                 <a:cs typeface="Calibri" pitchFamily="34" charset="-120"/>
               </a:rPr>
-              <a:t>Project-board view of Commission sittings; kanban-by-stage and one-click approval still to come (P3–P4).</a:t>
+              <a:t>Parameterised report catalog plus ad-hoc natural-language reports, ready for migration and rollout.</a:t>
             </a:r>
             <a:endParaRPr lang="en-US" sz="1000" dirty="0"/>
           </a:p>
@@ -12290,13 +12397,13 @@
       </p:sp>
       <p:sp>
         <p:nvSpPr>
-          <p:cNvPr id="23" name="Shape 20"/>
-          <p:cNvSpPr/>
-          <p:nvPr/>
-        </p:nvSpPr>
-        <p:spPr>
-          <a:xfrm>
-            <a:off x="8366760" y="5239512"/>
+          <p:cNvPr id="13" name="Shape 10"/>
+          <p:cNvSpPr/>
+          <p:nvPr/>
+        </p:nvSpPr>
+        <p:spPr>
+          <a:xfrm>
+            <a:off x="8366760" y="3099816"/>
             <a:ext cx="2468880" cy="384048"/>
           </a:xfrm>
           <a:prstGeom prst="roundRect">
@@ -12312,7 +12419,327 @@
       </p:sp>
       <p:sp>
         <p:nvSpPr>
-          <p:cNvPr id="24" name="Text 21"/>
+          <p:cNvPr id="14" name="Text 11"/>
+          <p:cNvSpPr/>
+          <p:nvPr/>
+        </p:nvSpPr>
+        <p:spPr>
+          <a:xfrm>
+            <a:off x="8366760" y="3099816"/>
+            <a:ext cx="2468880" cy="384048"/>
+          </a:xfrm>
+          <a:prstGeom prst="rect">
+            <a:avLst/>
+          </a:prstGeom>
+          <a:noFill/>
+          <a:ln/>
+        </p:spPr>
+        <p:txBody>
+          <a:bodyPr wrap="square" rtlCol="0" anchor="ctr"/>
+          <a:lstStyle/>
+          <a:p>
+            <a:pPr marL="0" indent="0" algn="ctr">
+              <a:buNone/>
+            </a:pPr>
+            <a:r>
+              <a:rPr lang="en-US" sz="1000" b="1" dirty="0">
+                <a:solidFill>
+                  <a:srgbClr val="1E7A4C"/>
+                </a:solidFill>
+                <a:latin typeface="Calibri" pitchFamily="34" charset="0"/>
+                <a:ea typeface="Calibri" pitchFamily="34" charset="-122"/>
+                <a:cs typeface="Calibri" pitchFamily="34" charset="-120"/>
+              </a:rPr>
+              <a:t>Built, pending deploy</a:t>
+            </a:r>
+            <a:endParaRPr lang="en-US" sz="1000" dirty="0"/>
+          </a:p>
+        </p:txBody>
+      </p:sp>
+      <p:sp>
+        <p:nvSpPr>
+          <p:cNvPr id="15" name="Shape 12"/>
+          <p:cNvSpPr/>
+          <p:nvPr/>
+        </p:nvSpPr>
+        <p:spPr>
+          <a:xfrm>
+            <a:off x="548640" y="3877056"/>
+            <a:ext cx="11064240" cy="960120"/>
+          </a:xfrm>
+          <a:prstGeom prst="roundRect">
+            <a:avLst>
+              <a:gd name="adj" fmla="val 8571"/>
+            </a:avLst>
+          </a:prstGeom>
+          <a:solidFill>
+            <a:srgbClr val="F5F3FB"/>
+          </a:solidFill>
+          <a:ln/>
+          <a:effectLst>
+            <a:outerShdw blurRad="127000" dist="38100" dir="5400000" algn="bl" rotWithShape="0">
+              <a:srgbClr val="1B0B3E">
+                <a:alpha val="35000"/>
+              </a:srgbClr>
+            </a:outerShdw>
+          </a:effectLst>
+        </p:spPr>
+      </p:sp>
+      <p:sp>
+        <p:nvSpPr>
+          <p:cNvPr id="16" name="Text 13"/>
+          <p:cNvSpPr/>
+          <p:nvPr/>
+        </p:nvSpPr>
+        <p:spPr>
+          <a:xfrm>
+            <a:off x="822960" y="4005072"/>
+            <a:ext cx="3657600" cy="457200"/>
+          </a:xfrm>
+          <a:prstGeom prst="rect">
+            <a:avLst/>
+          </a:prstGeom>
+          <a:noFill/>
+          <a:ln/>
+        </p:spPr>
+        <p:txBody>
+          <a:bodyPr wrap="square" rtlCol="0" anchor="ctr"/>
+          <a:lstStyle/>
+          <a:p>
+            <a:pPr marL="0" indent="0">
+              <a:buNone/>
+            </a:pPr>
+            <a:r>
+              <a:rPr lang="en-US" sz="1350" b="1" dirty="0">
+                <a:solidFill>
+                  <a:srgbClr val="2C0F5E"/>
+                </a:solidFill>
+                <a:latin typeface="Calibri" pitchFamily="34" charset="0"/>
+                <a:ea typeface="Calibri" pitchFamily="34" charset="-122"/>
+                <a:cs typeface="Calibri" pitchFamily="34" charset="-120"/>
+              </a:rPr>
+              <a:t>Intelligence Explorer</a:t>
+            </a:r>
+            <a:endParaRPr lang="en-US" sz="1350" dirty="0"/>
+          </a:p>
+        </p:txBody>
+      </p:sp>
+      <p:sp>
+        <p:nvSpPr>
+          <p:cNvPr id="17" name="Text 14"/>
+          <p:cNvSpPr/>
+          <p:nvPr/>
+        </p:nvSpPr>
+        <p:spPr>
+          <a:xfrm>
+            <a:off x="822960" y="4379976"/>
+            <a:ext cx="7315200" cy="411480"/>
+          </a:xfrm>
+          <a:prstGeom prst="rect">
+            <a:avLst/>
+          </a:prstGeom>
+          <a:noFill/>
+          <a:ln/>
+        </p:spPr>
+        <p:txBody>
+          <a:bodyPr wrap="square" rtlCol="0" anchor="ctr"/>
+          <a:lstStyle/>
+          <a:p>
+            <a:pPr marL="0" indent="0">
+              <a:lnSpc>
+                <a:spcPct val="110000"/>
+              </a:lnSpc>
+              <a:buNone/>
+            </a:pPr>
+            <a:r>
+              <a:rPr lang="en-US" sz="1000" dirty="0">
+                <a:solidFill>
+                  <a:srgbClr val="5C5470"/>
+                </a:solidFill>
+                <a:latin typeface="Calibri" pitchFamily="34" charset="0"/>
+                <a:ea typeface="Calibri" pitchFamily="34" charset="-122"/>
+                <a:cs typeface="Calibri" pitchFamily="34" charset="-120"/>
+              </a:rPr>
+              <a:t>Interactive data-exploration UI now live for the Submissions dataset.</a:t>
+            </a:r>
+            <a:endParaRPr lang="en-US" sz="1000" dirty="0"/>
+          </a:p>
+        </p:txBody>
+      </p:sp>
+      <p:sp>
+        <p:nvSpPr>
+          <p:cNvPr id="18" name="Shape 15"/>
+          <p:cNvSpPr/>
+          <p:nvPr/>
+        </p:nvSpPr>
+        <p:spPr>
+          <a:xfrm>
+            <a:off x="8366760" y="4169664"/>
+            <a:ext cx="2468880" cy="384048"/>
+          </a:xfrm>
+          <a:prstGeom prst="roundRect">
+            <a:avLst>
+              <a:gd name="adj" fmla="val 50000"/>
+            </a:avLst>
+          </a:prstGeom>
+          <a:solidFill>
+            <a:srgbClr val="E4F4EC"/>
+          </a:solidFill>
+          <a:ln/>
+        </p:spPr>
+      </p:sp>
+      <p:sp>
+        <p:nvSpPr>
+          <p:cNvPr id="19" name="Text 16"/>
+          <p:cNvSpPr/>
+          <p:nvPr/>
+        </p:nvSpPr>
+        <p:spPr>
+          <a:xfrm>
+            <a:off x="8366760" y="4169664"/>
+            <a:ext cx="2468880" cy="384048"/>
+          </a:xfrm>
+          <a:prstGeom prst="rect">
+            <a:avLst/>
+          </a:prstGeom>
+          <a:noFill/>
+          <a:ln/>
+        </p:spPr>
+        <p:txBody>
+          <a:bodyPr wrap="square" rtlCol="0" anchor="ctr"/>
+          <a:lstStyle/>
+          <a:p>
+            <a:pPr marL="0" indent="0" algn="ctr">
+              <a:buNone/>
+            </a:pPr>
+            <a:r>
+              <a:rPr lang="en-US" sz="1000" b="1" dirty="0">
+                <a:solidFill>
+                  <a:srgbClr val="1E7A4C"/>
+                </a:solidFill>
+                <a:latin typeface="Calibri" pitchFamily="34" charset="0"/>
+                <a:ea typeface="Calibri" pitchFamily="34" charset="-122"/>
+                <a:cs typeface="Calibri" pitchFamily="34" charset="-120"/>
+              </a:rPr>
+              <a:t>Built (P1)</a:t>
+            </a:r>
+            <a:endParaRPr lang="en-US" sz="1000" dirty="0"/>
+          </a:p>
+        </p:txBody>
+      </p:sp>
+      <p:sp>
+        <p:nvSpPr>
+          <p:cNvPr id="20" name="Shape 17"/>
+          <p:cNvSpPr/>
+          <p:nvPr/>
+        </p:nvSpPr>
+        <p:spPr>
+          <a:xfrm>
+            <a:off x="548640" y="4946904"/>
+            <a:ext cx="11064240" cy="960120"/>
+          </a:xfrm>
+          <a:prstGeom prst="roundRect">
+            <a:avLst>
+              <a:gd name="adj" fmla="val 8571"/>
+            </a:avLst>
+          </a:prstGeom>
+          <a:solidFill>
+            <a:srgbClr val="F5F3FB"/>
+          </a:solidFill>
+          <a:ln/>
+          <a:effectLst>
+            <a:outerShdw blurRad="127000" dist="38100" dir="5400000" algn="bl" rotWithShape="0">
+              <a:srgbClr val="1B0B3E">
+                <a:alpha val="35000"/>
+              </a:srgbClr>
+            </a:outerShdw>
+          </a:effectLst>
+        </p:spPr>
+      </p:sp>
+      <p:sp>
+        <p:nvSpPr>
+          <p:cNvPr id="21" name="Text 18"/>
+          <p:cNvSpPr/>
+          <p:nvPr/>
+        </p:nvSpPr>
+        <p:spPr>
+          <a:xfrm>
+            <a:off x="822960" y="5074920"/>
+            <a:ext cx="3657600" cy="457200"/>
+          </a:xfrm>
+          <a:prstGeom prst="rect">
+            <a:avLst/>
+          </a:prstGeom>
+          <a:noFill/>
+          <a:ln/>
+        </p:spPr>
+        <p:txBody>
+          <a:bodyPr wrap="square" rtlCol="0" anchor="ctr"/>
+          <a:lstStyle/>
+          <a:p>
+            <a:pPr marL="0" indent="0">
+              <a:buNone/>
+            </a:pPr>
+            <a:r>
+              <a:rPr lang="en-US" sz="1350" b="1" dirty="0">
+                <a:solidFill>
+                  <a:srgbClr val="2C0F5E"/>
+                </a:solidFill>
+                <a:latin typeface="Calibri" pitchFamily="34" charset="0"/>
+                <a:ea typeface="Calibri" pitchFamily="34" charset="-122"/>
+                <a:cs typeface="Calibri" pitchFamily="34" charset="-120"/>
+              </a:rPr>
+              <a:t>Sitting Workspace</a:t>
+            </a:r>
+            <a:endParaRPr lang="en-US" sz="1350" dirty="0"/>
+          </a:p>
+        </p:txBody>
+      </p:sp>
+      <p:sp>
+        <p:nvSpPr>
+          <p:cNvPr id="22" name="Text 19"/>
+          <p:cNvSpPr/>
+          <p:nvPr/>
+        </p:nvSpPr>
+        <p:spPr>
+          <a:xfrm>
+            <a:off x="822960" y="5449824"/>
+            <a:ext cx="7315200" cy="411480"/>
+          </a:xfrm>
+          <a:prstGeom prst="rect">
+            <a:avLst/>
+          </a:prstGeom>
+          <a:noFill/>
+          <a:ln/>
+        </p:spPr>
+        <p:txBody>
+          <a:bodyPr wrap="square" rtlCol="0" anchor="ctr"/>
+          <a:lstStyle/>
+          <a:p>
+            <a:pPr marL="0" indent="0">
+              <a:lnSpc>
+                <a:spcPct val="110000"/>
+              </a:lnSpc>
+              <a:buNone/>
+            </a:pPr>
+            <a:r>
+              <a:rPr lang="en-US" sz="1000" dirty="0">
+                <a:solidFill>
+                  <a:srgbClr val="5C5470"/>
+                </a:solidFill>
+                <a:latin typeface="Calibri" pitchFamily="34" charset="0"/>
+                <a:ea typeface="Calibri" pitchFamily="34" charset="-122"/>
+                <a:cs typeface="Calibri" pitchFamily="34" charset="-120"/>
+              </a:rPr>
+              <a:t>Project-board view of Commission sittings; kanban-by-stage and one-click approval still to come (P3–P4).</a:t>
+            </a:r>
+            <a:endParaRPr lang="en-US" sz="1000" dirty="0"/>
+          </a:p>
+        </p:txBody>
+      </p:sp>
+      <p:sp>
+        <p:nvSpPr>
+          <p:cNvPr id="23" name="Shape 20"/>
           <p:cNvSpPr/>
           <p:nvPr/>
         </p:nvSpPr>
@@ -12321,6 +12748,28 @@
             <a:off x="8366760" y="5239512"/>
             <a:ext cx="2468880" cy="384048"/>
           </a:xfrm>
+          <a:prstGeom prst="roundRect">
+            <a:avLst>
+              <a:gd name="adj" fmla="val 50000"/>
+            </a:avLst>
+          </a:prstGeom>
+          <a:solidFill>
+            <a:srgbClr val="E4F4EC"/>
+          </a:solidFill>
+          <a:ln/>
+        </p:spPr>
+      </p:sp>
+      <p:sp>
+        <p:nvSpPr>
+          <p:cNvPr id="24" name="Text 21"/>
+          <p:cNvSpPr/>
+          <p:nvPr/>
+        </p:nvSpPr>
+        <p:spPr>
+          <a:xfrm>
+            <a:off x="8366760" y="5239512"/>
+            <a:ext cx="2468880" cy="384048"/>
+          </a:xfrm>
           <a:prstGeom prst="rect">
             <a:avLst/>
           </a:prstGeom>
@@ -12421,7 +12870,7 @@
                 <a:ea typeface="Calibri" pitchFamily="34" charset="-122"/>
                 <a:cs typeface="Calibri" pitchFamily="34" charset="-120"/>
               </a:rPr>
-              <a:t>18</a:t>
+              <a:t>19</a:t>
             </a:r>
             <a:endParaRPr lang="en-US" sz="900" dirty="0"/>
           </a:p>
@@ -13518,1149 +13967,6 @@
 
 <file path=ppt/slides/slide20.xml><?xml version="1.0" encoding="utf-8"?>
 <p:sld xmlns:a="http://schemas.openxmlformats.org/drawingml/2006/main" xmlns:r="http://schemas.openxmlformats.org/officeDocument/2006/relationships" xmlns:p="http://schemas.openxmlformats.org/presentationml/2006/main">
-  <p:cSld name="Slide 19">
-    <p:spTree>
-      <p:nvGrpSpPr>
-        <p:cNvPr id="1" name=""/>
-        <p:cNvGrpSpPr/>
-        <p:nvPr/>
-      </p:nvGrpSpPr>
-      <p:grpSpPr>
-        <a:xfrm>
-          <a:off x="0" y="0"/>
-          <a:ext cx="0" cy="0"/>
-          <a:chOff x="0" y="0"/>
-          <a:chExt cx="0" cy="0"/>
-        </a:xfrm>
-      </p:grpSpPr>
-      <p:pic>
-        <p:nvPicPr>
-          <p:cNvPr id="2" name="Image 0" descr="C:\Users\Herman Tevilili\AppData\Local\Temp\claude\C--Users-Herman-Tevilili-Documents-GitHub-commissionDecisionApp-v1-0\2d2d3a12-ae9e-4f4b-990a-3e1ebe47ec28\scratchpad\scdms_deck\assets\bg.jpg"/>
-          <p:cNvPicPr>
-            <a:picLocks noChangeAspect="1"/>
-          </p:cNvPicPr>
-          <p:nvPr/>
-        </p:nvPicPr>
-        <p:blipFill>
-          <a:blip r:embed="rId3"/>
-          <a:stretch>
-            <a:fillRect/>
-          </a:stretch>
-        </p:blipFill>
-        <p:spPr>
-          <a:xfrm>
-            <a:off x="0" y="0"/>
-            <a:ext cx="12191695" cy="8127797"/>
-          </a:xfrm>
-          <a:prstGeom prst="rect">
-            <a:avLst/>
-          </a:prstGeom>
-        </p:spPr>
-      </p:pic>
-      <p:pic>
-        <p:nvPicPr>
-          <p:cNvPr id="3" name="Image 1" descr="C:\Users\Herman Tevilili\AppData\Local\Temp\claude\C--Users-Herman-Tevilili-Documents-GitHub-commissionDecisionApp-v1-0\2d2d3a12-ae9e-4f4b-990a-3e1ebe47ec28\scratchpad\scdms_deck\assets\rings.png"/>
-          <p:cNvPicPr>
-            <a:picLocks noChangeAspect="1"/>
-          </p:cNvPicPr>
-          <p:nvPr/>
-        </p:nvPicPr>
-        <p:blipFill>
-          <a:blip r:embed="rId4">
-            <a:alphaModFix amt="55000"/>
-          </a:blip>
-          <a:stretch>
-            <a:fillRect/>
-          </a:stretch>
-        </p:blipFill>
-        <p:spPr>
-          <a:xfrm>
-            <a:off x="10271455" y="4937760"/>
-            <a:ext cx="2926080" cy="2926080"/>
-          </a:xfrm>
-          <a:prstGeom prst="rect">
-            <a:avLst/>
-          </a:prstGeom>
-        </p:spPr>
-      </p:pic>
-      <p:sp>
-        <p:nvSpPr>
-          <p:cNvPr id="4" name="Text 0"/>
-          <p:cNvSpPr/>
-          <p:nvPr/>
-        </p:nvSpPr>
-        <p:spPr>
-          <a:xfrm>
-            <a:off x="1691640" y="457200"/>
-            <a:ext cx="9875520" cy="320040"/>
-          </a:xfrm>
-          <a:prstGeom prst="rect">
-            <a:avLst/>
-          </a:prstGeom>
-          <a:noFill/>
-          <a:ln/>
-        </p:spPr>
-        <p:txBody>
-          <a:bodyPr wrap="square" rtlCol="0" anchor="ctr"/>
-          <a:lstStyle/>
-          <a:p>
-            <a:pPr marL="0" indent="0">
-              <a:buNone/>
-            </a:pPr>
-            <a:r>
-              <a:rPr lang="en-US" sz="1200" b="1" kern="0" spc="200" dirty="0">
-                <a:solidFill>
-                  <a:srgbClr val="D9A441"/>
-                </a:solidFill>
-                <a:latin typeface="Calibri" pitchFamily="34" charset="0"/>
-                <a:ea typeface="Calibri" pitchFamily="34" charset="-122"/>
-                <a:cs typeface="Calibri" pitchFamily="34" charset="-120"/>
-              </a:rPr>
-              <a:t>WHAT'S NEXT</a:t>
-            </a:r>
-            <a:endParaRPr lang="en-US" sz="1200" dirty="0"/>
-          </a:p>
-        </p:txBody>
-      </p:sp>
-      <p:sp>
-        <p:nvSpPr>
-          <p:cNvPr id="5" name="Text 1"/>
-          <p:cNvSpPr/>
-          <p:nvPr/>
-        </p:nvSpPr>
-        <p:spPr>
-          <a:xfrm>
-            <a:off x="1691640" y="777240"/>
-            <a:ext cx="9951415" cy="822960"/>
-          </a:xfrm>
-          <a:prstGeom prst="rect">
-            <a:avLst/>
-          </a:prstGeom>
-          <a:noFill/>
-          <a:ln/>
-        </p:spPr>
-        <p:txBody>
-          <a:bodyPr wrap="square" rtlCol="0" anchor="ctr"/>
-          <a:lstStyle/>
-          <a:p>
-            <a:pPr marL="0" indent="0">
-              <a:buNone/>
-            </a:pPr>
-            <a:r>
-              <a:rPr lang="en-US" sz="2600" b="1" dirty="0">
-                <a:solidFill>
-                  <a:srgbClr val="FFFFFF"/>
-                </a:solidFill>
-                <a:latin typeface="Cambria" pitchFamily="34" charset="0"/>
-                <a:ea typeface="Cambria" pitchFamily="34" charset="-122"/>
-                <a:cs typeface="Cambria" pitchFamily="34" charset="-120"/>
-              </a:rPr>
-              <a:t>Two stages before wider rollout: pre-pilot, then pilot</a:t>
-            </a:r>
-            <a:endParaRPr lang="en-US" sz="2600" dirty="0"/>
-          </a:p>
-        </p:txBody>
-      </p:sp>
-      <p:sp>
-        <p:nvSpPr>
-          <p:cNvPr id="6" name="Text 2"/>
-          <p:cNvSpPr/>
-          <p:nvPr/>
-        </p:nvSpPr>
-        <p:spPr>
-          <a:xfrm>
-            <a:off x="1691640" y="1417320"/>
-            <a:ext cx="10058400" cy="594360"/>
-          </a:xfrm>
-          <a:prstGeom prst="rect">
-            <a:avLst/>
-          </a:prstGeom>
-          <a:noFill/>
-          <a:ln/>
-        </p:spPr>
-        <p:txBody>
-          <a:bodyPr wrap="square" rtlCol="0" anchor="ctr"/>
-          <a:lstStyle/>
-          <a:p>
-            <a:pPr marL="0" indent="0">
-              <a:lnSpc>
-                <a:spcPct val="125000"/>
-              </a:lnSpc>
-              <a:buNone/>
-            </a:pPr>
-            <a:r>
-              <a:rPr lang="en-US" sz="1200" dirty="0">
-                <a:solidFill>
-                  <a:srgbClr val="CBBFE6"/>
-                </a:solidFill>
-                <a:latin typeface="Calibri" pitchFamily="34" charset="0"/>
-                <a:ea typeface="Calibri" pitchFamily="34" charset="-122"/>
-                <a:cs typeface="Calibri" pitchFamily="34" charset="-120"/>
-              </a:rPr>
-              <a:t>Pre-pilot proves the system works under real conditions, with PSC staff only. Pilot proves it works for real ministries. Separating them contains risk before any live personnel decision runs through SCDMS.</a:t>
-            </a:r>
-            <a:endParaRPr lang="en-US" sz="1200" dirty="0"/>
-          </a:p>
-        </p:txBody>
-      </p:sp>
-      <p:sp>
-        <p:nvSpPr>
-          <p:cNvPr id="7" name="Shape 3"/>
-          <p:cNvSpPr/>
-          <p:nvPr/>
-        </p:nvSpPr>
-        <p:spPr>
-          <a:xfrm>
-            <a:off x="548640" y="2148840"/>
-            <a:ext cx="5349240" cy="3611880"/>
-          </a:xfrm>
-          <a:prstGeom prst="roundRect">
-            <a:avLst>
-              <a:gd name="adj" fmla="val 2278"/>
-            </a:avLst>
-          </a:prstGeom>
-          <a:solidFill>
-            <a:srgbClr val="F5F3FB"/>
-          </a:solidFill>
-          <a:ln/>
-          <a:effectLst>
-            <a:outerShdw blurRad="127000" dist="38100" dir="5400000" algn="bl" rotWithShape="0">
-              <a:srgbClr val="1B0B3E">
-                <a:alpha val="35000"/>
-              </a:srgbClr>
-            </a:outerShdw>
-          </a:effectLst>
-        </p:spPr>
-      </p:sp>
-      <p:sp>
-        <p:nvSpPr>
-          <p:cNvPr id="8" name="Text 4"/>
-          <p:cNvSpPr/>
-          <p:nvPr/>
-        </p:nvSpPr>
-        <p:spPr>
-          <a:xfrm>
-            <a:off x="868680" y="2377440"/>
-            <a:ext cx="3291840" cy="365760"/>
-          </a:xfrm>
-          <a:prstGeom prst="rect">
-            <a:avLst/>
-          </a:prstGeom>
-          <a:noFill/>
-          <a:ln/>
-        </p:spPr>
-        <p:txBody>
-          <a:bodyPr wrap="square" rtlCol="0" anchor="ctr"/>
-          <a:lstStyle/>
-          <a:p>
-            <a:pPr marL="0" indent="0">
-              <a:buNone/>
-            </a:pPr>
-            <a:r>
-              <a:rPr lang="en-US" sz="1450" b="1" dirty="0">
-                <a:solidFill>
-                  <a:srgbClr val="2C0F5E"/>
-                </a:solidFill>
-                <a:latin typeface="Calibri" pitchFamily="34" charset="0"/>
-                <a:ea typeface="Calibri" pitchFamily="34" charset="-122"/>
-                <a:cs typeface="Calibri" pitchFamily="34" charset="-120"/>
-              </a:rPr>
-              <a:t>Pre-Pilot</a:t>
-            </a:r>
-            <a:endParaRPr lang="en-US" sz="1450" dirty="0"/>
-          </a:p>
-        </p:txBody>
-      </p:sp>
-      <p:sp>
-        <p:nvSpPr>
-          <p:cNvPr id="9" name="Shape 5"/>
-          <p:cNvSpPr/>
-          <p:nvPr/>
-        </p:nvSpPr>
-        <p:spPr>
-          <a:xfrm>
-            <a:off x="4206240" y="2377440"/>
-            <a:ext cx="1554480" cy="329184"/>
-          </a:xfrm>
-          <a:prstGeom prst="roundRect">
-            <a:avLst>
-              <a:gd name="adj" fmla="val 50000"/>
-            </a:avLst>
-          </a:prstGeom>
-          <a:solidFill>
-            <a:srgbClr val="FBF0DC"/>
-          </a:solidFill>
-          <a:ln/>
-        </p:spPr>
-      </p:sp>
-      <p:sp>
-        <p:nvSpPr>
-          <p:cNvPr id="10" name="Text 6"/>
-          <p:cNvSpPr/>
-          <p:nvPr/>
-        </p:nvSpPr>
-        <p:spPr>
-          <a:xfrm>
-            <a:off x="4206240" y="2377440"/>
-            <a:ext cx="1554480" cy="329184"/>
-          </a:xfrm>
-          <a:prstGeom prst="rect">
-            <a:avLst/>
-          </a:prstGeom>
-          <a:noFill/>
-          <a:ln/>
-        </p:spPr>
-        <p:txBody>
-          <a:bodyPr wrap="square" rtlCol="0" anchor="ctr"/>
-          <a:lstStyle/>
-          <a:p>
-            <a:pPr marL="0" indent="0" algn="ctr">
-              <a:buNone/>
-            </a:pPr>
-            <a:r>
-              <a:rPr lang="en-US" sz="1000" b="1" dirty="0">
-                <a:solidFill>
-                  <a:srgbClr val="B5791A"/>
-                </a:solidFill>
-                <a:latin typeface="Calibri" pitchFamily="34" charset="0"/>
-                <a:ea typeface="Calibri" pitchFamily="34" charset="-122"/>
-                <a:cs typeface="Calibri" pitchFamily="34" charset="-120"/>
-              </a:rPr>
-              <a:t>Internal only</a:t>
-            </a:r>
-            <a:endParaRPr lang="en-US" sz="1000" dirty="0"/>
-          </a:p>
-        </p:txBody>
-      </p:sp>
-      <p:sp>
-        <p:nvSpPr>
-          <p:cNvPr id="11" name="Text 7"/>
-          <p:cNvSpPr/>
-          <p:nvPr/>
-        </p:nvSpPr>
-        <p:spPr>
-          <a:xfrm>
-            <a:off x="868680" y="2852928"/>
-            <a:ext cx="4754880" cy="502920"/>
-          </a:xfrm>
-          <a:prstGeom prst="rect">
-            <a:avLst/>
-          </a:prstGeom>
-          <a:noFill/>
-          <a:ln/>
-        </p:spPr>
-        <p:txBody>
-          <a:bodyPr wrap="square" rtlCol="0" anchor="ctr"/>
-          <a:lstStyle/>
-          <a:p>
-            <a:pPr marL="0" indent="0">
-              <a:lnSpc>
-                <a:spcPct val="115000"/>
-              </a:lnSpc>
-              <a:buNone/>
-            </a:pPr>
-            <a:r>
-              <a:rPr lang="en-US" sz="1080" b="1" dirty="0">
-                <a:solidFill>
-                  <a:srgbClr val="2C0F5E"/>
-                </a:solidFill>
-                <a:latin typeface="Calibri" pitchFamily="34" charset="0"/>
-                <a:ea typeface="Calibri" pitchFamily="34" charset="-122"/>
-                <a:cs typeface="Calibri" pitchFamily="34" charset="-120"/>
-              </a:rPr>
-              <a:t>•  </a:t>
-            </a:r>
-            <a:r>
-              <a:rPr lang="en-US" sz="1080" dirty="0">
-                <a:solidFill>
-                  <a:srgbClr val="5C5470"/>
-                </a:solidFill>
-                <a:latin typeface="Calibri" pitchFamily="34" charset="0"/>
-                <a:ea typeface="Calibri" pitchFamily="34" charset="-122"/>
-                <a:cs typeface="Calibri" pitchFamily="34" charset="-120"/>
-              </a:rPr>
-              <a:t>Real reference data loaded - ministries, departments, users - but no live submissions yet</a:t>
-            </a:r>
-            <a:endParaRPr lang="en-US" sz="1080" dirty="0"/>
-          </a:p>
-        </p:txBody>
-      </p:sp>
-      <p:sp>
-        <p:nvSpPr>
-          <p:cNvPr id="12" name="Text 8"/>
-          <p:cNvSpPr/>
-          <p:nvPr/>
-        </p:nvSpPr>
-        <p:spPr>
-          <a:xfrm>
-            <a:off x="868680" y="3383280"/>
-            <a:ext cx="4754880" cy="502920"/>
-          </a:xfrm>
-          <a:prstGeom prst="rect">
-            <a:avLst/>
-          </a:prstGeom>
-          <a:noFill/>
-          <a:ln/>
-        </p:spPr>
-        <p:txBody>
-          <a:bodyPr wrap="square" rtlCol="0" anchor="ctr"/>
-          <a:lstStyle/>
-          <a:p>
-            <a:pPr marL="0" indent="0">
-              <a:lnSpc>
-                <a:spcPct val="115000"/>
-              </a:lnSpc>
-              <a:buNone/>
-            </a:pPr>
-            <a:r>
-              <a:rPr lang="en-US" sz="1080" b="1" dirty="0">
-                <a:solidFill>
-                  <a:srgbClr val="2C0F5E"/>
-                </a:solidFill>
-                <a:latin typeface="Calibri" pitchFamily="34" charset="0"/>
-                <a:ea typeface="Calibri" pitchFamily="34" charset="-122"/>
-                <a:cs typeface="Calibri" pitchFamily="34" charset="-120"/>
-              </a:rPr>
-              <a:t>•  </a:t>
-            </a:r>
-            <a:r>
-              <a:rPr lang="en-US" sz="1080" dirty="0">
-                <a:solidFill>
-                  <a:srgbClr val="5C5470"/>
-                </a:solidFill>
-                <a:latin typeface="Calibri" pitchFamily="34" charset="0"/>
-                <a:ea typeface="Calibri" pitchFamily="34" charset="-122"/>
-                <a:cs typeface="Calibri" pitchFamily="34" charset="-120"/>
-              </a:rPr>
-              <a:t>Security fully activated: 2FA and the rest of the auth posture turned on</a:t>
-            </a:r>
-            <a:endParaRPr lang="en-US" sz="1080" dirty="0"/>
-          </a:p>
-        </p:txBody>
-      </p:sp>
-      <p:sp>
-        <p:nvSpPr>
-          <p:cNvPr id="13" name="Text 9"/>
-          <p:cNvSpPr/>
-          <p:nvPr/>
-        </p:nvSpPr>
-        <p:spPr>
-          <a:xfrm>
-            <a:off x="868680" y="3913632"/>
-            <a:ext cx="4754880" cy="502920"/>
-          </a:xfrm>
-          <a:prstGeom prst="rect">
-            <a:avLst/>
-          </a:prstGeom>
-          <a:noFill/>
-          <a:ln/>
-        </p:spPr>
-        <p:txBody>
-          <a:bodyPr wrap="square" rtlCol="0" anchor="ctr"/>
-          <a:lstStyle/>
-          <a:p>
-            <a:pPr marL="0" indent="0">
-              <a:lnSpc>
-                <a:spcPct val="115000"/>
-              </a:lnSpc>
-              <a:buNone/>
-            </a:pPr>
-            <a:r>
-              <a:rPr lang="en-US" sz="1080" b="1" dirty="0">
-                <a:solidFill>
-                  <a:srgbClr val="2C0F5E"/>
-                </a:solidFill>
-                <a:latin typeface="Calibri" pitchFamily="34" charset="0"/>
-                <a:ea typeface="Calibri" pitchFamily="34" charset="-122"/>
-                <a:cs typeface="Calibri" pitchFamily="34" charset="-120"/>
-              </a:rPr>
-              <a:t>•  </a:t>
-            </a:r>
-            <a:r>
-              <a:rPr lang="en-US" sz="1080" dirty="0">
-                <a:solidFill>
-                  <a:srgbClr val="5C5470"/>
-                </a:solidFill>
-                <a:latin typeface="Calibri" pitchFamily="34" charset="0"/>
-                <a:ea typeface="Calibri" pitchFamily="34" charset="-122"/>
-                <a:cs typeface="Calibri" pitchFamily="34" charset="-120"/>
-              </a:rPr>
-              <a:t>Running on the DCDT-provisioned server, not local dev</a:t>
-            </a:r>
-            <a:endParaRPr lang="en-US" sz="1080" dirty="0"/>
-          </a:p>
-        </p:txBody>
-      </p:sp>
-      <p:sp>
-        <p:nvSpPr>
-          <p:cNvPr id="14" name="Text 10"/>
-          <p:cNvSpPr/>
-          <p:nvPr/>
-        </p:nvSpPr>
-        <p:spPr>
-          <a:xfrm>
-            <a:off x="868680" y="4443984"/>
-            <a:ext cx="4754880" cy="502920"/>
-          </a:xfrm>
-          <a:prstGeom prst="rect">
-            <a:avLst/>
-          </a:prstGeom>
-          <a:noFill/>
-          <a:ln/>
-        </p:spPr>
-        <p:txBody>
-          <a:bodyPr wrap="square" rtlCol="0" anchor="ctr"/>
-          <a:lstStyle/>
-          <a:p>
-            <a:pPr marL="0" indent="0">
-              <a:lnSpc>
-                <a:spcPct val="115000"/>
-              </a:lnSpc>
-              <a:buNone/>
-            </a:pPr>
-            <a:r>
-              <a:rPr lang="en-US" sz="1080" b="1" dirty="0">
-                <a:solidFill>
-                  <a:srgbClr val="2C0F5E"/>
-                </a:solidFill>
-                <a:latin typeface="Calibri" pitchFamily="34" charset="0"/>
-                <a:ea typeface="Calibri" pitchFamily="34" charset="-122"/>
-                <a:cs typeface="Calibri" pitchFamily="34" charset="-120"/>
-              </a:rPr>
-              <a:t>•  </a:t>
-            </a:r>
-            <a:r>
-              <a:rPr lang="en-US" sz="1080" dirty="0">
-                <a:solidFill>
-                  <a:srgbClr val="5C5470"/>
-                </a:solidFill>
-                <a:latin typeface="Calibri" pitchFamily="34" charset="0"/>
-                <a:ea typeface="Calibri" pitchFamily="34" charset="-122"/>
-                <a:cs typeface="Calibri" pitchFamily="34" charset="-120"/>
-              </a:rPr>
-              <a:t>Formal internal UAT by PSC staff, end to end</a:t>
-            </a:r>
-            <a:endParaRPr lang="en-US" sz="1080" dirty="0"/>
-          </a:p>
-        </p:txBody>
-      </p:sp>
-      <p:sp>
-        <p:nvSpPr>
-          <p:cNvPr id="15" name="Text 11"/>
-          <p:cNvSpPr/>
-          <p:nvPr/>
-        </p:nvSpPr>
-        <p:spPr>
-          <a:xfrm>
-            <a:off x="868680" y="4974336"/>
-            <a:ext cx="4754880" cy="502920"/>
-          </a:xfrm>
-          <a:prstGeom prst="rect">
-            <a:avLst/>
-          </a:prstGeom>
-          <a:noFill/>
-          <a:ln/>
-        </p:spPr>
-        <p:txBody>
-          <a:bodyPr wrap="square" rtlCol="0" anchor="ctr"/>
-          <a:lstStyle/>
-          <a:p>
-            <a:pPr marL="0" indent="0">
-              <a:lnSpc>
-                <a:spcPct val="115000"/>
-              </a:lnSpc>
-              <a:buNone/>
-            </a:pPr>
-            <a:r>
-              <a:rPr lang="en-US" sz="1080" b="1" dirty="0">
-                <a:solidFill>
-                  <a:srgbClr val="2C0F5E"/>
-                </a:solidFill>
-                <a:latin typeface="Calibri" pitchFamily="34" charset="0"/>
-                <a:ea typeface="Calibri" pitchFamily="34" charset="-122"/>
-                <a:cs typeface="Calibri" pitchFamily="34" charset="-120"/>
-              </a:rPr>
-              <a:t>•  </a:t>
-            </a:r>
-            <a:r>
-              <a:rPr lang="en-US" sz="1080" dirty="0">
-                <a:solidFill>
-                  <a:srgbClr val="5C5470"/>
-                </a:solidFill>
-                <a:latin typeface="Calibri" pitchFamily="34" charset="0"/>
-                <a:ea typeface="Calibri" pitchFamily="34" charset="-122"/>
-                <a:cs typeface="Calibri" pitchFamily="34" charset="-120"/>
-              </a:rPr>
-              <a:t>Outstanding unit workflow sign-offs confirmed (ODU, CIU, VIPAM, HRM)</a:t>
-            </a:r>
-            <a:endParaRPr lang="en-US" sz="1080" dirty="0"/>
-          </a:p>
-        </p:txBody>
-      </p:sp>
-      <p:sp>
-        <p:nvSpPr>
-          <p:cNvPr id="16" name="Shape 12"/>
-          <p:cNvSpPr/>
-          <p:nvPr/>
-        </p:nvSpPr>
-        <p:spPr>
-          <a:xfrm>
-            <a:off x="6263640" y="2148840"/>
-            <a:ext cx="5349240" cy="3611880"/>
-          </a:xfrm>
-          <a:prstGeom prst="roundRect">
-            <a:avLst>
-              <a:gd name="adj" fmla="val 2278"/>
-            </a:avLst>
-          </a:prstGeom>
-          <a:solidFill>
-            <a:srgbClr val="1E0E42"/>
-          </a:solidFill>
-          <a:ln/>
-          <a:effectLst>
-            <a:outerShdw blurRad="127000" dist="38100" dir="5400000" algn="bl" rotWithShape="0">
-              <a:srgbClr val="1B0B3E">
-                <a:alpha val="35000"/>
-              </a:srgbClr>
-            </a:outerShdw>
-          </a:effectLst>
-        </p:spPr>
-      </p:sp>
-      <p:sp>
-        <p:nvSpPr>
-          <p:cNvPr id="17" name="Text 13"/>
-          <p:cNvSpPr/>
-          <p:nvPr/>
-        </p:nvSpPr>
-        <p:spPr>
-          <a:xfrm>
-            <a:off x="6583680" y="2377440"/>
-            <a:ext cx="3291840" cy="365760"/>
-          </a:xfrm>
-          <a:prstGeom prst="rect">
-            <a:avLst/>
-          </a:prstGeom>
-          <a:noFill/>
-          <a:ln/>
-        </p:spPr>
-        <p:txBody>
-          <a:bodyPr wrap="square" rtlCol="0" anchor="ctr"/>
-          <a:lstStyle/>
-          <a:p>
-            <a:pPr marL="0" indent="0">
-              <a:buNone/>
-            </a:pPr>
-            <a:r>
-              <a:rPr lang="en-US" sz="1450" b="1" dirty="0">
-                <a:solidFill>
-                  <a:srgbClr val="D9A441"/>
-                </a:solidFill>
-                <a:latin typeface="Calibri" pitchFamily="34" charset="0"/>
-                <a:ea typeface="Calibri" pitchFamily="34" charset="-122"/>
-                <a:cs typeface="Calibri" pitchFamily="34" charset="-120"/>
-              </a:rPr>
-              <a:t>Pilot</a:t>
-            </a:r>
-            <a:endParaRPr lang="en-US" sz="1450" dirty="0"/>
-          </a:p>
-        </p:txBody>
-      </p:sp>
-      <p:sp>
-        <p:nvSpPr>
-          <p:cNvPr id="18" name="Shape 14"/>
-          <p:cNvSpPr/>
-          <p:nvPr/>
-        </p:nvSpPr>
-        <p:spPr>
-          <a:xfrm>
-            <a:off x="9601200" y="2377440"/>
-            <a:ext cx="1645920" cy="329184"/>
-          </a:xfrm>
-          <a:prstGeom prst="roundRect">
-            <a:avLst>
-              <a:gd name="adj" fmla="val 50000"/>
-            </a:avLst>
-          </a:prstGeom>
-          <a:solidFill>
-            <a:srgbClr val="FBF0DC"/>
-          </a:solidFill>
-          <a:ln/>
-        </p:spPr>
-      </p:sp>
-      <p:sp>
-        <p:nvSpPr>
-          <p:cNvPr id="19" name="Text 15"/>
-          <p:cNvSpPr/>
-          <p:nvPr/>
-        </p:nvSpPr>
-        <p:spPr>
-          <a:xfrm>
-            <a:off x="9601200" y="2377440"/>
-            <a:ext cx="1645920" cy="329184"/>
-          </a:xfrm>
-          <a:prstGeom prst="rect">
-            <a:avLst/>
-          </a:prstGeom>
-          <a:noFill/>
-          <a:ln/>
-        </p:spPr>
-        <p:txBody>
-          <a:bodyPr wrap="square" rtlCol="0" anchor="ctr"/>
-          <a:lstStyle/>
-          <a:p>
-            <a:pPr marL="0" indent="0" algn="ctr">
-              <a:buNone/>
-            </a:pPr>
-            <a:r>
-              <a:rPr lang="en-US" sz="1000" b="1" dirty="0">
-                <a:solidFill>
-                  <a:srgbClr val="B5791A"/>
-                </a:solidFill>
-                <a:latin typeface="Calibri" pitchFamily="34" charset="0"/>
-                <a:ea typeface="Calibri" pitchFamily="34" charset="-122"/>
-                <a:cs typeface="Calibri" pitchFamily="34" charset="-120"/>
-              </a:rPr>
-              <a:t>1–2 ministries</a:t>
-            </a:r>
-            <a:endParaRPr lang="en-US" sz="1000" dirty="0"/>
-          </a:p>
-        </p:txBody>
-      </p:sp>
-      <p:sp>
-        <p:nvSpPr>
-          <p:cNvPr id="20" name="Text 16"/>
-          <p:cNvSpPr/>
-          <p:nvPr/>
-        </p:nvSpPr>
-        <p:spPr>
-          <a:xfrm>
-            <a:off x="6583680" y="2852928"/>
-            <a:ext cx="4754880" cy="502920"/>
-          </a:xfrm>
-          <a:prstGeom prst="rect">
-            <a:avLst/>
-          </a:prstGeom>
-          <a:noFill/>
-          <a:ln/>
-        </p:spPr>
-        <p:txBody>
-          <a:bodyPr wrap="square" rtlCol="0" anchor="ctr"/>
-          <a:lstStyle/>
-          <a:p>
-            <a:pPr marL="0" indent="0">
-              <a:lnSpc>
-                <a:spcPct val="115000"/>
-              </a:lnSpc>
-              <a:buNone/>
-            </a:pPr>
-            <a:r>
-              <a:rPr lang="en-US" sz="1080" b="1" dirty="0">
-                <a:solidFill>
-                  <a:srgbClr val="D9A441"/>
-                </a:solidFill>
-                <a:latin typeface="Calibri" pitchFamily="34" charset="0"/>
-                <a:ea typeface="Calibri" pitchFamily="34" charset="-122"/>
-                <a:cs typeface="Calibri" pitchFamily="34" charset="-120"/>
-              </a:rPr>
-              <a:t>→  </a:t>
-            </a:r>
-            <a:r>
-              <a:rPr lang="en-US" sz="1080" dirty="0">
-                <a:solidFill>
-                  <a:srgbClr val="FFFFFF"/>
-                </a:solidFill>
-                <a:latin typeface="Calibri" pitchFamily="34" charset="0"/>
-                <a:ea typeface="Calibri" pitchFamily="34" charset="-122"/>
-                <a:cs typeface="Calibri" pitchFamily="34" charset="-120"/>
-              </a:rPr>
-              <a:t>Real ministries, real submissions, real Commission decisions</a:t>
-            </a:r>
-            <a:endParaRPr lang="en-US" sz="1080" dirty="0"/>
-          </a:p>
-        </p:txBody>
-      </p:sp>
-      <p:sp>
-        <p:nvSpPr>
-          <p:cNvPr id="21" name="Text 17"/>
-          <p:cNvSpPr/>
-          <p:nvPr/>
-        </p:nvSpPr>
-        <p:spPr>
-          <a:xfrm>
-            <a:off x="6583680" y="3383280"/>
-            <a:ext cx="4754880" cy="502920"/>
-          </a:xfrm>
-          <a:prstGeom prst="rect">
-            <a:avLst/>
-          </a:prstGeom>
-          <a:noFill/>
-          <a:ln/>
-        </p:spPr>
-        <p:txBody>
-          <a:bodyPr wrap="square" rtlCol="0" anchor="ctr"/>
-          <a:lstStyle/>
-          <a:p>
-            <a:pPr marL="0" indent="0">
-              <a:lnSpc>
-                <a:spcPct val="115000"/>
-              </a:lnSpc>
-              <a:buNone/>
-            </a:pPr>
-            <a:r>
-              <a:rPr lang="en-US" sz="1080" b="1" dirty="0">
-                <a:solidFill>
-                  <a:srgbClr val="D9A441"/>
-                </a:solidFill>
-                <a:latin typeface="Calibri" pitchFamily="34" charset="0"/>
-                <a:ea typeface="Calibri" pitchFamily="34" charset="-122"/>
-                <a:cs typeface="Calibri" pitchFamily="34" charset="-120"/>
-              </a:rPr>
-              <a:t>→  </a:t>
-            </a:r>
-            <a:r>
-              <a:rPr lang="en-US" sz="1080" dirty="0">
-                <a:solidFill>
-                  <a:srgbClr val="FFFFFF"/>
-                </a:solidFill>
-                <a:latin typeface="Calibri" pitchFamily="34" charset="0"/>
-                <a:ea typeface="Calibri" pitchFamily="34" charset="-122"/>
-                <a:cs typeface="Calibri" pitchFamily="34" charset="-120"/>
-              </a:rPr>
-              <a:t>A small, deliberate cohort - not a full rollout</a:t>
-            </a:r>
-            <a:endParaRPr lang="en-US" sz="1080" dirty="0"/>
-          </a:p>
-        </p:txBody>
-      </p:sp>
-      <p:sp>
-        <p:nvSpPr>
-          <p:cNvPr id="22" name="Text 18"/>
-          <p:cNvSpPr/>
-          <p:nvPr/>
-        </p:nvSpPr>
-        <p:spPr>
-          <a:xfrm>
-            <a:off x="6583680" y="3913632"/>
-            <a:ext cx="4754880" cy="502920"/>
-          </a:xfrm>
-          <a:prstGeom prst="rect">
-            <a:avLst/>
-          </a:prstGeom>
-          <a:noFill/>
-          <a:ln/>
-        </p:spPr>
-        <p:txBody>
-          <a:bodyPr wrap="square" rtlCol="0" anchor="ctr"/>
-          <a:lstStyle/>
-          <a:p>
-            <a:pPr marL="0" indent="0">
-              <a:lnSpc>
-                <a:spcPct val="115000"/>
-              </a:lnSpc>
-              <a:buNone/>
-            </a:pPr>
-            <a:r>
-              <a:rPr lang="en-US" sz="1080" b="1" dirty="0">
-                <a:solidFill>
-                  <a:srgbClr val="D9A441"/>
-                </a:solidFill>
-                <a:latin typeface="Calibri" pitchFamily="34" charset="0"/>
-                <a:ea typeface="Calibri" pitchFamily="34" charset="-122"/>
-                <a:cs typeface="Calibri" pitchFamily="34" charset="-120"/>
-              </a:rPr>
-              <a:t>→  </a:t>
-            </a:r>
-            <a:r>
-              <a:rPr lang="en-US" sz="1080" dirty="0">
-                <a:solidFill>
-                  <a:srgbClr val="FFFFFF"/>
-                </a:solidFill>
-                <a:latin typeface="Calibri" pitchFamily="34" charset="0"/>
-                <a:ea typeface="Calibri" pitchFamily="34" charset="-122"/>
-                <a:cs typeface="Calibri" pitchFamily="34" charset="-120"/>
-              </a:rPr>
-              <a:t>Training delivered to participants before go-live</a:t>
-            </a:r>
-            <a:endParaRPr lang="en-US" sz="1080" dirty="0"/>
-          </a:p>
-        </p:txBody>
-      </p:sp>
-      <p:sp>
-        <p:nvSpPr>
-          <p:cNvPr id="23" name="Text 19"/>
-          <p:cNvSpPr/>
-          <p:nvPr/>
-        </p:nvSpPr>
-        <p:spPr>
-          <a:xfrm>
-            <a:off x="6583680" y="4443984"/>
-            <a:ext cx="4754880" cy="502920"/>
-          </a:xfrm>
-          <a:prstGeom prst="rect">
-            <a:avLst/>
-          </a:prstGeom>
-          <a:noFill/>
-          <a:ln/>
-        </p:spPr>
-        <p:txBody>
-          <a:bodyPr wrap="square" rtlCol="0" anchor="ctr"/>
-          <a:lstStyle/>
-          <a:p>
-            <a:pPr marL="0" indent="0">
-              <a:lnSpc>
-                <a:spcPct val="115000"/>
-              </a:lnSpc>
-              <a:buNone/>
-            </a:pPr>
-            <a:r>
-              <a:rPr lang="en-US" sz="1080" b="1" dirty="0">
-                <a:solidFill>
-                  <a:srgbClr val="D9A441"/>
-                </a:solidFill>
-                <a:latin typeface="Calibri" pitchFamily="34" charset="0"/>
-                <a:ea typeface="Calibri" pitchFamily="34" charset="-122"/>
-                <a:cs typeface="Calibri" pitchFamily="34" charset="-120"/>
-              </a:rPr>
-              <a:t>→  </a:t>
-            </a:r>
-            <a:r>
-              <a:rPr lang="en-US" sz="1080" dirty="0">
-                <a:solidFill>
-                  <a:srgbClr val="FFFFFF"/>
-                </a:solidFill>
-                <a:latin typeface="Calibri" pitchFamily="34" charset="0"/>
-                <a:ea typeface="Calibri" pitchFamily="34" charset="-122"/>
-                <a:cs typeface="Calibri" pitchFamily="34" charset="-120"/>
-              </a:rPr>
-              <a:t>Helpdesk/support staffed for the duration of the pilot window</a:t>
-            </a:r>
-            <a:endParaRPr lang="en-US" sz="1080" dirty="0"/>
-          </a:p>
-        </p:txBody>
-      </p:sp>
-      <p:sp>
-        <p:nvSpPr>
-          <p:cNvPr id="24" name="Text 20"/>
-          <p:cNvSpPr/>
-          <p:nvPr/>
-        </p:nvSpPr>
-        <p:spPr>
-          <a:xfrm>
-            <a:off x="6583680" y="4974336"/>
-            <a:ext cx="4754880" cy="502920"/>
-          </a:xfrm>
-          <a:prstGeom prst="rect">
-            <a:avLst/>
-          </a:prstGeom>
-          <a:noFill/>
-          <a:ln/>
-        </p:spPr>
-        <p:txBody>
-          <a:bodyPr wrap="square" rtlCol="0" anchor="ctr"/>
-          <a:lstStyle/>
-          <a:p>
-            <a:pPr marL="0" indent="0">
-              <a:lnSpc>
-                <a:spcPct val="115000"/>
-              </a:lnSpc>
-              <a:buNone/>
-            </a:pPr>
-            <a:r>
-              <a:rPr lang="en-US" sz="1080" b="1" dirty="0">
-                <a:solidFill>
-                  <a:srgbClr val="D9A441"/>
-                </a:solidFill>
-                <a:latin typeface="Calibri" pitchFamily="34" charset="0"/>
-                <a:ea typeface="Calibri" pitchFamily="34" charset="-122"/>
-                <a:cs typeface="Calibri" pitchFamily="34" charset="-120"/>
-              </a:rPr>
-              <a:t>→  </a:t>
-            </a:r>
-            <a:r>
-              <a:rPr lang="en-US" sz="1080" dirty="0">
-                <a:solidFill>
-                  <a:srgbClr val="FFFFFF"/>
-                </a:solidFill>
-                <a:latin typeface="Calibri" pitchFamily="34" charset="0"/>
-                <a:ea typeface="Calibri" pitchFamily="34" charset="-122"/>
-                <a:cs typeface="Calibri" pitchFamily="34" charset="-120"/>
-              </a:rPr>
-              <a:t>Committee checkpoint to review results before wider rollout</a:t>
-            </a:r>
-            <a:endParaRPr lang="en-US" sz="1080" dirty="0"/>
-          </a:p>
-        </p:txBody>
-      </p:sp>
-      <p:sp>
-        <p:nvSpPr>
-          <p:cNvPr id="25" name="Shape 21"/>
-          <p:cNvSpPr/>
-          <p:nvPr/>
-        </p:nvSpPr>
-        <p:spPr>
-          <a:xfrm>
-            <a:off x="548640" y="5943600"/>
-            <a:ext cx="11064240" cy="594360"/>
-          </a:xfrm>
-          <a:prstGeom prst="roundRect">
-            <a:avLst>
-              <a:gd name="adj" fmla="val 13846"/>
-            </a:avLst>
-          </a:prstGeom>
-          <a:solidFill>
-            <a:srgbClr val="FBF3E4"/>
-          </a:solidFill>
-          <a:ln/>
-          <a:effectLst>
-            <a:outerShdw blurRad="127000" dist="38100" dir="5400000" algn="bl" rotWithShape="0">
-              <a:srgbClr val="1B0B3E">
-                <a:alpha val="35000"/>
-              </a:srgbClr>
-            </a:outerShdw>
-          </a:effectLst>
-        </p:spPr>
-      </p:sp>
-      <p:sp>
-        <p:nvSpPr>
-          <p:cNvPr id="26" name="Text 22"/>
-          <p:cNvSpPr/>
-          <p:nvPr/>
-        </p:nvSpPr>
-        <p:spPr>
-          <a:xfrm>
-            <a:off x="868680" y="5943600"/>
-            <a:ext cx="10424160" cy="594360"/>
-          </a:xfrm>
-          <a:prstGeom prst="rect">
-            <a:avLst/>
-          </a:prstGeom>
-          <a:noFill/>
-          <a:ln/>
-        </p:spPr>
-        <p:txBody>
-          <a:bodyPr wrap="square" rtlCol="0" anchor="ctr"/>
-          <a:lstStyle/>
-          <a:p>
-            <a:pPr marL="0" indent="0">
-              <a:lnSpc>
-                <a:spcPct val="115000"/>
-              </a:lnSpc>
-              <a:buNone/>
-            </a:pPr>
-            <a:r>
-              <a:rPr lang="en-US" sz="1100" b="1" i="1" dirty="0">
-                <a:solidFill>
-                  <a:srgbClr val="2C0F5E"/>
-                </a:solidFill>
-                <a:latin typeface="Calibri" pitchFamily="34" charset="0"/>
-                <a:ea typeface="Calibri" pitchFamily="34" charset="-122"/>
-                <a:cs typeface="Calibri" pitchFamily="34" charset="-120"/>
-              </a:rPr>
-              <a:t>In short:  </a:t>
-            </a:r>
-            <a:r>
-              <a:rPr lang="en-US" sz="1100" i="1" dirty="0">
-                <a:solidFill>
-                  <a:srgbClr val="5C5470"/>
-                </a:solidFill>
-                <a:latin typeface="Calibri" pitchFamily="34" charset="0"/>
-                <a:ea typeface="Calibri" pitchFamily="34" charset="-122"/>
-                <a:cs typeface="Calibri" pitchFamily="34" charset="-120"/>
-              </a:rPr>
-              <a:t>pre-pilot asks “does it work?” with people who already know the system; pilot asks “does it work for them?” with people who don't.</a:t>
-            </a:r>
-            <a:endParaRPr lang="en-US" sz="1100" dirty="0"/>
-          </a:p>
-        </p:txBody>
-      </p:sp>
-      <p:sp>
-        <p:nvSpPr>
-          <p:cNvPr id="27" name="Text 23"/>
-          <p:cNvSpPr/>
-          <p:nvPr/>
-        </p:nvSpPr>
-        <p:spPr>
-          <a:xfrm>
-            <a:off x="457200" y="6473952"/>
-            <a:ext cx="7315200" cy="274320"/>
-          </a:xfrm>
-          <a:prstGeom prst="rect">
-            <a:avLst/>
-          </a:prstGeom>
-          <a:noFill/>
-          <a:ln/>
-        </p:spPr>
-        <p:txBody>
-          <a:bodyPr wrap="square" rtlCol="0" anchor="ctr"/>
-          <a:lstStyle/>
-          <a:p>
-            <a:pPr marL="0" indent="0">
-              <a:buNone/>
-            </a:pPr>
-            <a:r>
-              <a:rPr lang="en-US" sz="900" i="1" dirty="0">
-                <a:solidFill>
-                  <a:srgbClr val="CBBFE6"/>
-                </a:solidFill>
-                <a:latin typeface="Calibri" pitchFamily="34" charset="0"/>
-                <a:ea typeface="Calibri" pitchFamily="34" charset="-122"/>
-                <a:cs typeface="Calibri" pitchFamily="34" charset="-120"/>
-              </a:rPr>
-              <a:t>SCDMS - Submission &amp; Commission Decision Management System</a:t>
-            </a:r>
-            <a:endParaRPr lang="en-US" sz="900" dirty="0"/>
-          </a:p>
-        </p:txBody>
-      </p:sp>
-      <p:sp>
-        <p:nvSpPr>
-          <p:cNvPr id="28" name="Text 24"/>
-          <p:cNvSpPr/>
-          <p:nvPr/>
-        </p:nvSpPr>
-        <p:spPr>
-          <a:xfrm>
-            <a:off x="11277295" y="6473952"/>
-            <a:ext cx="457200" cy="274320"/>
-          </a:xfrm>
-          <a:prstGeom prst="rect">
-            <a:avLst/>
-          </a:prstGeom>
-          <a:noFill/>
-          <a:ln/>
-        </p:spPr>
-        <p:txBody>
-          <a:bodyPr wrap="square" rtlCol="0" anchor="ctr"/>
-          <a:lstStyle/>
-          <a:p>
-            <a:pPr marL="0" indent="0" algn="r">
-              <a:buNone/>
-            </a:pPr>
-            <a:r>
-              <a:rPr lang="en-US" sz="900" dirty="0">
-                <a:solidFill>
-                  <a:srgbClr val="CBBFE6"/>
-                </a:solidFill>
-                <a:latin typeface="Calibri" pitchFamily="34" charset="0"/>
-                <a:ea typeface="Calibri" pitchFamily="34" charset="-122"/>
-                <a:cs typeface="Calibri" pitchFamily="34" charset="-120"/>
-              </a:rPr>
-              <a:t>19</a:t>
-            </a:r>
-            <a:endParaRPr lang="en-US" sz="900" dirty="0"/>
-          </a:p>
-        </p:txBody>
-      </p:sp>
-    </p:spTree>
-  </p:cSld>
-  <p:clrMapOvr>
-    <a:masterClrMapping/>
-  </p:clrMapOvr>
-</p:sld>
-</file>
-
-<file path=ppt/slides/slide21.xml><?xml version="1.0" encoding="utf-8"?>
-<p:sld xmlns:a="http://schemas.openxmlformats.org/drawingml/2006/main" xmlns:r="http://schemas.openxmlformats.org/officeDocument/2006/relationships" xmlns:p="http://schemas.openxmlformats.org/presentationml/2006/main">
   <p:cSld name="Slide 20">
     <p:spTree>
       <p:nvGrpSpPr>
@@ -14700,9 +14006,35 @@
           </a:prstGeom>
         </p:spPr>
       </p:pic>
-      <p:sp>
-        <p:nvSpPr>
-          <p:cNvPr id="3" name="Text 0"/>
+      <p:pic>
+        <p:nvPicPr>
+          <p:cNvPr id="3" name="Image 1" descr="C:\Users\Herman Tevilili\AppData\Local\Temp\claude\C--Users-Herman-Tevilili-Documents-GitHub-commissionDecisionApp-v1-0\2d2d3a12-ae9e-4f4b-990a-3e1ebe47ec28\scratchpad\scdms_deck\assets\rings.png"/>
+          <p:cNvPicPr>
+            <a:picLocks noChangeAspect="1"/>
+          </p:cNvPicPr>
+          <p:nvPr/>
+        </p:nvPicPr>
+        <p:blipFill>
+          <a:blip r:embed="rId4">
+            <a:alphaModFix amt="55000"/>
+          </a:blip>
+          <a:stretch>
+            <a:fillRect/>
+          </a:stretch>
+        </p:blipFill>
+        <p:spPr>
+          <a:xfrm>
+            <a:off x="10271455" y="4937760"/>
+            <a:ext cx="2926080" cy="2926080"/>
+          </a:xfrm>
+          <a:prstGeom prst="rect">
+            <a:avLst/>
+          </a:prstGeom>
+        </p:spPr>
+      </p:pic>
+      <p:sp>
+        <p:nvSpPr>
+          <p:cNvPr id="4" name="Text 0"/>
           <p:cNvSpPr/>
           <p:nvPr/>
         </p:nvSpPr>
@@ -14733,7 +14065,7 @@
                 <a:ea typeface="Calibri" pitchFamily="34" charset="-122"/>
                 <a:cs typeface="Calibri" pitchFamily="34" charset="-120"/>
               </a:rPr>
-              <a:t>WHAT WE NEED</a:t>
+              <a:t>WHAT'S NEXT</a:t>
             </a:r>
             <a:endParaRPr lang="en-US" sz="1200" dirty="0"/>
           </a:p>
@@ -14741,7 +14073,7 @@
       </p:sp>
       <p:sp>
         <p:nvSpPr>
-          <p:cNvPr id="4" name="Text 1"/>
+          <p:cNvPr id="5" name="Text 1"/>
           <p:cNvSpPr/>
           <p:nvPr/>
         </p:nvSpPr>
@@ -14764,7 +14096,7 @@
               <a:buNone/>
             </a:pPr>
             <a:r>
-              <a:rPr lang="en-US" sz="2900" b="1" dirty="0">
+              <a:rPr lang="en-US" sz="2600" b="1" dirty="0">
                 <a:solidFill>
                   <a:srgbClr val="FFFFFF"/>
                 </a:solidFill>
@@ -14772,30 +14104,72 @@
                 <a:ea typeface="Cambria" pitchFamily="34" charset="-122"/>
                 <a:cs typeface="Cambria" pitchFamily="34" charset="-120"/>
               </a:rPr>
-              <a:t>What we're asking of the Committee today</a:t>
-            </a:r>
-            <a:endParaRPr lang="en-US" sz="2900" dirty="0"/>
-          </a:p>
-        </p:txBody>
-      </p:sp>
-      <p:sp>
-        <p:nvSpPr>
-          <p:cNvPr id="5" name="Shape 2"/>
-          <p:cNvSpPr/>
-          <p:nvPr/>
-        </p:nvSpPr>
-        <p:spPr>
-          <a:xfrm>
-            <a:off x="548640" y="1783080"/>
-            <a:ext cx="5257800" cy="1874520"/>
+              <a:t>Two stages before wider rollout: pre-pilot, then pilot</a:t>
+            </a:r>
+            <a:endParaRPr lang="en-US" sz="2600" dirty="0"/>
+          </a:p>
+        </p:txBody>
+      </p:sp>
+      <p:sp>
+        <p:nvSpPr>
+          <p:cNvPr id="6" name="Text 2"/>
+          <p:cNvSpPr/>
+          <p:nvPr/>
+        </p:nvSpPr>
+        <p:spPr>
+          <a:xfrm>
+            <a:off x="1691640" y="1417320"/>
+            <a:ext cx="10058400" cy="594360"/>
+          </a:xfrm>
+          <a:prstGeom prst="rect">
+            <a:avLst/>
+          </a:prstGeom>
+          <a:noFill/>
+          <a:ln/>
+        </p:spPr>
+        <p:txBody>
+          <a:bodyPr wrap="square" rtlCol="0" anchor="ctr"/>
+          <a:lstStyle/>
+          <a:p>
+            <a:pPr marL="0" indent="0">
+              <a:lnSpc>
+                <a:spcPct val="125000"/>
+              </a:lnSpc>
+              <a:buNone/>
+            </a:pPr>
+            <a:r>
+              <a:rPr lang="en-US" sz="1200" dirty="0">
+                <a:solidFill>
+                  <a:srgbClr val="CBBFE6"/>
+                </a:solidFill>
+                <a:latin typeface="Calibri" pitchFamily="34" charset="0"/>
+                <a:ea typeface="Calibri" pitchFamily="34" charset="-122"/>
+                <a:cs typeface="Calibri" pitchFamily="34" charset="-120"/>
+              </a:rPr>
+              <a:t>Pre-pilot proves the system works under real conditions, with PSC staff only. Pilot proves it works for real ministries. Separating them contains risk before any live personnel decision runs through SCDMS.</a:t>
+            </a:r>
+            <a:endParaRPr lang="en-US" sz="1200" dirty="0"/>
+          </a:p>
+        </p:txBody>
+      </p:sp>
+      <p:sp>
+        <p:nvSpPr>
+          <p:cNvPr id="7" name="Shape 3"/>
+          <p:cNvSpPr/>
+          <p:nvPr/>
+        </p:nvSpPr>
+        <p:spPr>
+          <a:xfrm>
+            <a:off x="548640" y="2148840"/>
+            <a:ext cx="5349240" cy="3611880"/>
           </a:xfrm>
           <a:prstGeom prst="roundRect">
             <a:avLst>
-              <a:gd name="adj" fmla="val 4390"/>
+              <a:gd name="adj" fmla="val 2278"/>
             </a:avLst>
           </a:prstGeom>
           <a:solidFill>
-            <a:srgbClr val="FBF3E4"/>
+            <a:srgbClr val="F5F3FB"/>
           </a:solidFill>
           <a:ln/>
           <a:effectLst>
@@ -14809,50 +14183,30 @@
       </p:sp>
       <p:sp>
         <p:nvSpPr>
-          <p:cNvPr id="6" name="Shape 3"/>
-          <p:cNvSpPr/>
-          <p:nvPr/>
-        </p:nvSpPr>
-        <p:spPr>
-          <a:xfrm>
-            <a:off x="800100" y="1988820"/>
-            <a:ext cx="594360" cy="594360"/>
-          </a:xfrm>
-          <a:prstGeom prst="ellipse">
-            <a:avLst/>
-          </a:prstGeom>
-          <a:solidFill>
-            <a:srgbClr val="D9A441"/>
-          </a:solidFill>
-          <a:ln/>
-        </p:spPr>
-      </p:sp>
-      <p:sp>
-        <p:nvSpPr>
-          <p:cNvPr id="7" name="Text 4"/>
-          <p:cNvSpPr/>
-          <p:nvPr/>
-        </p:nvSpPr>
-        <p:spPr>
-          <a:xfrm>
-            <a:off x="800100" y="1988820"/>
-            <a:ext cx="594360" cy="594360"/>
-          </a:xfrm>
-          <a:prstGeom prst="rect">
-            <a:avLst/>
-          </a:prstGeom>
-          <a:noFill/>
-          <a:ln/>
-        </p:spPr>
-        <p:txBody>
-          <a:bodyPr wrap="square" rtlCol="0" anchor="ctr"/>
-          <a:lstStyle/>
-          <a:p>
-            <a:pPr marL="0" indent="0" algn="ctr">
-              <a:buNone/>
-            </a:pPr>
-            <a:r>
-              <a:rPr lang="en-US" sz="1800" b="1" dirty="0">
+          <p:cNvPr id="8" name="Text 4"/>
+          <p:cNvSpPr/>
+          <p:nvPr/>
+        </p:nvSpPr>
+        <p:spPr>
+          <a:xfrm>
+            <a:off x="868680" y="2377440"/>
+            <a:ext cx="3291840" cy="365760"/>
+          </a:xfrm>
+          <a:prstGeom prst="rect">
+            <a:avLst/>
+          </a:prstGeom>
+          <a:noFill/>
+          <a:ln/>
+        </p:spPr>
+        <p:txBody>
+          <a:bodyPr wrap="square" rtlCol="0" anchor="ctr"/>
+          <a:lstStyle/>
+          <a:p>
+            <a:pPr marL="0" indent="0">
+              <a:buNone/>
+            </a:pPr>
+            <a:r>
+              <a:rPr lang="en-US" sz="1450" b="1" dirty="0">
                 <a:solidFill>
                   <a:srgbClr val="2C0F5E"/>
                 </a:solidFill>
@@ -14860,49 +14214,7 @@
                 <a:ea typeface="Calibri" pitchFamily="34" charset="-122"/>
                 <a:cs typeface="Calibri" pitchFamily="34" charset="-120"/>
               </a:rPr>
-              <a:t>1</a:t>
-            </a:r>
-            <a:endParaRPr lang="en-US" sz="1800" dirty="0"/>
-          </a:p>
-        </p:txBody>
-      </p:sp>
-      <p:sp>
-        <p:nvSpPr>
-          <p:cNvPr id="8" name="Text 5"/>
-          <p:cNvSpPr/>
-          <p:nvPr/>
-        </p:nvSpPr>
-        <p:spPr>
-          <a:xfrm>
-            <a:off x="1737360" y="1984248"/>
-            <a:ext cx="3840480" cy="594360"/>
-          </a:xfrm>
-          <a:prstGeom prst="rect">
-            <a:avLst/>
-          </a:prstGeom>
-          <a:noFill/>
-          <a:ln/>
-        </p:spPr>
-        <p:txBody>
-          <a:bodyPr wrap="square" rtlCol="0" anchor="ctr"/>
-          <a:lstStyle/>
-          <a:p>
-            <a:pPr marL="0" indent="0">
-              <a:lnSpc>
-                <a:spcPct val="110000"/>
-              </a:lnSpc>
-              <a:buNone/>
-            </a:pPr>
-            <a:r>
-              <a:rPr lang="en-US" sz="1450" b="1" dirty="0">
-                <a:solidFill>
-                  <a:srgbClr val="2C0F5E"/>
-                </a:solidFill>
-                <a:latin typeface="Calibri" pitchFamily="34" charset="0"/>
-                <a:ea typeface="Calibri" pitchFamily="34" charset="-122"/>
-                <a:cs typeface="Calibri" pitchFamily="34" charset="-120"/>
-              </a:rPr>
-              <a:t>Endorse the pre-pilot &amp; pilot approach</a:t>
+              <a:t>Pre-Pilot</a:t>
             </a:r>
             <a:endParaRPr lang="en-US" sz="1450" dirty="0"/>
           </a:p>
@@ -14910,64 +14222,348 @@
       </p:sp>
       <p:sp>
         <p:nvSpPr>
-          <p:cNvPr id="9" name="Text 6"/>
-          <p:cNvSpPr/>
-          <p:nvPr/>
-        </p:nvSpPr>
-        <p:spPr>
-          <a:xfrm>
-            <a:off x="868680" y="2834640"/>
-            <a:ext cx="4617720" cy="731520"/>
-          </a:xfrm>
-          <a:prstGeom prst="rect">
-            <a:avLst/>
-          </a:prstGeom>
-          <a:noFill/>
-          <a:ln/>
-        </p:spPr>
-        <p:txBody>
-          <a:bodyPr wrap="square" rtlCol="0" anchor="ctr"/>
-          <a:lstStyle/>
-          <a:p>
-            <a:pPr marL="0" indent="0">
-              <a:lnSpc>
-                <a:spcPct val="120000"/>
-              </a:lnSpc>
-              <a:buNone/>
-            </a:pPr>
-            <a:r>
-              <a:rPr lang="en-US" sz="1100" dirty="0">
-                <a:solidFill>
-                  <a:srgbClr val="5C5470"/>
-                </a:solidFill>
-                <a:latin typeface="Calibri" pitchFamily="34" charset="0"/>
-                <a:ea typeface="Calibri" pitchFamily="34" charset="-122"/>
-                <a:cs typeface="Calibri" pitchFamily="34" charset="-120"/>
-              </a:rPr>
-              <a:t>Agree to move from internal testing into pre-pilot, then a defined, scoped pilot phase.</a:t>
-            </a:r>
-            <a:endParaRPr lang="en-US" sz="1100" dirty="0"/>
-          </a:p>
-        </p:txBody>
-      </p:sp>
-      <p:sp>
-        <p:nvSpPr>
-          <p:cNvPr id="10" name="Shape 7"/>
-          <p:cNvSpPr/>
-          <p:nvPr/>
-        </p:nvSpPr>
-        <p:spPr>
-          <a:xfrm>
-            <a:off x="6126480" y="1783080"/>
-            <a:ext cx="5257800" cy="1874520"/>
+          <p:cNvPr id="9" name="Shape 5"/>
+          <p:cNvSpPr/>
+          <p:nvPr/>
+        </p:nvSpPr>
+        <p:spPr>
+          <a:xfrm>
+            <a:off x="4206240" y="2377440"/>
+            <a:ext cx="1554480" cy="329184"/>
           </a:xfrm>
           <a:prstGeom prst="roundRect">
             <a:avLst>
-              <a:gd name="adj" fmla="val 4390"/>
+              <a:gd name="adj" fmla="val 50000"/>
             </a:avLst>
           </a:prstGeom>
           <a:solidFill>
-            <a:srgbClr val="FBF3E4"/>
+            <a:srgbClr val="FBF0DC"/>
+          </a:solidFill>
+          <a:ln/>
+        </p:spPr>
+      </p:sp>
+      <p:sp>
+        <p:nvSpPr>
+          <p:cNvPr id="10" name="Text 6"/>
+          <p:cNvSpPr/>
+          <p:nvPr/>
+        </p:nvSpPr>
+        <p:spPr>
+          <a:xfrm>
+            <a:off x="4206240" y="2377440"/>
+            <a:ext cx="1554480" cy="329184"/>
+          </a:xfrm>
+          <a:prstGeom prst="rect">
+            <a:avLst/>
+          </a:prstGeom>
+          <a:noFill/>
+          <a:ln/>
+        </p:spPr>
+        <p:txBody>
+          <a:bodyPr wrap="square" rtlCol="0" anchor="ctr"/>
+          <a:lstStyle/>
+          <a:p>
+            <a:pPr marL="0" indent="0" algn="ctr">
+              <a:buNone/>
+            </a:pPr>
+            <a:r>
+              <a:rPr lang="en-US" sz="1000" b="1" dirty="0">
+                <a:solidFill>
+                  <a:srgbClr val="B5791A"/>
+                </a:solidFill>
+                <a:latin typeface="Calibri" pitchFamily="34" charset="0"/>
+                <a:ea typeface="Calibri" pitchFamily="34" charset="-122"/>
+                <a:cs typeface="Calibri" pitchFamily="34" charset="-120"/>
+              </a:rPr>
+              <a:t>Internal only</a:t>
+            </a:r>
+            <a:endParaRPr lang="en-US" sz="1000" dirty="0"/>
+          </a:p>
+        </p:txBody>
+      </p:sp>
+      <p:sp>
+        <p:nvSpPr>
+          <p:cNvPr id="11" name="Text 7"/>
+          <p:cNvSpPr/>
+          <p:nvPr/>
+        </p:nvSpPr>
+        <p:spPr>
+          <a:xfrm>
+            <a:off x="868680" y="2852928"/>
+            <a:ext cx="4754880" cy="502920"/>
+          </a:xfrm>
+          <a:prstGeom prst="rect">
+            <a:avLst/>
+          </a:prstGeom>
+          <a:noFill/>
+          <a:ln/>
+        </p:spPr>
+        <p:txBody>
+          <a:bodyPr wrap="square" rtlCol="0" anchor="ctr"/>
+          <a:lstStyle/>
+          <a:p>
+            <a:pPr marL="0" indent="0">
+              <a:lnSpc>
+                <a:spcPct val="115000"/>
+              </a:lnSpc>
+              <a:buNone/>
+            </a:pPr>
+            <a:r>
+              <a:rPr lang="en-US" sz="1080" b="1" dirty="0">
+                <a:solidFill>
+                  <a:srgbClr val="2C0F5E"/>
+                </a:solidFill>
+                <a:latin typeface="Calibri" pitchFamily="34" charset="0"/>
+                <a:ea typeface="Calibri" pitchFamily="34" charset="-122"/>
+                <a:cs typeface="Calibri" pitchFamily="34" charset="-120"/>
+              </a:rPr>
+              <a:t>•  </a:t>
+            </a:r>
+            <a:r>
+              <a:rPr lang="en-US" sz="1080" dirty="0">
+                <a:solidFill>
+                  <a:srgbClr val="5C5470"/>
+                </a:solidFill>
+                <a:latin typeface="Calibri" pitchFamily="34" charset="0"/>
+                <a:ea typeface="Calibri" pitchFamily="34" charset="-122"/>
+                <a:cs typeface="Calibri" pitchFamily="34" charset="-120"/>
+              </a:rPr>
+              <a:t>Real reference data loaded - ministries, departments, users - but no live submissions yet</a:t>
+            </a:r>
+            <a:endParaRPr lang="en-US" sz="1080" dirty="0"/>
+          </a:p>
+        </p:txBody>
+      </p:sp>
+      <p:sp>
+        <p:nvSpPr>
+          <p:cNvPr id="12" name="Text 8"/>
+          <p:cNvSpPr/>
+          <p:nvPr/>
+        </p:nvSpPr>
+        <p:spPr>
+          <a:xfrm>
+            <a:off x="868680" y="3383280"/>
+            <a:ext cx="4754880" cy="502920"/>
+          </a:xfrm>
+          <a:prstGeom prst="rect">
+            <a:avLst/>
+          </a:prstGeom>
+          <a:noFill/>
+          <a:ln/>
+        </p:spPr>
+        <p:txBody>
+          <a:bodyPr wrap="square" rtlCol="0" anchor="ctr"/>
+          <a:lstStyle/>
+          <a:p>
+            <a:pPr marL="0" indent="0">
+              <a:lnSpc>
+                <a:spcPct val="115000"/>
+              </a:lnSpc>
+              <a:buNone/>
+            </a:pPr>
+            <a:r>
+              <a:rPr lang="en-US" sz="1080" b="1" dirty="0">
+                <a:solidFill>
+                  <a:srgbClr val="2C0F5E"/>
+                </a:solidFill>
+                <a:latin typeface="Calibri" pitchFamily="34" charset="0"/>
+                <a:ea typeface="Calibri" pitchFamily="34" charset="-122"/>
+                <a:cs typeface="Calibri" pitchFamily="34" charset="-120"/>
+              </a:rPr>
+              <a:t>•  </a:t>
+            </a:r>
+            <a:r>
+              <a:rPr lang="en-US" sz="1080" dirty="0">
+                <a:solidFill>
+                  <a:srgbClr val="5C5470"/>
+                </a:solidFill>
+                <a:latin typeface="Calibri" pitchFamily="34" charset="0"/>
+                <a:ea typeface="Calibri" pitchFamily="34" charset="-122"/>
+                <a:cs typeface="Calibri" pitchFamily="34" charset="-120"/>
+              </a:rPr>
+              <a:t>Security fully activated: 2FA and the rest of the auth posture turned on</a:t>
+            </a:r>
+            <a:endParaRPr lang="en-US" sz="1080" dirty="0"/>
+          </a:p>
+        </p:txBody>
+      </p:sp>
+      <p:sp>
+        <p:nvSpPr>
+          <p:cNvPr id="13" name="Text 9"/>
+          <p:cNvSpPr/>
+          <p:nvPr/>
+        </p:nvSpPr>
+        <p:spPr>
+          <a:xfrm>
+            <a:off x="868680" y="3913632"/>
+            <a:ext cx="4754880" cy="502920"/>
+          </a:xfrm>
+          <a:prstGeom prst="rect">
+            <a:avLst/>
+          </a:prstGeom>
+          <a:noFill/>
+          <a:ln/>
+        </p:spPr>
+        <p:txBody>
+          <a:bodyPr wrap="square" rtlCol="0" anchor="ctr"/>
+          <a:lstStyle/>
+          <a:p>
+            <a:pPr marL="0" indent="0">
+              <a:lnSpc>
+                <a:spcPct val="115000"/>
+              </a:lnSpc>
+              <a:buNone/>
+            </a:pPr>
+            <a:r>
+              <a:rPr lang="en-US" sz="1080" b="1" dirty="0">
+                <a:solidFill>
+                  <a:srgbClr val="2C0F5E"/>
+                </a:solidFill>
+                <a:latin typeface="Calibri" pitchFamily="34" charset="0"/>
+                <a:ea typeface="Calibri" pitchFamily="34" charset="-122"/>
+                <a:cs typeface="Calibri" pitchFamily="34" charset="-120"/>
+              </a:rPr>
+              <a:t>•  </a:t>
+            </a:r>
+            <a:r>
+              <a:rPr lang="en-US" sz="1080" dirty="0">
+                <a:solidFill>
+                  <a:srgbClr val="5C5470"/>
+                </a:solidFill>
+                <a:latin typeface="Calibri" pitchFamily="34" charset="0"/>
+                <a:ea typeface="Calibri" pitchFamily="34" charset="-122"/>
+                <a:cs typeface="Calibri" pitchFamily="34" charset="-120"/>
+              </a:rPr>
+              <a:t>Running on the DCDT-provisioned server, not local dev</a:t>
+            </a:r>
+            <a:endParaRPr lang="en-US" sz="1080" dirty="0"/>
+          </a:p>
+        </p:txBody>
+      </p:sp>
+      <p:sp>
+        <p:nvSpPr>
+          <p:cNvPr id="14" name="Text 10"/>
+          <p:cNvSpPr/>
+          <p:nvPr/>
+        </p:nvSpPr>
+        <p:spPr>
+          <a:xfrm>
+            <a:off x="868680" y="4443984"/>
+            <a:ext cx="4754880" cy="502920"/>
+          </a:xfrm>
+          <a:prstGeom prst="rect">
+            <a:avLst/>
+          </a:prstGeom>
+          <a:noFill/>
+          <a:ln/>
+        </p:spPr>
+        <p:txBody>
+          <a:bodyPr wrap="square" rtlCol="0" anchor="ctr"/>
+          <a:lstStyle/>
+          <a:p>
+            <a:pPr marL="0" indent="0">
+              <a:lnSpc>
+                <a:spcPct val="115000"/>
+              </a:lnSpc>
+              <a:buNone/>
+            </a:pPr>
+            <a:r>
+              <a:rPr lang="en-US" sz="1080" b="1" dirty="0">
+                <a:solidFill>
+                  <a:srgbClr val="2C0F5E"/>
+                </a:solidFill>
+                <a:latin typeface="Calibri" pitchFamily="34" charset="0"/>
+                <a:ea typeface="Calibri" pitchFamily="34" charset="-122"/>
+                <a:cs typeface="Calibri" pitchFamily="34" charset="-120"/>
+              </a:rPr>
+              <a:t>•  </a:t>
+            </a:r>
+            <a:r>
+              <a:rPr lang="en-US" sz="1080" dirty="0">
+                <a:solidFill>
+                  <a:srgbClr val="5C5470"/>
+                </a:solidFill>
+                <a:latin typeface="Calibri" pitchFamily="34" charset="0"/>
+                <a:ea typeface="Calibri" pitchFamily="34" charset="-122"/>
+                <a:cs typeface="Calibri" pitchFamily="34" charset="-120"/>
+              </a:rPr>
+              <a:t>Formal internal UAT by PSC staff, end to end</a:t>
+            </a:r>
+            <a:endParaRPr lang="en-US" sz="1080" dirty="0"/>
+          </a:p>
+        </p:txBody>
+      </p:sp>
+      <p:sp>
+        <p:nvSpPr>
+          <p:cNvPr id="15" name="Text 11"/>
+          <p:cNvSpPr/>
+          <p:nvPr/>
+        </p:nvSpPr>
+        <p:spPr>
+          <a:xfrm>
+            <a:off x="868680" y="4974336"/>
+            <a:ext cx="4754880" cy="502920"/>
+          </a:xfrm>
+          <a:prstGeom prst="rect">
+            <a:avLst/>
+          </a:prstGeom>
+          <a:noFill/>
+          <a:ln/>
+        </p:spPr>
+        <p:txBody>
+          <a:bodyPr wrap="square" rtlCol="0" anchor="ctr"/>
+          <a:lstStyle/>
+          <a:p>
+            <a:pPr marL="0" indent="0">
+              <a:lnSpc>
+                <a:spcPct val="115000"/>
+              </a:lnSpc>
+              <a:buNone/>
+            </a:pPr>
+            <a:r>
+              <a:rPr lang="en-US" sz="1080" b="1" dirty="0">
+                <a:solidFill>
+                  <a:srgbClr val="2C0F5E"/>
+                </a:solidFill>
+                <a:latin typeface="Calibri" pitchFamily="34" charset="0"/>
+                <a:ea typeface="Calibri" pitchFamily="34" charset="-122"/>
+                <a:cs typeface="Calibri" pitchFamily="34" charset="-120"/>
+              </a:rPr>
+              <a:t>•  </a:t>
+            </a:r>
+            <a:r>
+              <a:rPr lang="en-US" sz="1080" dirty="0">
+                <a:solidFill>
+                  <a:srgbClr val="5C5470"/>
+                </a:solidFill>
+                <a:latin typeface="Calibri" pitchFamily="34" charset="0"/>
+                <a:ea typeface="Calibri" pitchFamily="34" charset="-122"/>
+                <a:cs typeface="Calibri" pitchFamily="34" charset="-120"/>
+              </a:rPr>
+              <a:t>Outstanding unit workflow sign-offs confirmed (ODU, CIU, VIPAM, HRM)</a:t>
+            </a:r>
+            <a:endParaRPr lang="en-US" sz="1080" dirty="0"/>
+          </a:p>
+        </p:txBody>
+      </p:sp>
+      <p:sp>
+        <p:nvSpPr>
+          <p:cNvPr id="16" name="Shape 12"/>
+          <p:cNvSpPr/>
+          <p:nvPr/>
+        </p:nvSpPr>
+        <p:spPr>
+          <a:xfrm>
+            <a:off x="6263640" y="2148840"/>
+            <a:ext cx="5349240" cy="3611880"/>
+          </a:xfrm>
+          <a:prstGeom prst="roundRect">
+            <a:avLst>
+              <a:gd name="adj" fmla="val 2278"/>
+            </a:avLst>
+          </a:prstGeom>
+          <a:solidFill>
+            <a:srgbClr val="1E0E42"/>
           </a:solidFill>
           <a:ln/>
           <a:effectLst>
@@ -14981,100 +14577,38 @@
       </p:sp>
       <p:sp>
         <p:nvSpPr>
-          <p:cNvPr id="11" name="Shape 8"/>
-          <p:cNvSpPr/>
-          <p:nvPr/>
-        </p:nvSpPr>
-        <p:spPr>
-          <a:xfrm>
-            <a:off x="6377940" y="1988820"/>
-            <a:ext cx="594360" cy="594360"/>
-          </a:xfrm>
-          <a:prstGeom prst="ellipse">
-            <a:avLst/>
-          </a:prstGeom>
-          <a:solidFill>
-            <a:srgbClr val="D9A441"/>
-          </a:solidFill>
-          <a:ln/>
-        </p:spPr>
-      </p:sp>
-      <p:sp>
-        <p:nvSpPr>
-          <p:cNvPr id="12" name="Text 9"/>
-          <p:cNvSpPr/>
-          <p:nvPr/>
-        </p:nvSpPr>
-        <p:spPr>
-          <a:xfrm>
-            <a:off x="6377940" y="1988820"/>
-            <a:ext cx="594360" cy="594360"/>
-          </a:xfrm>
-          <a:prstGeom prst="rect">
-            <a:avLst/>
-          </a:prstGeom>
-          <a:noFill/>
-          <a:ln/>
-        </p:spPr>
-        <p:txBody>
-          <a:bodyPr wrap="square" rtlCol="0" anchor="ctr"/>
-          <a:lstStyle/>
-          <a:p>
-            <a:pPr marL="0" indent="0" algn="ctr">
-              <a:buNone/>
-            </a:pPr>
-            <a:r>
-              <a:rPr lang="en-US" sz="1800" b="1" dirty="0">
-                <a:solidFill>
-                  <a:srgbClr val="2C0F5E"/>
-                </a:solidFill>
-                <a:latin typeface="Calibri" pitchFamily="34" charset="0"/>
-                <a:ea typeface="Calibri" pitchFamily="34" charset="-122"/>
-                <a:cs typeface="Calibri" pitchFamily="34" charset="-120"/>
-              </a:rPr>
-              <a:t>2</a:t>
-            </a:r>
-            <a:endParaRPr lang="en-US" sz="1800" dirty="0"/>
-          </a:p>
-        </p:txBody>
-      </p:sp>
-      <p:sp>
-        <p:nvSpPr>
-          <p:cNvPr id="13" name="Text 10"/>
-          <p:cNvSpPr/>
-          <p:nvPr/>
-        </p:nvSpPr>
-        <p:spPr>
-          <a:xfrm>
-            <a:off x="7315200" y="1984248"/>
-            <a:ext cx="3840480" cy="594360"/>
-          </a:xfrm>
-          <a:prstGeom prst="rect">
-            <a:avLst/>
-          </a:prstGeom>
-          <a:noFill/>
-          <a:ln/>
-        </p:spPr>
-        <p:txBody>
-          <a:bodyPr wrap="square" rtlCol="0" anchor="ctr"/>
-          <a:lstStyle/>
-          <a:p>
-            <a:pPr marL="0" indent="0">
-              <a:lnSpc>
-                <a:spcPct val="110000"/>
-              </a:lnSpc>
+          <p:cNvPr id="17" name="Text 13"/>
+          <p:cNvSpPr/>
+          <p:nvPr/>
+        </p:nvSpPr>
+        <p:spPr>
+          <a:xfrm>
+            <a:off x="6583680" y="2377440"/>
+            <a:ext cx="3291840" cy="365760"/>
+          </a:xfrm>
+          <a:prstGeom prst="rect">
+            <a:avLst/>
+          </a:prstGeom>
+          <a:noFill/>
+          <a:ln/>
+        </p:spPr>
+        <p:txBody>
+          <a:bodyPr wrap="square" rtlCol="0" anchor="ctr"/>
+          <a:lstStyle/>
+          <a:p>
+            <a:pPr marL="0" indent="0">
               <a:buNone/>
             </a:pPr>
             <a:r>
               <a:rPr lang="en-US" sz="1450" b="1" dirty="0">
                 <a:solidFill>
-                  <a:srgbClr val="2C0F5E"/>
-                </a:solidFill>
-                <a:latin typeface="Calibri" pitchFamily="34" charset="0"/>
-                <a:ea typeface="Calibri" pitchFamily="34" charset="-122"/>
-                <a:cs typeface="Calibri" pitchFamily="34" charset="-120"/>
-              </a:rPr>
-              <a:t>Confirm pilot ministries</a:t>
+                  <a:srgbClr val="D9A441"/>
+                </a:solidFill>
+                <a:latin typeface="Calibri" pitchFamily="34" charset="0"/>
+                <a:ea typeface="Calibri" pitchFamily="34" charset="-122"/>
+                <a:cs typeface="Calibri" pitchFamily="34" charset="-120"/>
+              </a:rPr>
+              <a:t>Pilot</a:t>
             </a:r>
             <a:endParaRPr lang="en-US" sz="1450" dirty="0"/>
           </a:p>
@@ -15082,60 +14616,344 @@
       </p:sp>
       <p:sp>
         <p:nvSpPr>
-          <p:cNvPr id="14" name="Text 11"/>
-          <p:cNvSpPr/>
-          <p:nvPr/>
-        </p:nvSpPr>
-        <p:spPr>
-          <a:xfrm>
-            <a:off x="6446520" y="2834640"/>
-            <a:ext cx="4617720" cy="731520"/>
-          </a:xfrm>
-          <a:prstGeom prst="rect">
-            <a:avLst/>
-          </a:prstGeom>
-          <a:noFill/>
-          <a:ln/>
-        </p:spPr>
-        <p:txBody>
-          <a:bodyPr wrap="square" rtlCol="0" anchor="ctr"/>
-          <a:lstStyle/>
-          <a:p>
-            <a:pPr marL="0" indent="0">
-              <a:lnSpc>
-                <a:spcPct val="120000"/>
-              </a:lnSpc>
-              <a:buNone/>
-            </a:pPr>
-            <a:r>
-              <a:rPr lang="en-US" sz="1100" dirty="0">
-                <a:solidFill>
-                  <a:srgbClr val="5C5470"/>
-                </a:solidFill>
-                <a:latin typeface="Calibri" pitchFamily="34" charset="0"/>
-                <a:ea typeface="Calibri" pitchFamily="34" charset="-122"/>
-                <a:cs typeface="Calibri" pitchFamily="34" charset="-120"/>
-              </a:rPr>
-              <a:t>Nominate the ministries / units to participate in the first pilot cohort.</a:t>
-            </a:r>
-            <a:endParaRPr lang="en-US" sz="1100" dirty="0"/>
-          </a:p>
-        </p:txBody>
-      </p:sp>
-      <p:sp>
-        <p:nvSpPr>
-          <p:cNvPr id="15" name="Shape 12"/>
-          <p:cNvSpPr/>
-          <p:nvPr/>
-        </p:nvSpPr>
-        <p:spPr>
-          <a:xfrm>
-            <a:off x="548640" y="3840480"/>
-            <a:ext cx="5257800" cy="1874520"/>
+          <p:cNvPr id="18" name="Shape 14"/>
+          <p:cNvSpPr/>
+          <p:nvPr/>
+        </p:nvSpPr>
+        <p:spPr>
+          <a:xfrm>
+            <a:off x="9601200" y="2377440"/>
+            <a:ext cx="1645920" cy="329184"/>
           </a:xfrm>
           <a:prstGeom prst="roundRect">
             <a:avLst>
-              <a:gd name="adj" fmla="val 4390"/>
+              <a:gd name="adj" fmla="val 50000"/>
+            </a:avLst>
+          </a:prstGeom>
+          <a:solidFill>
+            <a:srgbClr val="FBF0DC"/>
+          </a:solidFill>
+          <a:ln/>
+        </p:spPr>
+      </p:sp>
+      <p:sp>
+        <p:nvSpPr>
+          <p:cNvPr id="19" name="Text 15"/>
+          <p:cNvSpPr/>
+          <p:nvPr/>
+        </p:nvSpPr>
+        <p:spPr>
+          <a:xfrm>
+            <a:off x="9601200" y="2377440"/>
+            <a:ext cx="1645920" cy="329184"/>
+          </a:xfrm>
+          <a:prstGeom prst="rect">
+            <a:avLst/>
+          </a:prstGeom>
+          <a:noFill/>
+          <a:ln/>
+        </p:spPr>
+        <p:txBody>
+          <a:bodyPr wrap="square" rtlCol="0" anchor="ctr"/>
+          <a:lstStyle/>
+          <a:p>
+            <a:pPr marL="0" indent="0" algn="ctr">
+              <a:buNone/>
+            </a:pPr>
+            <a:r>
+              <a:rPr lang="en-US" sz="1000" b="1" dirty="0">
+                <a:solidFill>
+                  <a:srgbClr val="B5791A"/>
+                </a:solidFill>
+                <a:latin typeface="Calibri" pitchFamily="34" charset="0"/>
+                <a:ea typeface="Calibri" pitchFamily="34" charset="-122"/>
+                <a:cs typeface="Calibri" pitchFamily="34" charset="-120"/>
+              </a:rPr>
+              <a:t>1–2 ministries</a:t>
+            </a:r>
+            <a:endParaRPr lang="en-US" sz="1000" dirty="0"/>
+          </a:p>
+        </p:txBody>
+      </p:sp>
+      <p:sp>
+        <p:nvSpPr>
+          <p:cNvPr id="20" name="Text 16"/>
+          <p:cNvSpPr/>
+          <p:nvPr/>
+        </p:nvSpPr>
+        <p:spPr>
+          <a:xfrm>
+            <a:off x="6583680" y="2852928"/>
+            <a:ext cx="4754880" cy="502920"/>
+          </a:xfrm>
+          <a:prstGeom prst="rect">
+            <a:avLst/>
+          </a:prstGeom>
+          <a:noFill/>
+          <a:ln/>
+        </p:spPr>
+        <p:txBody>
+          <a:bodyPr wrap="square" rtlCol="0" anchor="ctr"/>
+          <a:lstStyle/>
+          <a:p>
+            <a:pPr marL="0" indent="0">
+              <a:lnSpc>
+                <a:spcPct val="115000"/>
+              </a:lnSpc>
+              <a:buNone/>
+            </a:pPr>
+            <a:r>
+              <a:rPr lang="en-US" sz="1080" b="1" dirty="0">
+                <a:solidFill>
+                  <a:srgbClr val="D9A441"/>
+                </a:solidFill>
+                <a:latin typeface="Calibri" pitchFamily="34" charset="0"/>
+                <a:ea typeface="Calibri" pitchFamily="34" charset="-122"/>
+                <a:cs typeface="Calibri" pitchFamily="34" charset="-120"/>
+              </a:rPr>
+              <a:t>→  </a:t>
+            </a:r>
+            <a:r>
+              <a:rPr lang="en-US" sz="1080" dirty="0">
+                <a:solidFill>
+                  <a:srgbClr val="FFFFFF"/>
+                </a:solidFill>
+                <a:latin typeface="Calibri" pitchFamily="34" charset="0"/>
+                <a:ea typeface="Calibri" pitchFamily="34" charset="-122"/>
+                <a:cs typeface="Calibri" pitchFamily="34" charset="-120"/>
+              </a:rPr>
+              <a:t>Real ministries, real submissions, real Commission decisions</a:t>
+            </a:r>
+            <a:endParaRPr lang="en-US" sz="1080" dirty="0"/>
+          </a:p>
+        </p:txBody>
+      </p:sp>
+      <p:sp>
+        <p:nvSpPr>
+          <p:cNvPr id="21" name="Text 17"/>
+          <p:cNvSpPr/>
+          <p:nvPr/>
+        </p:nvSpPr>
+        <p:spPr>
+          <a:xfrm>
+            <a:off x="6583680" y="3383280"/>
+            <a:ext cx="4754880" cy="502920"/>
+          </a:xfrm>
+          <a:prstGeom prst="rect">
+            <a:avLst/>
+          </a:prstGeom>
+          <a:noFill/>
+          <a:ln/>
+        </p:spPr>
+        <p:txBody>
+          <a:bodyPr wrap="square" rtlCol="0" anchor="ctr"/>
+          <a:lstStyle/>
+          <a:p>
+            <a:pPr marL="0" indent="0">
+              <a:lnSpc>
+                <a:spcPct val="115000"/>
+              </a:lnSpc>
+              <a:buNone/>
+            </a:pPr>
+            <a:r>
+              <a:rPr lang="en-US" sz="1080" b="1" dirty="0">
+                <a:solidFill>
+                  <a:srgbClr val="D9A441"/>
+                </a:solidFill>
+                <a:latin typeface="Calibri" pitchFamily="34" charset="0"/>
+                <a:ea typeface="Calibri" pitchFamily="34" charset="-122"/>
+                <a:cs typeface="Calibri" pitchFamily="34" charset="-120"/>
+              </a:rPr>
+              <a:t>→  </a:t>
+            </a:r>
+            <a:r>
+              <a:rPr lang="en-US" sz="1080" dirty="0">
+                <a:solidFill>
+                  <a:srgbClr val="FFFFFF"/>
+                </a:solidFill>
+                <a:latin typeface="Calibri" pitchFamily="34" charset="0"/>
+                <a:ea typeface="Calibri" pitchFamily="34" charset="-122"/>
+                <a:cs typeface="Calibri" pitchFamily="34" charset="-120"/>
+              </a:rPr>
+              <a:t>A small, deliberate cohort - not a full rollout</a:t>
+            </a:r>
+            <a:endParaRPr lang="en-US" sz="1080" dirty="0"/>
+          </a:p>
+        </p:txBody>
+      </p:sp>
+      <p:sp>
+        <p:nvSpPr>
+          <p:cNvPr id="22" name="Text 18"/>
+          <p:cNvSpPr/>
+          <p:nvPr/>
+        </p:nvSpPr>
+        <p:spPr>
+          <a:xfrm>
+            <a:off x="6583680" y="3913632"/>
+            <a:ext cx="4754880" cy="502920"/>
+          </a:xfrm>
+          <a:prstGeom prst="rect">
+            <a:avLst/>
+          </a:prstGeom>
+          <a:noFill/>
+          <a:ln/>
+        </p:spPr>
+        <p:txBody>
+          <a:bodyPr wrap="square" rtlCol="0" anchor="ctr"/>
+          <a:lstStyle/>
+          <a:p>
+            <a:pPr marL="0" indent="0">
+              <a:lnSpc>
+                <a:spcPct val="115000"/>
+              </a:lnSpc>
+              <a:buNone/>
+            </a:pPr>
+            <a:r>
+              <a:rPr lang="en-US" sz="1080" b="1" dirty="0">
+                <a:solidFill>
+                  <a:srgbClr val="D9A441"/>
+                </a:solidFill>
+                <a:latin typeface="Calibri" pitchFamily="34" charset="0"/>
+                <a:ea typeface="Calibri" pitchFamily="34" charset="-122"/>
+                <a:cs typeface="Calibri" pitchFamily="34" charset="-120"/>
+              </a:rPr>
+              <a:t>→  </a:t>
+            </a:r>
+            <a:r>
+              <a:rPr lang="en-US" sz="1080" dirty="0">
+                <a:solidFill>
+                  <a:srgbClr val="FFFFFF"/>
+                </a:solidFill>
+                <a:latin typeface="Calibri" pitchFamily="34" charset="0"/>
+                <a:ea typeface="Calibri" pitchFamily="34" charset="-122"/>
+                <a:cs typeface="Calibri" pitchFamily="34" charset="-120"/>
+              </a:rPr>
+              <a:t>Training delivered to participants before go-live</a:t>
+            </a:r>
+            <a:endParaRPr lang="en-US" sz="1080" dirty="0"/>
+          </a:p>
+        </p:txBody>
+      </p:sp>
+      <p:sp>
+        <p:nvSpPr>
+          <p:cNvPr id="23" name="Text 19"/>
+          <p:cNvSpPr/>
+          <p:nvPr/>
+        </p:nvSpPr>
+        <p:spPr>
+          <a:xfrm>
+            <a:off x="6583680" y="4443984"/>
+            <a:ext cx="4754880" cy="502920"/>
+          </a:xfrm>
+          <a:prstGeom prst="rect">
+            <a:avLst/>
+          </a:prstGeom>
+          <a:noFill/>
+          <a:ln/>
+        </p:spPr>
+        <p:txBody>
+          <a:bodyPr wrap="square" rtlCol="0" anchor="ctr"/>
+          <a:lstStyle/>
+          <a:p>
+            <a:pPr marL="0" indent="0">
+              <a:lnSpc>
+                <a:spcPct val="115000"/>
+              </a:lnSpc>
+              <a:buNone/>
+            </a:pPr>
+            <a:r>
+              <a:rPr lang="en-US" sz="1080" b="1" dirty="0">
+                <a:solidFill>
+                  <a:srgbClr val="D9A441"/>
+                </a:solidFill>
+                <a:latin typeface="Calibri" pitchFamily="34" charset="0"/>
+                <a:ea typeface="Calibri" pitchFamily="34" charset="-122"/>
+                <a:cs typeface="Calibri" pitchFamily="34" charset="-120"/>
+              </a:rPr>
+              <a:t>→  </a:t>
+            </a:r>
+            <a:r>
+              <a:rPr lang="en-US" sz="1080" dirty="0">
+                <a:solidFill>
+                  <a:srgbClr val="FFFFFF"/>
+                </a:solidFill>
+                <a:latin typeface="Calibri" pitchFamily="34" charset="0"/>
+                <a:ea typeface="Calibri" pitchFamily="34" charset="-122"/>
+                <a:cs typeface="Calibri" pitchFamily="34" charset="-120"/>
+              </a:rPr>
+              <a:t>Helpdesk/support staffed for the duration of the pilot window</a:t>
+            </a:r>
+            <a:endParaRPr lang="en-US" sz="1080" dirty="0"/>
+          </a:p>
+        </p:txBody>
+      </p:sp>
+      <p:sp>
+        <p:nvSpPr>
+          <p:cNvPr id="24" name="Text 20"/>
+          <p:cNvSpPr/>
+          <p:nvPr/>
+        </p:nvSpPr>
+        <p:spPr>
+          <a:xfrm>
+            <a:off x="6583680" y="4974336"/>
+            <a:ext cx="4754880" cy="502920"/>
+          </a:xfrm>
+          <a:prstGeom prst="rect">
+            <a:avLst/>
+          </a:prstGeom>
+          <a:noFill/>
+          <a:ln/>
+        </p:spPr>
+        <p:txBody>
+          <a:bodyPr wrap="square" rtlCol="0" anchor="ctr"/>
+          <a:lstStyle/>
+          <a:p>
+            <a:pPr marL="0" indent="0">
+              <a:lnSpc>
+                <a:spcPct val="115000"/>
+              </a:lnSpc>
+              <a:buNone/>
+            </a:pPr>
+            <a:r>
+              <a:rPr lang="en-US" sz="1080" b="1" dirty="0">
+                <a:solidFill>
+                  <a:srgbClr val="D9A441"/>
+                </a:solidFill>
+                <a:latin typeface="Calibri" pitchFamily="34" charset="0"/>
+                <a:ea typeface="Calibri" pitchFamily="34" charset="-122"/>
+                <a:cs typeface="Calibri" pitchFamily="34" charset="-120"/>
+              </a:rPr>
+              <a:t>→  </a:t>
+            </a:r>
+            <a:r>
+              <a:rPr lang="en-US" sz="1080" dirty="0">
+                <a:solidFill>
+                  <a:srgbClr val="FFFFFF"/>
+                </a:solidFill>
+                <a:latin typeface="Calibri" pitchFamily="34" charset="0"/>
+                <a:ea typeface="Calibri" pitchFamily="34" charset="-122"/>
+                <a:cs typeface="Calibri" pitchFamily="34" charset="-120"/>
+              </a:rPr>
+              <a:t>Committee checkpoint to review results before wider rollout</a:t>
+            </a:r>
+            <a:endParaRPr lang="en-US" sz="1080" dirty="0"/>
+          </a:p>
+        </p:txBody>
+      </p:sp>
+      <p:sp>
+        <p:nvSpPr>
+          <p:cNvPr id="25" name="Shape 21"/>
+          <p:cNvSpPr/>
+          <p:nvPr/>
+        </p:nvSpPr>
+        <p:spPr>
+          <a:xfrm>
+            <a:off x="548640" y="5943600"/>
+            <a:ext cx="11064240" cy="594360"/>
+          </a:xfrm>
+          <a:prstGeom prst="roundRect">
+            <a:avLst>
+              <a:gd name="adj" fmla="val 13846"/>
             </a:avLst>
           </a:prstGeom>
           <a:solidFill>
@@ -15153,50 +14971,33 @@
       </p:sp>
       <p:sp>
         <p:nvSpPr>
-          <p:cNvPr id="16" name="Shape 13"/>
-          <p:cNvSpPr/>
-          <p:nvPr/>
-        </p:nvSpPr>
-        <p:spPr>
-          <a:xfrm>
-            <a:off x="800100" y="4046220"/>
-            <a:ext cx="594360" cy="594360"/>
-          </a:xfrm>
-          <a:prstGeom prst="ellipse">
-            <a:avLst/>
-          </a:prstGeom>
-          <a:solidFill>
-            <a:srgbClr val="D9A441"/>
-          </a:solidFill>
-          <a:ln/>
-        </p:spPr>
-      </p:sp>
-      <p:sp>
-        <p:nvSpPr>
-          <p:cNvPr id="17" name="Text 14"/>
-          <p:cNvSpPr/>
-          <p:nvPr/>
-        </p:nvSpPr>
-        <p:spPr>
-          <a:xfrm>
-            <a:off x="800100" y="4046220"/>
-            <a:ext cx="594360" cy="594360"/>
-          </a:xfrm>
-          <a:prstGeom prst="rect">
-            <a:avLst/>
-          </a:prstGeom>
-          <a:noFill/>
-          <a:ln/>
-        </p:spPr>
-        <p:txBody>
-          <a:bodyPr wrap="square" rtlCol="0" anchor="ctr"/>
-          <a:lstStyle/>
-          <a:p>
-            <a:pPr marL="0" indent="0" algn="ctr">
-              <a:buNone/>
-            </a:pPr>
-            <a:r>
-              <a:rPr lang="en-US" sz="1800" b="1" dirty="0">
+          <p:cNvPr id="26" name="Text 22"/>
+          <p:cNvSpPr/>
+          <p:nvPr/>
+        </p:nvSpPr>
+        <p:spPr>
+          <a:xfrm>
+            <a:off x="868680" y="5943600"/>
+            <a:ext cx="10424160" cy="594360"/>
+          </a:xfrm>
+          <a:prstGeom prst="rect">
+            <a:avLst/>
+          </a:prstGeom>
+          <a:noFill/>
+          <a:ln/>
+        </p:spPr>
+        <p:txBody>
+          <a:bodyPr wrap="square" rtlCol="0" anchor="ctr"/>
+          <a:lstStyle/>
+          <a:p>
+            <a:pPr marL="0" indent="0">
+              <a:lnSpc>
+                <a:spcPct val="115000"/>
+              </a:lnSpc>
+              <a:buNone/>
+            </a:pPr>
+            <a:r>
+              <a:rPr lang="en-US" sz="1100" b="1" i="1" dirty="0">
                 <a:solidFill>
                   <a:srgbClr val="2C0F5E"/>
                 </a:solidFill>
@@ -15204,83 +15005,10 @@
                 <a:ea typeface="Calibri" pitchFamily="34" charset="-122"/>
                 <a:cs typeface="Calibri" pitchFamily="34" charset="-120"/>
               </a:rPr>
-              <a:t>3</a:t>
-            </a:r>
-            <a:endParaRPr lang="en-US" sz="1800" dirty="0"/>
-          </a:p>
-        </p:txBody>
-      </p:sp>
-      <p:sp>
-        <p:nvSpPr>
-          <p:cNvPr id="18" name="Text 15"/>
-          <p:cNvSpPr/>
-          <p:nvPr/>
-        </p:nvSpPr>
-        <p:spPr>
-          <a:xfrm>
-            <a:off x="1737360" y="4041648"/>
-            <a:ext cx="3840480" cy="594360"/>
-          </a:xfrm>
-          <a:prstGeom prst="rect">
-            <a:avLst/>
-          </a:prstGeom>
-          <a:noFill/>
-          <a:ln/>
-        </p:spPr>
-        <p:txBody>
-          <a:bodyPr wrap="square" rtlCol="0" anchor="ctr"/>
-          <a:lstStyle/>
-          <a:p>
-            <a:pPr marL="0" indent="0">
-              <a:lnSpc>
-                <a:spcPct val="110000"/>
-              </a:lnSpc>
-              <a:buNone/>
-            </a:pPr>
-            <a:r>
-              <a:rPr lang="en-US" sz="1450" b="1" dirty="0">
-                <a:solidFill>
-                  <a:srgbClr val="2C0F5E"/>
-                </a:solidFill>
-                <a:latin typeface="Calibri" pitchFamily="34" charset="0"/>
-                <a:ea typeface="Calibri" pitchFamily="34" charset="-122"/>
-                <a:cs typeface="Calibri" pitchFamily="34" charset="-120"/>
-              </a:rPr>
-              <a:t>Support data &amp; user readiness</a:t>
-            </a:r>
-            <a:endParaRPr lang="en-US" sz="1450" dirty="0"/>
-          </a:p>
-        </p:txBody>
-      </p:sp>
-      <p:sp>
-        <p:nvSpPr>
-          <p:cNvPr id="19" name="Text 16"/>
-          <p:cNvSpPr/>
-          <p:nvPr/>
-        </p:nvSpPr>
-        <p:spPr>
-          <a:xfrm>
-            <a:off x="868680" y="4892040"/>
-            <a:ext cx="4617720" cy="731520"/>
-          </a:xfrm>
-          <a:prstGeom prst="rect">
-            <a:avLst/>
-          </a:prstGeom>
-          <a:noFill/>
-          <a:ln/>
-        </p:spPr>
-        <p:txBody>
-          <a:bodyPr wrap="square" rtlCol="0" anchor="ctr"/>
-          <a:lstStyle/>
-          <a:p>
-            <a:pPr marL="0" indent="0">
-              <a:lnSpc>
-                <a:spcPct val="120000"/>
-              </a:lnSpc>
-              <a:buNone/>
-            </a:pPr>
-            <a:r>
-              <a:rPr lang="en-US" sz="1100" dirty="0">
+              <a:t>In short:  </a:t>
+            </a:r>
+            <a:r>
+              <a:rPr lang="en-US" sz="1100" i="1" dirty="0">
                 <a:solidFill>
                   <a:srgbClr val="5C5470"/>
                 </a:solidFill>
@@ -15288,7 +15016,7 @@
                 <a:ea typeface="Calibri" pitchFamily="34" charset="-122"/>
                 <a:cs typeface="Calibri" pitchFamily="34" charset="-120"/>
               </a:rPr>
-              <a:t>Approve provisioning real reference data and verified user accounts for pilot participants.</a:t>
+              <a:t>pre-pilot asks “does it work?” with people who already know the system; pilot asks “does it work for them?” with people who don't.</a:t>
             </a:r>
             <a:endParaRPr lang="en-US" sz="1100" dirty="0"/>
           </a:p>
@@ -15296,13 +15024,218 @@
       </p:sp>
       <p:sp>
         <p:nvSpPr>
-          <p:cNvPr id="20" name="Shape 17"/>
-          <p:cNvSpPr/>
-          <p:nvPr/>
-        </p:nvSpPr>
-        <p:spPr>
-          <a:xfrm>
-            <a:off x="6126480" y="3840480"/>
+          <p:cNvPr id="27" name="Text 23"/>
+          <p:cNvSpPr/>
+          <p:nvPr/>
+        </p:nvSpPr>
+        <p:spPr>
+          <a:xfrm>
+            <a:off x="457200" y="6473952"/>
+            <a:ext cx="7315200" cy="274320"/>
+          </a:xfrm>
+          <a:prstGeom prst="rect">
+            <a:avLst/>
+          </a:prstGeom>
+          <a:noFill/>
+          <a:ln/>
+        </p:spPr>
+        <p:txBody>
+          <a:bodyPr wrap="square" rtlCol="0" anchor="ctr"/>
+          <a:lstStyle/>
+          <a:p>
+            <a:pPr marL="0" indent="0">
+              <a:buNone/>
+            </a:pPr>
+            <a:r>
+              <a:rPr lang="en-US" sz="900" i="1" dirty="0">
+                <a:solidFill>
+                  <a:srgbClr val="CBBFE6"/>
+                </a:solidFill>
+                <a:latin typeface="Calibri" pitchFamily="34" charset="0"/>
+                <a:ea typeface="Calibri" pitchFamily="34" charset="-122"/>
+                <a:cs typeface="Calibri" pitchFamily="34" charset="-120"/>
+              </a:rPr>
+              <a:t>SCDMS - Submission &amp; Commission Decision Management System</a:t>
+            </a:r>
+            <a:endParaRPr lang="en-US" sz="900" dirty="0"/>
+          </a:p>
+        </p:txBody>
+      </p:sp>
+      <p:sp>
+        <p:nvSpPr>
+          <p:cNvPr id="28" name="Text 24"/>
+          <p:cNvSpPr/>
+          <p:nvPr/>
+        </p:nvSpPr>
+        <p:spPr>
+          <a:xfrm>
+            <a:off x="11277295" y="6473952"/>
+            <a:ext cx="457200" cy="274320"/>
+          </a:xfrm>
+          <a:prstGeom prst="rect">
+            <a:avLst/>
+          </a:prstGeom>
+          <a:noFill/>
+          <a:ln/>
+        </p:spPr>
+        <p:txBody>
+          <a:bodyPr wrap="square" rtlCol="0" anchor="ctr"/>
+          <a:lstStyle/>
+          <a:p>
+            <a:pPr marL="0" indent="0" algn="r">
+              <a:buNone/>
+            </a:pPr>
+            <a:r>
+              <a:rPr lang="en-US" sz="900" dirty="0">
+                <a:solidFill>
+                  <a:srgbClr val="CBBFE6"/>
+                </a:solidFill>
+                <a:latin typeface="Calibri" pitchFamily="34" charset="0"/>
+                <a:ea typeface="Calibri" pitchFamily="34" charset="-122"/>
+                <a:cs typeface="Calibri" pitchFamily="34" charset="-120"/>
+              </a:rPr>
+              <a:t>20</a:t>
+            </a:r>
+            <a:endParaRPr lang="en-US" sz="900" dirty="0"/>
+          </a:p>
+        </p:txBody>
+      </p:sp>
+    </p:spTree>
+  </p:cSld>
+  <p:clrMapOvr>
+    <a:masterClrMapping/>
+  </p:clrMapOvr>
+</p:sld>
+</file>
+
+<file path=ppt/slides/slide21.xml><?xml version="1.0" encoding="utf-8"?>
+<p:sld xmlns:a="http://schemas.openxmlformats.org/drawingml/2006/main" xmlns:r="http://schemas.openxmlformats.org/officeDocument/2006/relationships" xmlns:p="http://schemas.openxmlformats.org/presentationml/2006/main">
+  <p:cSld name="Slide 21">
+    <p:spTree>
+      <p:nvGrpSpPr>
+        <p:cNvPr id="1" name=""/>
+        <p:cNvGrpSpPr/>
+        <p:nvPr/>
+      </p:nvGrpSpPr>
+      <p:grpSpPr>
+        <a:xfrm>
+          <a:off x="0" y="0"/>
+          <a:ext cx="0" cy="0"/>
+          <a:chOff x="0" y="0"/>
+          <a:chExt cx="0" cy="0"/>
+        </a:xfrm>
+      </p:grpSpPr>
+      <p:pic>
+        <p:nvPicPr>
+          <p:cNvPr id="2" name="Image 0" descr="C:\Users\Herman Tevilili\AppData\Local\Temp\claude\C--Users-Herman-Tevilili-Documents-GitHub-commissionDecisionApp-v1-0\2d2d3a12-ae9e-4f4b-990a-3e1ebe47ec28\scratchpad\scdms_deck\assets\bg.jpg"/>
+          <p:cNvPicPr>
+            <a:picLocks noChangeAspect="1"/>
+          </p:cNvPicPr>
+          <p:nvPr/>
+        </p:nvPicPr>
+        <p:blipFill>
+          <a:blip r:embed="rId3"/>
+          <a:stretch>
+            <a:fillRect/>
+          </a:stretch>
+        </p:blipFill>
+        <p:spPr>
+          <a:xfrm>
+            <a:off x="0" y="0"/>
+            <a:ext cx="12191695" cy="8127797"/>
+          </a:xfrm>
+          <a:prstGeom prst="rect">
+            <a:avLst/>
+          </a:prstGeom>
+        </p:spPr>
+      </p:pic>
+      <p:sp>
+        <p:nvSpPr>
+          <p:cNvPr id="3" name="Text 0"/>
+          <p:cNvSpPr/>
+          <p:nvPr/>
+        </p:nvSpPr>
+        <p:spPr>
+          <a:xfrm>
+            <a:off x="1691640" y="457200"/>
+            <a:ext cx="9875520" cy="320040"/>
+          </a:xfrm>
+          <a:prstGeom prst="rect">
+            <a:avLst/>
+          </a:prstGeom>
+          <a:noFill/>
+          <a:ln/>
+        </p:spPr>
+        <p:txBody>
+          <a:bodyPr wrap="square" rtlCol="0" anchor="ctr"/>
+          <a:lstStyle/>
+          <a:p>
+            <a:pPr marL="0" indent="0">
+              <a:buNone/>
+            </a:pPr>
+            <a:r>
+              <a:rPr lang="en-US" sz="1200" b="1" kern="0" spc="200" dirty="0">
+                <a:solidFill>
+                  <a:srgbClr val="D9A441"/>
+                </a:solidFill>
+                <a:latin typeface="Calibri" pitchFamily="34" charset="0"/>
+                <a:ea typeface="Calibri" pitchFamily="34" charset="-122"/>
+                <a:cs typeface="Calibri" pitchFamily="34" charset="-120"/>
+              </a:rPr>
+              <a:t>WHAT WE NEED</a:t>
+            </a:r>
+            <a:endParaRPr lang="en-US" sz="1200" dirty="0"/>
+          </a:p>
+        </p:txBody>
+      </p:sp>
+      <p:sp>
+        <p:nvSpPr>
+          <p:cNvPr id="4" name="Text 1"/>
+          <p:cNvSpPr/>
+          <p:nvPr/>
+        </p:nvSpPr>
+        <p:spPr>
+          <a:xfrm>
+            <a:off x="1691640" y="777240"/>
+            <a:ext cx="9951415" cy="822960"/>
+          </a:xfrm>
+          <a:prstGeom prst="rect">
+            <a:avLst/>
+          </a:prstGeom>
+          <a:noFill/>
+          <a:ln/>
+        </p:spPr>
+        <p:txBody>
+          <a:bodyPr wrap="square" rtlCol="0" anchor="ctr"/>
+          <a:lstStyle/>
+          <a:p>
+            <a:pPr marL="0" indent="0">
+              <a:buNone/>
+            </a:pPr>
+            <a:r>
+              <a:rPr lang="en-US" sz="2900" b="1" dirty="0">
+                <a:solidFill>
+                  <a:srgbClr val="FFFFFF"/>
+                </a:solidFill>
+                <a:latin typeface="Cambria" pitchFamily="34" charset="0"/>
+                <a:ea typeface="Cambria" pitchFamily="34" charset="-122"/>
+                <a:cs typeface="Cambria" pitchFamily="34" charset="-120"/>
+              </a:rPr>
+              <a:t>What we're asking of the Committee today</a:t>
+            </a:r>
+            <a:endParaRPr lang="en-US" sz="2900" dirty="0"/>
+          </a:p>
+        </p:txBody>
+      </p:sp>
+      <p:sp>
+        <p:nvSpPr>
+          <p:cNvPr id="5" name="Shape 2"/>
+          <p:cNvSpPr/>
+          <p:nvPr/>
+        </p:nvSpPr>
+        <p:spPr>
+          <a:xfrm>
+            <a:off x="548640" y="1783080"/>
             <a:ext cx="5257800" cy="1874520"/>
           </a:xfrm>
           <a:prstGeom prst="roundRect">
@@ -15325,13 +15258,13 @@
       </p:sp>
       <p:sp>
         <p:nvSpPr>
-          <p:cNvPr id="21" name="Shape 18"/>
-          <p:cNvSpPr/>
-          <p:nvPr/>
-        </p:nvSpPr>
-        <p:spPr>
-          <a:xfrm>
-            <a:off x="6377940" y="4046220"/>
+          <p:cNvPr id="6" name="Shape 3"/>
+          <p:cNvSpPr/>
+          <p:nvPr/>
+        </p:nvSpPr>
+        <p:spPr>
+          <a:xfrm>
+            <a:off x="800100" y="1988820"/>
             <a:ext cx="594360" cy="594360"/>
           </a:xfrm>
           <a:prstGeom prst="ellipse">
@@ -15345,13 +15278,13 @@
       </p:sp>
       <p:sp>
         <p:nvSpPr>
-          <p:cNvPr id="22" name="Text 19"/>
-          <p:cNvSpPr/>
-          <p:nvPr/>
-        </p:nvSpPr>
-        <p:spPr>
-          <a:xfrm>
-            <a:off x="6377940" y="4046220"/>
+          <p:cNvPr id="7" name="Text 4"/>
+          <p:cNvSpPr/>
+          <p:nvPr/>
+        </p:nvSpPr>
+        <p:spPr>
+          <a:xfrm>
+            <a:off x="800100" y="1988820"/>
             <a:ext cx="594360" cy="594360"/>
           </a:xfrm>
           <a:prstGeom prst="rect">
@@ -15376,7 +15309,7 @@
                 <a:ea typeface="Calibri" pitchFamily="34" charset="-122"/>
                 <a:cs typeface="Calibri" pitchFamily="34" charset="-120"/>
               </a:rPr>
-              <a:t>4</a:t>
+              <a:t>1</a:t>
             </a:r>
             <a:endParaRPr lang="en-US" sz="1800" dirty="0"/>
           </a:p>
@@ -15384,13 +15317,13 @@
       </p:sp>
       <p:sp>
         <p:nvSpPr>
-          <p:cNvPr id="23" name="Text 20"/>
-          <p:cNvSpPr/>
-          <p:nvPr/>
-        </p:nvSpPr>
-        <p:spPr>
-          <a:xfrm>
-            <a:off x="7315200" y="4041648"/>
+          <p:cNvPr id="8" name="Text 5"/>
+          <p:cNvSpPr/>
+          <p:nvPr/>
+        </p:nvSpPr>
+        <p:spPr>
+          <a:xfrm>
+            <a:off x="1737360" y="1984248"/>
             <a:ext cx="3840480" cy="594360"/>
           </a:xfrm>
           <a:prstGeom prst="rect">
@@ -15418,7 +15351,7 @@
                 <a:ea typeface="Calibri" pitchFamily="34" charset="-122"/>
                 <a:cs typeface="Calibri" pitchFamily="34" charset="-120"/>
               </a:rPr>
-              <a:t>Set a review checkpoint</a:t>
+              <a:t>Endorse the pre-pilot &amp; pilot approach</a:t>
             </a:r>
             <a:endParaRPr lang="en-US" sz="1450" dirty="0"/>
           </a:p>
@@ -15426,13 +15359,13 @@
       </p:sp>
       <p:sp>
         <p:nvSpPr>
-          <p:cNvPr id="24" name="Text 21"/>
-          <p:cNvSpPr/>
-          <p:nvPr/>
-        </p:nvSpPr>
-        <p:spPr>
-          <a:xfrm>
-            <a:off x="6446520" y="4892040"/>
+          <p:cNvPr id="9" name="Text 6"/>
+          <p:cNvSpPr/>
+          <p:nvPr/>
+        </p:nvSpPr>
+        <p:spPr>
+          <a:xfrm>
+            <a:off x="868680" y="2834640"/>
             <a:ext cx="4617720" cy="731520"/>
           </a:xfrm>
           <a:prstGeom prst="rect">
@@ -15460,6 +15393,522 @@
                 <a:ea typeface="Calibri" pitchFamily="34" charset="-122"/>
                 <a:cs typeface="Calibri" pitchFamily="34" charset="-120"/>
               </a:rPr>
+              <a:t>Agree to move from internal testing into pre-pilot, then a defined, scoped pilot phase.</a:t>
+            </a:r>
+            <a:endParaRPr lang="en-US" sz="1100" dirty="0"/>
+          </a:p>
+        </p:txBody>
+      </p:sp>
+      <p:sp>
+        <p:nvSpPr>
+          <p:cNvPr id="10" name="Shape 7"/>
+          <p:cNvSpPr/>
+          <p:nvPr/>
+        </p:nvSpPr>
+        <p:spPr>
+          <a:xfrm>
+            <a:off x="6126480" y="1783080"/>
+            <a:ext cx="5257800" cy="1874520"/>
+          </a:xfrm>
+          <a:prstGeom prst="roundRect">
+            <a:avLst>
+              <a:gd name="adj" fmla="val 4390"/>
+            </a:avLst>
+          </a:prstGeom>
+          <a:solidFill>
+            <a:srgbClr val="FBF3E4"/>
+          </a:solidFill>
+          <a:ln/>
+          <a:effectLst>
+            <a:outerShdw blurRad="127000" dist="38100" dir="5400000" algn="bl" rotWithShape="0">
+              <a:srgbClr val="1B0B3E">
+                <a:alpha val="35000"/>
+              </a:srgbClr>
+            </a:outerShdw>
+          </a:effectLst>
+        </p:spPr>
+      </p:sp>
+      <p:sp>
+        <p:nvSpPr>
+          <p:cNvPr id="11" name="Shape 8"/>
+          <p:cNvSpPr/>
+          <p:nvPr/>
+        </p:nvSpPr>
+        <p:spPr>
+          <a:xfrm>
+            <a:off x="6377940" y="1988820"/>
+            <a:ext cx="594360" cy="594360"/>
+          </a:xfrm>
+          <a:prstGeom prst="ellipse">
+            <a:avLst/>
+          </a:prstGeom>
+          <a:solidFill>
+            <a:srgbClr val="D9A441"/>
+          </a:solidFill>
+          <a:ln/>
+        </p:spPr>
+      </p:sp>
+      <p:sp>
+        <p:nvSpPr>
+          <p:cNvPr id="12" name="Text 9"/>
+          <p:cNvSpPr/>
+          <p:nvPr/>
+        </p:nvSpPr>
+        <p:spPr>
+          <a:xfrm>
+            <a:off x="6377940" y="1988820"/>
+            <a:ext cx="594360" cy="594360"/>
+          </a:xfrm>
+          <a:prstGeom prst="rect">
+            <a:avLst/>
+          </a:prstGeom>
+          <a:noFill/>
+          <a:ln/>
+        </p:spPr>
+        <p:txBody>
+          <a:bodyPr wrap="square" rtlCol="0" anchor="ctr"/>
+          <a:lstStyle/>
+          <a:p>
+            <a:pPr marL="0" indent="0" algn="ctr">
+              <a:buNone/>
+            </a:pPr>
+            <a:r>
+              <a:rPr lang="en-US" sz="1800" b="1" dirty="0">
+                <a:solidFill>
+                  <a:srgbClr val="2C0F5E"/>
+                </a:solidFill>
+                <a:latin typeface="Calibri" pitchFamily="34" charset="0"/>
+                <a:ea typeface="Calibri" pitchFamily="34" charset="-122"/>
+                <a:cs typeface="Calibri" pitchFamily="34" charset="-120"/>
+              </a:rPr>
+              <a:t>2</a:t>
+            </a:r>
+            <a:endParaRPr lang="en-US" sz="1800" dirty="0"/>
+          </a:p>
+        </p:txBody>
+      </p:sp>
+      <p:sp>
+        <p:nvSpPr>
+          <p:cNvPr id="13" name="Text 10"/>
+          <p:cNvSpPr/>
+          <p:nvPr/>
+        </p:nvSpPr>
+        <p:spPr>
+          <a:xfrm>
+            <a:off x="7315200" y="1984248"/>
+            <a:ext cx="3840480" cy="594360"/>
+          </a:xfrm>
+          <a:prstGeom prst="rect">
+            <a:avLst/>
+          </a:prstGeom>
+          <a:noFill/>
+          <a:ln/>
+        </p:spPr>
+        <p:txBody>
+          <a:bodyPr wrap="square" rtlCol="0" anchor="ctr"/>
+          <a:lstStyle/>
+          <a:p>
+            <a:pPr marL="0" indent="0">
+              <a:lnSpc>
+                <a:spcPct val="110000"/>
+              </a:lnSpc>
+              <a:buNone/>
+            </a:pPr>
+            <a:r>
+              <a:rPr lang="en-US" sz="1450" b="1" dirty="0">
+                <a:solidFill>
+                  <a:srgbClr val="2C0F5E"/>
+                </a:solidFill>
+                <a:latin typeface="Calibri" pitchFamily="34" charset="0"/>
+                <a:ea typeface="Calibri" pitchFamily="34" charset="-122"/>
+                <a:cs typeface="Calibri" pitchFamily="34" charset="-120"/>
+              </a:rPr>
+              <a:t>Confirm pilot ministries</a:t>
+            </a:r>
+            <a:endParaRPr lang="en-US" sz="1450" dirty="0"/>
+          </a:p>
+        </p:txBody>
+      </p:sp>
+      <p:sp>
+        <p:nvSpPr>
+          <p:cNvPr id="14" name="Text 11"/>
+          <p:cNvSpPr/>
+          <p:nvPr/>
+        </p:nvSpPr>
+        <p:spPr>
+          <a:xfrm>
+            <a:off x="6446520" y="2834640"/>
+            <a:ext cx="4617720" cy="731520"/>
+          </a:xfrm>
+          <a:prstGeom prst="rect">
+            <a:avLst/>
+          </a:prstGeom>
+          <a:noFill/>
+          <a:ln/>
+        </p:spPr>
+        <p:txBody>
+          <a:bodyPr wrap="square" rtlCol="0" anchor="ctr"/>
+          <a:lstStyle/>
+          <a:p>
+            <a:pPr marL="0" indent="0">
+              <a:lnSpc>
+                <a:spcPct val="120000"/>
+              </a:lnSpc>
+              <a:buNone/>
+            </a:pPr>
+            <a:r>
+              <a:rPr lang="en-US" sz="1100" dirty="0">
+                <a:solidFill>
+                  <a:srgbClr val="5C5470"/>
+                </a:solidFill>
+                <a:latin typeface="Calibri" pitchFamily="34" charset="0"/>
+                <a:ea typeface="Calibri" pitchFamily="34" charset="-122"/>
+                <a:cs typeface="Calibri" pitchFamily="34" charset="-120"/>
+              </a:rPr>
+              <a:t>Nominate the ministries / units to participate in the first pilot cohort.</a:t>
+            </a:r>
+            <a:endParaRPr lang="en-US" sz="1100" dirty="0"/>
+          </a:p>
+        </p:txBody>
+      </p:sp>
+      <p:sp>
+        <p:nvSpPr>
+          <p:cNvPr id="15" name="Shape 12"/>
+          <p:cNvSpPr/>
+          <p:nvPr/>
+        </p:nvSpPr>
+        <p:spPr>
+          <a:xfrm>
+            <a:off x="548640" y="3840480"/>
+            <a:ext cx="5257800" cy="1874520"/>
+          </a:xfrm>
+          <a:prstGeom prst="roundRect">
+            <a:avLst>
+              <a:gd name="adj" fmla="val 4390"/>
+            </a:avLst>
+          </a:prstGeom>
+          <a:solidFill>
+            <a:srgbClr val="FBF3E4"/>
+          </a:solidFill>
+          <a:ln/>
+          <a:effectLst>
+            <a:outerShdw blurRad="127000" dist="38100" dir="5400000" algn="bl" rotWithShape="0">
+              <a:srgbClr val="1B0B3E">
+                <a:alpha val="35000"/>
+              </a:srgbClr>
+            </a:outerShdw>
+          </a:effectLst>
+        </p:spPr>
+      </p:sp>
+      <p:sp>
+        <p:nvSpPr>
+          <p:cNvPr id="16" name="Shape 13"/>
+          <p:cNvSpPr/>
+          <p:nvPr/>
+        </p:nvSpPr>
+        <p:spPr>
+          <a:xfrm>
+            <a:off x="800100" y="4046220"/>
+            <a:ext cx="594360" cy="594360"/>
+          </a:xfrm>
+          <a:prstGeom prst="ellipse">
+            <a:avLst/>
+          </a:prstGeom>
+          <a:solidFill>
+            <a:srgbClr val="D9A441"/>
+          </a:solidFill>
+          <a:ln/>
+        </p:spPr>
+      </p:sp>
+      <p:sp>
+        <p:nvSpPr>
+          <p:cNvPr id="17" name="Text 14"/>
+          <p:cNvSpPr/>
+          <p:nvPr/>
+        </p:nvSpPr>
+        <p:spPr>
+          <a:xfrm>
+            <a:off x="800100" y="4046220"/>
+            <a:ext cx="594360" cy="594360"/>
+          </a:xfrm>
+          <a:prstGeom prst="rect">
+            <a:avLst/>
+          </a:prstGeom>
+          <a:noFill/>
+          <a:ln/>
+        </p:spPr>
+        <p:txBody>
+          <a:bodyPr wrap="square" rtlCol="0" anchor="ctr"/>
+          <a:lstStyle/>
+          <a:p>
+            <a:pPr marL="0" indent="0" algn="ctr">
+              <a:buNone/>
+            </a:pPr>
+            <a:r>
+              <a:rPr lang="en-US" sz="1800" b="1" dirty="0">
+                <a:solidFill>
+                  <a:srgbClr val="2C0F5E"/>
+                </a:solidFill>
+                <a:latin typeface="Calibri" pitchFamily="34" charset="0"/>
+                <a:ea typeface="Calibri" pitchFamily="34" charset="-122"/>
+                <a:cs typeface="Calibri" pitchFamily="34" charset="-120"/>
+              </a:rPr>
+              <a:t>3</a:t>
+            </a:r>
+            <a:endParaRPr lang="en-US" sz="1800" dirty="0"/>
+          </a:p>
+        </p:txBody>
+      </p:sp>
+      <p:sp>
+        <p:nvSpPr>
+          <p:cNvPr id="18" name="Text 15"/>
+          <p:cNvSpPr/>
+          <p:nvPr/>
+        </p:nvSpPr>
+        <p:spPr>
+          <a:xfrm>
+            <a:off x="1737360" y="4041648"/>
+            <a:ext cx="3840480" cy="594360"/>
+          </a:xfrm>
+          <a:prstGeom prst="rect">
+            <a:avLst/>
+          </a:prstGeom>
+          <a:noFill/>
+          <a:ln/>
+        </p:spPr>
+        <p:txBody>
+          <a:bodyPr wrap="square" rtlCol="0" anchor="ctr"/>
+          <a:lstStyle/>
+          <a:p>
+            <a:pPr marL="0" indent="0">
+              <a:lnSpc>
+                <a:spcPct val="110000"/>
+              </a:lnSpc>
+              <a:buNone/>
+            </a:pPr>
+            <a:r>
+              <a:rPr lang="en-US" sz="1450" b="1" dirty="0">
+                <a:solidFill>
+                  <a:srgbClr val="2C0F5E"/>
+                </a:solidFill>
+                <a:latin typeface="Calibri" pitchFamily="34" charset="0"/>
+                <a:ea typeface="Calibri" pitchFamily="34" charset="-122"/>
+                <a:cs typeface="Calibri" pitchFamily="34" charset="-120"/>
+              </a:rPr>
+              <a:t>Support data &amp; user readiness</a:t>
+            </a:r>
+            <a:endParaRPr lang="en-US" sz="1450" dirty="0"/>
+          </a:p>
+        </p:txBody>
+      </p:sp>
+      <p:sp>
+        <p:nvSpPr>
+          <p:cNvPr id="19" name="Text 16"/>
+          <p:cNvSpPr/>
+          <p:nvPr/>
+        </p:nvSpPr>
+        <p:spPr>
+          <a:xfrm>
+            <a:off x="868680" y="4892040"/>
+            <a:ext cx="4617720" cy="731520"/>
+          </a:xfrm>
+          <a:prstGeom prst="rect">
+            <a:avLst/>
+          </a:prstGeom>
+          <a:noFill/>
+          <a:ln/>
+        </p:spPr>
+        <p:txBody>
+          <a:bodyPr wrap="square" rtlCol="0" anchor="ctr"/>
+          <a:lstStyle/>
+          <a:p>
+            <a:pPr marL="0" indent="0">
+              <a:lnSpc>
+                <a:spcPct val="120000"/>
+              </a:lnSpc>
+              <a:buNone/>
+            </a:pPr>
+            <a:r>
+              <a:rPr lang="en-US" sz="1100" dirty="0">
+                <a:solidFill>
+                  <a:srgbClr val="5C5470"/>
+                </a:solidFill>
+                <a:latin typeface="Calibri" pitchFamily="34" charset="0"/>
+                <a:ea typeface="Calibri" pitchFamily="34" charset="-122"/>
+                <a:cs typeface="Calibri" pitchFamily="34" charset="-120"/>
+              </a:rPr>
+              <a:t>Approve provisioning real reference data and verified user accounts for pilot participants.</a:t>
+            </a:r>
+            <a:endParaRPr lang="en-US" sz="1100" dirty="0"/>
+          </a:p>
+        </p:txBody>
+      </p:sp>
+      <p:sp>
+        <p:nvSpPr>
+          <p:cNvPr id="20" name="Shape 17"/>
+          <p:cNvSpPr/>
+          <p:nvPr/>
+        </p:nvSpPr>
+        <p:spPr>
+          <a:xfrm>
+            <a:off x="6126480" y="3840480"/>
+            <a:ext cx="5257800" cy="1874520"/>
+          </a:xfrm>
+          <a:prstGeom prst="roundRect">
+            <a:avLst>
+              <a:gd name="adj" fmla="val 4390"/>
+            </a:avLst>
+          </a:prstGeom>
+          <a:solidFill>
+            <a:srgbClr val="FBF3E4"/>
+          </a:solidFill>
+          <a:ln/>
+          <a:effectLst>
+            <a:outerShdw blurRad="127000" dist="38100" dir="5400000" algn="bl" rotWithShape="0">
+              <a:srgbClr val="1B0B3E">
+                <a:alpha val="35000"/>
+              </a:srgbClr>
+            </a:outerShdw>
+          </a:effectLst>
+        </p:spPr>
+      </p:sp>
+      <p:sp>
+        <p:nvSpPr>
+          <p:cNvPr id="21" name="Shape 18"/>
+          <p:cNvSpPr/>
+          <p:nvPr/>
+        </p:nvSpPr>
+        <p:spPr>
+          <a:xfrm>
+            <a:off x="6377940" y="4046220"/>
+            <a:ext cx="594360" cy="594360"/>
+          </a:xfrm>
+          <a:prstGeom prst="ellipse">
+            <a:avLst/>
+          </a:prstGeom>
+          <a:solidFill>
+            <a:srgbClr val="D9A441"/>
+          </a:solidFill>
+          <a:ln/>
+        </p:spPr>
+      </p:sp>
+      <p:sp>
+        <p:nvSpPr>
+          <p:cNvPr id="22" name="Text 19"/>
+          <p:cNvSpPr/>
+          <p:nvPr/>
+        </p:nvSpPr>
+        <p:spPr>
+          <a:xfrm>
+            <a:off x="6377940" y="4046220"/>
+            <a:ext cx="594360" cy="594360"/>
+          </a:xfrm>
+          <a:prstGeom prst="rect">
+            <a:avLst/>
+          </a:prstGeom>
+          <a:noFill/>
+          <a:ln/>
+        </p:spPr>
+        <p:txBody>
+          <a:bodyPr wrap="square" rtlCol="0" anchor="ctr"/>
+          <a:lstStyle/>
+          <a:p>
+            <a:pPr marL="0" indent="0" algn="ctr">
+              <a:buNone/>
+            </a:pPr>
+            <a:r>
+              <a:rPr lang="en-US" sz="1800" b="1" dirty="0">
+                <a:solidFill>
+                  <a:srgbClr val="2C0F5E"/>
+                </a:solidFill>
+                <a:latin typeface="Calibri" pitchFamily="34" charset="0"/>
+                <a:ea typeface="Calibri" pitchFamily="34" charset="-122"/>
+                <a:cs typeface="Calibri" pitchFamily="34" charset="-120"/>
+              </a:rPr>
+              <a:t>4</a:t>
+            </a:r>
+            <a:endParaRPr lang="en-US" sz="1800" dirty="0"/>
+          </a:p>
+        </p:txBody>
+      </p:sp>
+      <p:sp>
+        <p:nvSpPr>
+          <p:cNvPr id="23" name="Text 20"/>
+          <p:cNvSpPr/>
+          <p:nvPr/>
+        </p:nvSpPr>
+        <p:spPr>
+          <a:xfrm>
+            <a:off x="7315200" y="4041648"/>
+            <a:ext cx="3840480" cy="594360"/>
+          </a:xfrm>
+          <a:prstGeom prst="rect">
+            <a:avLst/>
+          </a:prstGeom>
+          <a:noFill/>
+          <a:ln/>
+        </p:spPr>
+        <p:txBody>
+          <a:bodyPr wrap="square" rtlCol="0" anchor="ctr"/>
+          <a:lstStyle/>
+          <a:p>
+            <a:pPr marL="0" indent="0">
+              <a:lnSpc>
+                <a:spcPct val="110000"/>
+              </a:lnSpc>
+              <a:buNone/>
+            </a:pPr>
+            <a:r>
+              <a:rPr lang="en-US" sz="1450" b="1" dirty="0">
+                <a:solidFill>
+                  <a:srgbClr val="2C0F5E"/>
+                </a:solidFill>
+                <a:latin typeface="Calibri" pitchFamily="34" charset="0"/>
+                <a:ea typeface="Calibri" pitchFamily="34" charset="-122"/>
+                <a:cs typeface="Calibri" pitchFamily="34" charset="-120"/>
+              </a:rPr>
+              <a:t>Set a review checkpoint</a:t>
+            </a:r>
+            <a:endParaRPr lang="en-US" sz="1450" dirty="0"/>
+          </a:p>
+        </p:txBody>
+      </p:sp>
+      <p:sp>
+        <p:nvSpPr>
+          <p:cNvPr id="24" name="Text 21"/>
+          <p:cNvSpPr/>
+          <p:nvPr/>
+        </p:nvSpPr>
+        <p:spPr>
+          <a:xfrm>
+            <a:off x="6446520" y="4892040"/>
+            <a:ext cx="4617720" cy="731520"/>
+          </a:xfrm>
+          <a:prstGeom prst="rect">
+            <a:avLst/>
+          </a:prstGeom>
+          <a:noFill/>
+          <a:ln/>
+        </p:spPr>
+        <p:txBody>
+          <a:bodyPr wrap="square" rtlCol="0" anchor="ctr"/>
+          <a:lstStyle/>
+          <a:p>
+            <a:pPr marL="0" indent="0">
+              <a:lnSpc>
+                <a:spcPct val="120000"/>
+              </a:lnSpc>
+              <a:buNone/>
+            </a:pPr>
+            <a:r>
+              <a:rPr lang="en-US" sz="1100" dirty="0">
+                <a:solidFill>
+                  <a:srgbClr val="5C5470"/>
+                </a:solidFill>
+                <a:latin typeface="Calibri" pitchFamily="34" charset="0"/>
+                <a:ea typeface="Calibri" pitchFamily="34" charset="-122"/>
+                <a:cs typeface="Calibri" pitchFamily="34" charset="-120"/>
+              </a:rPr>
               <a:t>Agree a date for the Committee to review pilot results before wider rollout.</a:t>
             </a:r>
             <a:endParaRPr lang="en-US" sz="1100" dirty="0"/>
@@ -15538,7 +15987,7 @@
                 <a:ea typeface="Calibri" pitchFamily="34" charset="-122"/>
                 <a:cs typeface="Calibri" pitchFamily="34" charset="-120"/>
               </a:rPr>
-              <a:t>20</a:t>
+              <a:t>21</a:t>
             </a:r>
             <a:endParaRPr lang="en-US" sz="900" dirty="0"/>
           </a:p>
@@ -15554,7 +16003,7 @@
 
 <file path=ppt/slides/slide22.xml><?xml version="1.0" encoding="utf-8"?>
 <p:sld xmlns:a="http://schemas.openxmlformats.org/drawingml/2006/main" xmlns:r="http://schemas.openxmlformats.org/officeDocument/2006/relationships" xmlns:p="http://schemas.openxmlformats.org/presentationml/2006/main">
-  <p:cSld name="Slide 21">
+  <p:cSld name="Slide 22">
     <p:spTree>
       <p:nvGrpSpPr>
         <p:cNvPr id="1" name=""/>
